--- a/deliverables/italian_labour_forecast_policy_deck.pptx
+++ b/deliverables/italian_labour_forecast_policy_deck.pptx
@@ -2,27 +2,29 @@
 <file path=ppt/presentation.xml><?xml version="1.0" encoding="utf-8"?>
 <p:presentation xmlns:p="http://schemas.openxmlformats.org/presentationml/2006/main">
   <p:sldMasterIdLst>
-    <p:sldMasterId xmlns:r="http://schemas.openxmlformats.org/officeDocument/2006/relationships" id="2147483648" r:id="R5ab9fe42a7c74661"/>
+    <p:sldMasterId xmlns:r="http://schemas.openxmlformats.org/officeDocument/2006/relationships" id="2147483648" r:id="Rd9af6cd1a5a34eb9"/>
   </p:sldMasterIdLst>
   <p:notesMasterIdLst>
-    <p:notesMasterId xmlns:r="http://schemas.openxmlformats.org/officeDocument/2006/relationships" r:id="Rcb965b22185d479b"/>
+    <p:notesMasterId xmlns:r="http://schemas.openxmlformats.org/officeDocument/2006/relationships" r:id="Rd848492f34cb45c6"/>
   </p:notesMasterIdLst>
   <p:sldIdLst>
-    <p:sldId xmlns:r="http://schemas.openxmlformats.org/officeDocument/2006/relationships" id="256" r:id="R337e1ca507cf4f71"/>
-    <p:sldId xmlns:r="http://schemas.openxmlformats.org/officeDocument/2006/relationships" id="257" r:id="Rdd71b625bcf14d6c"/>
-    <p:sldId xmlns:r="http://schemas.openxmlformats.org/officeDocument/2006/relationships" id="258" r:id="R9ee6854e8fb0491b"/>
-    <p:sldId xmlns:r="http://schemas.openxmlformats.org/officeDocument/2006/relationships" id="259" r:id="Rc640af84c3ae4719"/>
-    <p:sldId xmlns:r="http://schemas.openxmlformats.org/officeDocument/2006/relationships" id="260" r:id="R8a3a63f99f6245e2"/>
-    <p:sldId xmlns:r="http://schemas.openxmlformats.org/officeDocument/2006/relationships" id="261" r:id="R5ddd6c324eec4768"/>
-    <p:sldId xmlns:r="http://schemas.openxmlformats.org/officeDocument/2006/relationships" id="262" r:id="R6db606633ce04222"/>
-    <p:sldId xmlns:r="http://schemas.openxmlformats.org/officeDocument/2006/relationships" id="263" r:id="R33fd40f8a901427a"/>
-    <p:sldId xmlns:r="http://schemas.openxmlformats.org/officeDocument/2006/relationships" id="264" r:id="R88f8005504964ffe"/>
-    <p:sldId xmlns:r="http://schemas.openxmlformats.org/officeDocument/2006/relationships" id="265" r:id="R2c1fa1625fe04d44"/>
-    <p:sldId xmlns:r="http://schemas.openxmlformats.org/officeDocument/2006/relationships" id="266" r:id="R11e5d31bfe534636"/>
-    <p:sldId xmlns:r="http://schemas.openxmlformats.org/officeDocument/2006/relationships" id="267" r:id="Ra3b6afbbfef342a7"/>
-    <p:sldId xmlns:r="http://schemas.openxmlformats.org/officeDocument/2006/relationships" id="268" r:id="R1fe9142578ce45e8"/>
-    <p:sldId xmlns:r="http://schemas.openxmlformats.org/officeDocument/2006/relationships" id="269" r:id="Rfb5e99cefbf94348"/>
-    <p:sldId xmlns:r="http://schemas.openxmlformats.org/officeDocument/2006/relationships" id="270" r:id="R36c1bdf15851423a"/>
+    <p:sldId xmlns:r="http://schemas.openxmlformats.org/officeDocument/2006/relationships" id="256" r:id="R9604cd6fbbb944f2"/>
+    <p:sldId xmlns:r="http://schemas.openxmlformats.org/officeDocument/2006/relationships" id="257" r:id="R3c48b8f8a7024c88"/>
+    <p:sldId xmlns:r="http://schemas.openxmlformats.org/officeDocument/2006/relationships" id="258" r:id="R7599e2663a5f4706"/>
+    <p:sldId xmlns:r="http://schemas.openxmlformats.org/officeDocument/2006/relationships" id="259" r:id="R744a7bc20e0d4f78"/>
+    <p:sldId xmlns:r="http://schemas.openxmlformats.org/officeDocument/2006/relationships" id="260" r:id="Ra13216e4c18141de"/>
+    <p:sldId xmlns:r="http://schemas.openxmlformats.org/officeDocument/2006/relationships" id="261" r:id="R6c515e8cdc2c4d34"/>
+    <p:sldId xmlns:r="http://schemas.openxmlformats.org/officeDocument/2006/relationships" id="262" r:id="Rd1282eb05e6c4492"/>
+    <p:sldId xmlns:r="http://schemas.openxmlformats.org/officeDocument/2006/relationships" id="263" r:id="Ree805a608bf24e89"/>
+    <p:sldId xmlns:r="http://schemas.openxmlformats.org/officeDocument/2006/relationships" id="264" r:id="Rd06aef2c8b5a4056"/>
+    <p:sldId xmlns:r="http://schemas.openxmlformats.org/officeDocument/2006/relationships" id="265" r:id="Rfe2c46c603ff41ed"/>
+    <p:sldId xmlns:r="http://schemas.openxmlformats.org/officeDocument/2006/relationships" id="266" r:id="R9295e3289739448a"/>
+    <p:sldId xmlns:r="http://schemas.openxmlformats.org/officeDocument/2006/relationships" id="267" r:id="Raee698a363cd4443"/>
+    <p:sldId xmlns:r="http://schemas.openxmlformats.org/officeDocument/2006/relationships" id="268" r:id="Re6729f3a90f846a6"/>
+    <p:sldId xmlns:r="http://schemas.openxmlformats.org/officeDocument/2006/relationships" id="269" r:id="R87167d1328064116"/>
+    <p:sldId xmlns:r="http://schemas.openxmlformats.org/officeDocument/2006/relationships" id="270" r:id="R8025881c4b184e9c"/>
+    <p:sldId xmlns:r="http://schemas.openxmlformats.org/officeDocument/2006/relationships" id="271" r:id="Rce9d30fe2ba7489f"/>
+    <p:sldId xmlns:r="http://schemas.openxmlformats.org/officeDocument/2006/relationships" id="272" r:id="Rd36c370ed73c42bc"/>
   </p:sldIdLst>
   <p:sldSz cx="12192000" cy="6858000"/>
   <p:notesSz cx="6858000" cy="9144000"/>
@@ -927,6 +929,138 @@
 </p:notes>
 </file>
 
+<file path=ppt/notesSlides/notesSlide16.xml><?xml version="1.0" encoding="utf-8"?>
+<p:notes xmlns:p="http://schemas.openxmlformats.org/presentationml/2006/main">
+  <p:cSld>
+    <p:spTree>
+      <p:nvGrpSpPr>
+        <p:cNvPr id="1" name=""/>
+        <p:cNvGrpSpPr/>
+        <p:nvPr/>
+      </p:nvGrpSpPr>
+      <p:grpSpPr>
+        <a:xfrm xmlns:a="http://schemas.openxmlformats.org/drawingml/2006/main"/>
+      </p:grpSpPr>
+      <p:sp>
+        <p:nvSpPr>
+          <p:cNvPr id="2" name="Slide Image Placeholder 1"/>
+          <p:cNvSpPr>
+            <a:spLocks xmlns:a="http://schemas.openxmlformats.org/drawingml/2006/main" noGrp="1"/>
+          </p:cNvSpPr>
+          <p:nvPr>
+            <p:ph type="sldImg" idx="0"/>
+          </p:nvPr>
+        </p:nvSpPr>
+        <p:spPr/>
+      </p:sp>
+      <p:sp>
+        <p:nvSpPr>
+          <p:cNvPr id="3" name="Notes Placeholder 2"/>
+          <p:cNvSpPr>
+            <a:spLocks xmlns:a="http://schemas.openxmlformats.org/drawingml/2006/main" noGrp="1"/>
+          </p:cNvSpPr>
+          <p:nvPr>
+            <p:ph type="body" idx="1"/>
+          </p:nvPr>
+        </p:nvSpPr>
+        <p:spPr/>
+        <p:txBody>
+          <a:bodyPr xmlns:a="http://schemas.openxmlformats.org/drawingml/2006/main"/>
+          <a:lstStyle xmlns:a="http://schemas.openxmlformats.org/drawingml/2006/main"/>
+          <a:p xmlns:a="http://schemas.openxmlformats.org/drawingml/2006/main"/>
+        </p:txBody>
+      </p:sp>
+      <p:sp>
+        <p:nvSpPr>
+          <p:cNvPr id="4" name="Slide Number Placeholder 3"/>
+          <p:cNvSpPr>
+            <a:spLocks xmlns:a="http://schemas.openxmlformats.org/drawingml/2006/main" noGrp="1"/>
+          </p:cNvSpPr>
+          <p:nvPr>
+            <p:ph type="sldNum" idx="5"/>
+          </p:nvPr>
+        </p:nvSpPr>
+        <p:spPr/>
+        <p:txBody>
+          <a:bodyPr xmlns:a="http://schemas.openxmlformats.org/drawingml/2006/main"/>
+          <a:lstStyle xmlns:a="http://schemas.openxmlformats.org/drawingml/2006/main"/>
+          <a:p xmlns:a="http://schemas.openxmlformats.org/drawingml/2006/main"/>
+        </p:txBody>
+      </p:sp>
+    </p:spTree>
+  </p:cSld>
+  <p:clrMapOvr>
+    <a:masterClrMapping xmlns:a="http://schemas.openxmlformats.org/drawingml/2006/main"/>
+  </p:clrMapOvr>
+</p:notes>
+</file>
+
+<file path=ppt/notesSlides/notesSlide17.xml><?xml version="1.0" encoding="utf-8"?>
+<p:notes xmlns:p="http://schemas.openxmlformats.org/presentationml/2006/main">
+  <p:cSld>
+    <p:spTree>
+      <p:nvGrpSpPr>
+        <p:cNvPr id="1" name=""/>
+        <p:cNvGrpSpPr/>
+        <p:nvPr/>
+      </p:nvGrpSpPr>
+      <p:grpSpPr>
+        <a:xfrm xmlns:a="http://schemas.openxmlformats.org/drawingml/2006/main"/>
+      </p:grpSpPr>
+      <p:sp>
+        <p:nvSpPr>
+          <p:cNvPr id="2" name="Slide Image Placeholder 1"/>
+          <p:cNvSpPr>
+            <a:spLocks xmlns:a="http://schemas.openxmlformats.org/drawingml/2006/main" noGrp="1"/>
+          </p:cNvSpPr>
+          <p:nvPr>
+            <p:ph type="sldImg" idx="0"/>
+          </p:nvPr>
+        </p:nvSpPr>
+        <p:spPr/>
+      </p:sp>
+      <p:sp>
+        <p:nvSpPr>
+          <p:cNvPr id="3" name="Notes Placeholder 2"/>
+          <p:cNvSpPr>
+            <a:spLocks xmlns:a="http://schemas.openxmlformats.org/drawingml/2006/main" noGrp="1"/>
+          </p:cNvSpPr>
+          <p:nvPr>
+            <p:ph type="body" idx="1"/>
+          </p:nvPr>
+        </p:nvSpPr>
+        <p:spPr/>
+        <p:txBody>
+          <a:bodyPr xmlns:a="http://schemas.openxmlformats.org/drawingml/2006/main"/>
+          <a:lstStyle xmlns:a="http://schemas.openxmlformats.org/drawingml/2006/main"/>
+          <a:p xmlns:a="http://schemas.openxmlformats.org/drawingml/2006/main"/>
+        </p:txBody>
+      </p:sp>
+      <p:sp>
+        <p:nvSpPr>
+          <p:cNvPr id="4" name="Slide Number Placeholder 3"/>
+          <p:cNvSpPr>
+            <a:spLocks xmlns:a="http://schemas.openxmlformats.org/drawingml/2006/main" noGrp="1"/>
+          </p:cNvSpPr>
+          <p:nvPr>
+            <p:ph type="sldNum" idx="5"/>
+          </p:nvPr>
+        </p:nvSpPr>
+        <p:spPr/>
+        <p:txBody>
+          <a:bodyPr xmlns:a="http://schemas.openxmlformats.org/drawingml/2006/main"/>
+          <a:lstStyle xmlns:a="http://schemas.openxmlformats.org/drawingml/2006/main"/>
+          <a:p xmlns:a="http://schemas.openxmlformats.org/drawingml/2006/main"/>
+        </p:txBody>
+      </p:sp>
+    </p:spTree>
+  </p:cSld>
+  <p:clrMapOvr>
+    <a:masterClrMapping xmlns:a="http://schemas.openxmlformats.org/drawingml/2006/main"/>
+  </p:clrMapOvr>
+</p:notes>
+</file>
+
 <file path=ppt/notesSlides/notesSlide2.xml><?xml version="1.0" encoding="utf-8"?>
 <p:notes xmlns:p="http://schemas.openxmlformats.org/presentationml/2006/main">
   <p:cSld>
@@ -1493,7 +1627,7 @@
   </p:cSld>
   <p:clrMap bg1="lt1" tx1="dk1" bg2="lt2" tx2="dk2" accent1="accent1" accent2="accent2" accent3="accent3" accent4="accent4" accent5="accent5" accent6="accent6" hlink="hlink" folHlink="folHlink"/>
   <p:sldLayoutIdLst>
-    <p:sldLayoutId xmlns:r="http://schemas.openxmlformats.org/officeDocument/2006/relationships" id="2147483649" r:id="R8f70b4899a954774"/>
+    <p:sldLayoutId xmlns:r="http://schemas.openxmlformats.org/officeDocument/2006/relationships" id="2147483649" r:id="R01e879ca230c4bd8"/>
   </p:sldLayoutIdLst>
   <p:txStyles>
     <p:titleStyle>
@@ -1792,7 +1926,7 @@
           <p:cNvPr id="1" name="">
             <a:extLst xmlns:a="http://schemas.openxmlformats.org/drawingml/2006/main">
               <a:ext uri="{FF2B5EF4-FFF2-40B4-BE49-F238E27FC236}">
-                <a16:creationId xmlns:a16="http://schemas.microsoft.com/office/drawing/2014/main" id="{89EB6467-B784-4D69-AD35-F970D4FC8DE7}"/>
+                <a16:creationId xmlns:a16="http://schemas.microsoft.com/office/drawing/2014/main" id="{253169E1-B495-4EFC-8499-FD7EE9EB0D93}"/>
               </a:ext>
             </a:extLst>
           </p:cNvPr>
@@ -1827,7 +1961,7 @@
           <p:cNvPr id="2" name="">
             <a:extLst xmlns:a="http://schemas.openxmlformats.org/drawingml/2006/main">
               <a:ext uri="{FF2B5EF4-FFF2-40B4-BE49-F238E27FC236}">
-                <a16:creationId xmlns:a16="http://schemas.microsoft.com/office/drawing/2014/main" id="{F6E783E9-301C-43DE-9E0D-54D4E2316520}"/>
+                <a16:creationId xmlns:a16="http://schemas.microsoft.com/office/drawing/2014/main" id="{40662A5D-2E57-4DD8-8624-02F844998EC3}"/>
               </a:ext>
             </a:extLst>
           </p:cNvPr>
@@ -1862,7 +1996,7 @@
           <p:cNvPr id="3" name="">
             <a:extLst xmlns:a="http://schemas.openxmlformats.org/drawingml/2006/main">
               <a:ext uri="{FF2B5EF4-FFF2-40B4-BE49-F238E27FC236}">
-                <a16:creationId xmlns:a16="http://schemas.microsoft.com/office/drawing/2014/main" id="{983B3260-3B29-4428-B6EF-FE7B19966B31}"/>
+                <a16:creationId xmlns:a16="http://schemas.microsoft.com/office/drawing/2014/main" id="{E1B0EA16-CA58-46C8-84A4-6907EDC39584}"/>
               </a:ext>
             </a:extLst>
           </p:cNvPr>
@@ -1926,7 +2060,7 @@
           <p:cNvPr id="4" name="">
             <a:extLst xmlns:a="http://schemas.openxmlformats.org/drawingml/2006/main">
               <a:ext uri="{FF2B5EF4-FFF2-40B4-BE49-F238E27FC236}">
-                <a16:creationId xmlns:a16="http://schemas.microsoft.com/office/drawing/2014/main" id="{4C575504-5070-497A-8E62-53A5BE878F75}"/>
+                <a16:creationId xmlns:a16="http://schemas.microsoft.com/office/drawing/2014/main" id="{AC8FFB40-E958-438E-A63F-7B818C413CE1}"/>
               </a:ext>
             </a:extLst>
           </p:cNvPr>
@@ -1990,7 +2124,7 @@
           <p:cNvPr id="5" name="">
             <a:extLst xmlns:a="http://schemas.openxmlformats.org/drawingml/2006/main">
               <a:ext uri="{FF2B5EF4-FFF2-40B4-BE49-F238E27FC236}">
-                <a16:creationId xmlns:a16="http://schemas.microsoft.com/office/drawing/2014/main" id="{BE6DCB84-0FBD-4C09-BAD4-5BB96942372A}"/>
+                <a16:creationId xmlns:a16="http://schemas.microsoft.com/office/drawing/2014/main" id="{7AD2EA3D-C010-4411-8208-D2ADF98090BF}"/>
               </a:ext>
             </a:extLst>
           </p:cNvPr>
@@ -2025,7 +2159,7 @@
           <p:cNvPr id="6" name="">
             <a:extLst xmlns:a="http://schemas.openxmlformats.org/drawingml/2006/main">
               <a:ext uri="{FF2B5EF4-FFF2-40B4-BE49-F238E27FC236}">
-                <a16:creationId xmlns:a16="http://schemas.microsoft.com/office/drawing/2014/main" id="{E02DBEDD-28B2-40FB-9B01-294FF7C04ECD}"/>
+                <a16:creationId xmlns:a16="http://schemas.microsoft.com/office/drawing/2014/main" id="{39992BE6-FC5A-4CA1-A912-2249DE3BFAC8}"/>
               </a:ext>
             </a:extLst>
           </p:cNvPr>
@@ -2068,7 +2202,7 @@
           <p:cNvPr id="7" name="">
             <a:extLst xmlns:a="http://schemas.openxmlformats.org/drawingml/2006/main">
               <a:ext uri="{FF2B5EF4-FFF2-40B4-BE49-F238E27FC236}">
-                <a16:creationId xmlns:a16="http://schemas.microsoft.com/office/drawing/2014/main" id="{72D78A3C-E584-4850-8B79-D7CCFEE28C75}"/>
+                <a16:creationId xmlns:a16="http://schemas.microsoft.com/office/drawing/2014/main" id="{6B3DF089-4A60-4094-983A-47B873DCD8FE}"/>
               </a:ext>
             </a:extLst>
           </p:cNvPr>
@@ -2132,7 +2266,7 @@
           <p:cNvPr id="8" name="">
             <a:extLst xmlns:a="http://schemas.openxmlformats.org/drawingml/2006/main">
               <a:ext uri="{FF2B5EF4-FFF2-40B4-BE49-F238E27FC236}">
-                <a16:creationId xmlns:a16="http://schemas.microsoft.com/office/drawing/2014/main" id="{074A2342-C792-4E1F-8C28-18CDB935EBD0}"/>
+                <a16:creationId xmlns:a16="http://schemas.microsoft.com/office/drawing/2014/main" id="{D160B7FF-B913-4107-9A2A-952CF1CD648E}"/>
               </a:ext>
             </a:extLst>
           </p:cNvPr>
@@ -2196,7 +2330,7 @@
           <p:cNvPr id="9" name="">
             <a:extLst xmlns:a="http://schemas.openxmlformats.org/drawingml/2006/main">
               <a:ext uri="{FF2B5EF4-FFF2-40B4-BE49-F238E27FC236}">
-                <a16:creationId xmlns:a16="http://schemas.microsoft.com/office/drawing/2014/main" id="{05113B0A-8FF6-4A34-ADE5-1219EFB9AFB9}"/>
+                <a16:creationId xmlns:a16="http://schemas.microsoft.com/office/drawing/2014/main" id="{FB87BA7B-3EAF-4B22-9254-7F8DF617B0F4}"/>
               </a:ext>
             </a:extLst>
           </p:cNvPr>
@@ -2229,7 +2363,7 @@
           <p:cNvPr id="10" name="">
             <a:extLst xmlns:a="http://schemas.openxmlformats.org/drawingml/2006/main">
               <a:ext uri="{FF2B5EF4-FFF2-40B4-BE49-F238E27FC236}">
-                <a16:creationId xmlns:a16="http://schemas.microsoft.com/office/drawing/2014/main" id="{4DE945ED-0252-46CD-9C85-CCC2A5C12BD7}"/>
+                <a16:creationId xmlns:a16="http://schemas.microsoft.com/office/drawing/2014/main" id="{7862EAE8-187C-4A41-A32D-2DE8A1BCD9E2}"/>
               </a:ext>
             </a:extLst>
           </p:cNvPr>
@@ -2264,7 +2398,7 @@
           <p:cNvPr id="11" name="">
             <a:extLst xmlns:a="http://schemas.openxmlformats.org/drawingml/2006/main">
               <a:ext uri="{FF2B5EF4-FFF2-40B4-BE49-F238E27FC236}">
-                <a16:creationId xmlns:a16="http://schemas.microsoft.com/office/drawing/2014/main" id="{C2BEA7E2-301C-4EE3-B4BC-B845FE055E98}"/>
+                <a16:creationId xmlns:a16="http://schemas.microsoft.com/office/drawing/2014/main" id="{D70D54EB-7D50-4B7C-A73E-B5C93DBE4257}"/>
               </a:ext>
             </a:extLst>
           </p:cNvPr>
@@ -2328,7 +2462,7 @@
           <p:cNvPr id="12" name="">
             <a:extLst xmlns:a="http://schemas.openxmlformats.org/drawingml/2006/main">
               <a:ext uri="{FF2B5EF4-FFF2-40B4-BE49-F238E27FC236}">
-                <a16:creationId xmlns:a16="http://schemas.microsoft.com/office/drawing/2014/main" id="{EDA790AC-EB52-4EC9-BBC6-E5D7D51F39B7}"/>
+                <a16:creationId xmlns:a16="http://schemas.microsoft.com/office/drawing/2014/main" id="{A3CBC01C-178D-4542-9578-6480F098B3C2}"/>
               </a:ext>
             </a:extLst>
           </p:cNvPr>
@@ -2392,7 +2526,7 @@
           <p:cNvPr id="13" name="">
             <a:extLst xmlns:a="http://schemas.openxmlformats.org/drawingml/2006/main">
               <a:ext uri="{FF2B5EF4-FFF2-40B4-BE49-F238E27FC236}">
-                <a16:creationId xmlns:a16="http://schemas.microsoft.com/office/drawing/2014/main" id="{6E98B68F-A802-4A7B-8D02-E0E3FC0FCA47}"/>
+                <a16:creationId xmlns:a16="http://schemas.microsoft.com/office/drawing/2014/main" id="{80E6F270-5AE0-4E4D-9E01-77878693CD43}"/>
               </a:ext>
             </a:extLst>
           </p:cNvPr>
@@ -2456,7 +2590,7 @@
           <p:cNvPr id="14" name="">
             <a:extLst xmlns:a="http://schemas.openxmlformats.org/drawingml/2006/main">
               <a:ext uri="{FF2B5EF4-FFF2-40B4-BE49-F238E27FC236}">
-                <a16:creationId xmlns:a16="http://schemas.microsoft.com/office/drawing/2014/main" id="{6D2E0FB9-3ECD-4FBC-BFFE-6F390A92CCA6}"/>
+                <a16:creationId xmlns:a16="http://schemas.microsoft.com/office/drawing/2014/main" id="{64ED8123-55E8-4F4B-BA72-F626248FFB01}"/>
               </a:ext>
             </a:extLst>
           </p:cNvPr>
@@ -2489,7 +2623,7 @@
           <p:cNvPr id="15" name="">
             <a:extLst xmlns:a="http://schemas.openxmlformats.org/drawingml/2006/main">
               <a:ext uri="{FF2B5EF4-FFF2-40B4-BE49-F238E27FC236}">
-                <a16:creationId xmlns:a16="http://schemas.microsoft.com/office/drawing/2014/main" id="{D20860A9-9081-4037-A05C-3CD45150A906}"/>
+                <a16:creationId xmlns:a16="http://schemas.microsoft.com/office/drawing/2014/main" id="{5D52C3A0-50F0-4D0F-9064-5C83E3F3147F}"/>
               </a:ext>
             </a:extLst>
           </p:cNvPr>
@@ -2524,7 +2658,7 @@
           <p:cNvPr id="16" name="">
             <a:extLst xmlns:a="http://schemas.openxmlformats.org/drawingml/2006/main">
               <a:ext uri="{FF2B5EF4-FFF2-40B4-BE49-F238E27FC236}">
-                <a16:creationId xmlns:a16="http://schemas.microsoft.com/office/drawing/2014/main" id="{23B78381-3BDB-4A17-BC66-11AC40F28BB3}"/>
+                <a16:creationId xmlns:a16="http://schemas.microsoft.com/office/drawing/2014/main" id="{A0CDBFD9-E3BC-4A17-9CCB-A32C6167F371}"/>
               </a:ext>
             </a:extLst>
           </p:cNvPr>
@@ -2588,7 +2722,7 @@
           <p:cNvPr id="17" name="">
             <a:extLst xmlns:a="http://schemas.openxmlformats.org/drawingml/2006/main">
               <a:ext uri="{FF2B5EF4-FFF2-40B4-BE49-F238E27FC236}">
-                <a16:creationId xmlns:a16="http://schemas.microsoft.com/office/drawing/2014/main" id="{D6B1E2C9-47C6-4E08-993A-F69EAA592A60}"/>
+                <a16:creationId xmlns:a16="http://schemas.microsoft.com/office/drawing/2014/main" id="{7243112B-1685-41DD-8400-F4496215C2C3}"/>
               </a:ext>
             </a:extLst>
           </p:cNvPr>
@@ -2652,7 +2786,7 @@
           <p:cNvPr id="18" name="">
             <a:extLst xmlns:a="http://schemas.openxmlformats.org/drawingml/2006/main">
               <a:ext uri="{FF2B5EF4-FFF2-40B4-BE49-F238E27FC236}">
-                <a16:creationId xmlns:a16="http://schemas.microsoft.com/office/drawing/2014/main" id="{9D5B8CF1-F1DA-4F06-A8D0-CE60B6852C9B}"/>
+                <a16:creationId xmlns:a16="http://schemas.microsoft.com/office/drawing/2014/main" id="{FAB29C42-F156-4771-994B-13411AC04B8B}"/>
               </a:ext>
             </a:extLst>
           </p:cNvPr>
@@ -2716,7 +2850,7 @@
           <p:cNvPr id="19" name="">
             <a:extLst xmlns:a="http://schemas.openxmlformats.org/drawingml/2006/main">
               <a:ext uri="{FF2B5EF4-FFF2-40B4-BE49-F238E27FC236}">
-                <a16:creationId xmlns:a16="http://schemas.microsoft.com/office/drawing/2014/main" id="{F97B31FA-EC24-40D8-BC32-19F41F24431E}"/>
+                <a16:creationId xmlns:a16="http://schemas.microsoft.com/office/drawing/2014/main" id="{D01DA5A5-F2B6-43F5-BD61-06321AD8B40E}"/>
               </a:ext>
             </a:extLst>
           </p:cNvPr>
@@ -2749,7 +2883,7 @@
           <p:cNvPr id="20" name="">
             <a:extLst xmlns:a="http://schemas.openxmlformats.org/drawingml/2006/main">
               <a:ext uri="{FF2B5EF4-FFF2-40B4-BE49-F238E27FC236}">
-                <a16:creationId xmlns:a16="http://schemas.microsoft.com/office/drawing/2014/main" id="{2422C544-DFA6-451C-994F-26A5247DC170}"/>
+                <a16:creationId xmlns:a16="http://schemas.microsoft.com/office/drawing/2014/main" id="{07F36159-965A-4A31-B8B9-736FABDA0EB8}"/>
               </a:ext>
             </a:extLst>
           </p:cNvPr>
@@ -2784,7 +2918,7 @@
           <p:cNvPr id="21" name="">
             <a:extLst xmlns:a="http://schemas.openxmlformats.org/drawingml/2006/main">
               <a:ext uri="{FF2B5EF4-FFF2-40B4-BE49-F238E27FC236}">
-                <a16:creationId xmlns:a16="http://schemas.microsoft.com/office/drawing/2014/main" id="{52A76D2B-90A5-43C4-887B-7CFB6685235C}"/>
+                <a16:creationId xmlns:a16="http://schemas.microsoft.com/office/drawing/2014/main" id="{3B4D5598-9FA0-46F8-AE10-81F62D0D50C2}"/>
               </a:ext>
             </a:extLst>
           </p:cNvPr>
@@ -2848,7 +2982,7 @@
           <p:cNvPr id="22" name="">
             <a:extLst xmlns:a="http://schemas.openxmlformats.org/drawingml/2006/main">
               <a:ext uri="{FF2B5EF4-FFF2-40B4-BE49-F238E27FC236}">
-                <a16:creationId xmlns:a16="http://schemas.microsoft.com/office/drawing/2014/main" id="{04E85F9A-FCB8-4A47-A466-96DD948D3EFF}"/>
+                <a16:creationId xmlns:a16="http://schemas.microsoft.com/office/drawing/2014/main" id="{DDBC18E1-61A5-4AE5-A553-595159AD6E12}"/>
               </a:ext>
             </a:extLst>
           </p:cNvPr>
@@ -2912,7 +3046,7 @@
           <p:cNvPr id="23" name="">
             <a:extLst xmlns:a="http://schemas.openxmlformats.org/drawingml/2006/main">
               <a:ext uri="{FF2B5EF4-FFF2-40B4-BE49-F238E27FC236}">
-                <a16:creationId xmlns:a16="http://schemas.microsoft.com/office/drawing/2014/main" id="{36F700D0-D9AA-425F-A7DD-88C0F48128D1}"/>
+                <a16:creationId xmlns:a16="http://schemas.microsoft.com/office/drawing/2014/main" id="{F443F171-C225-485D-97BA-2FE82AA2E31B}"/>
               </a:ext>
             </a:extLst>
           </p:cNvPr>
@@ -2976,7 +3110,7 @@
           <p:cNvPr id="24" name="">
             <a:extLst xmlns:a="http://schemas.openxmlformats.org/drawingml/2006/main">
               <a:ext uri="{FF2B5EF4-FFF2-40B4-BE49-F238E27FC236}">
-                <a16:creationId xmlns:a16="http://schemas.microsoft.com/office/drawing/2014/main" id="{BE42B093-0B2E-43B2-8958-B8970D73E123}"/>
+                <a16:creationId xmlns:a16="http://schemas.microsoft.com/office/drawing/2014/main" id="{5740F892-D47F-4ED8-A69A-B5A1305117D9}"/>
               </a:ext>
             </a:extLst>
           </p:cNvPr>
@@ -3040,7 +3174,7 @@
           <p:cNvPr id="25" name="">
             <a:extLst xmlns:a="http://schemas.openxmlformats.org/drawingml/2006/main">
               <a:ext uri="{FF2B5EF4-FFF2-40B4-BE49-F238E27FC236}">
-                <a16:creationId xmlns:a16="http://schemas.microsoft.com/office/drawing/2014/main" id="{2B24AD85-429A-4D1F-952B-438705846E83}"/>
+                <a16:creationId xmlns:a16="http://schemas.microsoft.com/office/drawing/2014/main" id="{5EEEE135-9EF4-4E34-A596-079B09E93E50}"/>
               </a:ext>
             </a:extLst>
           </p:cNvPr>
@@ -3104,7 +3238,7 @@
           <p:cNvPr id="26" name="">
             <a:extLst xmlns:a="http://schemas.openxmlformats.org/drawingml/2006/main">
               <a:ext uri="{FF2B5EF4-FFF2-40B4-BE49-F238E27FC236}">
-                <a16:creationId xmlns:a16="http://schemas.microsoft.com/office/drawing/2014/main" id="{04C1AF7C-340E-4B6D-AB6D-5AC86AC796AB}"/>
+                <a16:creationId xmlns:a16="http://schemas.microsoft.com/office/drawing/2014/main" id="{248EC888-E305-425A-B8FD-7EC2AC2F1DFB}"/>
               </a:ext>
             </a:extLst>
           </p:cNvPr>
@@ -3166,7 +3300,7 @@
     </p:spTree>
     <p:extLst>
       <p:ext uri="{BB962C8B-B14F-4D97-AF65-F5344CB8AC3E}">
-        <p14:creationId xmlns:p14="http://schemas.microsoft.com/office/powerpoint/2010/main" val="1304818254"/>
+        <p14:creationId xmlns:p14="http://schemas.microsoft.com/office/powerpoint/2010/main" val="761094144"/>
       </p:ext>
     </p:extLst>
   </p:cSld>
@@ -3190,7 +3324,7 @@
           <p:cNvPr id="1" name="">
             <a:extLst xmlns:a="http://schemas.openxmlformats.org/drawingml/2006/main">
               <a:ext uri="{FF2B5EF4-FFF2-40B4-BE49-F238E27FC236}">
-                <a16:creationId xmlns:a16="http://schemas.microsoft.com/office/drawing/2014/main" id="{9F3FB202-04BC-479E-A3CE-71BFBACF39C6}"/>
+                <a16:creationId xmlns:a16="http://schemas.microsoft.com/office/drawing/2014/main" id="{28C9848C-74DB-4CF3-BB25-7EE1D28ECBAE}"/>
               </a:ext>
             </a:extLst>
           </p:cNvPr>
@@ -3225,7 +3359,7 @@
           <p:cNvPr id="2" name="">
             <a:extLst xmlns:a="http://schemas.openxmlformats.org/drawingml/2006/main">
               <a:ext uri="{FF2B5EF4-FFF2-40B4-BE49-F238E27FC236}">
-                <a16:creationId xmlns:a16="http://schemas.microsoft.com/office/drawing/2014/main" id="{DCB13D85-0A12-4875-8E31-6C87874D6089}"/>
+                <a16:creationId xmlns:a16="http://schemas.microsoft.com/office/drawing/2014/main" id="{A1BDD5BF-409B-42CA-8591-D92A6413999F}"/>
               </a:ext>
             </a:extLst>
           </p:cNvPr>
@@ -3260,7 +3394,7 @@
           <p:cNvPr id="3" name="">
             <a:extLst xmlns:a="http://schemas.openxmlformats.org/drawingml/2006/main">
               <a:ext uri="{FF2B5EF4-FFF2-40B4-BE49-F238E27FC236}">
-                <a16:creationId xmlns:a16="http://schemas.microsoft.com/office/drawing/2014/main" id="{F87789B2-20B4-4AE6-ADBF-A54D7037DB99}"/>
+                <a16:creationId xmlns:a16="http://schemas.microsoft.com/office/drawing/2014/main" id="{A8990733-12F0-44EE-9070-58FB1C298BCC}"/>
               </a:ext>
             </a:extLst>
           </p:cNvPr>
@@ -3324,7 +3458,7 @@
           <p:cNvPr id="4" name="">
             <a:extLst xmlns:a="http://schemas.openxmlformats.org/drawingml/2006/main">
               <a:ext uri="{FF2B5EF4-FFF2-40B4-BE49-F238E27FC236}">
-                <a16:creationId xmlns:a16="http://schemas.microsoft.com/office/drawing/2014/main" id="{0C1CB026-D2E1-4F07-9303-BD4CDE5946D4}"/>
+                <a16:creationId xmlns:a16="http://schemas.microsoft.com/office/drawing/2014/main" id="{EBEE1860-D1E1-49E7-81CC-93169BBB211F}"/>
               </a:ext>
             </a:extLst>
           </p:cNvPr>
@@ -3388,7 +3522,7 @@
           <p:cNvPr id="5" name="">
             <a:extLst xmlns:a="http://schemas.openxmlformats.org/drawingml/2006/main">
               <a:ext uri="{FF2B5EF4-FFF2-40B4-BE49-F238E27FC236}">
-                <a16:creationId xmlns:a16="http://schemas.microsoft.com/office/drawing/2014/main" id="{C655C349-592C-4717-996B-B72409EB425F}"/>
+                <a16:creationId xmlns:a16="http://schemas.microsoft.com/office/drawing/2014/main" id="{6FBCAA86-BCA3-4289-9829-6CBE6AD5A613}"/>
               </a:ext>
             </a:extLst>
           </p:cNvPr>
@@ -3452,7 +3586,7 @@
           <p:cNvPr id="6" name="">
             <a:extLst xmlns:a="http://schemas.openxmlformats.org/drawingml/2006/main">
               <a:ext uri="{FF2B5EF4-FFF2-40B4-BE49-F238E27FC236}">
-                <a16:creationId xmlns:a16="http://schemas.microsoft.com/office/drawing/2014/main" id="{7C1D2BD6-CF47-43EB-95DB-85CC704D7F93}"/>
+                <a16:creationId xmlns:a16="http://schemas.microsoft.com/office/drawing/2014/main" id="{9BD2F77E-456E-47F1-B4F2-B59B6D5DC7AB}"/>
               </a:ext>
             </a:extLst>
           </p:cNvPr>
@@ -3516,7 +3650,7 @@
           <p:cNvPr id="7" name="">
             <a:extLst xmlns:a="http://schemas.openxmlformats.org/drawingml/2006/main">
               <a:ext uri="{FF2B5EF4-FFF2-40B4-BE49-F238E27FC236}">
-                <a16:creationId xmlns:a16="http://schemas.microsoft.com/office/drawing/2014/main" id="{052345EF-011A-4494-AEDE-726753A501DE}"/>
+                <a16:creationId xmlns:a16="http://schemas.microsoft.com/office/drawing/2014/main" id="{43E52C63-8EB2-4450-8B01-75EE5669DF47}"/>
               </a:ext>
             </a:extLst>
           </p:cNvPr>
@@ -3553,7 +3687,7 @@
           <p:nvPr/>
         </p:nvPicPr>
         <p:blipFill>
-          <a:blip xmlns:r="http://schemas.openxmlformats.org/officeDocument/2006/relationships" xmlns:a="http://schemas.openxmlformats.org/drawingml/2006/main" r:embed="R1528a31ce8c44458"/>
+          <a:blip xmlns:r="http://schemas.openxmlformats.org/officeDocument/2006/relationships" xmlns:a="http://schemas.openxmlformats.org/drawingml/2006/main" r:embed="R45f2df486d834388"/>
           <a:stretch xmlns:a="http://schemas.openxmlformats.org/drawingml/2006/main"/>
         </p:blipFill>
         <p:spPr>
@@ -3571,7 +3705,7 @@
           <p:cNvPr id="9" name="">
             <a:extLst xmlns:a="http://schemas.openxmlformats.org/drawingml/2006/main">
               <a:ext uri="{FF2B5EF4-FFF2-40B4-BE49-F238E27FC236}">
-                <a16:creationId xmlns:a16="http://schemas.microsoft.com/office/drawing/2014/main" id="{874D8BA8-DD0C-41B8-96E4-0EB776E7DB2B}"/>
+                <a16:creationId xmlns:a16="http://schemas.microsoft.com/office/drawing/2014/main" id="{C7873807-91DB-450D-8B4D-B7C74D464644}"/>
               </a:ext>
             </a:extLst>
           </p:cNvPr>
@@ -3635,7 +3769,7 @@
           <p:cNvPr id="10" name="">
             <a:extLst xmlns:a="http://schemas.openxmlformats.org/drawingml/2006/main">
               <a:ext uri="{FF2B5EF4-FFF2-40B4-BE49-F238E27FC236}">
-                <a16:creationId xmlns:a16="http://schemas.microsoft.com/office/drawing/2014/main" id="{DE90CBEA-CD68-40FA-B925-03150841C915}"/>
+                <a16:creationId xmlns:a16="http://schemas.microsoft.com/office/drawing/2014/main" id="{B86674A7-B744-4768-A6AF-A75AF78374C3}"/>
               </a:ext>
             </a:extLst>
           </p:cNvPr>
@@ -3668,7 +3802,7 @@
           <p:cNvPr id="11" name="">
             <a:extLst xmlns:a="http://schemas.openxmlformats.org/drawingml/2006/main">
               <a:ext uri="{FF2B5EF4-FFF2-40B4-BE49-F238E27FC236}">
-                <a16:creationId xmlns:a16="http://schemas.microsoft.com/office/drawing/2014/main" id="{303EC310-A61D-4DE1-BD56-9FE659621BF1}"/>
+                <a16:creationId xmlns:a16="http://schemas.microsoft.com/office/drawing/2014/main" id="{55EAD74E-4699-4FFC-91FC-D01ADF5631DF}"/>
               </a:ext>
             </a:extLst>
           </p:cNvPr>
@@ -3703,7 +3837,7 @@
           <p:cNvPr id="12" name="">
             <a:extLst xmlns:a="http://schemas.openxmlformats.org/drawingml/2006/main">
               <a:ext uri="{FF2B5EF4-FFF2-40B4-BE49-F238E27FC236}">
-                <a16:creationId xmlns:a16="http://schemas.microsoft.com/office/drawing/2014/main" id="{D63D4CF7-019E-41BC-95BA-35D3F453FC27}"/>
+                <a16:creationId xmlns:a16="http://schemas.microsoft.com/office/drawing/2014/main" id="{857E69AA-4E83-42C5-9524-E4F356EA761F}"/>
               </a:ext>
             </a:extLst>
           </p:cNvPr>
@@ -3767,7 +3901,7 @@
           <p:cNvPr id="13" name="">
             <a:extLst xmlns:a="http://schemas.openxmlformats.org/drawingml/2006/main">
               <a:ext uri="{FF2B5EF4-FFF2-40B4-BE49-F238E27FC236}">
-                <a16:creationId xmlns:a16="http://schemas.microsoft.com/office/drawing/2014/main" id="{EDBB372D-A2D0-4789-A98B-09880DAAFD38}"/>
+                <a16:creationId xmlns:a16="http://schemas.microsoft.com/office/drawing/2014/main" id="{48C52767-8916-4AB1-B20D-DA927CCBDF49}"/>
               </a:ext>
             </a:extLst>
           </p:cNvPr>
@@ -3831,7 +3965,7 @@
           <p:cNvPr id="14" name="">
             <a:extLst xmlns:a="http://schemas.openxmlformats.org/drawingml/2006/main">
               <a:ext uri="{FF2B5EF4-FFF2-40B4-BE49-F238E27FC236}">
-                <a16:creationId xmlns:a16="http://schemas.microsoft.com/office/drawing/2014/main" id="{4D9FE72C-3D6F-4B21-AEBD-7F917B13BD49}"/>
+                <a16:creationId xmlns:a16="http://schemas.microsoft.com/office/drawing/2014/main" id="{320BC11D-5605-49B0-BE32-F708222A28E3}"/>
               </a:ext>
             </a:extLst>
           </p:cNvPr>
@@ -3895,7 +4029,7 @@
           <p:cNvPr id="15" name="">
             <a:extLst xmlns:a="http://schemas.openxmlformats.org/drawingml/2006/main">
               <a:ext uri="{FF2B5EF4-FFF2-40B4-BE49-F238E27FC236}">
-                <a16:creationId xmlns:a16="http://schemas.microsoft.com/office/drawing/2014/main" id="{E0EC4C2E-3E02-438D-A177-29702CFD6AB2}"/>
+                <a16:creationId xmlns:a16="http://schemas.microsoft.com/office/drawing/2014/main" id="{695A6E0F-5D9F-401B-9F8D-8E451CF498DF}"/>
               </a:ext>
             </a:extLst>
           </p:cNvPr>
@@ -3928,7 +4062,7 @@
           <p:cNvPr id="16" name="">
             <a:extLst xmlns:a="http://schemas.openxmlformats.org/drawingml/2006/main">
               <a:ext uri="{FF2B5EF4-FFF2-40B4-BE49-F238E27FC236}">
-                <a16:creationId xmlns:a16="http://schemas.microsoft.com/office/drawing/2014/main" id="{75388E21-AB5D-4904-A3DF-8F8541852BF8}"/>
+                <a16:creationId xmlns:a16="http://schemas.microsoft.com/office/drawing/2014/main" id="{D3587434-922E-4A30-BB07-B84A87B11933}"/>
               </a:ext>
             </a:extLst>
           </p:cNvPr>
@@ -3963,7 +4097,7 @@
           <p:cNvPr id="17" name="">
             <a:extLst xmlns:a="http://schemas.openxmlformats.org/drawingml/2006/main">
               <a:ext uri="{FF2B5EF4-FFF2-40B4-BE49-F238E27FC236}">
-                <a16:creationId xmlns:a16="http://schemas.microsoft.com/office/drawing/2014/main" id="{3521FC05-63BA-46C5-97A3-43F25C09181E}"/>
+                <a16:creationId xmlns:a16="http://schemas.microsoft.com/office/drawing/2014/main" id="{093FA6A0-42AD-49A2-AA67-64C244E7A7DB}"/>
               </a:ext>
             </a:extLst>
           </p:cNvPr>
@@ -4027,7 +4161,7 @@
           <p:cNvPr id="18" name="">
             <a:extLst xmlns:a="http://schemas.openxmlformats.org/drawingml/2006/main">
               <a:ext uri="{FF2B5EF4-FFF2-40B4-BE49-F238E27FC236}">
-                <a16:creationId xmlns:a16="http://schemas.microsoft.com/office/drawing/2014/main" id="{AAF38316-D4A8-4539-92A2-50A86A88068A}"/>
+                <a16:creationId xmlns:a16="http://schemas.microsoft.com/office/drawing/2014/main" id="{9038425C-59C9-4A4B-9FCB-F18B24CC13F8}"/>
               </a:ext>
             </a:extLst>
           </p:cNvPr>
@@ -4091,7 +4225,7 @@
           <p:cNvPr id="19" name="">
             <a:extLst xmlns:a="http://schemas.openxmlformats.org/drawingml/2006/main">
               <a:ext uri="{FF2B5EF4-FFF2-40B4-BE49-F238E27FC236}">
-                <a16:creationId xmlns:a16="http://schemas.microsoft.com/office/drawing/2014/main" id="{35F09A33-C4AA-4AAE-9469-C30EBFC09BEA}"/>
+                <a16:creationId xmlns:a16="http://schemas.microsoft.com/office/drawing/2014/main" id="{5EC13AFD-1638-4D4D-BE30-7707DAA32294}"/>
               </a:ext>
             </a:extLst>
           </p:cNvPr>
@@ -4155,7 +4289,7 @@
           <p:cNvPr id="20" name="">
             <a:extLst xmlns:a="http://schemas.openxmlformats.org/drawingml/2006/main">
               <a:ext uri="{FF2B5EF4-FFF2-40B4-BE49-F238E27FC236}">
-                <a16:creationId xmlns:a16="http://schemas.microsoft.com/office/drawing/2014/main" id="{BDAB38A6-E03E-445D-B7C4-E9C7C7386A2A}"/>
+                <a16:creationId xmlns:a16="http://schemas.microsoft.com/office/drawing/2014/main" id="{663885DC-0E04-4DD2-B7BD-F1E4805A5558}"/>
               </a:ext>
             </a:extLst>
           </p:cNvPr>
@@ -4219,7 +4353,7 @@
           <p:cNvPr id="21" name="">
             <a:extLst xmlns:a="http://schemas.openxmlformats.org/drawingml/2006/main">
               <a:ext uri="{FF2B5EF4-FFF2-40B4-BE49-F238E27FC236}">
-                <a16:creationId xmlns:a16="http://schemas.microsoft.com/office/drawing/2014/main" id="{16EE5C09-FA94-4E25-AC74-C2334CDDC27B}"/>
+                <a16:creationId xmlns:a16="http://schemas.microsoft.com/office/drawing/2014/main" id="{F12DAEAF-7825-46A9-A072-9DF1A18E0BE1}"/>
               </a:ext>
             </a:extLst>
           </p:cNvPr>
@@ -4283,7 +4417,7 @@
           <p:cNvPr id="22" name="">
             <a:extLst xmlns:a="http://schemas.openxmlformats.org/drawingml/2006/main">
               <a:ext uri="{FF2B5EF4-FFF2-40B4-BE49-F238E27FC236}">
-                <a16:creationId xmlns:a16="http://schemas.microsoft.com/office/drawing/2014/main" id="{093E0854-71A7-4623-BF3B-B0EE0303A966}"/>
+                <a16:creationId xmlns:a16="http://schemas.microsoft.com/office/drawing/2014/main" id="{14F46AB0-69F9-4DA7-9581-3518A6052B9D}"/>
               </a:ext>
             </a:extLst>
           </p:cNvPr>
@@ -4345,7 +4479,7 @@
     </p:spTree>
     <p:extLst>
       <p:ext uri="{BB962C8B-B14F-4D97-AF65-F5344CB8AC3E}">
-        <p14:creationId xmlns:p14="http://schemas.microsoft.com/office/powerpoint/2010/main" val="1268411915"/>
+        <p14:creationId xmlns:p14="http://schemas.microsoft.com/office/powerpoint/2010/main" val="1769623495"/>
       </p:ext>
     </p:extLst>
   </p:cSld>
@@ -4369,7 +4503,7 @@
           <p:cNvPr id="1" name="">
             <a:extLst xmlns:a="http://schemas.openxmlformats.org/drawingml/2006/main">
               <a:ext uri="{FF2B5EF4-FFF2-40B4-BE49-F238E27FC236}">
-                <a16:creationId xmlns:a16="http://schemas.microsoft.com/office/drawing/2014/main" id="{E950C8D4-EC59-4A4E-89E7-5197902BBF05}"/>
+                <a16:creationId xmlns:a16="http://schemas.microsoft.com/office/drawing/2014/main" id="{177009A7-9F00-4CDF-A5A8-3981C815BC26}"/>
               </a:ext>
             </a:extLst>
           </p:cNvPr>
@@ -4404,7 +4538,7 @@
           <p:cNvPr id="2" name="">
             <a:extLst xmlns:a="http://schemas.openxmlformats.org/drawingml/2006/main">
               <a:ext uri="{FF2B5EF4-FFF2-40B4-BE49-F238E27FC236}">
-                <a16:creationId xmlns:a16="http://schemas.microsoft.com/office/drawing/2014/main" id="{64A9A480-921A-4E3D-B981-244319E556FA}"/>
+                <a16:creationId xmlns:a16="http://schemas.microsoft.com/office/drawing/2014/main" id="{67E9CC8F-6BAE-4050-8FF8-831776DA1E21}"/>
               </a:ext>
             </a:extLst>
           </p:cNvPr>
@@ -4439,7 +4573,7 @@
           <p:cNvPr id="3" name="">
             <a:extLst xmlns:a="http://schemas.openxmlformats.org/drawingml/2006/main">
               <a:ext uri="{FF2B5EF4-FFF2-40B4-BE49-F238E27FC236}">
-                <a16:creationId xmlns:a16="http://schemas.microsoft.com/office/drawing/2014/main" id="{BC5A55AB-B462-4DE4-968F-87C32485686C}"/>
+                <a16:creationId xmlns:a16="http://schemas.microsoft.com/office/drawing/2014/main" id="{8699FB69-4A0D-4F48-8150-4BFEC8952DD2}"/>
               </a:ext>
             </a:extLst>
           </p:cNvPr>
@@ -4503,7 +4637,7 @@
           <p:cNvPr id="4" name="">
             <a:extLst xmlns:a="http://schemas.openxmlformats.org/drawingml/2006/main">
               <a:ext uri="{FF2B5EF4-FFF2-40B4-BE49-F238E27FC236}">
-                <a16:creationId xmlns:a16="http://schemas.microsoft.com/office/drawing/2014/main" id="{C7688F8C-AD2C-4CFB-AAEC-14EE120C43FE}"/>
+                <a16:creationId xmlns:a16="http://schemas.microsoft.com/office/drawing/2014/main" id="{C2B95C60-C198-4CEC-9640-9499916BD349}"/>
               </a:ext>
             </a:extLst>
           </p:cNvPr>
@@ -4567,7 +4701,7 @@
           <p:cNvPr id="5" name="">
             <a:extLst xmlns:a="http://schemas.openxmlformats.org/drawingml/2006/main">
               <a:ext uri="{FF2B5EF4-FFF2-40B4-BE49-F238E27FC236}">
-                <a16:creationId xmlns:a16="http://schemas.microsoft.com/office/drawing/2014/main" id="{62A75495-CEFD-4969-BF3E-D482AE7A4FD2}"/>
+                <a16:creationId xmlns:a16="http://schemas.microsoft.com/office/drawing/2014/main" id="{23CA3DE3-3A0E-45ED-99C8-33C952318072}"/>
               </a:ext>
             </a:extLst>
           </p:cNvPr>
@@ -4631,7 +4765,7 @@
           <p:cNvPr id="6" name="">
             <a:extLst xmlns:a="http://schemas.openxmlformats.org/drawingml/2006/main">
               <a:ext uri="{FF2B5EF4-FFF2-40B4-BE49-F238E27FC236}">
-                <a16:creationId xmlns:a16="http://schemas.microsoft.com/office/drawing/2014/main" id="{5DABA056-2EA9-427B-9373-E5E94434CCAC}"/>
+                <a16:creationId xmlns:a16="http://schemas.microsoft.com/office/drawing/2014/main" id="{81C0758B-C6BE-4D30-96D0-EDCD79DEC56A}"/>
               </a:ext>
             </a:extLst>
           </p:cNvPr>
@@ -4695,7 +4829,7 @@
           <p:cNvPr id="7" name="">
             <a:extLst xmlns:a="http://schemas.openxmlformats.org/drawingml/2006/main">
               <a:ext uri="{FF2B5EF4-FFF2-40B4-BE49-F238E27FC236}">
-                <a16:creationId xmlns:a16="http://schemas.microsoft.com/office/drawing/2014/main" id="{AE70289A-38F6-4C83-8B6B-3E8B9B463C6F}"/>
+                <a16:creationId xmlns:a16="http://schemas.microsoft.com/office/drawing/2014/main" id="{DA86D02D-EE21-4BF7-A796-C3C3A22FD074}"/>
               </a:ext>
             </a:extLst>
           </p:cNvPr>
@@ -4732,7 +4866,7 @@
           <p:nvPr/>
         </p:nvPicPr>
         <p:blipFill>
-          <a:blip xmlns:r="http://schemas.openxmlformats.org/officeDocument/2006/relationships" xmlns:a="http://schemas.openxmlformats.org/drawingml/2006/main" r:embed="R44c26deae6174d8e"/>
+          <a:blip xmlns:r="http://schemas.openxmlformats.org/officeDocument/2006/relationships" xmlns:a="http://schemas.openxmlformats.org/drawingml/2006/main" r:embed="Rd6cb5e3bf48a4e9b"/>
           <a:stretch xmlns:a="http://schemas.openxmlformats.org/drawingml/2006/main"/>
         </p:blipFill>
         <p:spPr>
@@ -4750,7 +4884,7 @@
           <p:cNvPr id="9" name="">
             <a:extLst xmlns:a="http://schemas.openxmlformats.org/drawingml/2006/main">
               <a:ext uri="{FF2B5EF4-FFF2-40B4-BE49-F238E27FC236}">
-                <a16:creationId xmlns:a16="http://schemas.microsoft.com/office/drawing/2014/main" id="{10767726-733B-4D23-AA4E-74E9BD1D877D}"/>
+                <a16:creationId xmlns:a16="http://schemas.microsoft.com/office/drawing/2014/main" id="{C1F00D0A-47A5-4855-9460-0A6FB87D766C}"/>
               </a:ext>
             </a:extLst>
           </p:cNvPr>
@@ -4814,7 +4948,7 @@
           <p:cNvPr id="10" name="">
             <a:extLst xmlns:a="http://schemas.openxmlformats.org/drawingml/2006/main">
               <a:ext uri="{FF2B5EF4-FFF2-40B4-BE49-F238E27FC236}">
-                <a16:creationId xmlns:a16="http://schemas.microsoft.com/office/drawing/2014/main" id="{6F7E5C27-427F-4DE2-8FC3-3FD30C34D6AF}"/>
+                <a16:creationId xmlns:a16="http://schemas.microsoft.com/office/drawing/2014/main" id="{F87CBCF3-E1C9-444B-A945-481328BB6BC7}"/>
               </a:ext>
             </a:extLst>
           </p:cNvPr>
@@ -4847,7 +4981,7 @@
           <p:cNvPr id="11" name="">
             <a:extLst xmlns:a="http://schemas.openxmlformats.org/drawingml/2006/main">
               <a:ext uri="{FF2B5EF4-FFF2-40B4-BE49-F238E27FC236}">
-                <a16:creationId xmlns:a16="http://schemas.microsoft.com/office/drawing/2014/main" id="{CF0D265D-11AE-4AA3-B306-E253126AE5DD}"/>
+                <a16:creationId xmlns:a16="http://schemas.microsoft.com/office/drawing/2014/main" id="{B3887606-5B06-4288-A1A4-C8364E4B40E1}"/>
               </a:ext>
             </a:extLst>
           </p:cNvPr>
@@ -4911,7 +5045,7 @@
           <p:cNvPr id="12" name="">
             <a:extLst xmlns:a="http://schemas.openxmlformats.org/drawingml/2006/main">
               <a:ext uri="{FF2B5EF4-FFF2-40B4-BE49-F238E27FC236}">
-                <a16:creationId xmlns:a16="http://schemas.microsoft.com/office/drawing/2014/main" id="{6F5079F1-B4D7-473C-ACC6-76624DCC62EA}"/>
+                <a16:creationId xmlns:a16="http://schemas.microsoft.com/office/drawing/2014/main" id="{7C273076-C90D-48B8-9746-6126873B264F}"/>
               </a:ext>
             </a:extLst>
           </p:cNvPr>
@@ -4944,7 +5078,7 @@
           <p:cNvPr id="13" name="">
             <a:extLst xmlns:a="http://schemas.openxmlformats.org/drawingml/2006/main">
               <a:ext uri="{FF2B5EF4-FFF2-40B4-BE49-F238E27FC236}">
-                <a16:creationId xmlns:a16="http://schemas.microsoft.com/office/drawing/2014/main" id="{8043F929-1ACA-4442-AC60-015DF69B15BA}"/>
+                <a16:creationId xmlns:a16="http://schemas.microsoft.com/office/drawing/2014/main" id="{5546BF62-A55B-4199-8EF7-9C385FF530E1}"/>
               </a:ext>
             </a:extLst>
           </p:cNvPr>
@@ -5008,7 +5142,7 @@
           <p:cNvPr id="14" name="">
             <a:extLst xmlns:a="http://schemas.openxmlformats.org/drawingml/2006/main">
               <a:ext uri="{FF2B5EF4-FFF2-40B4-BE49-F238E27FC236}">
-                <a16:creationId xmlns:a16="http://schemas.microsoft.com/office/drawing/2014/main" id="{F77C06B6-FE9F-4B3D-A3F3-C687DEFB733E}"/>
+                <a16:creationId xmlns:a16="http://schemas.microsoft.com/office/drawing/2014/main" id="{2E51B245-D76B-4247-A840-97311FC3CD81}"/>
               </a:ext>
             </a:extLst>
           </p:cNvPr>
@@ -5041,7 +5175,7 @@
           <p:cNvPr id="15" name="">
             <a:extLst xmlns:a="http://schemas.openxmlformats.org/drawingml/2006/main">
               <a:ext uri="{FF2B5EF4-FFF2-40B4-BE49-F238E27FC236}">
-                <a16:creationId xmlns:a16="http://schemas.microsoft.com/office/drawing/2014/main" id="{CB0F60F8-9950-4D48-A20F-EDC6D11683D5}"/>
+                <a16:creationId xmlns:a16="http://schemas.microsoft.com/office/drawing/2014/main" id="{3ABCDD60-4DF7-430E-A440-8042023DB4A1}"/>
               </a:ext>
             </a:extLst>
           </p:cNvPr>
@@ -5105,7 +5239,7 @@
           <p:cNvPr id="16" name="">
             <a:extLst xmlns:a="http://schemas.openxmlformats.org/drawingml/2006/main">
               <a:ext uri="{FF2B5EF4-FFF2-40B4-BE49-F238E27FC236}">
-                <a16:creationId xmlns:a16="http://schemas.microsoft.com/office/drawing/2014/main" id="{06A881C9-88C2-449D-A32B-C317AA743B97}"/>
+                <a16:creationId xmlns:a16="http://schemas.microsoft.com/office/drawing/2014/main" id="{B102A757-4B57-4C9E-BB1D-91ADBAA49853}"/>
               </a:ext>
             </a:extLst>
           </p:cNvPr>
@@ -5138,7 +5272,7 @@
           <p:cNvPr id="17" name="">
             <a:extLst xmlns:a="http://schemas.openxmlformats.org/drawingml/2006/main">
               <a:ext uri="{FF2B5EF4-FFF2-40B4-BE49-F238E27FC236}">
-                <a16:creationId xmlns:a16="http://schemas.microsoft.com/office/drawing/2014/main" id="{09E526C3-5667-4A91-96EC-599FEA17D281}"/>
+                <a16:creationId xmlns:a16="http://schemas.microsoft.com/office/drawing/2014/main" id="{C4A34A86-35D3-4031-A7C7-CAAE81265B5D}"/>
               </a:ext>
             </a:extLst>
           </p:cNvPr>
@@ -5202,7 +5336,7 @@
           <p:cNvPr id="18" name="">
             <a:extLst xmlns:a="http://schemas.openxmlformats.org/drawingml/2006/main">
               <a:ext uri="{FF2B5EF4-FFF2-40B4-BE49-F238E27FC236}">
-                <a16:creationId xmlns:a16="http://schemas.microsoft.com/office/drawing/2014/main" id="{1F67A902-40F4-42D6-89A1-9C9B54ED2D7E}"/>
+                <a16:creationId xmlns:a16="http://schemas.microsoft.com/office/drawing/2014/main" id="{C0301100-4B24-42FE-9514-299C75736AD8}"/>
               </a:ext>
             </a:extLst>
           </p:cNvPr>
@@ -5235,7 +5369,7 @@
           <p:cNvPr id="19" name="">
             <a:extLst xmlns:a="http://schemas.openxmlformats.org/drawingml/2006/main">
               <a:ext uri="{FF2B5EF4-FFF2-40B4-BE49-F238E27FC236}">
-                <a16:creationId xmlns:a16="http://schemas.microsoft.com/office/drawing/2014/main" id="{243FBB74-1763-4A6F-BE7E-A23DB7CD0497}"/>
+                <a16:creationId xmlns:a16="http://schemas.microsoft.com/office/drawing/2014/main" id="{CAB0AAFB-9E98-48FA-AC8E-ADF044FD74FA}"/>
               </a:ext>
             </a:extLst>
           </p:cNvPr>
@@ -5299,7 +5433,7 @@
           <p:cNvPr id="20" name="">
             <a:extLst xmlns:a="http://schemas.openxmlformats.org/drawingml/2006/main">
               <a:ext uri="{FF2B5EF4-FFF2-40B4-BE49-F238E27FC236}">
-                <a16:creationId xmlns:a16="http://schemas.microsoft.com/office/drawing/2014/main" id="{31BF0095-5F09-43CD-87FC-B3C3C6A6C632}"/>
+                <a16:creationId xmlns:a16="http://schemas.microsoft.com/office/drawing/2014/main" id="{20E04A2A-1661-408E-B48F-689756580341}"/>
               </a:ext>
             </a:extLst>
           </p:cNvPr>
@@ -5332,7 +5466,7 @@
           <p:cNvPr id="21" name="">
             <a:extLst xmlns:a="http://schemas.openxmlformats.org/drawingml/2006/main">
               <a:ext uri="{FF2B5EF4-FFF2-40B4-BE49-F238E27FC236}">
-                <a16:creationId xmlns:a16="http://schemas.microsoft.com/office/drawing/2014/main" id="{523FBB02-5217-4BDC-9B6C-FC6FCEC8AEC3}"/>
+                <a16:creationId xmlns:a16="http://schemas.microsoft.com/office/drawing/2014/main" id="{BEAAFD73-078F-42E1-BB51-16D60466B202}"/>
               </a:ext>
             </a:extLst>
           </p:cNvPr>
@@ -5396,7 +5530,7 @@
           <p:cNvPr id="22" name="">
             <a:extLst xmlns:a="http://schemas.openxmlformats.org/drawingml/2006/main">
               <a:ext uri="{FF2B5EF4-FFF2-40B4-BE49-F238E27FC236}">
-                <a16:creationId xmlns:a16="http://schemas.microsoft.com/office/drawing/2014/main" id="{7AA68956-7446-4107-9B8F-BBBAE1DD44F3}"/>
+                <a16:creationId xmlns:a16="http://schemas.microsoft.com/office/drawing/2014/main" id="{E97638D4-DAA8-45F2-952E-8AAA8437597A}"/>
               </a:ext>
             </a:extLst>
           </p:cNvPr>
@@ -5429,7 +5563,7 @@
           <p:cNvPr id="23" name="">
             <a:extLst xmlns:a="http://schemas.openxmlformats.org/drawingml/2006/main">
               <a:ext uri="{FF2B5EF4-FFF2-40B4-BE49-F238E27FC236}">
-                <a16:creationId xmlns:a16="http://schemas.microsoft.com/office/drawing/2014/main" id="{23AA6575-7C96-4769-A0DE-68380923A658}"/>
+                <a16:creationId xmlns:a16="http://schemas.microsoft.com/office/drawing/2014/main" id="{BC2945DE-D66E-4CE4-8ADE-535F810F5A24}"/>
               </a:ext>
             </a:extLst>
           </p:cNvPr>
@@ -5493,7 +5627,7 @@
           <p:cNvPr id="24" name="">
             <a:extLst xmlns:a="http://schemas.openxmlformats.org/drawingml/2006/main">
               <a:ext uri="{FF2B5EF4-FFF2-40B4-BE49-F238E27FC236}">
-                <a16:creationId xmlns:a16="http://schemas.microsoft.com/office/drawing/2014/main" id="{A1D025C9-55B3-40F1-8CE5-A5BCF4072A01}"/>
+                <a16:creationId xmlns:a16="http://schemas.microsoft.com/office/drawing/2014/main" id="{D0239F29-4E90-4DEA-80D7-8C2D67CD25DE}"/>
               </a:ext>
             </a:extLst>
           </p:cNvPr>
@@ -5526,7 +5660,7 @@
           <p:cNvPr id="25" name="">
             <a:extLst xmlns:a="http://schemas.openxmlformats.org/drawingml/2006/main">
               <a:ext uri="{FF2B5EF4-FFF2-40B4-BE49-F238E27FC236}">
-                <a16:creationId xmlns:a16="http://schemas.microsoft.com/office/drawing/2014/main" id="{CCAA6366-8B22-4181-B811-56DB473291D5}"/>
+                <a16:creationId xmlns:a16="http://schemas.microsoft.com/office/drawing/2014/main" id="{52092BE5-BD89-463A-A686-6565716394CE}"/>
               </a:ext>
             </a:extLst>
           </p:cNvPr>
@@ -5590,7 +5724,7 @@
           <p:cNvPr id="26" name="">
             <a:extLst xmlns:a="http://schemas.openxmlformats.org/drawingml/2006/main">
               <a:ext uri="{FF2B5EF4-FFF2-40B4-BE49-F238E27FC236}">
-                <a16:creationId xmlns:a16="http://schemas.microsoft.com/office/drawing/2014/main" id="{5E105E04-E4CF-4AC7-85E7-7781ABD07D19}"/>
+                <a16:creationId xmlns:a16="http://schemas.microsoft.com/office/drawing/2014/main" id="{E78FC01C-B377-4C0C-880E-328144D62D53}"/>
               </a:ext>
             </a:extLst>
           </p:cNvPr>
@@ -5623,7 +5757,7 @@
           <p:cNvPr id="27" name="">
             <a:extLst xmlns:a="http://schemas.openxmlformats.org/drawingml/2006/main">
               <a:ext uri="{FF2B5EF4-FFF2-40B4-BE49-F238E27FC236}">
-                <a16:creationId xmlns:a16="http://schemas.microsoft.com/office/drawing/2014/main" id="{62CA6E17-4B6B-4A22-8A28-BC7ECEDAC74E}"/>
+                <a16:creationId xmlns:a16="http://schemas.microsoft.com/office/drawing/2014/main" id="{AC1C0784-3136-40B8-9143-9660544E5428}"/>
               </a:ext>
             </a:extLst>
           </p:cNvPr>
@@ -5687,7 +5821,7 @@
           <p:cNvPr id="28" name="">
             <a:extLst xmlns:a="http://schemas.openxmlformats.org/drawingml/2006/main">
               <a:ext uri="{FF2B5EF4-FFF2-40B4-BE49-F238E27FC236}">
-                <a16:creationId xmlns:a16="http://schemas.microsoft.com/office/drawing/2014/main" id="{D40E475A-CB49-4909-B82F-E1640EA62C20}"/>
+                <a16:creationId xmlns:a16="http://schemas.microsoft.com/office/drawing/2014/main" id="{B5066443-D0FE-4B62-A035-DECB031AE8B6}"/>
               </a:ext>
             </a:extLst>
           </p:cNvPr>
@@ -5720,7 +5854,7 @@
           <p:cNvPr id="29" name="">
             <a:extLst xmlns:a="http://schemas.openxmlformats.org/drawingml/2006/main">
               <a:ext uri="{FF2B5EF4-FFF2-40B4-BE49-F238E27FC236}">
-                <a16:creationId xmlns:a16="http://schemas.microsoft.com/office/drawing/2014/main" id="{7BA7D183-8504-499E-8E8D-D170A99FC416}"/>
+                <a16:creationId xmlns:a16="http://schemas.microsoft.com/office/drawing/2014/main" id="{7E8034C3-14DA-471F-AC00-35F8A5FD3283}"/>
               </a:ext>
             </a:extLst>
           </p:cNvPr>
@@ -5784,7 +5918,7 @@
           <p:cNvPr id="30" name="">
             <a:extLst xmlns:a="http://schemas.openxmlformats.org/drawingml/2006/main">
               <a:ext uri="{FF2B5EF4-FFF2-40B4-BE49-F238E27FC236}">
-                <a16:creationId xmlns:a16="http://schemas.microsoft.com/office/drawing/2014/main" id="{72A30F43-0EFF-4983-9755-3EA3ACDE6B9B}"/>
+                <a16:creationId xmlns:a16="http://schemas.microsoft.com/office/drawing/2014/main" id="{3D3B3596-0BAB-47C9-A9E9-8112B6D0BCE7}"/>
               </a:ext>
             </a:extLst>
           </p:cNvPr>
@@ -5817,7 +5951,7 @@
           <p:cNvPr id="31" name="">
             <a:extLst xmlns:a="http://schemas.openxmlformats.org/drawingml/2006/main">
               <a:ext uri="{FF2B5EF4-FFF2-40B4-BE49-F238E27FC236}">
-                <a16:creationId xmlns:a16="http://schemas.microsoft.com/office/drawing/2014/main" id="{FDB7D401-0A24-4B3A-88C7-6770EDFEC1DF}"/>
+                <a16:creationId xmlns:a16="http://schemas.microsoft.com/office/drawing/2014/main" id="{D38129FD-D33F-4755-8232-FEC8210DA945}"/>
               </a:ext>
             </a:extLst>
           </p:cNvPr>
@@ -5881,7 +6015,7 @@
           <p:cNvPr id="32" name="">
             <a:extLst xmlns:a="http://schemas.openxmlformats.org/drawingml/2006/main">
               <a:ext uri="{FF2B5EF4-FFF2-40B4-BE49-F238E27FC236}">
-                <a16:creationId xmlns:a16="http://schemas.microsoft.com/office/drawing/2014/main" id="{3610015F-CC69-4949-8FBE-FA1851F7B023}"/>
+                <a16:creationId xmlns:a16="http://schemas.microsoft.com/office/drawing/2014/main" id="{478E5F46-03B1-491C-AC14-B885AB8BCB01}"/>
               </a:ext>
             </a:extLst>
           </p:cNvPr>
@@ -5914,7 +6048,7 @@
           <p:cNvPr id="33" name="">
             <a:extLst xmlns:a="http://schemas.openxmlformats.org/drawingml/2006/main">
               <a:ext uri="{FF2B5EF4-FFF2-40B4-BE49-F238E27FC236}">
-                <a16:creationId xmlns:a16="http://schemas.microsoft.com/office/drawing/2014/main" id="{C51CFFEE-5257-437C-A546-1EE22B1F9BE5}"/>
+                <a16:creationId xmlns:a16="http://schemas.microsoft.com/office/drawing/2014/main" id="{649A0555-4531-4C6F-8895-DFC412C1F792}"/>
               </a:ext>
             </a:extLst>
           </p:cNvPr>
@@ -5978,7 +6112,7 @@
           <p:cNvPr id="34" name="">
             <a:extLst xmlns:a="http://schemas.openxmlformats.org/drawingml/2006/main">
               <a:ext uri="{FF2B5EF4-FFF2-40B4-BE49-F238E27FC236}">
-                <a16:creationId xmlns:a16="http://schemas.microsoft.com/office/drawing/2014/main" id="{8FE1F631-9983-4CB7-99A0-437F9DB4FA2F}"/>
+                <a16:creationId xmlns:a16="http://schemas.microsoft.com/office/drawing/2014/main" id="{5A16348E-2028-44F3-979B-FAC0BEFBCC9B}"/>
               </a:ext>
             </a:extLst>
           </p:cNvPr>
@@ -6011,7 +6145,7 @@
           <p:cNvPr id="35" name="">
             <a:extLst xmlns:a="http://schemas.openxmlformats.org/drawingml/2006/main">
               <a:ext uri="{FF2B5EF4-FFF2-40B4-BE49-F238E27FC236}">
-                <a16:creationId xmlns:a16="http://schemas.microsoft.com/office/drawing/2014/main" id="{BE8B7B14-40EC-4B57-B7F9-1CAA335997D0}"/>
+                <a16:creationId xmlns:a16="http://schemas.microsoft.com/office/drawing/2014/main" id="{9DEA7E33-B766-4242-8034-0B02EEF45B1A}"/>
               </a:ext>
             </a:extLst>
           </p:cNvPr>
@@ -6075,7 +6209,7 @@
           <p:cNvPr id="36" name="">
             <a:extLst xmlns:a="http://schemas.openxmlformats.org/drawingml/2006/main">
               <a:ext uri="{FF2B5EF4-FFF2-40B4-BE49-F238E27FC236}">
-                <a16:creationId xmlns:a16="http://schemas.microsoft.com/office/drawing/2014/main" id="{FC63184C-02E2-455A-90EA-8C184BAC00A7}"/>
+                <a16:creationId xmlns:a16="http://schemas.microsoft.com/office/drawing/2014/main" id="{B7D9CA82-6B78-401D-ACA7-672164547F81}"/>
               </a:ext>
             </a:extLst>
           </p:cNvPr>
@@ -6108,7 +6242,7 @@
           <p:cNvPr id="37" name="">
             <a:extLst xmlns:a="http://schemas.openxmlformats.org/drawingml/2006/main">
               <a:ext uri="{FF2B5EF4-FFF2-40B4-BE49-F238E27FC236}">
-                <a16:creationId xmlns:a16="http://schemas.microsoft.com/office/drawing/2014/main" id="{B5AC44D2-4B83-493E-989C-4FF7D3EACB22}"/>
+                <a16:creationId xmlns:a16="http://schemas.microsoft.com/office/drawing/2014/main" id="{ED84EB99-ACAD-49D6-8FF2-25B0A2F97E3A}"/>
               </a:ext>
             </a:extLst>
           </p:cNvPr>
@@ -6172,7 +6306,7 @@
           <p:cNvPr id="38" name="">
             <a:extLst xmlns:a="http://schemas.openxmlformats.org/drawingml/2006/main">
               <a:ext uri="{FF2B5EF4-FFF2-40B4-BE49-F238E27FC236}">
-                <a16:creationId xmlns:a16="http://schemas.microsoft.com/office/drawing/2014/main" id="{25438715-C983-401A-9982-E3092457ABFC}"/>
+                <a16:creationId xmlns:a16="http://schemas.microsoft.com/office/drawing/2014/main" id="{E91A96D4-86D2-4F67-B9A8-4B73BD677E97}"/>
               </a:ext>
             </a:extLst>
           </p:cNvPr>
@@ -6205,7 +6339,7 @@
           <p:cNvPr id="39" name="">
             <a:extLst xmlns:a="http://schemas.openxmlformats.org/drawingml/2006/main">
               <a:ext uri="{FF2B5EF4-FFF2-40B4-BE49-F238E27FC236}">
-                <a16:creationId xmlns:a16="http://schemas.microsoft.com/office/drawing/2014/main" id="{DE48DCFD-E98E-42D1-BA6C-EF5409DEC666}"/>
+                <a16:creationId xmlns:a16="http://schemas.microsoft.com/office/drawing/2014/main" id="{CC464B74-BA4C-46D4-97D1-45979C9D6291}"/>
               </a:ext>
             </a:extLst>
           </p:cNvPr>
@@ -6269,7 +6403,7 @@
           <p:cNvPr id="40" name="">
             <a:extLst xmlns:a="http://schemas.openxmlformats.org/drawingml/2006/main">
               <a:ext uri="{FF2B5EF4-FFF2-40B4-BE49-F238E27FC236}">
-                <a16:creationId xmlns:a16="http://schemas.microsoft.com/office/drawing/2014/main" id="{238E1842-A4E1-4CC2-94DB-54E3E3324852}"/>
+                <a16:creationId xmlns:a16="http://schemas.microsoft.com/office/drawing/2014/main" id="{7F157D95-D1C8-4C4A-82A1-8759CEFC90F2}"/>
               </a:ext>
             </a:extLst>
           </p:cNvPr>
@@ -6302,7 +6436,7 @@
           <p:cNvPr id="41" name="">
             <a:extLst xmlns:a="http://schemas.openxmlformats.org/drawingml/2006/main">
               <a:ext uri="{FF2B5EF4-FFF2-40B4-BE49-F238E27FC236}">
-                <a16:creationId xmlns:a16="http://schemas.microsoft.com/office/drawing/2014/main" id="{503FFA50-6E0E-4E44-B95D-9B31C280064B}"/>
+                <a16:creationId xmlns:a16="http://schemas.microsoft.com/office/drawing/2014/main" id="{7AD86C63-1A56-46DB-80D9-EAEDA3CF594E}"/>
               </a:ext>
             </a:extLst>
           </p:cNvPr>
@@ -6366,7 +6500,7 @@
           <p:cNvPr id="42" name="">
             <a:extLst xmlns:a="http://schemas.openxmlformats.org/drawingml/2006/main">
               <a:ext uri="{FF2B5EF4-FFF2-40B4-BE49-F238E27FC236}">
-                <a16:creationId xmlns:a16="http://schemas.microsoft.com/office/drawing/2014/main" id="{BFE5B4E8-41AC-4934-A8D5-A2215C3C02AC}"/>
+                <a16:creationId xmlns:a16="http://schemas.microsoft.com/office/drawing/2014/main" id="{BE04078D-FD5E-4F2B-B321-E613166565D9}"/>
               </a:ext>
             </a:extLst>
           </p:cNvPr>
@@ -6399,7 +6533,7 @@
           <p:cNvPr id="43" name="">
             <a:extLst xmlns:a="http://schemas.openxmlformats.org/drawingml/2006/main">
               <a:ext uri="{FF2B5EF4-FFF2-40B4-BE49-F238E27FC236}">
-                <a16:creationId xmlns:a16="http://schemas.microsoft.com/office/drawing/2014/main" id="{32AD61CB-CC5B-458E-9D3A-68ACE0890F50}"/>
+                <a16:creationId xmlns:a16="http://schemas.microsoft.com/office/drawing/2014/main" id="{191528CE-7F30-437B-81D0-F5FFAA05BA18}"/>
               </a:ext>
             </a:extLst>
           </p:cNvPr>
@@ -6463,7 +6597,7 @@
           <p:cNvPr id="44" name="">
             <a:extLst xmlns:a="http://schemas.openxmlformats.org/drawingml/2006/main">
               <a:ext uri="{FF2B5EF4-FFF2-40B4-BE49-F238E27FC236}">
-                <a16:creationId xmlns:a16="http://schemas.microsoft.com/office/drawing/2014/main" id="{29FF9477-572F-4F66-AC13-11BEEBF1A345}"/>
+                <a16:creationId xmlns:a16="http://schemas.microsoft.com/office/drawing/2014/main" id="{874DB3AB-34A4-4771-981F-A78A420B16C2}"/>
               </a:ext>
             </a:extLst>
           </p:cNvPr>
@@ -6496,7 +6630,7 @@
           <p:cNvPr id="45" name="">
             <a:extLst xmlns:a="http://schemas.openxmlformats.org/drawingml/2006/main">
               <a:ext uri="{FF2B5EF4-FFF2-40B4-BE49-F238E27FC236}">
-                <a16:creationId xmlns:a16="http://schemas.microsoft.com/office/drawing/2014/main" id="{FF59A891-3CF3-459D-B79C-DC9AEF973648}"/>
+                <a16:creationId xmlns:a16="http://schemas.microsoft.com/office/drawing/2014/main" id="{93E3EED1-947D-421B-8901-2D30C9BE823A}"/>
               </a:ext>
             </a:extLst>
           </p:cNvPr>
@@ -6560,7 +6694,7 @@
           <p:cNvPr id="46" name="">
             <a:extLst xmlns:a="http://schemas.openxmlformats.org/drawingml/2006/main">
               <a:ext uri="{FF2B5EF4-FFF2-40B4-BE49-F238E27FC236}">
-                <a16:creationId xmlns:a16="http://schemas.microsoft.com/office/drawing/2014/main" id="{2198E9CD-87D9-473F-9063-F3DC4BE2C115}"/>
+                <a16:creationId xmlns:a16="http://schemas.microsoft.com/office/drawing/2014/main" id="{4F82D471-53F1-4901-9AC1-951714AFD18F}"/>
               </a:ext>
             </a:extLst>
           </p:cNvPr>
@@ -6593,7 +6727,7 @@
           <p:cNvPr id="47" name="">
             <a:extLst xmlns:a="http://schemas.openxmlformats.org/drawingml/2006/main">
               <a:ext uri="{FF2B5EF4-FFF2-40B4-BE49-F238E27FC236}">
-                <a16:creationId xmlns:a16="http://schemas.microsoft.com/office/drawing/2014/main" id="{E51A7EA4-7CD1-496E-A2F0-936961D373FE}"/>
+                <a16:creationId xmlns:a16="http://schemas.microsoft.com/office/drawing/2014/main" id="{E07B4856-104C-4450-AEA3-CC31B9AE5EDF}"/>
               </a:ext>
             </a:extLst>
           </p:cNvPr>
@@ -6657,7 +6791,7 @@
           <p:cNvPr id="48" name="">
             <a:extLst xmlns:a="http://schemas.openxmlformats.org/drawingml/2006/main">
               <a:ext uri="{FF2B5EF4-FFF2-40B4-BE49-F238E27FC236}">
-                <a16:creationId xmlns:a16="http://schemas.microsoft.com/office/drawing/2014/main" id="{B4D43279-76FB-4E8C-9151-65536337C8DC}"/>
+                <a16:creationId xmlns:a16="http://schemas.microsoft.com/office/drawing/2014/main" id="{18A2BEBD-1CDE-4547-B51C-FA2EE7F41A5A}"/>
               </a:ext>
             </a:extLst>
           </p:cNvPr>
@@ -6690,7 +6824,7 @@
           <p:cNvPr id="49" name="">
             <a:extLst xmlns:a="http://schemas.openxmlformats.org/drawingml/2006/main">
               <a:ext uri="{FF2B5EF4-FFF2-40B4-BE49-F238E27FC236}">
-                <a16:creationId xmlns:a16="http://schemas.microsoft.com/office/drawing/2014/main" id="{DD82D601-9FAE-40EC-9808-3D644B59F78E}"/>
+                <a16:creationId xmlns:a16="http://schemas.microsoft.com/office/drawing/2014/main" id="{4BB9DB33-B1D9-463F-B4DB-0022D3DE6911}"/>
               </a:ext>
             </a:extLst>
           </p:cNvPr>
@@ -6754,7 +6888,7 @@
           <p:cNvPr id="50" name="">
             <a:extLst xmlns:a="http://schemas.openxmlformats.org/drawingml/2006/main">
               <a:ext uri="{FF2B5EF4-FFF2-40B4-BE49-F238E27FC236}">
-                <a16:creationId xmlns:a16="http://schemas.microsoft.com/office/drawing/2014/main" id="{09D4152A-CD23-4702-85C8-CD13233D34D3}"/>
+                <a16:creationId xmlns:a16="http://schemas.microsoft.com/office/drawing/2014/main" id="{1258DC3D-EEDA-4350-960C-04608CB417F4}"/>
               </a:ext>
             </a:extLst>
           </p:cNvPr>
@@ -6787,7 +6921,7 @@
           <p:cNvPr id="51" name="">
             <a:extLst xmlns:a="http://schemas.openxmlformats.org/drawingml/2006/main">
               <a:ext uri="{FF2B5EF4-FFF2-40B4-BE49-F238E27FC236}">
-                <a16:creationId xmlns:a16="http://schemas.microsoft.com/office/drawing/2014/main" id="{E3CAED8C-2B7B-4347-8813-D9BC1B6CBFAD}"/>
+                <a16:creationId xmlns:a16="http://schemas.microsoft.com/office/drawing/2014/main" id="{B2EE574B-39BE-4CA0-9BF5-27EAF39BDD8D}"/>
               </a:ext>
             </a:extLst>
           </p:cNvPr>
@@ -6851,7 +6985,7 @@
           <p:cNvPr id="52" name="">
             <a:extLst xmlns:a="http://schemas.openxmlformats.org/drawingml/2006/main">
               <a:ext uri="{FF2B5EF4-FFF2-40B4-BE49-F238E27FC236}">
-                <a16:creationId xmlns:a16="http://schemas.microsoft.com/office/drawing/2014/main" id="{73DCBC9D-0A41-4812-91FA-8A7CC0ADE424}"/>
+                <a16:creationId xmlns:a16="http://schemas.microsoft.com/office/drawing/2014/main" id="{52221A0B-1D1B-4A6E-9442-A51C3ADEF264}"/>
               </a:ext>
             </a:extLst>
           </p:cNvPr>
@@ -6884,7 +7018,7 @@
           <p:cNvPr id="53" name="">
             <a:extLst xmlns:a="http://schemas.openxmlformats.org/drawingml/2006/main">
               <a:ext uri="{FF2B5EF4-FFF2-40B4-BE49-F238E27FC236}">
-                <a16:creationId xmlns:a16="http://schemas.microsoft.com/office/drawing/2014/main" id="{DA75EAAA-F6BD-4E13-88C0-399E7F1287CB}"/>
+                <a16:creationId xmlns:a16="http://schemas.microsoft.com/office/drawing/2014/main" id="{BBA8CC1F-EA83-4F52-B80D-61C5D24FB1C0}"/>
               </a:ext>
             </a:extLst>
           </p:cNvPr>
@@ -6948,7 +7082,7 @@
           <p:cNvPr id="54" name="">
             <a:extLst xmlns:a="http://schemas.openxmlformats.org/drawingml/2006/main">
               <a:ext uri="{FF2B5EF4-FFF2-40B4-BE49-F238E27FC236}">
-                <a16:creationId xmlns:a16="http://schemas.microsoft.com/office/drawing/2014/main" id="{D746FDB9-A3D6-47FA-A032-FF7D905F01AC}"/>
+                <a16:creationId xmlns:a16="http://schemas.microsoft.com/office/drawing/2014/main" id="{3E838ACD-98D2-4614-8D94-944DBCF278C1}"/>
               </a:ext>
             </a:extLst>
           </p:cNvPr>
@@ -6981,7 +7115,7 @@
           <p:cNvPr id="55" name="">
             <a:extLst xmlns:a="http://schemas.openxmlformats.org/drawingml/2006/main">
               <a:ext uri="{FF2B5EF4-FFF2-40B4-BE49-F238E27FC236}">
-                <a16:creationId xmlns:a16="http://schemas.microsoft.com/office/drawing/2014/main" id="{A1DE9F0F-C71E-42B7-B7DD-C872633B3F33}"/>
+                <a16:creationId xmlns:a16="http://schemas.microsoft.com/office/drawing/2014/main" id="{D12F5F1F-84AD-4C6A-BCDB-EB097B028D1C}"/>
               </a:ext>
             </a:extLst>
           </p:cNvPr>
@@ -7045,7 +7179,7 @@
           <p:cNvPr id="56" name="">
             <a:extLst xmlns:a="http://schemas.openxmlformats.org/drawingml/2006/main">
               <a:ext uri="{FF2B5EF4-FFF2-40B4-BE49-F238E27FC236}">
-                <a16:creationId xmlns:a16="http://schemas.microsoft.com/office/drawing/2014/main" id="{FC430FEF-D892-4AB6-A81B-C36EDD8F1375}"/>
+                <a16:creationId xmlns:a16="http://schemas.microsoft.com/office/drawing/2014/main" id="{24DE724C-22E7-4D86-B749-80FEAC142656}"/>
               </a:ext>
             </a:extLst>
           </p:cNvPr>
@@ -7078,7 +7212,7 @@
           <p:cNvPr id="57" name="">
             <a:extLst xmlns:a="http://schemas.openxmlformats.org/drawingml/2006/main">
               <a:ext uri="{FF2B5EF4-FFF2-40B4-BE49-F238E27FC236}">
-                <a16:creationId xmlns:a16="http://schemas.microsoft.com/office/drawing/2014/main" id="{F11EF72C-798D-4B70-BD50-C48E0A7C5389}"/>
+                <a16:creationId xmlns:a16="http://schemas.microsoft.com/office/drawing/2014/main" id="{17A4C771-66CA-4ACB-A0D9-1A3B0CC90BF0}"/>
               </a:ext>
             </a:extLst>
           </p:cNvPr>
@@ -7142,7 +7276,7 @@
           <p:cNvPr id="58" name="">
             <a:extLst xmlns:a="http://schemas.openxmlformats.org/drawingml/2006/main">
               <a:ext uri="{FF2B5EF4-FFF2-40B4-BE49-F238E27FC236}">
-                <a16:creationId xmlns:a16="http://schemas.microsoft.com/office/drawing/2014/main" id="{53F15F54-8777-446A-89DE-30EF5382BA61}"/>
+                <a16:creationId xmlns:a16="http://schemas.microsoft.com/office/drawing/2014/main" id="{F46E9207-7D9F-4FC1-947B-B4A05516AA09}"/>
               </a:ext>
             </a:extLst>
           </p:cNvPr>
@@ -7204,7 +7338,7 @@
     </p:spTree>
     <p:extLst>
       <p:ext uri="{BB962C8B-B14F-4D97-AF65-F5344CB8AC3E}">
-        <p14:creationId xmlns:p14="http://schemas.microsoft.com/office/powerpoint/2010/main" val="305110933"/>
+        <p14:creationId xmlns:p14="http://schemas.microsoft.com/office/powerpoint/2010/main" val="842365823"/>
       </p:ext>
     </p:extLst>
   </p:cSld>
@@ -7228,7 +7362,7 @@
           <p:cNvPr id="1" name="">
             <a:extLst xmlns:a="http://schemas.openxmlformats.org/drawingml/2006/main">
               <a:ext uri="{FF2B5EF4-FFF2-40B4-BE49-F238E27FC236}">
-                <a16:creationId xmlns:a16="http://schemas.microsoft.com/office/drawing/2014/main" id="{123430C9-C618-46F2-A673-F7BA333B8EB9}"/>
+                <a16:creationId xmlns:a16="http://schemas.microsoft.com/office/drawing/2014/main" id="{3D768243-E31A-4463-AC40-8DC5E1048B31}"/>
               </a:ext>
             </a:extLst>
           </p:cNvPr>
@@ -7263,7 +7397,7 @@
           <p:cNvPr id="2" name="">
             <a:extLst xmlns:a="http://schemas.openxmlformats.org/drawingml/2006/main">
               <a:ext uri="{FF2B5EF4-FFF2-40B4-BE49-F238E27FC236}">
-                <a16:creationId xmlns:a16="http://schemas.microsoft.com/office/drawing/2014/main" id="{B3046FEA-F89E-40BB-A8F3-4F798CE5C6D3}"/>
+                <a16:creationId xmlns:a16="http://schemas.microsoft.com/office/drawing/2014/main" id="{5E3E7117-9DE5-47F6-A5AF-C00A2100A048}"/>
               </a:ext>
             </a:extLst>
           </p:cNvPr>
@@ -7298,7 +7432,7 @@
           <p:cNvPr id="3" name="">
             <a:extLst xmlns:a="http://schemas.openxmlformats.org/drawingml/2006/main">
               <a:ext uri="{FF2B5EF4-FFF2-40B4-BE49-F238E27FC236}">
-                <a16:creationId xmlns:a16="http://schemas.microsoft.com/office/drawing/2014/main" id="{22B9548D-E29A-497D-A767-DFCB622036F3}"/>
+                <a16:creationId xmlns:a16="http://schemas.microsoft.com/office/drawing/2014/main" id="{EF9FB0FE-157B-471E-A77F-09836E392CE7}"/>
               </a:ext>
             </a:extLst>
           </p:cNvPr>
@@ -7362,7 +7496,7 @@
           <p:cNvPr id="4" name="">
             <a:extLst xmlns:a="http://schemas.openxmlformats.org/drawingml/2006/main">
               <a:ext uri="{FF2B5EF4-FFF2-40B4-BE49-F238E27FC236}">
-                <a16:creationId xmlns:a16="http://schemas.microsoft.com/office/drawing/2014/main" id="{F0CB9003-FFCA-4276-ABE3-7FF468607F49}"/>
+                <a16:creationId xmlns:a16="http://schemas.microsoft.com/office/drawing/2014/main" id="{B98D1AFD-AA0E-4F84-93C2-62C183A6B059}"/>
               </a:ext>
             </a:extLst>
           </p:cNvPr>
@@ -7426,7 +7560,7 @@
           <p:cNvPr id="5" name="">
             <a:extLst xmlns:a="http://schemas.openxmlformats.org/drawingml/2006/main">
               <a:ext uri="{FF2B5EF4-FFF2-40B4-BE49-F238E27FC236}">
-                <a16:creationId xmlns:a16="http://schemas.microsoft.com/office/drawing/2014/main" id="{91E64372-405A-4F82-8349-408D7C3F580A}"/>
+                <a16:creationId xmlns:a16="http://schemas.microsoft.com/office/drawing/2014/main" id="{244BA29B-2BBB-41CB-A07D-1A66352B93C8}"/>
               </a:ext>
             </a:extLst>
           </p:cNvPr>
@@ -7490,7 +7624,7 @@
           <p:cNvPr id="6" name="">
             <a:extLst xmlns:a="http://schemas.openxmlformats.org/drawingml/2006/main">
               <a:ext uri="{FF2B5EF4-FFF2-40B4-BE49-F238E27FC236}">
-                <a16:creationId xmlns:a16="http://schemas.microsoft.com/office/drawing/2014/main" id="{677538A2-5868-4B9C-BA84-EA2AEF5F2BE3}"/>
+                <a16:creationId xmlns:a16="http://schemas.microsoft.com/office/drawing/2014/main" id="{5657F431-8508-4DF1-B46C-FF6ED725858A}"/>
               </a:ext>
             </a:extLst>
           </p:cNvPr>
@@ -7554,7 +7688,7 @@
           <p:cNvPr id="7" name="">
             <a:extLst xmlns:a="http://schemas.openxmlformats.org/drawingml/2006/main">
               <a:ext uri="{FF2B5EF4-FFF2-40B4-BE49-F238E27FC236}">
-                <a16:creationId xmlns:a16="http://schemas.microsoft.com/office/drawing/2014/main" id="{12E6E3DC-83CF-4695-8471-274491A799FC}"/>
+                <a16:creationId xmlns:a16="http://schemas.microsoft.com/office/drawing/2014/main" id="{6E27ACAF-902B-4812-AFAC-0C2F3239A456}"/>
               </a:ext>
             </a:extLst>
           </p:cNvPr>
@@ -7591,7 +7725,7 @@
           <p:nvPr/>
         </p:nvPicPr>
         <p:blipFill>
-          <a:blip xmlns:r="http://schemas.openxmlformats.org/officeDocument/2006/relationships" xmlns:a="http://schemas.openxmlformats.org/drawingml/2006/main" r:embed="R8510d9aa229a4df9"/>
+          <a:blip xmlns:r="http://schemas.openxmlformats.org/officeDocument/2006/relationships" xmlns:a="http://schemas.openxmlformats.org/drawingml/2006/main" r:embed="R4fb5c94e7c7548c9"/>
           <a:stretch xmlns:a="http://schemas.openxmlformats.org/drawingml/2006/main"/>
         </p:blipFill>
         <p:spPr>
@@ -7609,7 +7743,7 @@
           <p:cNvPr id="9" name="">
             <a:extLst xmlns:a="http://schemas.openxmlformats.org/drawingml/2006/main">
               <a:ext uri="{FF2B5EF4-FFF2-40B4-BE49-F238E27FC236}">
-                <a16:creationId xmlns:a16="http://schemas.microsoft.com/office/drawing/2014/main" id="{9169D897-5424-4850-9C85-09B200DA5076}"/>
+                <a16:creationId xmlns:a16="http://schemas.microsoft.com/office/drawing/2014/main" id="{EB6042FA-46F0-43EE-B4D2-601F98230003}"/>
               </a:ext>
             </a:extLst>
           </p:cNvPr>
@@ -7673,7 +7807,7 @@
           <p:cNvPr id="10" name="">
             <a:extLst xmlns:a="http://schemas.openxmlformats.org/drawingml/2006/main">
               <a:ext uri="{FF2B5EF4-FFF2-40B4-BE49-F238E27FC236}">
-                <a16:creationId xmlns:a16="http://schemas.microsoft.com/office/drawing/2014/main" id="{40EA7C77-DD3F-4469-952C-5BC3C4CC7B3B}"/>
+                <a16:creationId xmlns:a16="http://schemas.microsoft.com/office/drawing/2014/main" id="{4FC2BBFC-FA18-4F1B-803F-72AC56C0F74E}"/>
               </a:ext>
             </a:extLst>
           </p:cNvPr>
@@ -7706,7 +7840,7 @@
           <p:cNvPr id="11" name="">
             <a:extLst xmlns:a="http://schemas.openxmlformats.org/drawingml/2006/main">
               <a:ext uri="{FF2B5EF4-FFF2-40B4-BE49-F238E27FC236}">
-                <a16:creationId xmlns:a16="http://schemas.microsoft.com/office/drawing/2014/main" id="{8474E27C-9224-4843-86EB-9248396B0296}"/>
+                <a16:creationId xmlns:a16="http://schemas.microsoft.com/office/drawing/2014/main" id="{9F9E4603-5551-4613-B6A1-F057CCE633F2}"/>
               </a:ext>
             </a:extLst>
           </p:cNvPr>
@@ -7741,7 +7875,7 @@
           <p:cNvPr id="12" name="">
             <a:extLst xmlns:a="http://schemas.openxmlformats.org/drawingml/2006/main">
               <a:ext uri="{FF2B5EF4-FFF2-40B4-BE49-F238E27FC236}">
-                <a16:creationId xmlns:a16="http://schemas.microsoft.com/office/drawing/2014/main" id="{9718FAB4-69D7-48CA-960D-1F4E8A025ADE}"/>
+                <a16:creationId xmlns:a16="http://schemas.microsoft.com/office/drawing/2014/main" id="{AF411226-1853-408A-8BC9-066A37256411}"/>
               </a:ext>
             </a:extLst>
           </p:cNvPr>
@@ -7805,7 +7939,7 @@
           <p:cNvPr id="13" name="">
             <a:extLst xmlns:a="http://schemas.openxmlformats.org/drawingml/2006/main">
               <a:ext uri="{FF2B5EF4-FFF2-40B4-BE49-F238E27FC236}">
-                <a16:creationId xmlns:a16="http://schemas.microsoft.com/office/drawing/2014/main" id="{4A51129E-C95B-427E-900A-E9E9150DCCA7}"/>
+                <a16:creationId xmlns:a16="http://schemas.microsoft.com/office/drawing/2014/main" id="{94AB1811-38CE-4E21-8643-143BDB8E1D29}"/>
               </a:ext>
             </a:extLst>
           </p:cNvPr>
@@ -7869,7 +8003,7 @@
           <p:cNvPr id="14" name="">
             <a:extLst xmlns:a="http://schemas.openxmlformats.org/drawingml/2006/main">
               <a:ext uri="{FF2B5EF4-FFF2-40B4-BE49-F238E27FC236}">
-                <a16:creationId xmlns:a16="http://schemas.microsoft.com/office/drawing/2014/main" id="{834FBB8A-855C-4B1B-A2A4-432804F20B82}"/>
+                <a16:creationId xmlns:a16="http://schemas.microsoft.com/office/drawing/2014/main" id="{91ECBF0A-4E47-41DB-BAD0-EE3FB12AD228}"/>
               </a:ext>
             </a:extLst>
           </p:cNvPr>
@@ -7933,7 +8067,7 @@
           <p:cNvPr id="15" name="">
             <a:extLst xmlns:a="http://schemas.openxmlformats.org/drawingml/2006/main">
               <a:ext uri="{FF2B5EF4-FFF2-40B4-BE49-F238E27FC236}">
-                <a16:creationId xmlns:a16="http://schemas.microsoft.com/office/drawing/2014/main" id="{DF38B7DA-1C60-49FE-ACA5-EA3AD35B3888}"/>
+                <a16:creationId xmlns:a16="http://schemas.microsoft.com/office/drawing/2014/main" id="{61A112DD-08E8-441F-8673-9420B407AA20}"/>
               </a:ext>
             </a:extLst>
           </p:cNvPr>
@@ -7966,7 +8100,7 @@
           <p:cNvPr id="16" name="">
             <a:extLst xmlns:a="http://schemas.openxmlformats.org/drawingml/2006/main">
               <a:ext uri="{FF2B5EF4-FFF2-40B4-BE49-F238E27FC236}">
-                <a16:creationId xmlns:a16="http://schemas.microsoft.com/office/drawing/2014/main" id="{B92F7766-F206-4556-90C1-98287F969D4B}"/>
+                <a16:creationId xmlns:a16="http://schemas.microsoft.com/office/drawing/2014/main" id="{31B3008C-E7E9-4001-88B2-55B55BA07220}"/>
               </a:ext>
             </a:extLst>
           </p:cNvPr>
@@ -8001,7 +8135,7 @@
           <p:cNvPr id="17" name="">
             <a:extLst xmlns:a="http://schemas.openxmlformats.org/drawingml/2006/main">
               <a:ext uri="{FF2B5EF4-FFF2-40B4-BE49-F238E27FC236}">
-                <a16:creationId xmlns:a16="http://schemas.microsoft.com/office/drawing/2014/main" id="{E556BCC5-96F4-4E9B-9468-35CEB7F9DBA6}"/>
+                <a16:creationId xmlns:a16="http://schemas.microsoft.com/office/drawing/2014/main" id="{51EFA211-88CF-4E0D-9483-96169E93211B}"/>
               </a:ext>
             </a:extLst>
           </p:cNvPr>
@@ -8065,7 +8199,7 @@
           <p:cNvPr id="18" name="">
             <a:extLst xmlns:a="http://schemas.openxmlformats.org/drawingml/2006/main">
               <a:ext uri="{FF2B5EF4-FFF2-40B4-BE49-F238E27FC236}">
-                <a16:creationId xmlns:a16="http://schemas.microsoft.com/office/drawing/2014/main" id="{48811B2D-DF77-4CCA-9405-0CDBAD94E481}"/>
+                <a16:creationId xmlns:a16="http://schemas.microsoft.com/office/drawing/2014/main" id="{79E3352E-D26A-460A-809A-52CA53434832}"/>
               </a:ext>
             </a:extLst>
           </p:cNvPr>
@@ -8129,7 +8263,7 @@
           <p:cNvPr id="19" name="">
             <a:extLst xmlns:a="http://schemas.openxmlformats.org/drawingml/2006/main">
               <a:ext uri="{FF2B5EF4-FFF2-40B4-BE49-F238E27FC236}">
-                <a16:creationId xmlns:a16="http://schemas.microsoft.com/office/drawing/2014/main" id="{52F7BBA5-AAAE-4FDC-85F6-22707F77C080}"/>
+                <a16:creationId xmlns:a16="http://schemas.microsoft.com/office/drawing/2014/main" id="{AD199AC4-24C1-4B92-B088-6892F0F86C2E}"/>
               </a:ext>
             </a:extLst>
           </p:cNvPr>
@@ -8193,7 +8327,7 @@
           <p:cNvPr id="20" name="">
             <a:extLst xmlns:a="http://schemas.openxmlformats.org/drawingml/2006/main">
               <a:ext uri="{FF2B5EF4-FFF2-40B4-BE49-F238E27FC236}">
-                <a16:creationId xmlns:a16="http://schemas.microsoft.com/office/drawing/2014/main" id="{3B9F2382-D43A-4093-942E-2B54C940EDF6}"/>
+                <a16:creationId xmlns:a16="http://schemas.microsoft.com/office/drawing/2014/main" id="{B8E9AC4D-EF93-420C-A485-37A5C66BFF35}"/>
               </a:ext>
             </a:extLst>
           </p:cNvPr>
@@ -8226,7 +8360,7 @@
           <p:cNvPr id="21" name="">
             <a:extLst xmlns:a="http://schemas.openxmlformats.org/drawingml/2006/main">
               <a:ext uri="{FF2B5EF4-FFF2-40B4-BE49-F238E27FC236}">
-                <a16:creationId xmlns:a16="http://schemas.microsoft.com/office/drawing/2014/main" id="{77AAAAA9-CE5E-4043-8CD3-653B6C2C683F}"/>
+                <a16:creationId xmlns:a16="http://schemas.microsoft.com/office/drawing/2014/main" id="{40F5F5C0-B349-4D03-95DD-1ED0633CEBE3}"/>
               </a:ext>
             </a:extLst>
           </p:cNvPr>
@@ -8261,7 +8395,7 @@
           <p:cNvPr id="22" name="">
             <a:extLst xmlns:a="http://schemas.openxmlformats.org/drawingml/2006/main">
               <a:ext uri="{FF2B5EF4-FFF2-40B4-BE49-F238E27FC236}">
-                <a16:creationId xmlns:a16="http://schemas.microsoft.com/office/drawing/2014/main" id="{5A82AB7D-29C8-4D14-B2D1-0E288330B7C8}"/>
+                <a16:creationId xmlns:a16="http://schemas.microsoft.com/office/drawing/2014/main" id="{996E52AC-14BE-471F-8ADF-EC15705BBA93}"/>
               </a:ext>
             </a:extLst>
           </p:cNvPr>
@@ -8325,7 +8459,7 @@
           <p:cNvPr id="23" name="">
             <a:extLst xmlns:a="http://schemas.openxmlformats.org/drawingml/2006/main">
               <a:ext uri="{FF2B5EF4-FFF2-40B4-BE49-F238E27FC236}">
-                <a16:creationId xmlns:a16="http://schemas.microsoft.com/office/drawing/2014/main" id="{2817ED4E-55AD-4DFD-94A7-861FFAB3D369}"/>
+                <a16:creationId xmlns:a16="http://schemas.microsoft.com/office/drawing/2014/main" id="{F47A958C-405D-46DD-8100-2BEC35A77535}"/>
               </a:ext>
             </a:extLst>
           </p:cNvPr>
@@ -8389,7 +8523,7 @@
           <p:cNvPr id="24" name="">
             <a:extLst xmlns:a="http://schemas.openxmlformats.org/drawingml/2006/main">
               <a:ext uri="{FF2B5EF4-FFF2-40B4-BE49-F238E27FC236}">
-                <a16:creationId xmlns:a16="http://schemas.microsoft.com/office/drawing/2014/main" id="{81669D13-0E8B-4446-AB3F-BB834525796D}"/>
+                <a16:creationId xmlns:a16="http://schemas.microsoft.com/office/drawing/2014/main" id="{74043CDD-9212-43B0-8A92-85689E889B07}"/>
               </a:ext>
             </a:extLst>
           </p:cNvPr>
@@ -8453,7 +8587,7 @@
           <p:cNvPr id="25" name="">
             <a:extLst xmlns:a="http://schemas.openxmlformats.org/drawingml/2006/main">
               <a:ext uri="{FF2B5EF4-FFF2-40B4-BE49-F238E27FC236}">
-                <a16:creationId xmlns:a16="http://schemas.microsoft.com/office/drawing/2014/main" id="{E959BD92-820E-4FF3-98CB-B84BE7BEC769}"/>
+                <a16:creationId xmlns:a16="http://schemas.microsoft.com/office/drawing/2014/main" id="{7EA4397E-8219-433D-AA1B-8D21757D570A}"/>
               </a:ext>
             </a:extLst>
           </p:cNvPr>
@@ -8515,7 +8649,7 @@
     </p:spTree>
     <p:extLst>
       <p:ext uri="{BB962C8B-B14F-4D97-AF65-F5344CB8AC3E}">
-        <p14:creationId xmlns:p14="http://schemas.microsoft.com/office/powerpoint/2010/main" val="294876304"/>
+        <p14:creationId xmlns:p14="http://schemas.microsoft.com/office/powerpoint/2010/main" val="1690425214"/>
       </p:ext>
     </p:extLst>
   </p:cSld>
@@ -8539,7 +8673,7 @@
           <p:cNvPr id="1" name="">
             <a:extLst xmlns:a="http://schemas.openxmlformats.org/drawingml/2006/main">
               <a:ext uri="{FF2B5EF4-FFF2-40B4-BE49-F238E27FC236}">
-                <a16:creationId xmlns:a16="http://schemas.microsoft.com/office/drawing/2014/main" id="{8018672A-290F-4765-A00C-3759159E4022}"/>
+                <a16:creationId xmlns:a16="http://schemas.microsoft.com/office/drawing/2014/main" id="{97FE7285-764B-4D92-AD52-1679368C203A}"/>
               </a:ext>
             </a:extLst>
           </p:cNvPr>
@@ -8574,7 +8708,7 @@
           <p:cNvPr id="2" name="">
             <a:extLst xmlns:a="http://schemas.openxmlformats.org/drawingml/2006/main">
               <a:ext uri="{FF2B5EF4-FFF2-40B4-BE49-F238E27FC236}">
-                <a16:creationId xmlns:a16="http://schemas.microsoft.com/office/drawing/2014/main" id="{FDF9E8B8-168F-4314-A3CA-08BBA4A54CC2}"/>
+                <a16:creationId xmlns:a16="http://schemas.microsoft.com/office/drawing/2014/main" id="{D5934BF2-E4B6-4421-BFD4-B525F468AABE}"/>
               </a:ext>
             </a:extLst>
           </p:cNvPr>
@@ -8609,7 +8743,7 @@
           <p:cNvPr id="3" name="">
             <a:extLst xmlns:a="http://schemas.openxmlformats.org/drawingml/2006/main">
               <a:ext uri="{FF2B5EF4-FFF2-40B4-BE49-F238E27FC236}">
-                <a16:creationId xmlns:a16="http://schemas.microsoft.com/office/drawing/2014/main" id="{A699C9FB-5929-4F84-8BEE-DE5C56694F8D}"/>
+                <a16:creationId xmlns:a16="http://schemas.microsoft.com/office/drawing/2014/main" id="{2135EEF8-9BAD-455F-94D3-F32954CF7798}"/>
               </a:ext>
             </a:extLst>
           </p:cNvPr>
@@ -8673,7 +8807,7 @@
           <p:cNvPr id="4" name="">
             <a:extLst xmlns:a="http://schemas.openxmlformats.org/drawingml/2006/main">
               <a:ext uri="{FF2B5EF4-FFF2-40B4-BE49-F238E27FC236}">
-                <a16:creationId xmlns:a16="http://schemas.microsoft.com/office/drawing/2014/main" id="{9CC7BABE-1327-4557-A459-C1672D2FB5E9}"/>
+                <a16:creationId xmlns:a16="http://schemas.microsoft.com/office/drawing/2014/main" id="{3584D9ED-30F5-403B-90D6-4E4F1EF49C83}"/>
               </a:ext>
             </a:extLst>
           </p:cNvPr>
@@ -8737,7 +8871,7 @@
           <p:cNvPr id="5" name="">
             <a:extLst xmlns:a="http://schemas.openxmlformats.org/drawingml/2006/main">
               <a:ext uri="{FF2B5EF4-FFF2-40B4-BE49-F238E27FC236}">
-                <a16:creationId xmlns:a16="http://schemas.microsoft.com/office/drawing/2014/main" id="{A7E0645C-AA4D-4F3F-97BE-35C56D4DB2FC}"/>
+                <a16:creationId xmlns:a16="http://schemas.microsoft.com/office/drawing/2014/main" id="{6710AE41-9FE6-4219-92D6-92F29AEB8BE9}"/>
               </a:ext>
             </a:extLst>
           </p:cNvPr>
@@ -8801,7 +8935,7 @@
           <p:cNvPr id="6" name="">
             <a:extLst xmlns:a="http://schemas.openxmlformats.org/drawingml/2006/main">
               <a:ext uri="{FF2B5EF4-FFF2-40B4-BE49-F238E27FC236}">
-                <a16:creationId xmlns:a16="http://schemas.microsoft.com/office/drawing/2014/main" id="{9A0BC772-6108-4FFD-B889-3B2A865423DB}"/>
+                <a16:creationId xmlns:a16="http://schemas.microsoft.com/office/drawing/2014/main" id="{D1B784C7-6E18-4401-BEF3-412FCD0CE53C}"/>
               </a:ext>
             </a:extLst>
           </p:cNvPr>
@@ -8865,7 +8999,7 @@
           <p:cNvPr id="7" name="">
             <a:extLst xmlns:a="http://schemas.openxmlformats.org/drawingml/2006/main">
               <a:ext uri="{FF2B5EF4-FFF2-40B4-BE49-F238E27FC236}">
-                <a16:creationId xmlns:a16="http://schemas.microsoft.com/office/drawing/2014/main" id="{EF916B1F-4380-432D-92BD-C7A5AD5EE4B9}"/>
+                <a16:creationId xmlns:a16="http://schemas.microsoft.com/office/drawing/2014/main" id="{777FDC08-1161-4103-A526-D5A76FDDF080}"/>
               </a:ext>
             </a:extLst>
           </p:cNvPr>
@@ -8902,7 +9036,7 @@
           <p:nvPr/>
         </p:nvPicPr>
         <p:blipFill>
-          <a:blip xmlns:r="http://schemas.openxmlformats.org/officeDocument/2006/relationships" xmlns:a="http://schemas.openxmlformats.org/drawingml/2006/main" r:embed="R42b42a342dc34207"/>
+          <a:blip xmlns:r="http://schemas.openxmlformats.org/officeDocument/2006/relationships" xmlns:a="http://schemas.openxmlformats.org/drawingml/2006/main" r:embed="R481cd33a36854051"/>
           <a:stretch xmlns:a="http://schemas.openxmlformats.org/drawingml/2006/main"/>
         </p:blipFill>
         <p:spPr>
@@ -8920,7 +9054,7 @@
           <p:cNvPr id="9" name="">
             <a:extLst xmlns:a="http://schemas.openxmlformats.org/drawingml/2006/main">
               <a:ext uri="{FF2B5EF4-FFF2-40B4-BE49-F238E27FC236}">
-                <a16:creationId xmlns:a16="http://schemas.microsoft.com/office/drawing/2014/main" id="{ADB327A5-9C56-4F67-A6A5-4A8A7DB7C79D}"/>
+                <a16:creationId xmlns:a16="http://schemas.microsoft.com/office/drawing/2014/main" id="{A13EEE33-7011-4A7B-B281-11B5562CA900}"/>
               </a:ext>
             </a:extLst>
           </p:cNvPr>
@@ -8984,7 +9118,7 @@
           <p:cNvPr id="10" name="">
             <a:extLst xmlns:a="http://schemas.openxmlformats.org/drawingml/2006/main">
               <a:ext uri="{FF2B5EF4-FFF2-40B4-BE49-F238E27FC236}">
-                <a16:creationId xmlns:a16="http://schemas.microsoft.com/office/drawing/2014/main" id="{1B37D404-6B5F-4448-B417-987C048CA703}"/>
+                <a16:creationId xmlns:a16="http://schemas.microsoft.com/office/drawing/2014/main" id="{F14209CF-8C0E-499B-ADB1-9FF152D7B551}"/>
               </a:ext>
             </a:extLst>
           </p:cNvPr>
@@ -9017,7 +9151,7 @@
           <p:cNvPr id="11" name="">
             <a:extLst xmlns:a="http://schemas.openxmlformats.org/drawingml/2006/main">
               <a:ext uri="{FF2B5EF4-FFF2-40B4-BE49-F238E27FC236}">
-                <a16:creationId xmlns:a16="http://schemas.microsoft.com/office/drawing/2014/main" id="{B184F2D1-8140-4C1E-B5F6-D4DF1A4B2720}"/>
+                <a16:creationId xmlns:a16="http://schemas.microsoft.com/office/drawing/2014/main" id="{1C19E400-C943-4783-936E-13CA254EC708}"/>
               </a:ext>
             </a:extLst>
           </p:cNvPr>
@@ -9052,7 +9186,7 @@
           <p:cNvPr id="12" name="">
             <a:extLst xmlns:a="http://schemas.openxmlformats.org/drawingml/2006/main">
               <a:ext uri="{FF2B5EF4-FFF2-40B4-BE49-F238E27FC236}">
-                <a16:creationId xmlns:a16="http://schemas.microsoft.com/office/drawing/2014/main" id="{BDC34E90-2600-46FC-8133-8FF2341C5502}"/>
+                <a16:creationId xmlns:a16="http://schemas.microsoft.com/office/drawing/2014/main" id="{D4EBC6CB-F6CD-4D0A-8D2E-B1C95E95EAF9}"/>
               </a:ext>
             </a:extLst>
           </p:cNvPr>
@@ -9116,7 +9250,7 @@
           <p:cNvPr id="13" name="">
             <a:extLst xmlns:a="http://schemas.openxmlformats.org/drawingml/2006/main">
               <a:ext uri="{FF2B5EF4-FFF2-40B4-BE49-F238E27FC236}">
-                <a16:creationId xmlns:a16="http://schemas.microsoft.com/office/drawing/2014/main" id="{A3E09DAC-7F57-4ACD-B2FB-DE0F47EB1265}"/>
+                <a16:creationId xmlns:a16="http://schemas.microsoft.com/office/drawing/2014/main" id="{C9128808-FC30-448A-A227-F2E2E3D007FF}"/>
               </a:ext>
             </a:extLst>
           </p:cNvPr>
@@ -9180,7 +9314,7 @@
           <p:cNvPr id="14" name="">
             <a:extLst xmlns:a="http://schemas.openxmlformats.org/drawingml/2006/main">
               <a:ext uri="{FF2B5EF4-FFF2-40B4-BE49-F238E27FC236}">
-                <a16:creationId xmlns:a16="http://schemas.microsoft.com/office/drawing/2014/main" id="{676BDE73-5B06-4048-90A4-E06BB4F69BD5}"/>
+                <a16:creationId xmlns:a16="http://schemas.microsoft.com/office/drawing/2014/main" id="{9D39E66D-4B09-4BEC-A62C-17D1FE3379CC}"/>
               </a:ext>
             </a:extLst>
           </p:cNvPr>
@@ -9244,7 +9378,7 @@
           <p:cNvPr id="15" name="">
             <a:extLst xmlns:a="http://schemas.openxmlformats.org/drawingml/2006/main">
               <a:ext uri="{FF2B5EF4-FFF2-40B4-BE49-F238E27FC236}">
-                <a16:creationId xmlns:a16="http://schemas.microsoft.com/office/drawing/2014/main" id="{EADB2363-92B2-4641-B584-F91F05486656}"/>
+                <a16:creationId xmlns:a16="http://schemas.microsoft.com/office/drawing/2014/main" id="{5DF2AF1F-0503-4160-9EDA-A4830AECDC73}"/>
               </a:ext>
             </a:extLst>
           </p:cNvPr>
@@ -9277,7 +9411,7 @@
           <p:cNvPr id="16" name="">
             <a:extLst xmlns:a="http://schemas.openxmlformats.org/drawingml/2006/main">
               <a:ext uri="{FF2B5EF4-FFF2-40B4-BE49-F238E27FC236}">
-                <a16:creationId xmlns:a16="http://schemas.microsoft.com/office/drawing/2014/main" id="{ED16D74E-748C-4A1F-BA84-A60C3C4A1E60}"/>
+                <a16:creationId xmlns:a16="http://schemas.microsoft.com/office/drawing/2014/main" id="{243DAD31-760F-4781-952C-45DAB9F4AF62}"/>
               </a:ext>
             </a:extLst>
           </p:cNvPr>
@@ -9312,7 +9446,7 @@
           <p:cNvPr id="17" name="">
             <a:extLst xmlns:a="http://schemas.openxmlformats.org/drawingml/2006/main">
               <a:ext uri="{FF2B5EF4-FFF2-40B4-BE49-F238E27FC236}">
-                <a16:creationId xmlns:a16="http://schemas.microsoft.com/office/drawing/2014/main" id="{922ADC0E-464A-43D3-90D9-779E084FA2FF}"/>
+                <a16:creationId xmlns:a16="http://schemas.microsoft.com/office/drawing/2014/main" id="{7AD948F2-200A-4677-BC48-E6121CB3414D}"/>
               </a:ext>
             </a:extLst>
           </p:cNvPr>
@@ -9376,7 +9510,7 @@
           <p:cNvPr id="18" name="">
             <a:extLst xmlns:a="http://schemas.openxmlformats.org/drawingml/2006/main">
               <a:ext uri="{FF2B5EF4-FFF2-40B4-BE49-F238E27FC236}">
-                <a16:creationId xmlns:a16="http://schemas.microsoft.com/office/drawing/2014/main" id="{50A98653-B0E6-4418-BF39-1246BE7FED97}"/>
+                <a16:creationId xmlns:a16="http://schemas.microsoft.com/office/drawing/2014/main" id="{E65857BA-6CB9-4E3F-9C3D-592414BF7DE8}"/>
               </a:ext>
             </a:extLst>
           </p:cNvPr>
@@ -9440,7 +9574,7 @@
           <p:cNvPr id="19" name="">
             <a:extLst xmlns:a="http://schemas.openxmlformats.org/drawingml/2006/main">
               <a:ext uri="{FF2B5EF4-FFF2-40B4-BE49-F238E27FC236}">
-                <a16:creationId xmlns:a16="http://schemas.microsoft.com/office/drawing/2014/main" id="{855662EC-7C75-4551-86A3-AF190EC336A4}"/>
+                <a16:creationId xmlns:a16="http://schemas.microsoft.com/office/drawing/2014/main" id="{02AB636F-A90A-4E96-B813-4E56A0998718}"/>
               </a:ext>
             </a:extLst>
           </p:cNvPr>
@@ -9504,7 +9638,7 @@
           <p:cNvPr id="20" name="">
             <a:extLst xmlns:a="http://schemas.openxmlformats.org/drawingml/2006/main">
               <a:ext uri="{FF2B5EF4-FFF2-40B4-BE49-F238E27FC236}">
-                <a16:creationId xmlns:a16="http://schemas.microsoft.com/office/drawing/2014/main" id="{6B4C37B0-DAFB-4CC7-BAEA-5CB9DF342A17}"/>
+                <a16:creationId xmlns:a16="http://schemas.microsoft.com/office/drawing/2014/main" id="{225FCDE9-07BC-412F-9CC8-7AFF5C168E58}"/>
               </a:ext>
             </a:extLst>
           </p:cNvPr>
@@ -9537,7 +9671,7 @@
           <p:cNvPr id="21" name="">
             <a:extLst xmlns:a="http://schemas.openxmlformats.org/drawingml/2006/main">
               <a:ext uri="{FF2B5EF4-FFF2-40B4-BE49-F238E27FC236}">
-                <a16:creationId xmlns:a16="http://schemas.microsoft.com/office/drawing/2014/main" id="{6C87D610-0F4B-4075-A91B-23356109987B}"/>
+                <a16:creationId xmlns:a16="http://schemas.microsoft.com/office/drawing/2014/main" id="{17EC9297-F3C4-4069-8679-A3724820BED5}"/>
               </a:ext>
             </a:extLst>
           </p:cNvPr>
@@ -9572,7 +9706,7 @@
           <p:cNvPr id="22" name="">
             <a:extLst xmlns:a="http://schemas.openxmlformats.org/drawingml/2006/main">
               <a:ext uri="{FF2B5EF4-FFF2-40B4-BE49-F238E27FC236}">
-                <a16:creationId xmlns:a16="http://schemas.microsoft.com/office/drawing/2014/main" id="{0EF8FF23-8722-4D5D-BCB1-1AA89D8A9FA2}"/>
+                <a16:creationId xmlns:a16="http://schemas.microsoft.com/office/drawing/2014/main" id="{EF08F7D5-1F35-4D8A-AA0C-6C6175F91BCD}"/>
               </a:ext>
             </a:extLst>
           </p:cNvPr>
@@ -9636,7 +9770,7 @@
           <p:cNvPr id="23" name="">
             <a:extLst xmlns:a="http://schemas.openxmlformats.org/drawingml/2006/main">
               <a:ext uri="{FF2B5EF4-FFF2-40B4-BE49-F238E27FC236}">
-                <a16:creationId xmlns:a16="http://schemas.microsoft.com/office/drawing/2014/main" id="{B837778D-D82A-4BD0-A1EA-D2F50810E901}"/>
+                <a16:creationId xmlns:a16="http://schemas.microsoft.com/office/drawing/2014/main" id="{DB9D6E14-D182-4232-B64D-D60E1DBDE781}"/>
               </a:ext>
             </a:extLst>
           </p:cNvPr>
@@ -9700,7 +9834,7 @@
           <p:cNvPr id="24" name="">
             <a:extLst xmlns:a="http://schemas.openxmlformats.org/drawingml/2006/main">
               <a:ext uri="{FF2B5EF4-FFF2-40B4-BE49-F238E27FC236}">
-                <a16:creationId xmlns:a16="http://schemas.microsoft.com/office/drawing/2014/main" id="{19AA4E4D-AD5E-42D6-8B66-08524766A35B}"/>
+                <a16:creationId xmlns:a16="http://schemas.microsoft.com/office/drawing/2014/main" id="{98BBCE7A-6D62-4EB9-BD1B-5E76557534AA}"/>
               </a:ext>
             </a:extLst>
           </p:cNvPr>
@@ -9764,7 +9898,7 @@
           <p:cNvPr id="25" name="">
             <a:extLst xmlns:a="http://schemas.openxmlformats.org/drawingml/2006/main">
               <a:ext uri="{FF2B5EF4-FFF2-40B4-BE49-F238E27FC236}">
-                <a16:creationId xmlns:a16="http://schemas.microsoft.com/office/drawing/2014/main" id="{3010C95A-65EB-42F1-AD37-FD1C4F0017EB}"/>
+                <a16:creationId xmlns:a16="http://schemas.microsoft.com/office/drawing/2014/main" id="{18782432-20BB-4EAF-BC96-3A1B381FFA8E}"/>
               </a:ext>
             </a:extLst>
           </p:cNvPr>
@@ -9826,7 +9960,7 @@
     </p:spTree>
     <p:extLst>
       <p:ext uri="{BB962C8B-B14F-4D97-AF65-F5344CB8AC3E}">
-        <p14:creationId xmlns:p14="http://schemas.microsoft.com/office/powerpoint/2010/main" val="902758252"/>
+        <p14:creationId xmlns:p14="http://schemas.microsoft.com/office/powerpoint/2010/main" val="1340403505"/>
       </p:ext>
     </p:extLst>
   </p:cSld>
@@ -9850,7 +9984,7 @@
           <p:cNvPr id="1" name="">
             <a:extLst xmlns:a="http://schemas.openxmlformats.org/drawingml/2006/main">
               <a:ext uri="{FF2B5EF4-FFF2-40B4-BE49-F238E27FC236}">
-                <a16:creationId xmlns:a16="http://schemas.microsoft.com/office/drawing/2014/main" id="{27C859F2-A771-4ED3-AB0B-C60A34FEDADD}"/>
+                <a16:creationId xmlns:a16="http://schemas.microsoft.com/office/drawing/2014/main" id="{F7E1C9D6-F625-4271-9FBD-350D7F4D81C1}"/>
               </a:ext>
             </a:extLst>
           </p:cNvPr>
@@ -9885,7 +10019,7 @@
           <p:cNvPr id="2" name="">
             <a:extLst xmlns:a="http://schemas.openxmlformats.org/drawingml/2006/main">
               <a:ext uri="{FF2B5EF4-FFF2-40B4-BE49-F238E27FC236}">
-                <a16:creationId xmlns:a16="http://schemas.microsoft.com/office/drawing/2014/main" id="{21874247-E64F-4FAC-81DB-1A09622F570A}"/>
+                <a16:creationId xmlns:a16="http://schemas.microsoft.com/office/drawing/2014/main" id="{2AC84DB7-5A8F-4854-89F5-AC532C378A09}"/>
               </a:ext>
             </a:extLst>
           </p:cNvPr>
@@ -9920,7 +10054,7 @@
           <p:cNvPr id="3" name="">
             <a:extLst xmlns:a="http://schemas.openxmlformats.org/drawingml/2006/main">
               <a:ext uri="{FF2B5EF4-FFF2-40B4-BE49-F238E27FC236}">
-                <a16:creationId xmlns:a16="http://schemas.microsoft.com/office/drawing/2014/main" id="{0D80086F-E5CA-4AF7-A645-9E1624BCF462}"/>
+                <a16:creationId xmlns:a16="http://schemas.microsoft.com/office/drawing/2014/main" id="{8BF5D25A-4E15-44B1-A8C1-1F306D39BF23}"/>
               </a:ext>
             </a:extLst>
           </p:cNvPr>
@@ -9984,7 +10118,7 @@
           <p:cNvPr id="4" name="">
             <a:extLst xmlns:a="http://schemas.openxmlformats.org/drawingml/2006/main">
               <a:ext uri="{FF2B5EF4-FFF2-40B4-BE49-F238E27FC236}">
-                <a16:creationId xmlns:a16="http://schemas.microsoft.com/office/drawing/2014/main" id="{CD893B97-831F-451F-8C06-76381BFB9632}"/>
+                <a16:creationId xmlns:a16="http://schemas.microsoft.com/office/drawing/2014/main" id="{193A77AA-7900-478D-8012-ECB5A7C4A881}"/>
               </a:ext>
             </a:extLst>
           </p:cNvPr>
@@ -10048,7 +10182,7 @@
           <p:cNvPr id="5" name="">
             <a:extLst xmlns:a="http://schemas.openxmlformats.org/drawingml/2006/main">
               <a:ext uri="{FF2B5EF4-FFF2-40B4-BE49-F238E27FC236}">
-                <a16:creationId xmlns:a16="http://schemas.microsoft.com/office/drawing/2014/main" id="{BE015FB0-E61F-49D3-9BAF-7162D5932314}"/>
+                <a16:creationId xmlns:a16="http://schemas.microsoft.com/office/drawing/2014/main" id="{26D9479B-7DC6-4890-A58B-8A52518DAC2D}"/>
               </a:ext>
             </a:extLst>
           </p:cNvPr>
@@ -10112,7 +10246,7 @@
           <p:cNvPr id="6" name="">
             <a:extLst xmlns:a="http://schemas.openxmlformats.org/drawingml/2006/main">
               <a:ext uri="{FF2B5EF4-FFF2-40B4-BE49-F238E27FC236}">
-                <a16:creationId xmlns:a16="http://schemas.microsoft.com/office/drawing/2014/main" id="{D28E4018-150A-4B19-AAD7-05262528B865}"/>
+                <a16:creationId xmlns:a16="http://schemas.microsoft.com/office/drawing/2014/main" id="{0DC66F93-E129-4634-ADA7-EFA676B0C393}"/>
               </a:ext>
             </a:extLst>
           </p:cNvPr>
@@ -10176,7 +10310,7 @@
           <p:cNvPr id="7" name="">
             <a:extLst xmlns:a="http://schemas.openxmlformats.org/drawingml/2006/main">
               <a:ext uri="{FF2B5EF4-FFF2-40B4-BE49-F238E27FC236}">
-                <a16:creationId xmlns:a16="http://schemas.microsoft.com/office/drawing/2014/main" id="{BB25D93B-DAAF-46AE-9B73-1CBB76FF23A0}"/>
+                <a16:creationId xmlns:a16="http://schemas.microsoft.com/office/drawing/2014/main" id="{8F9CA005-F5AF-4598-AB4E-7B16BAB088A0}"/>
               </a:ext>
             </a:extLst>
           </p:cNvPr>
@@ -10211,7 +10345,7 @@
           <p:cNvPr id="8" name="">
             <a:extLst xmlns:a="http://schemas.openxmlformats.org/drawingml/2006/main">
               <a:ext uri="{FF2B5EF4-FFF2-40B4-BE49-F238E27FC236}">
-                <a16:creationId xmlns:a16="http://schemas.microsoft.com/office/drawing/2014/main" id="{1FA00E3F-9963-46FE-A4AC-65FD7AED2757}"/>
+                <a16:creationId xmlns:a16="http://schemas.microsoft.com/office/drawing/2014/main" id="{6A4BF46D-F4ED-4C8D-BAEF-E5169E7FAB2E}"/>
               </a:ext>
             </a:extLst>
           </p:cNvPr>
@@ -10275,7 +10409,7 @@
           <p:cNvPr id="9" name="">
             <a:extLst xmlns:a="http://schemas.openxmlformats.org/drawingml/2006/main">
               <a:ext uri="{FF2B5EF4-FFF2-40B4-BE49-F238E27FC236}">
-                <a16:creationId xmlns:a16="http://schemas.microsoft.com/office/drawing/2014/main" id="{F9BEF7B3-E1F6-47E1-861C-FB81C814C9E9}"/>
+                <a16:creationId xmlns:a16="http://schemas.microsoft.com/office/drawing/2014/main" id="{03D36339-B035-41C0-9BB2-E63607B95513}"/>
               </a:ext>
             </a:extLst>
           </p:cNvPr>
@@ -10339,7 +10473,7 @@
           <p:cNvPr id="10" name="">
             <a:extLst xmlns:a="http://schemas.openxmlformats.org/drawingml/2006/main">
               <a:ext uri="{FF2B5EF4-FFF2-40B4-BE49-F238E27FC236}">
-                <a16:creationId xmlns:a16="http://schemas.microsoft.com/office/drawing/2014/main" id="{EB193E88-7479-4AAC-95EF-22F0ED9ED850}"/>
+                <a16:creationId xmlns:a16="http://schemas.microsoft.com/office/drawing/2014/main" id="{C338AD0C-AF45-41D9-9855-7D3DD1F308EC}"/>
               </a:ext>
             </a:extLst>
           </p:cNvPr>
@@ -10403,7 +10537,7 @@
           <p:cNvPr id="11" name="">
             <a:extLst xmlns:a="http://schemas.openxmlformats.org/drawingml/2006/main">
               <a:ext uri="{FF2B5EF4-FFF2-40B4-BE49-F238E27FC236}">
-                <a16:creationId xmlns:a16="http://schemas.microsoft.com/office/drawing/2014/main" id="{3B49DA49-4E35-4AB8-9EBB-F6B793751549}"/>
+                <a16:creationId xmlns:a16="http://schemas.microsoft.com/office/drawing/2014/main" id="{D1B5039A-AB79-4851-9780-C8E02EFFFC20}"/>
               </a:ext>
             </a:extLst>
           </p:cNvPr>
@@ -10438,7 +10572,7 @@
           <p:cNvPr id="12" name="">
             <a:extLst xmlns:a="http://schemas.openxmlformats.org/drawingml/2006/main">
               <a:ext uri="{FF2B5EF4-FFF2-40B4-BE49-F238E27FC236}">
-                <a16:creationId xmlns:a16="http://schemas.microsoft.com/office/drawing/2014/main" id="{549CC975-A466-4E20-A87F-376B24BCA682}"/>
+                <a16:creationId xmlns:a16="http://schemas.microsoft.com/office/drawing/2014/main" id="{C81169BF-1E7C-4A46-B53D-75A5F3D4480A}"/>
               </a:ext>
             </a:extLst>
           </p:cNvPr>
@@ -10502,7 +10636,7 @@
           <p:cNvPr id="13" name="">
             <a:extLst xmlns:a="http://schemas.openxmlformats.org/drawingml/2006/main">
               <a:ext uri="{FF2B5EF4-FFF2-40B4-BE49-F238E27FC236}">
-                <a16:creationId xmlns:a16="http://schemas.microsoft.com/office/drawing/2014/main" id="{D94C67F8-8F4F-447E-B967-7279568CE185}"/>
+                <a16:creationId xmlns:a16="http://schemas.microsoft.com/office/drawing/2014/main" id="{229BCF92-67E7-4A2C-AD00-D788D4CF89BA}"/>
               </a:ext>
             </a:extLst>
           </p:cNvPr>
@@ -10566,7 +10700,7 @@
           <p:cNvPr id="14" name="">
             <a:extLst xmlns:a="http://schemas.openxmlformats.org/drawingml/2006/main">
               <a:ext uri="{FF2B5EF4-FFF2-40B4-BE49-F238E27FC236}">
-                <a16:creationId xmlns:a16="http://schemas.microsoft.com/office/drawing/2014/main" id="{6CAF14E8-91B5-454E-AC30-08DB535368CE}"/>
+                <a16:creationId xmlns:a16="http://schemas.microsoft.com/office/drawing/2014/main" id="{0CD4FCA4-8780-4C60-B2E5-CF604928D04D}"/>
               </a:ext>
             </a:extLst>
           </p:cNvPr>
@@ -10630,7 +10764,7 @@
           <p:cNvPr id="15" name="">
             <a:extLst xmlns:a="http://schemas.openxmlformats.org/drawingml/2006/main">
               <a:ext uri="{FF2B5EF4-FFF2-40B4-BE49-F238E27FC236}">
-                <a16:creationId xmlns:a16="http://schemas.microsoft.com/office/drawing/2014/main" id="{7CC2F376-1568-4997-A67D-5D1A75802451}"/>
+                <a16:creationId xmlns:a16="http://schemas.microsoft.com/office/drawing/2014/main" id="{436526F3-5BD5-4794-B447-7FAAC4CE79A2}"/>
               </a:ext>
             </a:extLst>
           </p:cNvPr>
@@ -10665,7 +10799,7 @@
           <p:cNvPr id="16" name="">
             <a:extLst xmlns:a="http://schemas.openxmlformats.org/drawingml/2006/main">
               <a:ext uri="{FF2B5EF4-FFF2-40B4-BE49-F238E27FC236}">
-                <a16:creationId xmlns:a16="http://schemas.microsoft.com/office/drawing/2014/main" id="{B6445DE4-5AAF-4BD0-84CE-85642EF37202}"/>
+                <a16:creationId xmlns:a16="http://schemas.microsoft.com/office/drawing/2014/main" id="{682F6120-0720-4234-88A9-36324DF48C0F}"/>
               </a:ext>
             </a:extLst>
           </p:cNvPr>
@@ -10729,7 +10863,7 @@
           <p:cNvPr id="17" name="">
             <a:extLst xmlns:a="http://schemas.openxmlformats.org/drawingml/2006/main">
               <a:ext uri="{FF2B5EF4-FFF2-40B4-BE49-F238E27FC236}">
-                <a16:creationId xmlns:a16="http://schemas.microsoft.com/office/drawing/2014/main" id="{091D0F5D-DC01-4BCF-B6C3-B10E8EA306FE}"/>
+                <a16:creationId xmlns:a16="http://schemas.microsoft.com/office/drawing/2014/main" id="{6F2A1FF3-7B7D-4AA9-8055-A9A34F788847}"/>
               </a:ext>
             </a:extLst>
           </p:cNvPr>
@@ -10793,7 +10927,7 @@
           <p:cNvPr id="18" name="">
             <a:extLst xmlns:a="http://schemas.openxmlformats.org/drawingml/2006/main">
               <a:ext uri="{FF2B5EF4-FFF2-40B4-BE49-F238E27FC236}">
-                <a16:creationId xmlns:a16="http://schemas.microsoft.com/office/drawing/2014/main" id="{8166308F-BBE2-4769-A549-DBF856CBDFE8}"/>
+                <a16:creationId xmlns:a16="http://schemas.microsoft.com/office/drawing/2014/main" id="{B83ACC6A-2C5D-49B0-8E56-A94AEBEE1C80}"/>
               </a:ext>
             </a:extLst>
           </p:cNvPr>
@@ -10857,7 +10991,7 @@
           <p:cNvPr id="19" name="">
             <a:extLst xmlns:a="http://schemas.openxmlformats.org/drawingml/2006/main">
               <a:ext uri="{FF2B5EF4-FFF2-40B4-BE49-F238E27FC236}">
-                <a16:creationId xmlns:a16="http://schemas.microsoft.com/office/drawing/2014/main" id="{2FB13A28-3EB0-487F-8E3E-7903F8664F1C}"/>
+                <a16:creationId xmlns:a16="http://schemas.microsoft.com/office/drawing/2014/main" id="{93DC5125-2152-461F-A6E4-AD6D116E0B1F}"/>
               </a:ext>
             </a:extLst>
           </p:cNvPr>
@@ -10892,7 +11026,7 @@
           <p:cNvPr id="20" name="">
             <a:extLst xmlns:a="http://schemas.openxmlformats.org/drawingml/2006/main">
               <a:ext uri="{FF2B5EF4-FFF2-40B4-BE49-F238E27FC236}">
-                <a16:creationId xmlns:a16="http://schemas.microsoft.com/office/drawing/2014/main" id="{A006DF83-786A-474C-A25A-4A2116083633}"/>
+                <a16:creationId xmlns:a16="http://schemas.microsoft.com/office/drawing/2014/main" id="{225B043D-956B-4C14-8CED-CC4F8563840A}"/>
               </a:ext>
             </a:extLst>
           </p:cNvPr>
@@ -10956,7 +11090,7 @@
           <p:cNvPr id="21" name="">
             <a:extLst xmlns:a="http://schemas.openxmlformats.org/drawingml/2006/main">
               <a:ext uri="{FF2B5EF4-FFF2-40B4-BE49-F238E27FC236}">
-                <a16:creationId xmlns:a16="http://schemas.microsoft.com/office/drawing/2014/main" id="{7F907249-AF5D-4DC7-BDAA-BB9C60897C5B}"/>
+                <a16:creationId xmlns:a16="http://schemas.microsoft.com/office/drawing/2014/main" id="{A976254B-CA9B-4A76-95D6-9B54F91AE895}"/>
               </a:ext>
             </a:extLst>
           </p:cNvPr>
@@ -11020,7 +11154,7 @@
           <p:cNvPr id="22" name="">
             <a:extLst xmlns:a="http://schemas.openxmlformats.org/drawingml/2006/main">
               <a:ext uri="{FF2B5EF4-FFF2-40B4-BE49-F238E27FC236}">
-                <a16:creationId xmlns:a16="http://schemas.microsoft.com/office/drawing/2014/main" id="{FD38CC51-87AC-463E-AD4A-0C458EC7233C}"/>
+                <a16:creationId xmlns:a16="http://schemas.microsoft.com/office/drawing/2014/main" id="{9587025D-A1DF-4F88-BA5A-651EBB14199D}"/>
               </a:ext>
             </a:extLst>
           </p:cNvPr>
@@ -11084,7 +11218,7 @@
           <p:cNvPr id="23" name="">
             <a:extLst xmlns:a="http://schemas.openxmlformats.org/drawingml/2006/main">
               <a:ext uri="{FF2B5EF4-FFF2-40B4-BE49-F238E27FC236}">
-                <a16:creationId xmlns:a16="http://schemas.microsoft.com/office/drawing/2014/main" id="{7AB29180-CBAD-4C31-B14F-BAC7D3BD42F7}"/>
+                <a16:creationId xmlns:a16="http://schemas.microsoft.com/office/drawing/2014/main" id="{575FE1D2-CAA6-489E-8782-F90363321DB4}"/>
               </a:ext>
             </a:extLst>
           </p:cNvPr>
@@ -11119,7 +11253,7 @@
           <p:cNvPr id="24" name="">
             <a:extLst xmlns:a="http://schemas.openxmlformats.org/drawingml/2006/main">
               <a:ext uri="{FF2B5EF4-FFF2-40B4-BE49-F238E27FC236}">
-                <a16:creationId xmlns:a16="http://schemas.microsoft.com/office/drawing/2014/main" id="{AC58CB78-3E2C-4CC3-B5C6-18BAA5C8BF83}"/>
+                <a16:creationId xmlns:a16="http://schemas.microsoft.com/office/drawing/2014/main" id="{9BA55E5F-5FE7-4998-98E0-A9D0E8742F59}"/>
               </a:ext>
             </a:extLst>
           </p:cNvPr>
@@ -11183,7 +11317,7 @@
           <p:cNvPr id="25" name="">
             <a:extLst xmlns:a="http://schemas.openxmlformats.org/drawingml/2006/main">
               <a:ext uri="{FF2B5EF4-FFF2-40B4-BE49-F238E27FC236}">
-                <a16:creationId xmlns:a16="http://schemas.microsoft.com/office/drawing/2014/main" id="{D52F8623-C18F-4959-8A05-F2D0713A3112}"/>
+                <a16:creationId xmlns:a16="http://schemas.microsoft.com/office/drawing/2014/main" id="{24DF6A14-E48A-4E42-966D-D912CF6FF399}"/>
               </a:ext>
             </a:extLst>
           </p:cNvPr>
@@ -11247,7 +11381,7 @@
           <p:cNvPr id="26" name="">
             <a:extLst xmlns:a="http://schemas.openxmlformats.org/drawingml/2006/main">
               <a:ext uri="{FF2B5EF4-FFF2-40B4-BE49-F238E27FC236}">
-                <a16:creationId xmlns:a16="http://schemas.microsoft.com/office/drawing/2014/main" id="{67A6C871-3E84-441A-8ABA-5E0DED0025F7}"/>
+                <a16:creationId xmlns:a16="http://schemas.microsoft.com/office/drawing/2014/main" id="{67FC434D-38A0-480E-9C72-916FCEEF622B}"/>
               </a:ext>
             </a:extLst>
           </p:cNvPr>
@@ -11311,7 +11445,7 @@
           <p:cNvPr id="27" name="">
             <a:extLst xmlns:a="http://schemas.openxmlformats.org/drawingml/2006/main">
               <a:ext uri="{FF2B5EF4-FFF2-40B4-BE49-F238E27FC236}">
-                <a16:creationId xmlns:a16="http://schemas.microsoft.com/office/drawing/2014/main" id="{8B4FCA10-E8D4-4F65-9942-40B96BF6C915}"/>
+                <a16:creationId xmlns:a16="http://schemas.microsoft.com/office/drawing/2014/main" id="{51EB012F-FD6A-480A-A884-0FDCF7E634B6}"/>
               </a:ext>
             </a:extLst>
           </p:cNvPr>
@@ -11344,7 +11478,7 @@
           <p:cNvPr id="28" name="">
             <a:extLst xmlns:a="http://schemas.openxmlformats.org/drawingml/2006/main">
               <a:ext uri="{FF2B5EF4-FFF2-40B4-BE49-F238E27FC236}">
-                <a16:creationId xmlns:a16="http://schemas.microsoft.com/office/drawing/2014/main" id="{80DBD505-076E-4153-81BF-47969694374C}"/>
+                <a16:creationId xmlns:a16="http://schemas.microsoft.com/office/drawing/2014/main" id="{F228AD19-CCD8-4403-8557-BC9C8CC20134}"/>
               </a:ext>
             </a:extLst>
           </p:cNvPr>
@@ -11408,7 +11542,7 @@
           <p:cNvPr id="29" name="">
             <a:extLst xmlns:a="http://schemas.openxmlformats.org/drawingml/2006/main">
               <a:ext uri="{FF2B5EF4-FFF2-40B4-BE49-F238E27FC236}">
-                <a16:creationId xmlns:a16="http://schemas.microsoft.com/office/drawing/2014/main" id="{DCADDA0E-A168-47FB-A2FD-A37AFA596FF5}"/>
+                <a16:creationId xmlns:a16="http://schemas.microsoft.com/office/drawing/2014/main" id="{7EC769A2-6C8F-42EA-AF70-20BC51C6ABD8}"/>
               </a:ext>
             </a:extLst>
           </p:cNvPr>
@@ -11564,7 +11698,7 @@
           <p:cNvPr id="30" name="">
             <a:extLst xmlns:a="http://schemas.openxmlformats.org/drawingml/2006/main">
               <a:ext uri="{FF2B5EF4-FFF2-40B4-BE49-F238E27FC236}">
-                <a16:creationId xmlns:a16="http://schemas.microsoft.com/office/drawing/2014/main" id="{D83DCC5F-913F-4DA3-B828-3A36FAC6D9A2}"/>
+                <a16:creationId xmlns:a16="http://schemas.microsoft.com/office/drawing/2014/main" id="{A21EBCF4-A23E-4CCD-9484-0F3E600A3757}"/>
               </a:ext>
             </a:extLst>
           </p:cNvPr>
@@ -11626,7 +11760,7 @@
     </p:spTree>
     <p:extLst>
       <p:ext uri="{BB962C8B-B14F-4D97-AF65-F5344CB8AC3E}">
-        <p14:creationId xmlns:p14="http://schemas.microsoft.com/office/powerpoint/2010/main" val="1841237394"/>
+        <p14:creationId xmlns:p14="http://schemas.microsoft.com/office/powerpoint/2010/main" val="756835596"/>
       </p:ext>
     </p:extLst>
   </p:cSld>
@@ -11650,7 +11784,7 @@
           <p:cNvPr id="1" name="">
             <a:extLst xmlns:a="http://schemas.openxmlformats.org/drawingml/2006/main">
               <a:ext uri="{FF2B5EF4-FFF2-40B4-BE49-F238E27FC236}">
-                <a16:creationId xmlns:a16="http://schemas.microsoft.com/office/drawing/2014/main" id="{A6DA308F-289E-401B-83B2-D3A610EC5A36}"/>
+                <a16:creationId xmlns:a16="http://schemas.microsoft.com/office/drawing/2014/main" id="{50085B40-440C-4D7E-A47C-A52FE2DB7F83}"/>
               </a:ext>
             </a:extLst>
           </p:cNvPr>
@@ -11685,7 +11819,7 @@
           <p:cNvPr id="2" name="">
             <a:extLst xmlns:a="http://schemas.openxmlformats.org/drawingml/2006/main">
               <a:ext uri="{FF2B5EF4-FFF2-40B4-BE49-F238E27FC236}">
-                <a16:creationId xmlns:a16="http://schemas.microsoft.com/office/drawing/2014/main" id="{DA1334B5-3F5B-49BE-AC86-9A38F5F0DF48}"/>
+                <a16:creationId xmlns:a16="http://schemas.microsoft.com/office/drawing/2014/main" id="{3082FD2E-0493-4B5B-A798-E1D7DE30EB76}"/>
               </a:ext>
             </a:extLst>
           </p:cNvPr>
@@ -11720,7 +11854,7 @@
           <p:cNvPr id="3" name="">
             <a:extLst xmlns:a="http://schemas.openxmlformats.org/drawingml/2006/main">
               <a:ext uri="{FF2B5EF4-FFF2-40B4-BE49-F238E27FC236}">
-                <a16:creationId xmlns:a16="http://schemas.microsoft.com/office/drawing/2014/main" id="{252938BF-D303-42DA-820C-E46B0F561CD0}"/>
+                <a16:creationId xmlns:a16="http://schemas.microsoft.com/office/drawing/2014/main" id="{E43C783F-AD07-4311-9741-7C5FA02147ED}"/>
               </a:ext>
             </a:extLst>
           </p:cNvPr>
@@ -11784,7 +11918,7 @@
           <p:cNvPr id="4" name="">
             <a:extLst xmlns:a="http://schemas.openxmlformats.org/drawingml/2006/main">
               <a:ext uri="{FF2B5EF4-FFF2-40B4-BE49-F238E27FC236}">
-                <a16:creationId xmlns:a16="http://schemas.microsoft.com/office/drawing/2014/main" id="{0C4878A9-E4A7-47E7-BF3A-F2656F7C76CD}"/>
+                <a16:creationId xmlns:a16="http://schemas.microsoft.com/office/drawing/2014/main" id="{53C6783B-0AE7-4460-A30E-8206C478507A}"/>
               </a:ext>
             </a:extLst>
           </p:cNvPr>
@@ -11848,7 +11982,7 @@
           <p:cNvPr id="5" name="">
             <a:extLst xmlns:a="http://schemas.openxmlformats.org/drawingml/2006/main">
               <a:ext uri="{FF2B5EF4-FFF2-40B4-BE49-F238E27FC236}">
-                <a16:creationId xmlns:a16="http://schemas.microsoft.com/office/drawing/2014/main" id="{850F9688-AF49-4D48-A19E-5B9AF1EB3049}"/>
+                <a16:creationId xmlns:a16="http://schemas.microsoft.com/office/drawing/2014/main" id="{A3AC7F83-A65F-41AC-AA40-E124C9BC11C7}"/>
               </a:ext>
             </a:extLst>
           </p:cNvPr>
@@ -11912,7 +12046,7 @@
           <p:cNvPr id="6" name="">
             <a:extLst xmlns:a="http://schemas.openxmlformats.org/drawingml/2006/main">
               <a:ext uri="{FF2B5EF4-FFF2-40B4-BE49-F238E27FC236}">
-                <a16:creationId xmlns:a16="http://schemas.microsoft.com/office/drawing/2014/main" id="{3269ECC3-E171-44BD-9F64-AC61996A1D9B}"/>
+                <a16:creationId xmlns:a16="http://schemas.microsoft.com/office/drawing/2014/main" id="{62B15EF2-40B6-4583-896A-7896545EA4B4}"/>
               </a:ext>
             </a:extLst>
           </p:cNvPr>
@@ -11976,7 +12110,7 @@
           <p:cNvPr id="7" name="">
             <a:extLst xmlns:a="http://schemas.openxmlformats.org/drawingml/2006/main">
               <a:ext uri="{FF2B5EF4-FFF2-40B4-BE49-F238E27FC236}">
-                <a16:creationId xmlns:a16="http://schemas.microsoft.com/office/drawing/2014/main" id="{557EC5DC-E77D-4A85-B124-1A3AD178F2B4}"/>
+                <a16:creationId xmlns:a16="http://schemas.microsoft.com/office/drawing/2014/main" id="{D6FF25C9-DEAC-4182-99FB-623226908277}"/>
               </a:ext>
             </a:extLst>
           </p:cNvPr>
@@ -12009,7 +12143,7 @@
           <p:cNvPr id="8" name="">
             <a:extLst xmlns:a="http://schemas.openxmlformats.org/drawingml/2006/main">
               <a:ext uri="{FF2B5EF4-FFF2-40B4-BE49-F238E27FC236}">
-                <a16:creationId xmlns:a16="http://schemas.microsoft.com/office/drawing/2014/main" id="{B215C68A-6CE1-49AF-8E07-DE507A6DC4B4}"/>
+                <a16:creationId xmlns:a16="http://schemas.microsoft.com/office/drawing/2014/main" id="{27100A36-19B2-480C-BD59-BA76BFB9C0A1}"/>
               </a:ext>
             </a:extLst>
           </p:cNvPr>
@@ -12044,7 +12178,7 @@
           <p:cNvPr id="9" name="">
             <a:extLst xmlns:a="http://schemas.openxmlformats.org/drawingml/2006/main">
               <a:ext uri="{FF2B5EF4-FFF2-40B4-BE49-F238E27FC236}">
-                <a16:creationId xmlns:a16="http://schemas.microsoft.com/office/drawing/2014/main" id="{20353EDF-6980-4069-BE03-8BB6BFED231B}"/>
+                <a16:creationId xmlns:a16="http://schemas.microsoft.com/office/drawing/2014/main" id="{F14EE278-967B-47DE-BC7E-1A2028865A53}"/>
               </a:ext>
             </a:extLst>
           </p:cNvPr>
@@ -12108,7 +12242,7 @@
           <p:cNvPr id="10" name="">
             <a:extLst xmlns:a="http://schemas.openxmlformats.org/drawingml/2006/main">
               <a:ext uri="{FF2B5EF4-FFF2-40B4-BE49-F238E27FC236}">
-                <a16:creationId xmlns:a16="http://schemas.microsoft.com/office/drawing/2014/main" id="{B6108F72-AE14-4036-B764-842027FAD94F}"/>
+                <a16:creationId xmlns:a16="http://schemas.microsoft.com/office/drawing/2014/main" id="{BDC874C1-8831-4223-A138-50412C8F5DB3}"/>
               </a:ext>
             </a:extLst>
           </p:cNvPr>
@@ -12172,7 +12306,7 @@
           <p:cNvPr id="11" name="">
             <a:extLst xmlns:a="http://schemas.openxmlformats.org/drawingml/2006/main">
               <a:ext uri="{FF2B5EF4-FFF2-40B4-BE49-F238E27FC236}">
-                <a16:creationId xmlns:a16="http://schemas.microsoft.com/office/drawing/2014/main" id="{C771D5AF-AA3D-443D-B0E1-FE3774B0C82B}"/>
+                <a16:creationId xmlns:a16="http://schemas.microsoft.com/office/drawing/2014/main" id="{D1C73ECA-4288-47B1-B91C-993A8B2CAB2F}"/>
               </a:ext>
             </a:extLst>
           </p:cNvPr>
@@ -12236,7 +12370,7 @@
           <p:cNvPr id="12" name="">
             <a:extLst xmlns:a="http://schemas.openxmlformats.org/drawingml/2006/main">
               <a:ext uri="{FF2B5EF4-FFF2-40B4-BE49-F238E27FC236}">
-                <a16:creationId xmlns:a16="http://schemas.microsoft.com/office/drawing/2014/main" id="{A45B0528-40AB-42A8-AFD2-87AC858E12B5}"/>
+                <a16:creationId xmlns:a16="http://schemas.microsoft.com/office/drawing/2014/main" id="{38853F59-5B72-443D-842F-E5FA983581C8}"/>
               </a:ext>
             </a:extLst>
           </p:cNvPr>
@@ -12269,7 +12403,7 @@
           <p:cNvPr id="13" name="">
             <a:extLst xmlns:a="http://schemas.openxmlformats.org/drawingml/2006/main">
               <a:ext uri="{FF2B5EF4-FFF2-40B4-BE49-F238E27FC236}">
-                <a16:creationId xmlns:a16="http://schemas.microsoft.com/office/drawing/2014/main" id="{C3E33EEC-2491-44C0-A24C-18B158DC290A}"/>
+                <a16:creationId xmlns:a16="http://schemas.microsoft.com/office/drawing/2014/main" id="{5A781EB5-A48E-45A9-9F1C-D6A9B79A1ED9}"/>
               </a:ext>
             </a:extLst>
           </p:cNvPr>
@@ -12304,7 +12438,7 @@
           <p:cNvPr id="14" name="">
             <a:extLst xmlns:a="http://schemas.openxmlformats.org/drawingml/2006/main">
               <a:ext uri="{FF2B5EF4-FFF2-40B4-BE49-F238E27FC236}">
-                <a16:creationId xmlns:a16="http://schemas.microsoft.com/office/drawing/2014/main" id="{53B29594-DE3D-4BE7-83AD-4BC06977273C}"/>
+                <a16:creationId xmlns:a16="http://schemas.microsoft.com/office/drawing/2014/main" id="{A9B361DF-F7C2-437B-B7DC-DD7217DEBA33}"/>
               </a:ext>
             </a:extLst>
           </p:cNvPr>
@@ -12368,7 +12502,7 @@
           <p:cNvPr id="15" name="">
             <a:extLst xmlns:a="http://schemas.openxmlformats.org/drawingml/2006/main">
               <a:ext uri="{FF2B5EF4-FFF2-40B4-BE49-F238E27FC236}">
-                <a16:creationId xmlns:a16="http://schemas.microsoft.com/office/drawing/2014/main" id="{81D368E5-355F-47D9-9FFE-40442709BB1B}"/>
+                <a16:creationId xmlns:a16="http://schemas.microsoft.com/office/drawing/2014/main" id="{3D1590DD-3D24-4223-939C-37A7791566F9}"/>
               </a:ext>
             </a:extLst>
           </p:cNvPr>
@@ -12432,7 +12566,7 @@
           <p:cNvPr id="16" name="">
             <a:extLst xmlns:a="http://schemas.openxmlformats.org/drawingml/2006/main">
               <a:ext uri="{FF2B5EF4-FFF2-40B4-BE49-F238E27FC236}">
-                <a16:creationId xmlns:a16="http://schemas.microsoft.com/office/drawing/2014/main" id="{BFA4C07E-407A-492F-A1A6-75628084BE46}"/>
+                <a16:creationId xmlns:a16="http://schemas.microsoft.com/office/drawing/2014/main" id="{89A659B7-9B61-40D3-8632-528F5BDE062E}"/>
               </a:ext>
             </a:extLst>
           </p:cNvPr>
@@ -12496,7 +12630,7 @@
           <p:cNvPr id="17" name="">
             <a:extLst xmlns:a="http://schemas.openxmlformats.org/drawingml/2006/main">
               <a:ext uri="{FF2B5EF4-FFF2-40B4-BE49-F238E27FC236}">
-                <a16:creationId xmlns:a16="http://schemas.microsoft.com/office/drawing/2014/main" id="{A32B2B82-A633-42D6-AB7D-03879BFC5D62}"/>
+                <a16:creationId xmlns:a16="http://schemas.microsoft.com/office/drawing/2014/main" id="{58ADE0F3-D2B0-447A-997B-AC38559B0A11}"/>
               </a:ext>
             </a:extLst>
           </p:cNvPr>
@@ -12529,7 +12663,7 @@
           <p:cNvPr id="18" name="">
             <a:extLst xmlns:a="http://schemas.openxmlformats.org/drawingml/2006/main">
               <a:ext uri="{FF2B5EF4-FFF2-40B4-BE49-F238E27FC236}">
-                <a16:creationId xmlns:a16="http://schemas.microsoft.com/office/drawing/2014/main" id="{5AD01C79-E9B1-41DA-94A3-E5AD10B0152F}"/>
+                <a16:creationId xmlns:a16="http://schemas.microsoft.com/office/drawing/2014/main" id="{C13E30C2-121D-4EAB-8789-15E175DB7AB8}"/>
               </a:ext>
             </a:extLst>
           </p:cNvPr>
@@ -12564,7 +12698,7 @@
           <p:cNvPr id="19" name="">
             <a:extLst xmlns:a="http://schemas.openxmlformats.org/drawingml/2006/main">
               <a:ext uri="{FF2B5EF4-FFF2-40B4-BE49-F238E27FC236}">
-                <a16:creationId xmlns:a16="http://schemas.microsoft.com/office/drawing/2014/main" id="{5FD3A44A-9778-4117-AD52-D8B31BFD1542}"/>
+                <a16:creationId xmlns:a16="http://schemas.microsoft.com/office/drawing/2014/main" id="{13D11186-A30A-4C05-9326-25308BB3FB5A}"/>
               </a:ext>
             </a:extLst>
           </p:cNvPr>
@@ -12628,7 +12762,7 @@
           <p:cNvPr id="20" name="">
             <a:extLst xmlns:a="http://schemas.openxmlformats.org/drawingml/2006/main">
               <a:ext uri="{FF2B5EF4-FFF2-40B4-BE49-F238E27FC236}">
-                <a16:creationId xmlns:a16="http://schemas.microsoft.com/office/drawing/2014/main" id="{FAFEB8AE-5BD4-4D36-93E3-9C4E9C3BD4B9}"/>
+                <a16:creationId xmlns:a16="http://schemas.microsoft.com/office/drawing/2014/main" id="{8F994A62-9DA0-49CB-A8A6-8E62943DAA92}"/>
               </a:ext>
             </a:extLst>
           </p:cNvPr>
@@ -12692,7 +12826,7 @@
           <p:cNvPr id="21" name="">
             <a:extLst xmlns:a="http://schemas.openxmlformats.org/drawingml/2006/main">
               <a:ext uri="{FF2B5EF4-FFF2-40B4-BE49-F238E27FC236}">
-                <a16:creationId xmlns:a16="http://schemas.microsoft.com/office/drawing/2014/main" id="{611F9687-74F8-41BE-8CC3-04D689682203}"/>
+                <a16:creationId xmlns:a16="http://schemas.microsoft.com/office/drawing/2014/main" id="{6C870A25-6F05-46C6-82B4-CA01B6C09D43}"/>
               </a:ext>
             </a:extLst>
           </p:cNvPr>
@@ -12756,7 +12890,7 @@
           <p:cNvPr id="22" name="">
             <a:extLst xmlns:a="http://schemas.openxmlformats.org/drawingml/2006/main">
               <a:ext uri="{FF2B5EF4-FFF2-40B4-BE49-F238E27FC236}">
-                <a16:creationId xmlns:a16="http://schemas.microsoft.com/office/drawing/2014/main" id="{FF6C3658-311D-4F36-BFB3-D3E72F74F414}"/>
+                <a16:creationId xmlns:a16="http://schemas.microsoft.com/office/drawing/2014/main" id="{3154FDE9-AC11-47E8-9C4D-E63D3F4EE572}"/>
               </a:ext>
             </a:extLst>
           </p:cNvPr>
@@ -12820,7 +12954,7 @@
           <p:cNvPr id="23" name="">
             <a:extLst xmlns:a="http://schemas.openxmlformats.org/drawingml/2006/main">
               <a:ext uri="{FF2B5EF4-FFF2-40B4-BE49-F238E27FC236}">
-                <a16:creationId xmlns:a16="http://schemas.microsoft.com/office/drawing/2014/main" id="{501A49C5-30F9-4510-BADB-8BD8767A44D4}"/>
+                <a16:creationId xmlns:a16="http://schemas.microsoft.com/office/drawing/2014/main" id="{041A2605-461E-45FE-9544-7A7D65080775}"/>
               </a:ext>
             </a:extLst>
           </p:cNvPr>
@@ -12884,7 +13018,7 @@
           <p:cNvPr id="24" name="">
             <a:extLst xmlns:a="http://schemas.openxmlformats.org/drawingml/2006/main">
               <a:ext uri="{FF2B5EF4-FFF2-40B4-BE49-F238E27FC236}">
-                <a16:creationId xmlns:a16="http://schemas.microsoft.com/office/drawing/2014/main" id="{2CD0A089-6EB8-49CC-BF81-A3BEAB5170CA}"/>
+                <a16:creationId xmlns:a16="http://schemas.microsoft.com/office/drawing/2014/main" id="{8B5DAD6B-E130-4D67-8008-142399AE49A4}"/>
               </a:ext>
             </a:extLst>
           </p:cNvPr>
@@ -12919,7 +13053,7 @@
           <p:cNvPr id="25" name="">
             <a:extLst xmlns:a="http://schemas.openxmlformats.org/drawingml/2006/main">
               <a:ext uri="{FF2B5EF4-FFF2-40B4-BE49-F238E27FC236}">
-                <a16:creationId xmlns:a16="http://schemas.microsoft.com/office/drawing/2014/main" id="{F83250DA-1EC2-4986-AC05-AFEEE8C9BB5E}"/>
+                <a16:creationId xmlns:a16="http://schemas.microsoft.com/office/drawing/2014/main" id="{7D9862CC-DBA8-49BC-9432-6F3513C787A4}"/>
               </a:ext>
             </a:extLst>
           </p:cNvPr>
@@ -12981,7 +13115,2269 @@
     </p:spTree>
     <p:extLst>
       <p:ext uri="{BB962C8B-B14F-4D97-AF65-F5344CB8AC3E}">
-        <p14:creationId xmlns:p14="http://schemas.microsoft.com/office/powerpoint/2010/main" val="83093944"/>
+        <p14:creationId xmlns:p14="http://schemas.microsoft.com/office/powerpoint/2010/main" val="2001126698"/>
+      </p:ext>
+    </p:extLst>
+  </p:cSld>
+</p:sld>
+</file>
+
+<file path=ppt/slides/slide16.xml><?xml version="1.0" encoding="utf-8"?>
+<p:sld xmlns:p="http://schemas.openxmlformats.org/presentationml/2006/main">
+  <p:cSld>
+    <p:spTree>
+      <p:nvGrpSpPr>
+        <p:cNvPr id="1" name=""/>
+        <p:cNvGrpSpPr/>
+        <p:nvPr/>
+      </p:nvGrpSpPr>
+      <p:grpSpPr>
+        <a:xfrm xmlns:a="http://schemas.openxmlformats.org/drawingml/2006/main"/>
+      </p:grpSpPr>
+      <p:sp>
+        <p:nvSpPr>
+          <p:cNvPr id="1" name="">
+            <a:extLst xmlns:a="http://schemas.openxmlformats.org/drawingml/2006/main">
+              <a:ext uri="{FF2B5EF4-FFF2-40B4-BE49-F238E27FC236}">
+                <a16:creationId xmlns:a16="http://schemas.microsoft.com/office/drawing/2014/main" id="{EC809D2B-C68A-44C6-84D2-9D0404C81E7C}"/>
+              </a:ext>
+            </a:extLst>
+          </p:cNvPr>
+          <p:cNvSpPr>
+            <a:spLocks xmlns:a="http://schemas.openxmlformats.org/drawingml/2006/main" noGrp="1"/>
+          </p:cNvSpPr>
+          <p:nvPr/>
+        </p:nvSpPr>
+        <p:spPr>
+          <a:xfrm xmlns:a="http://schemas.openxmlformats.org/drawingml/2006/main">
+            <a:off x="0" y="0"/>
+            <a:ext cx="12192000" cy="6858000"/>
+          </a:xfrm>
+          <a:prstGeom xmlns:a="http://schemas.openxmlformats.org/drawingml/2006/main" prst="rect">
+            <a:avLst/>
+          </a:prstGeom>
+          <a:solidFill xmlns:a="http://schemas.openxmlformats.org/drawingml/2006/main">
+            <a:srgbClr val="F7F8F4"/>
+          </a:solidFill>
+          <a:ln xmlns:a="http://schemas.openxmlformats.org/drawingml/2006/main" w="0">
+            <a:solidFill>
+              <a:srgbClr val="000000">
+                <a:alpha val="0"/>
+              </a:srgbClr>
+            </a:solidFill>
+            <a:prstDash val="solid"/>
+          </a:ln>
+        </p:spPr>
+      </p:sp>
+      <p:sp>
+        <p:nvSpPr>
+          <p:cNvPr id="2" name="">
+            <a:extLst xmlns:a="http://schemas.openxmlformats.org/drawingml/2006/main">
+              <a:ext uri="{FF2B5EF4-FFF2-40B4-BE49-F238E27FC236}">
+                <a16:creationId xmlns:a16="http://schemas.microsoft.com/office/drawing/2014/main" id="{D14CA9AD-AC11-4A83-BE18-B83C46DBCB1C}"/>
+              </a:ext>
+            </a:extLst>
+          </p:cNvPr>
+          <p:cNvSpPr>
+            <a:spLocks xmlns:a="http://schemas.openxmlformats.org/drawingml/2006/main" noGrp="1"/>
+          </p:cNvSpPr>
+          <p:nvPr/>
+        </p:nvSpPr>
+        <p:spPr>
+          <a:xfrm xmlns:a="http://schemas.openxmlformats.org/drawingml/2006/main">
+            <a:off x="0" y="0"/>
+            <a:ext cx="12192000" cy="114300"/>
+          </a:xfrm>
+          <a:prstGeom xmlns:a="http://schemas.openxmlformats.org/drawingml/2006/main" prst="rect">
+            <a:avLst/>
+          </a:prstGeom>
+          <a:solidFill xmlns:a="http://schemas.openxmlformats.org/drawingml/2006/main">
+            <a:srgbClr val="2A9D8F"/>
+          </a:solidFill>
+          <a:ln xmlns:a="http://schemas.openxmlformats.org/drawingml/2006/main" w="0">
+            <a:solidFill>
+              <a:srgbClr val="000000">
+                <a:alpha val="0"/>
+              </a:srgbClr>
+            </a:solidFill>
+            <a:prstDash val="solid"/>
+          </a:ln>
+        </p:spPr>
+      </p:sp>
+      <p:sp>
+        <p:nvSpPr>
+          <p:cNvPr id="3" name="">
+            <a:extLst xmlns:a="http://schemas.openxmlformats.org/drawingml/2006/main">
+              <a:ext uri="{FF2B5EF4-FFF2-40B4-BE49-F238E27FC236}">
+                <a16:creationId xmlns:a16="http://schemas.microsoft.com/office/drawing/2014/main" id="{501B819F-FD53-4270-A7D1-CEE8F2181A87}"/>
+              </a:ext>
+            </a:extLst>
+          </p:cNvPr>
+          <p:cNvSpPr>
+            <a:spLocks xmlns:a="http://schemas.openxmlformats.org/drawingml/2006/main" noGrp="1"/>
+          </p:cNvSpPr>
+          <p:nvPr/>
+        </p:nvSpPr>
+        <p:spPr>
+          <a:xfrm xmlns:a="http://schemas.openxmlformats.org/drawingml/2006/main">
+            <a:off x="495300" y="266700"/>
+            <a:ext cx="3714750" cy="209550"/>
+          </a:xfrm>
+          <a:prstGeom xmlns:a="http://schemas.openxmlformats.org/drawingml/2006/main" prst="rect">
+            <a:avLst/>
+          </a:prstGeom>
+          <a:solidFill xmlns:a="http://schemas.openxmlformats.org/drawingml/2006/main">
+            <a:srgbClr val="000000">
+              <a:alpha val="0"/>
+            </a:srgbClr>
+          </a:solidFill>
+          <a:ln xmlns:a="http://schemas.openxmlformats.org/drawingml/2006/main" w="0">
+            <a:solidFill>
+              <a:srgbClr val="000000">
+                <a:alpha val="0"/>
+              </a:srgbClr>
+            </a:solidFill>
+            <a:prstDash val="solid"/>
+          </a:ln>
+        </p:spPr>
+        <p:txBody>
+          <a:bodyPr xmlns:a="http://schemas.openxmlformats.org/drawingml/2006/main" lIns="0" tIns="0" rIns="0" bIns="0" anchor="t"/>
+          <a:lstStyle xmlns:a="http://schemas.openxmlformats.org/drawingml/2006/main"/>
+          <a:p xmlns:a="http://schemas.openxmlformats.org/drawingml/2006/main">
+            <a:pPr algn="l">
+              <a:defRPr sz="975" b="1">
+                <a:solidFill>
+                  <a:srgbClr val="2A9D8F"/>
+                </a:solidFill>
+                <a:latin typeface="Aptos"/>
+                <a:ea typeface="Aptos"/>
+                <a:cs typeface="Aptos"/>
+              </a:defRPr>
+            </a:pPr>
+            <a:r>
+              <a:rPr sz="975" b="1">
+                <a:solidFill>
+                  <a:srgbClr val="2A9D8F"/>
+                </a:solidFill>
+                <a:latin typeface="Aptos"/>
+                <a:ea typeface="Aptos"/>
+                <a:cs typeface="Aptos"/>
+              </a:rPr>
+              <a:t>NEXT STEPS</a:t>
+            </a:r>
+          </a:p>
+        </p:txBody>
+      </p:sp>
+      <p:sp>
+        <p:nvSpPr>
+          <p:cNvPr id="4" name="">
+            <a:extLst xmlns:a="http://schemas.openxmlformats.org/drawingml/2006/main">
+              <a:ext uri="{FF2B5EF4-FFF2-40B4-BE49-F238E27FC236}">
+                <a16:creationId xmlns:a16="http://schemas.microsoft.com/office/drawing/2014/main" id="{C473B6DC-5D01-44D1-873A-FDAC05C4E1C6}"/>
+              </a:ext>
+            </a:extLst>
+          </p:cNvPr>
+          <p:cNvSpPr>
+            <a:spLocks xmlns:a="http://schemas.openxmlformats.org/drawingml/2006/main" noGrp="1"/>
+          </p:cNvSpPr>
+          <p:nvPr/>
+        </p:nvSpPr>
+        <p:spPr>
+          <a:xfrm xmlns:a="http://schemas.openxmlformats.org/drawingml/2006/main">
+            <a:off x="8096250" y="6457950"/>
+            <a:ext cx="3429000" cy="209550"/>
+          </a:xfrm>
+          <a:prstGeom xmlns:a="http://schemas.openxmlformats.org/drawingml/2006/main" prst="rect">
+            <a:avLst/>
+          </a:prstGeom>
+          <a:solidFill xmlns:a="http://schemas.openxmlformats.org/drawingml/2006/main">
+            <a:srgbClr val="000000">
+              <a:alpha val="0"/>
+            </a:srgbClr>
+          </a:solidFill>
+          <a:ln xmlns:a="http://schemas.openxmlformats.org/drawingml/2006/main" w="0">
+            <a:solidFill>
+              <a:srgbClr val="000000">
+                <a:alpha val="0"/>
+              </a:srgbClr>
+            </a:solidFill>
+            <a:prstDash val="solid"/>
+          </a:ln>
+        </p:spPr>
+        <p:txBody>
+          <a:bodyPr xmlns:a="http://schemas.openxmlformats.org/drawingml/2006/main" lIns="0" tIns="0" rIns="0" bIns="0" anchor="t"/>
+          <a:lstStyle xmlns:a="http://schemas.openxmlformats.org/drawingml/2006/main"/>
+          <a:p xmlns:a="http://schemas.openxmlformats.org/drawingml/2006/main">
+            <a:pPr algn="r">
+              <a:defRPr sz="825" b="0">
+                <a:solidFill>
+                  <a:srgbClr val="6B7280"/>
+                </a:solidFill>
+                <a:latin typeface="Aptos"/>
+                <a:ea typeface="Aptos"/>
+                <a:cs typeface="Aptos"/>
+              </a:defRPr>
+            </a:pPr>
+            <a:r>
+              <a:rPr sz="825" b="0">
+                <a:solidFill>
+                  <a:srgbClr val="6B7280"/>
+                </a:solidFill>
+                <a:latin typeface="Aptos"/>
+                <a:ea typeface="Aptos"/>
+                <a:cs typeface="Aptos"/>
+              </a:rPr>
+              <a:t>Big Data project | ISTAT regional labour market + GDP</a:t>
+            </a:r>
+          </a:p>
+        </p:txBody>
+      </p:sp>
+      <p:sp>
+        <p:nvSpPr>
+          <p:cNvPr id="5" name="">
+            <a:extLst xmlns:a="http://schemas.openxmlformats.org/drawingml/2006/main">
+              <a:ext uri="{FF2B5EF4-FFF2-40B4-BE49-F238E27FC236}">
+                <a16:creationId xmlns:a16="http://schemas.microsoft.com/office/drawing/2014/main" id="{794E895B-A64C-49E4-B478-E382E7EFED5A}"/>
+              </a:ext>
+            </a:extLst>
+          </p:cNvPr>
+          <p:cNvSpPr>
+            <a:spLocks xmlns:a="http://schemas.openxmlformats.org/drawingml/2006/main" noGrp="1"/>
+          </p:cNvSpPr>
+          <p:nvPr/>
+        </p:nvSpPr>
+        <p:spPr>
+          <a:xfrm xmlns:a="http://schemas.openxmlformats.org/drawingml/2006/main">
+            <a:off x="495300" y="552450"/>
+            <a:ext cx="7905750" cy="876300"/>
+          </a:xfrm>
+          <a:prstGeom xmlns:a="http://schemas.openxmlformats.org/drawingml/2006/main" prst="rect">
+            <a:avLst/>
+          </a:prstGeom>
+          <a:solidFill xmlns:a="http://schemas.openxmlformats.org/drawingml/2006/main">
+            <a:srgbClr val="000000">
+              <a:alpha val="0"/>
+            </a:srgbClr>
+          </a:solidFill>
+          <a:ln xmlns:a="http://schemas.openxmlformats.org/drawingml/2006/main" w="0">
+            <a:solidFill>
+              <a:srgbClr val="000000">
+                <a:alpha val="0"/>
+              </a:srgbClr>
+            </a:solidFill>
+            <a:prstDash val="solid"/>
+          </a:ln>
+        </p:spPr>
+        <p:txBody>
+          <a:bodyPr xmlns:a="http://schemas.openxmlformats.org/drawingml/2006/main" lIns="0" tIns="0" rIns="0" bIns="0" anchor="t"/>
+          <a:lstStyle xmlns:a="http://schemas.openxmlformats.org/drawingml/2006/main"/>
+          <a:p xmlns:a="http://schemas.openxmlformats.org/drawingml/2006/main">
+            <a:pPr algn="l">
+              <a:defRPr sz="2550" b="1">
+                <a:solidFill>
+                  <a:srgbClr val="16213E"/>
+                </a:solidFill>
+                <a:latin typeface="Aptos Display"/>
+                <a:ea typeface="Aptos Display"/>
+                <a:cs typeface="Aptos Display"/>
+              </a:defRPr>
+            </a:pPr>
+            <a:r>
+              <a:rPr sz="2550" b="1">
+                <a:solidFill>
+                  <a:srgbClr val="16213E"/>
+                </a:solidFill>
+                <a:latin typeface="Aptos Display"/>
+                <a:ea typeface="Aptos Display"/>
+                <a:cs typeface="Aptos Display"/>
+              </a:rPr>
+              <a:t>Prossimi sviluppi da implementare</a:t>
+            </a:r>
+          </a:p>
+        </p:txBody>
+      </p:sp>
+      <p:sp>
+        <p:nvSpPr>
+          <p:cNvPr id="6" name="">
+            <a:extLst xmlns:a="http://schemas.openxmlformats.org/drawingml/2006/main">
+              <a:ext uri="{FF2B5EF4-FFF2-40B4-BE49-F238E27FC236}">
+                <a16:creationId xmlns:a16="http://schemas.microsoft.com/office/drawing/2014/main" id="{6AFAF7C0-CD07-49F4-AFEB-F867E4C13498}"/>
+              </a:ext>
+            </a:extLst>
+          </p:cNvPr>
+          <p:cNvSpPr>
+            <a:spLocks xmlns:a="http://schemas.openxmlformats.org/drawingml/2006/main" noGrp="1"/>
+          </p:cNvSpPr>
+          <p:nvPr/>
+        </p:nvSpPr>
+        <p:spPr>
+          <a:xfrm xmlns:a="http://schemas.openxmlformats.org/drawingml/2006/main">
+            <a:off x="514350" y="1362075"/>
+            <a:ext cx="7810500" cy="400050"/>
+          </a:xfrm>
+          <a:prstGeom xmlns:a="http://schemas.openxmlformats.org/drawingml/2006/main" prst="rect">
+            <a:avLst/>
+          </a:prstGeom>
+          <a:solidFill xmlns:a="http://schemas.openxmlformats.org/drawingml/2006/main">
+            <a:srgbClr val="000000">
+              <a:alpha val="0"/>
+            </a:srgbClr>
+          </a:solidFill>
+          <a:ln xmlns:a="http://schemas.openxmlformats.org/drawingml/2006/main" w="0">
+            <a:solidFill>
+              <a:srgbClr val="000000">
+                <a:alpha val="0"/>
+              </a:srgbClr>
+            </a:solidFill>
+            <a:prstDash val="solid"/>
+          </a:ln>
+        </p:spPr>
+        <p:txBody>
+          <a:bodyPr xmlns:a="http://schemas.openxmlformats.org/drawingml/2006/main" lIns="0" tIns="0" rIns="0" bIns="0" anchor="t"/>
+          <a:lstStyle xmlns:a="http://schemas.openxmlformats.org/drawingml/2006/main"/>
+          <a:p xmlns:a="http://schemas.openxmlformats.org/drawingml/2006/main">
+            <a:pPr algn="l">
+              <a:defRPr sz="1200" b="0">
+                <a:solidFill>
+                  <a:srgbClr val="6B7280"/>
+                </a:solidFill>
+                <a:latin typeface="Aptos"/>
+                <a:ea typeface="Aptos"/>
+                <a:cs typeface="Aptos"/>
+              </a:defRPr>
+            </a:pPr>
+            <a:r>
+              <a:rPr sz="1200" b="0">
+                <a:solidFill>
+                  <a:srgbClr val="6B7280"/>
+                </a:solidFill>
+                <a:latin typeface="Aptos"/>
+                <a:ea typeface="Aptos"/>
+                <a:cs typeface="Aptos"/>
+              </a:rPr>
+              <a:t>Il progetto puo evolvere da analisi predittiva a strumento operativo per monitorare e simulare politiche del lavoro.</a:t>
+            </a:r>
+          </a:p>
+        </p:txBody>
+      </p:sp>
+      <p:sp>
+        <p:nvSpPr>
+          <p:cNvPr id="7" name="">
+            <a:extLst xmlns:a="http://schemas.openxmlformats.org/drawingml/2006/main">
+              <a:ext uri="{FF2B5EF4-FFF2-40B4-BE49-F238E27FC236}">
+                <a16:creationId xmlns:a16="http://schemas.microsoft.com/office/drawing/2014/main" id="{49C92E2C-9C35-4037-9044-BAD47E30609D}"/>
+              </a:ext>
+            </a:extLst>
+          </p:cNvPr>
+          <p:cNvSpPr>
+            <a:spLocks xmlns:a="http://schemas.openxmlformats.org/drawingml/2006/main" noGrp="1"/>
+          </p:cNvSpPr>
+          <p:nvPr/>
+        </p:nvSpPr>
+        <p:spPr>
+          <a:xfrm xmlns:a="http://schemas.openxmlformats.org/drawingml/2006/main">
+            <a:off x="742950" y="1638300"/>
+            <a:ext cx="552450" cy="552450"/>
+          </a:xfrm>
+          <a:prstGeom xmlns:a="http://schemas.openxmlformats.org/drawingml/2006/main" prst="rect">
+            <a:avLst/>
+          </a:prstGeom>
+          <a:solidFill xmlns:a="http://schemas.openxmlformats.org/drawingml/2006/main">
+            <a:srgbClr val="2A9D8F"/>
+          </a:solidFill>
+          <a:ln xmlns:a="http://schemas.openxmlformats.org/drawingml/2006/main" w="0">
+            <a:solidFill>
+              <a:srgbClr val="000000">
+                <a:alpha val="0"/>
+              </a:srgbClr>
+            </a:solidFill>
+            <a:prstDash val="solid"/>
+          </a:ln>
+        </p:spPr>
+      </p:sp>
+      <p:sp>
+        <p:nvSpPr>
+          <p:cNvPr id="8" name="">
+            <a:extLst xmlns:a="http://schemas.openxmlformats.org/drawingml/2006/main">
+              <a:ext uri="{FF2B5EF4-FFF2-40B4-BE49-F238E27FC236}">
+                <a16:creationId xmlns:a16="http://schemas.microsoft.com/office/drawing/2014/main" id="{D3F73727-03D9-4682-9D27-9C3EEFF32ED1}"/>
+              </a:ext>
+            </a:extLst>
+          </p:cNvPr>
+          <p:cNvSpPr>
+            <a:spLocks xmlns:a="http://schemas.openxmlformats.org/drawingml/2006/main" noGrp="1"/>
+          </p:cNvSpPr>
+          <p:nvPr/>
+        </p:nvSpPr>
+        <p:spPr>
+          <a:xfrm xmlns:a="http://schemas.openxmlformats.org/drawingml/2006/main">
+            <a:off x="742950" y="1724025"/>
+            <a:ext cx="552450" cy="361950"/>
+          </a:xfrm>
+          <a:prstGeom xmlns:a="http://schemas.openxmlformats.org/drawingml/2006/main" prst="rect">
+            <a:avLst/>
+          </a:prstGeom>
+          <a:solidFill xmlns:a="http://schemas.openxmlformats.org/drawingml/2006/main">
+            <a:srgbClr val="000000">
+              <a:alpha val="0"/>
+            </a:srgbClr>
+          </a:solidFill>
+          <a:ln xmlns:a="http://schemas.openxmlformats.org/drawingml/2006/main" w="0">
+            <a:solidFill>
+              <a:srgbClr val="000000">
+                <a:alpha val="0"/>
+              </a:srgbClr>
+            </a:solidFill>
+            <a:prstDash val="solid"/>
+          </a:ln>
+        </p:spPr>
+        <p:txBody>
+          <a:bodyPr xmlns:a="http://schemas.openxmlformats.org/drawingml/2006/main" lIns="0" tIns="0" rIns="0" bIns="0" anchor="t"/>
+          <a:lstStyle xmlns:a="http://schemas.openxmlformats.org/drawingml/2006/main"/>
+          <a:p xmlns:a="http://schemas.openxmlformats.org/drawingml/2006/main">
+            <a:pPr algn="ctr">
+              <a:defRPr sz="2100" b="1">
+                <a:solidFill>
+                  <a:srgbClr val="FFFFFF"/>
+                </a:solidFill>
+                <a:latin typeface="Aptos Display"/>
+                <a:ea typeface="Aptos Display"/>
+                <a:cs typeface="Aptos Display"/>
+              </a:defRPr>
+            </a:pPr>
+            <a:r>
+              <a:rPr sz="2100" b="1">
+                <a:solidFill>
+                  <a:srgbClr val="FFFFFF"/>
+                </a:solidFill>
+                <a:latin typeface="Aptos Display"/>
+                <a:ea typeface="Aptos Display"/>
+                <a:cs typeface="Aptos Display"/>
+              </a:rPr>
+              <a:t>1</a:t>
+            </a:r>
+          </a:p>
+        </p:txBody>
+      </p:sp>
+      <p:sp>
+        <p:nvSpPr>
+          <p:cNvPr id="9" name="">
+            <a:extLst xmlns:a="http://schemas.openxmlformats.org/drawingml/2006/main">
+              <a:ext uri="{FF2B5EF4-FFF2-40B4-BE49-F238E27FC236}">
+                <a16:creationId xmlns:a16="http://schemas.microsoft.com/office/drawing/2014/main" id="{9C21363F-0021-418F-A447-3F3E23B9C732}"/>
+              </a:ext>
+            </a:extLst>
+          </p:cNvPr>
+          <p:cNvSpPr>
+            <a:spLocks xmlns:a="http://schemas.openxmlformats.org/drawingml/2006/main" noGrp="1"/>
+          </p:cNvSpPr>
+          <p:nvPr/>
+        </p:nvSpPr>
+        <p:spPr>
+          <a:xfrm xmlns:a="http://schemas.openxmlformats.org/drawingml/2006/main">
+            <a:off x="1485900" y="1619250"/>
+            <a:ext cx="3714750" cy="266700"/>
+          </a:xfrm>
+          <a:prstGeom xmlns:a="http://schemas.openxmlformats.org/drawingml/2006/main" prst="rect">
+            <a:avLst/>
+          </a:prstGeom>
+          <a:solidFill xmlns:a="http://schemas.openxmlformats.org/drawingml/2006/main">
+            <a:srgbClr val="000000">
+              <a:alpha val="0"/>
+            </a:srgbClr>
+          </a:solidFill>
+          <a:ln xmlns:a="http://schemas.openxmlformats.org/drawingml/2006/main" w="0">
+            <a:solidFill>
+              <a:srgbClr val="000000">
+                <a:alpha val="0"/>
+              </a:srgbClr>
+            </a:solidFill>
+            <a:prstDash val="solid"/>
+          </a:ln>
+        </p:spPr>
+        <p:txBody>
+          <a:bodyPr xmlns:a="http://schemas.openxmlformats.org/drawingml/2006/main" lIns="0" tIns="0" rIns="0" bIns="0" anchor="t"/>
+          <a:lstStyle xmlns:a="http://schemas.openxmlformats.org/drawingml/2006/main"/>
+          <a:p xmlns:a="http://schemas.openxmlformats.org/drawingml/2006/main">
+            <a:pPr algn="l">
+              <a:defRPr sz="1500" b="1">
+                <a:solidFill>
+                  <a:srgbClr val="16213E"/>
+                </a:solidFill>
+                <a:latin typeface="Aptos Display"/>
+                <a:ea typeface="Aptos Display"/>
+                <a:cs typeface="Aptos Display"/>
+              </a:defRPr>
+            </a:pPr>
+            <a:r>
+              <a:rPr sz="1500" b="1">
+                <a:solidFill>
+                  <a:srgbClr val="16213E"/>
+                </a:solidFill>
+                <a:latin typeface="Aptos Display"/>
+                <a:ea typeface="Aptos Display"/>
+                <a:cs typeface="Aptos Display"/>
+              </a:rPr>
+              <a:t>Aggiornare e ampliare i dati</a:t>
+            </a:r>
+          </a:p>
+        </p:txBody>
+      </p:sp>
+      <p:sp>
+        <p:nvSpPr>
+          <p:cNvPr id="10" name="">
+            <a:extLst xmlns:a="http://schemas.openxmlformats.org/drawingml/2006/main">
+              <a:ext uri="{FF2B5EF4-FFF2-40B4-BE49-F238E27FC236}">
+                <a16:creationId xmlns:a16="http://schemas.microsoft.com/office/drawing/2014/main" id="{9BCBD7C7-3604-4C77-B483-68AD8AD82BE5}"/>
+              </a:ext>
+            </a:extLst>
+          </p:cNvPr>
+          <p:cNvSpPr>
+            <a:spLocks xmlns:a="http://schemas.openxmlformats.org/drawingml/2006/main" noGrp="1"/>
+          </p:cNvSpPr>
+          <p:nvPr/>
+        </p:nvSpPr>
+        <p:spPr>
+          <a:xfrm xmlns:a="http://schemas.openxmlformats.org/drawingml/2006/main">
+            <a:off x="1485900" y="1943100"/>
+            <a:ext cx="4048125" cy="590550"/>
+          </a:xfrm>
+          <a:prstGeom xmlns:a="http://schemas.openxmlformats.org/drawingml/2006/main" prst="rect">
+            <a:avLst/>
+          </a:prstGeom>
+          <a:solidFill xmlns:a="http://schemas.openxmlformats.org/drawingml/2006/main">
+            <a:srgbClr val="000000">
+              <a:alpha val="0"/>
+            </a:srgbClr>
+          </a:solidFill>
+          <a:ln xmlns:a="http://schemas.openxmlformats.org/drawingml/2006/main" w="0">
+            <a:solidFill>
+              <a:srgbClr val="000000">
+                <a:alpha val="0"/>
+              </a:srgbClr>
+            </a:solidFill>
+            <a:prstDash val="solid"/>
+          </a:ln>
+        </p:spPr>
+        <p:txBody>
+          <a:bodyPr xmlns:a="http://schemas.openxmlformats.org/drawingml/2006/main" lIns="0" tIns="0" rIns="0" bIns="0" anchor="t"/>
+          <a:lstStyle xmlns:a="http://schemas.openxmlformats.org/drawingml/2006/main"/>
+          <a:p xmlns:a="http://schemas.openxmlformats.org/drawingml/2006/main">
+            <a:pPr algn="l">
+              <a:defRPr sz="1050" b="0">
+                <a:solidFill>
+                  <a:srgbClr val="1F2937"/>
+                </a:solidFill>
+                <a:latin typeface="Aptos"/>
+                <a:ea typeface="Aptos"/>
+                <a:cs typeface="Aptos"/>
+              </a:defRPr>
+            </a:pPr>
+            <a:r>
+              <a:rPr sz="1050" b="0">
+                <a:solidFill>
+                  <a:srgbClr val="1F2937"/>
+                </a:solidFill>
+                <a:latin typeface="Aptos"/>
+                <a:ea typeface="Aptos"/>
+                <a:cs typeface="Aptos"/>
+              </a:rPr>
+              <a:t>Integrare nuovi anni ISTAT, dati provinciali, settori produttivi, istruzione, imprese attive e investimenti pubblici.</a:t>
+            </a:r>
+          </a:p>
+        </p:txBody>
+      </p:sp>
+      <p:sp>
+        <p:nvSpPr>
+          <p:cNvPr id="11" name="">
+            <a:extLst xmlns:a="http://schemas.openxmlformats.org/drawingml/2006/main">
+              <a:ext uri="{FF2B5EF4-FFF2-40B4-BE49-F238E27FC236}">
+                <a16:creationId xmlns:a16="http://schemas.microsoft.com/office/drawing/2014/main" id="{2FCED6B1-DD9D-4C9D-B246-88E72D41E179}"/>
+              </a:ext>
+            </a:extLst>
+          </p:cNvPr>
+          <p:cNvSpPr>
+            <a:spLocks xmlns:a="http://schemas.openxmlformats.org/drawingml/2006/main" noGrp="1"/>
+          </p:cNvSpPr>
+          <p:nvPr/>
+        </p:nvSpPr>
+        <p:spPr>
+          <a:xfrm xmlns:a="http://schemas.openxmlformats.org/drawingml/2006/main">
+            <a:off x="742950" y="2857500"/>
+            <a:ext cx="552450" cy="552450"/>
+          </a:xfrm>
+          <a:prstGeom xmlns:a="http://schemas.openxmlformats.org/drawingml/2006/main" prst="rect">
+            <a:avLst/>
+          </a:prstGeom>
+          <a:solidFill xmlns:a="http://schemas.openxmlformats.org/drawingml/2006/main">
+            <a:srgbClr val="457B9D"/>
+          </a:solidFill>
+          <a:ln xmlns:a="http://schemas.openxmlformats.org/drawingml/2006/main" w="0">
+            <a:solidFill>
+              <a:srgbClr val="000000">
+                <a:alpha val="0"/>
+              </a:srgbClr>
+            </a:solidFill>
+            <a:prstDash val="solid"/>
+          </a:ln>
+        </p:spPr>
+      </p:sp>
+      <p:sp>
+        <p:nvSpPr>
+          <p:cNvPr id="12" name="">
+            <a:extLst xmlns:a="http://schemas.openxmlformats.org/drawingml/2006/main">
+              <a:ext uri="{FF2B5EF4-FFF2-40B4-BE49-F238E27FC236}">
+                <a16:creationId xmlns:a16="http://schemas.microsoft.com/office/drawing/2014/main" id="{7487F2EE-3ABB-4F17-BF57-1E99E95B2FC5}"/>
+              </a:ext>
+            </a:extLst>
+          </p:cNvPr>
+          <p:cNvSpPr>
+            <a:spLocks xmlns:a="http://schemas.openxmlformats.org/drawingml/2006/main" noGrp="1"/>
+          </p:cNvSpPr>
+          <p:nvPr/>
+        </p:nvSpPr>
+        <p:spPr>
+          <a:xfrm xmlns:a="http://schemas.openxmlformats.org/drawingml/2006/main">
+            <a:off x="742950" y="2943225"/>
+            <a:ext cx="552450" cy="361950"/>
+          </a:xfrm>
+          <a:prstGeom xmlns:a="http://schemas.openxmlformats.org/drawingml/2006/main" prst="rect">
+            <a:avLst/>
+          </a:prstGeom>
+          <a:solidFill xmlns:a="http://schemas.openxmlformats.org/drawingml/2006/main">
+            <a:srgbClr val="000000">
+              <a:alpha val="0"/>
+            </a:srgbClr>
+          </a:solidFill>
+          <a:ln xmlns:a="http://schemas.openxmlformats.org/drawingml/2006/main" w="0">
+            <a:solidFill>
+              <a:srgbClr val="000000">
+                <a:alpha val="0"/>
+              </a:srgbClr>
+            </a:solidFill>
+            <a:prstDash val="solid"/>
+          </a:ln>
+        </p:spPr>
+        <p:txBody>
+          <a:bodyPr xmlns:a="http://schemas.openxmlformats.org/drawingml/2006/main" lIns="0" tIns="0" rIns="0" bIns="0" anchor="t"/>
+          <a:lstStyle xmlns:a="http://schemas.openxmlformats.org/drawingml/2006/main"/>
+          <a:p xmlns:a="http://schemas.openxmlformats.org/drawingml/2006/main">
+            <a:pPr algn="ctr">
+              <a:defRPr sz="2100" b="1">
+                <a:solidFill>
+                  <a:srgbClr val="FFFFFF"/>
+                </a:solidFill>
+                <a:latin typeface="Aptos Display"/>
+                <a:ea typeface="Aptos Display"/>
+                <a:cs typeface="Aptos Display"/>
+              </a:defRPr>
+            </a:pPr>
+            <a:r>
+              <a:rPr sz="2100" b="1">
+                <a:solidFill>
+                  <a:srgbClr val="FFFFFF"/>
+                </a:solidFill>
+                <a:latin typeface="Aptos Display"/>
+                <a:ea typeface="Aptos Display"/>
+                <a:cs typeface="Aptos Display"/>
+              </a:rPr>
+              <a:t>2</a:t>
+            </a:r>
+          </a:p>
+        </p:txBody>
+      </p:sp>
+      <p:sp>
+        <p:nvSpPr>
+          <p:cNvPr id="13" name="">
+            <a:extLst xmlns:a="http://schemas.openxmlformats.org/drawingml/2006/main">
+              <a:ext uri="{FF2B5EF4-FFF2-40B4-BE49-F238E27FC236}">
+                <a16:creationId xmlns:a16="http://schemas.microsoft.com/office/drawing/2014/main" id="{B166185B-84F0-48E8-9C6D-3B5293E39FDB}"/>
+              </a:ext>
+            </a:extLst>
+          </p:cNvPr>
+          <p:cNvSpPr>
+            <a:spLocks xmlns:a="http://schemas.openxmlformats.org/drawingml/2006/main" noGrp="1"/>
+          </p:cNvSpPr>
+          <p:nvPr/>
+        </p:nvSpPr>
+        <p:spPr>
+          <a:xfrm xmlns:a="http://schemas.openxmlformats.org/drawingml/2006/main">
+            <a:off x="1485900" y="2838450"/>
+            <a:ext cx="3714750" cy="266700"/>
+          </a:xfrm>
+          <a:prstGeom xmlns:a="http://schemas.openxmlformats.org/drawingml/2006/main" prst="rect">
+            <a:avLst/>
+          </a:prstGeom>
+          <a:solidFill xmlns:a="http://schemas.openxmlformats.org/drawingml/2006/main">
+            <a:srgbClr val="000000">
+              <a:alpha val="0"/>
+            </a:srgbClr>
+          </a:solidFill>
+          <a:ln xmlns:a="http://schemas.openxmlformats.org/drawingml/2006/main" w="0">
+            <a:solidFill>
+              <a:srgbClr val="000000">
+                <a:alpha val="0"/>
+              </a:srgbClr>
+            </a:solidFill>
+            <a:prstDash val="solid"/>
+          </a:ln>
+        </p:spPr>
+        <p:txBody>
+          <a:bodyPr xmlns:a="http://schemas.openxmlformats.org/drawingml/2006/main" lIns="0" tIns="0" rIns="0" bIns="0" anchor="t"/>
+          <a:lstStyle xmlns:a="http://schemas.openxmlformats.org/drawingml/2006/main"/>
+          <a:p xmlns:a="http://schemas.openxmlformats.org/drawingml/2006/main">
+            <a:pPr algn="l">
+              <a:defRPr sz="1500" b="1">
+                <a:solidFill>
+                  <a:srgbClr val="16213E"/>
+                </a:solidFill>
+                <a:latin typeface="Aptos Display"/>
+                <a:ea typeface="Aptos Display"/>
+                <a:cs typeface="Aptos Display"/>
+              </a:defRPr>
+            </a:pPr>
+            <a:r>
+              <a:rPr sz="1500" b="1">
+                <a:solidFill>
+                  <a:srgbClr val="16213E"/>
+                </a:solidFill>
+                <a:latin typeface="Aptos Display"/>
+                <a:ea typeface="Aptos Display"/>
+                <a:cs typeface="Aptos Display"/>
+              </a:rPr>
+              <a:t>Migliorare i modelli</a:t>
+            </a:r>
+          </a:p>
+        </p:txBody>
+      </p:sp>
+      <p:sp>
+        <p:nvSpPr>
+          <p:cNvPr id="14" name="">
+            <a:extLst xmlns:a="http://schemas.openxmlformats.org/drawingml/2006/main">
+              <a:ext uri="{FF2B5EF4-FFF2-40B4-BE49-F238E27FC236}">
+                <a16:creationId xmlns:a16="http://schemas.microsoft.com/office/drawing/2014/main" id="{DCE43B75-53AE-4734-AD28-C6B3B8DDEB9E}"/>
+              </a:ext>
+            </a:extLst>
+          </p:cNvPr>
+          <p:cNvSpPr>
+            <a:spLocks xmlns:a="http://schemas.openxmlformats.org/drawingml/2006/main" noGrp="1"/>
+          </p:cNvSpPr>
+          <p:nvPr/>
+        </p:nvSpPr>
+        <p:spPr>
+          <a:xfrm xmlns:a="http://schemas.openxmlformats.org/drawingml/2006/main">
+            <a:off x="1485900" y="3162300"/>
+            <a:ext cx="4048125" cy="590550"/>
+          </a:xfrm>
+          <a:prstGeom xmlns:a="http://schemas.openxmlformats.org/drawingml/2006/main" prst="rect">
+            <a:avLst/>
+          </a:prstGeom>
+          <a:solidFill xmlns:a="http://schemas.openxmlformats.org/drawingml/2006/main">
+            <a:srgbClr val="000000">
+              <a:alpha val="0"/>
+            </a:srgbClr>
+          </a:solidFill>
+          <a:ln xmlns:a="http://schemas.openxmlformats.org/drawingml/2006/main" w="0">
+            <a:solidFill>
+              <a:srgbClr val="000000">
+                <a:alpha val="0"/>
+              </a:srgbClr>
+            </a:solidFill>
+            <a:prstDash val="solid"/>
+          </a:ln>
+        </p:spPr>
+        <p:txBody>
+          <a:bodyPr xmlns:a="http://schemas.openxmlformats.org/drawingml/2006/main" lIns="0" tIns="0" rIns="0" bIns="0" anchor="t"/>
+          <a:lstStyle xmlns:a="http://schemas.openxmlformats.org/drawingml/2006/main"/>
+          <a:p xmlns:a="http://schemas.openxmlformats.org/drawingml/2006/main">
+            <a:pPr algn="l">
+              <a:defRPr sz="1050" b="0">
+                <a:solidFill>
+                  <a:srgbClr val="1F2937"/>
+                </a:solidFill>
+                <a:latin typeface="Aptos"/>
+                <a:ea typeface="Aptos"/>
+                <a:cs typeface="Aptos"/>
+              </a:defRPr>
+            </a:pPr>
+            <a:r>
+              <a:rPr sz="1050" b="0">
+                <a:solidFill>
+                  <a:srgbClr val="1F2937"/>
+                </a:solidFill>
+                <a:latin typeface="Aptos"/>
+                <a:ea typeface="Aptos"/>
+                <a:cs typeface="Aptos"/>
+              </a:rPr>
+              <a:t>Testare modelli spazio-temporali e boosting avanzato, mantenendo sempre il confronto con baseline semplici e OLS.</a:t>
+            </a:r>
+          </a:p>
+        </p:txBody>
+      </p:sp>
+      <p:sp>
+        <p:nvSpPr>
+          <p:cNvPr id="15" name="">
+            <a:extLst xmlns:a="http://schemas.openxmlformats.org/drawingml/2006/main">
+              <a:ext uri="{FF2B5EF4-FFF2-40B4-BE49-F238E27FC236}">
+                <a16:creationId xmlns:a16="http://schemas.microsoft.com/office/drawing/2014/main" id="{F265C4AD-D158-4FF1-BA63-D87838DAEDA6}"/>
+              </a:ext>
+            </a:extLst>
+          </p:cNvPr>
+          <p:cNvSpPr>
+            <a:spLocks xmlns:a="http://schemas.openxmlformats.org/drawingml/2006/main" noGrp="1"/>
+          </p:cNvSpPr>
+          <p:nvPr/>
+        </p:nvSpPr>
+        <p:spPr>
+          <a:xfrm xmlns:a="http://schemas.openxmlformats.org/drawingml/2006/main">
+            <a:off x="742950" y="4076700"/>
+            <a:ext cx="552450" cy="552450"/>
+          </a:xfrm>
+          <a:prstGeom xmlns:a="http://schemas.openxmlformats.org/drawingml/2006/main" prst="rect">
+            <a:avLst/>
+          </a:prstGeom>
+          <a:solidFill xmlns:a="http://schemas.openxmlformats.org/drawingml/2006/main">
+            <a:srgbClr val="E76F51"/>
+          </a:solidFill>
+          <a:ln xmlns:a="http://schemas.openxmlformats.org/drawingml/2006/main" w="0">
+            <a:solidFill>
+              <a:srgbClr val="000000">
+                <a:alpha val="0"/>
+              </a:srgbClr>
+            </a:solidFill>
+            <a:prstDash val="solid"/>
+          </a:ln>
+        </p:spPr>
+      </p:sp>
+      <p:sp>
+        <p:nvSpPr>
+          <p:cNvPr id="16" name="">
+            <a:extLst xmlns:a="http://schemas.openxmlformats.org/drawingml/2006/main">
+              <a:ext uri="{FF2B5EF4-FFF2-40B4-BE49-F238E27FC236}">
+                <a16:creationId xmlns:a16="http://schemas.microsoft.com/office/drawing/2014/main" id="{3D195653-B5F6-4AB0-A10D-6D9485B9829C}"/>
+              </a:ext>
+            </a:extLst>
+          </p:cNvPr>
+          <p:cNvSpPr>
+            <a:spLocks xmlns:a="http://schemas.openxmlformats.org/drawingml/2006/main" noGrp="1"/>
+          </p:cNvSpPr>
+          <p:nvPr/>
+        </p:nvSpPr>
+        <p:spPr>
+          <a:xfrm xmlns:a="http://schemas.openxmlformats.org/drawingml/2006/main">
+            <a:off x="742950" y="4162425"/>
+            <a:ext cx="552450" cy="361950"/>
+          </a:xfrm>
+          <a:prstGeom xmlns:a="http://schemas.openxmlformats.org/drawingml/2006/main" prst="rect">
+            <a:avLst/>
+          </a:prstGeom>
+          <a:solidFill xmlns:a="http://schemas.openxmlformats.org/drawingml/2006/main">
+            <a:srgbClr val="000000">
+              <a:alpha val="0"/>
+            </a:srgbClr>
+          </a:solidFill>
+          <a:ln xmlns:a="http://schemas.openxmlformats.org/drawingml/2006/main" w="0">
+            <a:solidFill>
+              <a:srgbClr val="000000">
+                <a:alpha val="0"/>
+              </a:srgbClr>
+            </a:solidFill>
+            <a:prstDash val="solid"/>
+          </a:ln>
+        </p:spPr>
+        <p:txBody>
+          <a:bodyPr xmlns:a="http://schemas.openxmlformats.org/drawingml/2006/main" lIns="0" tIns="0" rIns="0" bIns="0" anchor="t"/>
+          <a:lstStyle xmlns:a="http://schemas.openxmlformats.org/drawingml/2006/main"/>
+          <a:p xmlns:a="http://schemas.openxmlformats.org/drawingml/2006/main">
+            <a:pPr algn="ctr">
+              <a:defRPr sz="2100" b="1">
+                <a:solidFill>
+                  <a:srgbClr val="FFFFFF"/>
+                </a:solidFill>
+                <a:latin typeface="Aptos Display"/>
+                <a:ea typeface="Aptos Display"/>
+                <a:cs typeface="Aptos Display"/>
+              </a:defRPr>
+            </a:pPr>
+            <a:r>
+              <a:rPr sz="2100" b="1">
+                <a:solidFill>
+                  <a:srgbClr val="FFFFFF"/>
+                </a:solidFill>
+                <a:latin typeface="Aptos Display"/>
+                <a:ea typeface="Aptos Display"/>
+                <a:cs typeface="Aptos Display"/>
+              </a:rPr>
+              <a:t>3</a:t>
+            </a:r>
+          </a:p>
+        </p:txBody>
+      </p:sp>
+      <p:sp>
+        <p:nvSpPr>
+          <p:cNvPr id="17" name="">
+            <a:extLst xmlns:a="http://schemas.openxmlformats.org/drawingml/2006/main">
+              <a:ext uri="{FF2B5EF4-FFF2-40B4-BE49-F238E27FC236}">
+                <a16:creationId xmlns:a16="http://schemas.microsoft.com/office/drawing/2014/main" id="{91244CF7-9221-4FBB-958B-1C387DD87C65}"/>
+              </a:ext>
+            </a:extLst>
+          </p:cNvPr>
+          <p:cNvSpPr>
+            <a:spLocks xmlns:a="http://schemas.openxmlformats.org/drawingml/2006/main" noGrp="1"/>
+          </p:cNvSpPr>
+          <p:nvPr/>
+        </p:nvSpPr>
+        <p:spPr>
+          <a:xfrm xmlns:a="http://schemas.openxmlformats.org/drawingml/2006/main">
+            <a:off x="1485900" y="4057650"/>
+            <a:ext cx="3714750" cy="266700"/>
+          </a:xfrm>
+          <a:prstGeom xmlns:a="http://schemas.openxmlformats.org/drawingml/2006/main" prst="rect">
+            <a:avLst/>
+          </a:prstGeom>
+          <a:solidFill xmlns:a="http://schemas.openxmlformats.org/drawingml/2006/main">
+            <a:srgbClr val="000000">
+              <a:alpha val="0"/>
+            </a:srgbClr>
+          </a:solidFill>
+          <a:ln xmlns:a="http://schemas.openxmlformats.org/drawingml/2006/main" w="0">
+            <a:solidFill>
+              <a:srgbClr val="000000">
+                <a:alpha val="0"/>
+              </a:srgbClr>
+            </a:solidFill>
+            <a:prstDash val="solid"/>
+          </a:ln>
+        </p:spPr>
+        <p:txBody>
+          <a:bodyPr xmlns:a="http://schemas.openxmlformats.org/drawingml/2006/main" lIns="0" tIns="0" rIns="0" bIns="0" anchor="t"/>
+          <a:lstStyle xmlns:a="http://schemas.openxmlformats.org/drawingml/2006/main"/>
+          <a:p xmlns:a="http://schemas.openxmlformats.org/drawingml/2006/main">
+            <a:pPr algn="l">
+              <a:defRPr sz="1500" b="1">
+                <a:solidFill>
+                  <a:srgbClr val="16213E"/>
+                </a:solidFill>
+                <a:latin typeface="Aptos Display"/>
+                <a:ea typeface="Aptos Display"/>
+                <a:cs typeface="Aptos Display"/>
+              </a:defRPr>
+            </a:pPr>
+            <a:r>
+              <a:rPr sz="1500" b="1">
+                <a:solidFill>
+                  <a:srgbClr val="16213E"/>
+                </a:solidFill>
+                <a:latin typeface="Aptos Display"/>
+                <a:ea typeface="Aptos Display"/>
+                <a:cs typeface="Aptos Display"/>
+              </a:rPr>
+              <a:t>Spiegare meglio le previsioni</a:t>
+            </a:r>
+          </a:p>
+        </p:txBody>
+      </p:sp>
+      <p:sp>
+        <p:nvSpPr>
+          <p:cNvPr id="18" name="">
+            <a:extLst xmlns:a="http://schemas.openxmlformats.org/drawingml/2006/main">
+              <a:ext uri="{FF2B5EF4-FFF2-40B4-BE49-F238E27FC236}">
+                <a16:creationId xmlns:a16="http://schemas.microsoft.com/office/drawing/2014/main" id="{B0D5E451-7515-43A1-A70F-51BED7D8EAFA}"/>
+              </a:ext>
+            </a:extLst>
+          </p:cNvPr>
+          <p:cNvSpPr>
+            <a:spLocks xmlns:a="http://schemas.openxmlformats.org/drawingml/2006/main" noGrp="1"/>
+          </p:cNvSpPr>
+          <p:nvPr/>
+        </p:nvSpPr>
+        <p:spPr>
+          <a:xfrm xmlns:a="http://schemas.openxmlformats.org/drawingml/2006/main">
+            <a:off x="1485900" y="4381500"/>
+            <a:ext cx="4048125" cy="590550"/>
+          </a:xfrm>
+          <a:prstGeom xmlns:a="http://schemas.openxmlformats.org/drawingml/2006/main" prst="rect">
+            <a:avLst/>
+          </a:prstGeom>
+          <a:solidFill xmlns:a="http://schemas.openxmlformats.org/drawingml/2006/main">
+            <a:srgbClr val="000000">
+              <a:alpha val="0"/>
+            </a:srgbClr>
+          </a:solidFill>
+          <a:ln xmlns:a="http://schemas.openxmlformats.org/drawingml/2006/main" w="0">
+            <a:solidFill>
+              <a:srgbClr val="000000">
+                <a:alpha val="0"/>
+              </a:srgbClr>
+            </a:solidFill>
+            <a:prstDash val="solid"/>
+          </a:ln>
+        </p:spPr>
+        <p:txBody>
+          <a:bodyPr xmlns:a="http://schemas.openxmlformats.org/drawingml/2006/main" lIns="0" tIns="0" rIns="0" bIns="0" anchor="t"/>
+          <a:lstStyle xmlns:a="http://schemas.openxmlformats.org/drawingml/2006/main"/>
+          <a:p xmlns:a="http://schemas.openxmlformats.org/drawingml/2006/main">
+            <a:pPr algn="l">
+              <a:defRPr sz="1050" b="0">
+                <a:solidFill>
+                  <a:srgbClr val="1F2937"/>
+                </a:solidFill>
+                <a:latin typeface="Aptos"/>
+                <a:ea typeface="Aptos"/>
+                <a:cs typeface="Aptos"/>
+              </a:defRPr>
+            </a:pPr>
+            <a:r>
+              <a:rPr sz="1050" b="0">
+                <a:solidFill>
+                  <a:srgbClr val="1F2937"/>
+                </a:solidFill>
+                <a:latin typeface="Aptos"/>
+                <a:ea typeface="Aptos"/>
+                <a:cs typeface="Aptos"/>
+              </a:rPr>
+              <a:t>Usare SHAP o feature importance locali per capire perche una regione viene classificata come critica.</a:t>
+            </a:r>
+          </a:p>
+        </p:txBody>
+      </p:sp>
+      <p:sp>
+        <p:nvSpPr>
+          <p:cNvPr id="19" name="">
+            <a:extLst xmlns:a="http://schemas.openxmlformats.org/drawingml/2006/main">
+              <a:ext uri="{FF2B5EF4-FFF2-40B4-BE49-F238E27FC236}">
+                <a16:creationId xmlns:a16="http://schemas.microsoft.com/office/drawing/2014/main" id="{CB337ACE-790A-4FC2-A6CF-8A495ADCA249}"/>
+              </a:ext>
+            </a:extLst>
+          </p:cNvPr>
+          <p:cNvSpPr>
+            <a:spLocks xmlns:a="http://schemas.openxmlformats.org/drawingml/2006/main" noGrp="1"/>
+          </p:cNvSpPr>
+          <p:nvPr/>
+        </p:nvSpPr>
+        <p:spPr>
+          <a:xfrm xmlns:a="http://schemas.openxmlformats.org/drawingml/2006/main">
+            <a:off x="6362700" y="2076450"/>
+            <a:ext cx="552450" cy="552450"/>
+          </a:xfrm>
+          <a:prstGeom xmlns:a="http://schemas.openxmlformats.org/drawingml/2006/main" prst="rect">
+            <a:avLst/>
+          </a:prstGeom>
+          <a:solidFill xmlns:a="http://schemas.openxmlformats.org/drawingml/2006/main">
+            <a:srgbClr val="6A994E"/>
+          </a:solidFill>
+          <a:ln xmlns:a="http://schemas.openxmlformats.org/drawingml/2006/main" w="0">
+            <a:solidFill>
+              <a:srgbClr val="000000">
+                <a:alpha val="0"/>
+              </a:srgbClr>
+            </a:solidFill>
+            <a:prstDash val="solid"/>
+          </a:ln>
+        </p:spPr>
+      </p:sp>
+      <p:sp>
+        <p:nvSpPr>
+          <p:cNvPr id="20" name="">
+            <a:extLst xmlns:a="http://schemas.openxmlformats.org/drawingml/2006/main">
+              <a:ext uri="{FF2B5EF4-FFF2-40B4-BE49-F238E27FC236}">
+                <a16:creationId xmlns:a16="http://schemas.microsoft.com/office/drawing/2014/main" id="{0F762D44-B44C-42CD-AE65-2F6853D296E5}"/>
+              </a:ext>
+            </a:extLst>
+          </p:cNvPr>
+          <p:cNvSpPr>
+            <a:spLocks xmlns:a="http://schemas.openxmlformats.org/drawingml/2006/main" noGrp="1"/>
+          </p:cNvSpPr>
+          <p:nvPr/>
+        </p:nvSpPr>
+        <p:spPr>
+          <a:xfrm xmlns:a="http://schemas.openxmlformats.org/drawingml/2006/main">
+            <a:off x="6362700" y="2162175"/>
+            <a:ext cx="552450" cy="361950"/>
+          </a:xfrm>
+          <a:prstGeom xmlns:a="http://schemas.openxmlformats.org/drawingml/2006/main" prst="rect">
+            <a:avLst/>
+          </a:prstGeom>
+          <a:solidFill xmlns:a="http://schemas.openxmlformats.org/drawingml/2006/main">
+            <a:srgbClr val="000000">
+              <a:alpha val="0"/>
+            </a:srgbClr>
+          </a:solidFill>
+          <a:ln xmlns:a="http://schemas.openxmlformats.org/drawingml/2006/main" w="0">
+            <a:solidFill>
+              <a:srgbClr val="000000">
+                <a:alpha val="0"/>
+              </a:srgbClr>
+            </a:solidFill>
+            <a:prstDash val="solid"/>
+          </a:ln>
+        </p:spPr>
+        <p:txBody>
+          <a:bodyPr xmlns:a="http://schemas.openxmlformats.org/drawingml/2006/main" lIns="0" tIns="0" rIns="0" bIns="0" anchor="t"/>
+          <a:lstStyle xmlns:a="http://schemas.openxmlformats.org/drawingml/2006/main"/>
+          <a:p xmlns:a="http://schemas.openxmlformats.org/drawingml/2006/main">
+            <a:pPr algn="ctr">
+              <a:defRPr sz="2100" b="1">
+                <a:solidFill>
+                  <a:srgbClr val="FFFFFF"/>
+                </a:solidFill>
+                <a:latin typeface="Aptos Display"/>
+                <a:ea typeface="Aptos Display"/>
+                <a:cs typeface="Aptos Display"/>
+              </a:defRPr>
+            </a:pPr>
+            <a:r>
+              <a:rPr sz="2100" b="1">
+                <a:solidFill>
+                  <a:srgbClr val="FFFFFF"/>
+                </a:solidFill>
+                <a:latin typeface="Aptos Display"/>
+                <a:ea typeface="Aptos Display"/>
+                <a:cs typeface="Aptos Display"/>
+              </a:rPr>
+              <a:t>4</a:t>
+            </a:r>
+          </a:p>
+        </p:txBody>
+      </p:sp>
+      <p:sp>
+        <p:nvSpPr>
+          <p:cNvPr id="21" name="">
+            <a:extLst xmlns:a="http://schemas.openxmlformats.org/drawingml/2006/main">
+              <a:ext uri="{FF2B5EF4-FFF2-40B4-BE49-F238E27FC236}">
+                <a16:creationId xmlns:a16="http://schemas.microsoft.com/office/drawing/2014/main" id="{35309988-566B-4B17-A97C-6E375AB7B843}"/>
+              </a:ext>
+            </a:extLst>
+          </p:cNvPr>
+          <p:cNvSpPr>
+            <a:spLocks xmlns:a="http://schemas.openxmlformats.org/drawingml/2006/main" noGrp="1"/>
+          </p:cNvSpPr>
+          <p:nvPr/>
+        </p:nvSpPr>
+        <p:spPr>
+          <a:xfrm xmlns:a="http://schemas.openxmlformats.org/drawingml/2006/main">
+            <a:off x="7105650" y="2057400"/>
+            <a:ext cx="3714750" cy="266700"/>
+          </a:xfrm>
+          <a:prstGeom xmlns:a="http://schemas.openxmlformats.org/drawingml/2006/main" prst="rect">
+            <a:avLst/>
+          </a:prstGeom>
+          <a:solidFill xmlns:a="http://schemas.openxmlformats.org/drawingml/2006/main">
+            <a:srgbClr val="000000">
+              <a:alpha val="0"/>
+            </a:srgbClr>
+          </a:solidFill>
+          <a:ln xmlns:a="http://schemas.openxmlformats.org/drawingml/2006/main" w="0">
+            <a:solidFill>
+              <a:srgbClr val="000000">
+                <a:alpha val="0"/>
+              </a:srgbClr>
+            </a:solidFill>
+            <a:prstDash val="solid"/>
+          </a:ln>
+        </p:spPr>
+        <p:txBody>
+          <a:bodyPr xmlns:a="http://schemas.openxmlformats.org/drawingml/2006/main" lIns="0" tIns="0" rIns="0" bIns="0" anchor="t"/>
+          <a:lstStyle xmlns:a="http://schemas.openxmlformats.org/drawingml/2006/main"/>
+          <a:p xmlns:a="http://schemas.openxmlformats.org/drawingml/2006/main">
+            <a:pPr algn="l">
+              <a:defRPr sz="1500" b="1">
+                <a:solidFill>
+                  <a:srgbClr val="16213E"/>
+                </a:solidFill>
+                <a:latin typeface="Aptos Display"/>
+                <a:ea typeface="Aptos Display"/>
+                <a:cs typeface="Aptos Display"/>
+              </a:defRPr>
+            </a:pPr>
+            <a:r>
+              <a:rPr sz="1500" b="1">
+                <a:solidFill>
+                  <a:srgbClr val="16213E"/>
+                </a:solidFill>
+                <a:latin typeface="Aptos Display"/>
+                <a:ea typeface="Aptos Display"/>
+                <a:cs typeface="Aptos Display"/>
+              </a:rPr>
+              <a:t>Costruire scenari what-if</a:t>
+            </a:r>
+          </a:p>
+        </p:txBody>
+      </p:sp>
+      <p:sp>
+        <p:nvSpPr>
+          <p:cNvPr id="22" name="">
+            <a:extLst xmlns:a="http://schemas.openxmlformats.org/drawingml/2006/main">
+              <a:ext uri="{FF2B5EF4-FFF2-40B4-BE49-F238E27FC236}">
+                <a16:creationId xmlns:a16="http://schemas.microsoft.com/office/drawing/2014/main" id="{02E22B6A-70E8-4113-9CDF-FA2832BA8CD5}"/>
+              </a:ext>
+            </a:extLst>
+          </p:cNvPr>
+          <p:cNvSpPr>
+            <a:spLocks xmlns:a="http://schemas.openxmlformats.org/drawingml/2006/main" noGrp="1"/>
+          </p:cNvSpPr>
+          <p:nvPr/>
+        </p:nvSpPr>
+        <p:spPr>
+          <a:xfrm xmlns:a="http://schemas.openxmlformats.org/drawingml/2006/main">
+            <a:off x="7105650" y="2381250"/>
+            <a:ext cx="4048125" cy="590550"/>
+          </a:xfrm>
+          <a:prstGeom xmlns:a="http://schemas.openxmlformats.org/drawingml/2006/main" prst="rect">
+            <a:avLst/>
+          </a:prstGeom>
+          <a:solidFill xmlns:a="http://schemas.openxmlformats.org/drawingml/2006/main">
+            <a:srgbClr val="000000">
+              <a:alpha val="0"/>
+            </a:srgbClr>
+          </a:solidFill>
+          <a:ln xmlns:a="http://schemas.openxmlformats.org/drawingml/2006/main" w="0">
+            <a:solidFill>
+              <a:srgbClr val="000000">
+                <a:alpha val="0"/>
+              </a:srgbClr>
+            </a:solidFill>
+            <a:prstDash val="solid"/>
+          </a:ln>
+        </p:spPr>
+        <p:txBody>
+          <a:bodyPr xmlns:a="http://schemas.openxmlformats.org/drawingml/2006/main" lIns="0" tIns="0" rIns="0" bIns="0" anchor="t"/>
+          <a:lstStyle xmlns:a="http://schemas.openxmlformats.org/drawingml/2006/main"/>
+          <a:p xmlns:a="http://schemas.openxmlformats.org/drawingml/2006/main">
+            <a:pPr algn="l">
+              <a:defRPr sz="1050" b="0">
+                <a:solidFill>
+                  <a:srgbClr val="1F2937"/>
+                </a:solidFill>
+                <a:latin typeface="Aptos"/>
+                <a:ea typeface="Aptos"/>
+                <a:cs typeface="Aptos"/>
+              </a:defRPr>
+            </a:pPr>
+            <a:r>
+              <a:rPr sz="1050" b="0">
+                <a:solidFill>
+                  <a:srgbClr val="1F2937"/>
+                </a:solidFill>
+                <a:latin typeface="Aptos"/>
+                <a:ea typeface="Aptos"/>
+                <a:cs typeface="Aptos"/>
+              </a:rPr>
+              <a:t>Simulare l'effetto di riduzioni dei NEET, aumento del PIL per occupato o nuove politiche attive sul rischio regionale.</a:t>
+            </a:r>
+          </a:p>
+        </p:txBody>
+      </p:sp>
+      <p:sp>
+        <p:nvSpPr>
+          <p:cNvPr id="23" name="">
+            <a:extLst xmlns:a="http://schemas.openxmlformats.org/drawingml/2006/main">
+              <a:ext uri="{FF2B5EF4-FFF2-40B4-BE49-F238E27FC236}">
+                <a16:creationId xmlns:a16="http://schemas.microsoft.com/office/drawing/2014/main" id="{18B9792F-72F4-4D9B-90ED-FE11E869A1C7}"/>
+              </a:ext>
+            </a:extLst>
+          </p:cNvPr>
+          <p:cNvSpPr>
+            <a:spLocks xmlns:a="http://schemas.openxmlformats.org/drawingml/2006/main" noGrp="1"/>
+          </p:cNvSpPr>
+          <p:nvPr/>
+        </p:nvSpPr>
+        <p:spPr>
+          <a:xfrm xmlns:a="http://schemas.openxmlformats.org/drawingml/2006/main">
+            <a:off x="6362700" y="3505200"/>
+            <a:ext cx="552450" cy="552450"/>
+          </a:xfrm>
+          <a:prstGeom xmlns:a="http://schemas.openxmlformats.org/drawingml/2006/main" prst="rect">
+            <a:avLst/>
+          </a:prstGeom>
+          <a:solidFill xmlns:a="http://schemas.openxmlformats.org/drawingml/2006/main">
+            <a:srgbClr val="8E6C8A"/>
+          </a:solidFill>
+          <a:ln xmlns:a="http://schemas.openxmlformats.org/drawingml/2006/main" w="0">
+            <a:solidFill>
+              <a:srgbClr val="000000">
+                <a:alpha val="0"/>
+              </a:srgbClr>
+            </a:solidFill>
+            <a:prstDash val="solid"/>
+          </a:ln>
+        </p:spPr>
+      </p:sp>
+      <p:sp>
+        <p:nvSpPr>
+          <p:cNvPr id="24" name="">
+            <a:extLst xmlns:a="http://schemas.openxmlformats.org/drawingml/2006/main">
+              <a:ext uri="{FF2B5EF4-FFF2-40B4-BE49-F238E27FC236}">
+                <a16:creationId xmlns:a16="http://schemas.microsoft.com/office/drawing/2014/main" id="{293C8497-E961-441F-942F-99336F89D838}"/>
+              </a:ext>
+            </a:extLst>
+          </p:cNvPr>
+          <p:cNvSpPr>
+            <a:spLocks xmlns:a="http://schemas.openxmlformats.org/drawingml/2006/main" noGrp="1"/>
+          </p:cNvSpPr>
+          <p:nvPr/>
+        </p:nvSpPr>
+        <p:spPr>
+          <a:xfrm xmlns:a="http://schemas.openxmlformats.org/drawingml/2006/main">
+            <a:off x="6362700" y="3590925"/>
+            <a:ext cx="552450" cy="361950"/>
+          </a:xfrm>
+          <a:prstGeom xmlns:a="http://schemas.openxmlformats.org/drawingml/2006/main" prst="rect">
+            <a:avLst/>
+          </a:prstGeom>
+          <a:solidFill xmlns:a="http://schemas.openxmlformats.org/drawingml/2006/main">
+            <a:srgbClr val="000000">
+              <a:alpha val="0"/>
+            </a:srgbClr>
+          </a:solidFill>
+          <a:ln xmlns:a="http://schemas.openxmlformats.org/drawingml/2006/main" w="0">
+            <a:solidFill>
+              <a:srgbClr val="000000">
+                <a:alpha val="0"/>
+              </a:srgbClr>
+            </a:solidFill>
+            <a:prstDash val="solid"/>
+          </a:ln>
+        </p:spPr>
+        <p:txBody>
+          <a:bodyPr xmlns:a="http://schemas.openxmlformats.org/drawingml/2006/main" lIns="0" tIns="0" rIns="0" bIns="0" anchor="t"/>
+          <a:lstStyle xmlns:a="http://schemas.openxmlformats.org/drawingml/2006/main"/>
+          <a:p xmlns:a="http://schemas.openxmlformats.org/drawingml/2006/main">
+            <a:pPr algn="ctr">
+              <a:defRPr sz="2100" b="1">
+                <a:solidFill>
+                  <a:srgbClr val="FFFFFF"/>
+                </a:solidFill>
+                <a:latin typeface="Aptos Display"/>
+                <a:ea typeface="Aptos Display"/>
+                <a:cs typeface="Aptos Display"/>
+              </a:defRPr>
+            </a:pPr>
+            <a:r>
+              <a:rPr sz="2100" b="1">
+                <a:solidFill>
+                  <a:srgbClr val="FFFFFF"/>
+                </a:solidFill>
+                <a:latin typeface="Aptos Display"/>
+                <a:ea typeface="Aptos Display"/>
+                <a:cs typeface="Aptos Display"/>
+              </a:rPr>
+              <a:t>5</a:t>
+            </a:r>
+          </a:p>
+        </p:txBody>
+      </p:sp>
+      <p:sp>
+        <p:nvSpPr>
+          <p:cNvPr id="25" name="">
+            <a:extLst xmlns:a="http://schemas.openxmlformats.org/drawingml/2006/main">
+              <a:ext uri="{FF2B5EF4-FFF2-40B4-BE49-F238E27FC236}">
+                <a16:creationId xmlns:a16="http://schemas.microsoft.com/office/drawing/2014/main" id="{F9E46212-F8B0-4D09-8633-D196588F60C5}"/>
+              </a:ext>
+            </a:extLst>
+          </p:cNvPr>
+          <p:cNvSpPr>
+            <a:spLocks xmlns:a="http://schemas.openxmlformats.org/drawingml/2006/main" noGrp="1"/>
+          </p:cNvSpPr>
+          <p:nvPr/>
+        </p:nvSpPr>
+        <p:spPr>
+          <a:xfrm xmlns:a="http://schemas.openxmlformats.org/drawingml/2006/main">
+            <a:off x="7105650" y="3486150"/>
+            <a:ext cx="3714750" cy="266700"/>
+          </a:xfrm>
+          <a:prstGeom xmlns:a="http://schemas.openxmlformats.org/drawingml/2006/main" prst="rect">
+            <a:avLst/>
+          </a:prstGeom>
+          <a:solidFill xmlns:a="http://schemas.openxmlformats.org/drawingml/2006/main">
+            <a:srgbClr val="000000">
+              <a:alpha val="0"/>
+            </a:srgbClr>
+          </a:solidFill>
+          <a:ln xmlns:a="http://schemas.openxmlformats.org/drawingml/2006/main" w="0">
+            <a:solidFill>
+              <a:srgbClr val="000000">
+                <a:alpha val="0"/>
+              </a:srgbClr>
+            </a:solidFill>
+            <a:prstDash val="solid"/>
+          </a:ln>
+        </p:spPr>
+        <p:txBody>
+          <a:bodyPr xmlns:a="http://schemas.openxmlformats.org/drawingml/2006/main" lIns="0" tIns="0" rIns="0" bIns="0" anchor="t"/>
+          <a:lstStyle xmlns:a="http://schemas.openxmlformats.org/drawingml/2006/main"/>
+          <a:p xmlns:a="http://schemas.openxmlformats.org/drawingml/2006/main">
+            <a:pPr algn="l">
+              <a:defRPr sz="1500" b="1">
+                <a:solidFill>
+                  <a:srgbClr val="16213E"/>
+                </a:solidFill>
+                <a:latin typeface="Aptos Display"/>
+                <a:ea typeface="Aptos Display"/>
+                <a:cs typeface="Aptos Display"/>
+              </a:defRPr>
+            </a:pPr>
+            <a:r>
+              <a:rPr sz="1500" b="1">
+                <a:solidFill>
+                  <a:srgbClr val="16213E"/>
+                </a:solidFill>
+                <a:latin typeface="Aptos Display"/>
+                <a:ea typeface="Aptos Display"/>
+                <a:cs typeface="Aptos Display"/>
+              </a:rPr>
+              <a:t>Dashboard interattiva</a:t>
+            </a:r>
+          </a:p>
+        </p:txBody>
+      </p:sp>
+      <p:sp>
+        <p:nvSpPr>
+          <p:cNvPr id="26" name="">
+            <a:extLst xmlns:a="http://schemas.openxmlformats.org/drawingml/2006/main">
+              <a:ext uri="{FF2B5EF4-FFF2-40B4-BE49-F238E27FC236}">
+                <a16:creationId xmlns:a16="http://schemas.microsoft.com/office/drawing/2014/main" id="{324F0E99-0CB2-4218-836D-6A023B8F8620}"/>
+              </a:ext>
+            </a:extLst>
+          </p:cNvPr>
+          <p:cNvSpPr>
+            <a:spLocks xmlns:a="http://schemas.openxmlformats.org/drawingml/2006/main" noGrp="1"/>
+          </p:cNvSpPr>
+          <p:nvPr/>
+        </p:nvSpPr>
+        <p:spPr>
+          <a:xfrm xmlns:a="http://schemas.openxmlformats.org/drawingml/2006/main">
+            <a:off x="7105650" y="3810000"/>
+            <a:ext cx="4048125" cy="590550"/>
+          </a:xfrm>
+          <a:prstGeom xmlns:a="http://schemas.openxmlformats.org/drawingml/2006/main" prst="rect">
+            <a:avLst/>
+          </a:prstGeom>
+          <a:solidFill xmlns:a="http://schemas.openxmlformats.org/drawingml/2006/main">
+            <a:srgbClr val="000000">
+              <a:alpha val="0"/>
+            </a:srgbClr>
+          </a:solidFill>
+          <a:ln xmlns:a="http://schemas.openxmlformats.org/drawingml/2006/main" w="0">
+            <a:solidFill>
+              <a:srgbClr val="000000">
+                <a:alpha val="0"/>
+              </a:srgbClr>
+            </a:solidFill>
+            <a:prstDash val="solid"/>
+          </a:ln>
+        </p:spPr>
+        <p:txBody>
+          <a:bodyPr xmlns:a="http://schemas.openxmlformats.org/drawingml/2006/main" lIns="0" tIns="0" rIns="0" bIns="0" anchor="t"/>
+          <a:lstStyle xmlns:a="http://schemas.openxmlformats.org/drawingml/2006/main"/>
+          <a:p xmlns:a="http://schemas.openxmlformats.org/drawingml/2006/main">
+            <a:pPr algn="l">
+              <a:defRPr sz="1050" b="0">
+                <a:solidFill>
+                  <a:srgbClr val="1F2937"/>
+                </a:solidFill>
+                <a:latin typeface="Aptos"/>
+                <a:ea typeface="Aptos"/>
+                <a:cs typeface="Aptos"/>
+              </a:defRPr>
+            </a:pPr>
+            <a:r>
+              <a:rPr sz="1050" b="0">
+                <a:solidFill>
+                  <a:srgbClr val="1F2937"/>
+                </a:solidFill>
+                <a:latin typeface="Aptos"/>
+                <a:ea typeface="Aptos"/>
+                <a:cs typeface="Aptos"/>
+              </a:rPr>
+              <a:t>Pubblicare mappe e ranking regionali aggiornabili, utili per presentare le priorita di intervento in modo immediato.</a:t>
+            </a:r>
+          </a:p>
+        </p:txBody>
+      </p:sp>
+      <p:sp>
+        <p:nvSpPr>
+          <p:cNvPr id="27" name="">
+            <a:extLst xmlns:a="http://schemas.openxmlformats.org/drawingml/2006/main">
+              <a:ext uri="{FF2B5EF4-FFF2-40B4-BE49-F238E27FC236}">
+                <a16:creationId xmlns:a16="http://schemas.microsoft.com/office/drawing/2014/main" id="{8A203218-CF77-498F-A2D3-0BBD77B7736D}"/>
+              </a:ext>
+            </a:extLst>
+          </p:cNvPr>
+          <p:cNvSpPr>
+            <a:spLocks xmlns:a="http://schemas.openxmlformats.org/drawingml/2006/main" noGrp="1"/>
+          </p:cNvSpPr>
+          <p:nvPr/>
+        </p:nvSpPr>
+        <p:spPr>
+          <a:xfrm xmlns:a="http://schemas.openxmlformats.org/drawingml/2006/main">
+            <a:off x="523875" y="5524500"/>
+            <a:ext cx="10668000" cy="552450"/>
+          </a:xfrm>
+          <a:prstGeom xmlns:a="http://schemas.openxmlformats.org/drawingml/2006/main" prst="rect">
+            <a:avLst/>
+          </a:prstGeom>
+          <a:solidFill xmlns:a="http://schemas.openxmlformats.org/drawingml/2006/main">
+            <a:srgbClr val="000000">
+              <a:alpha val="0"/>
+            </a:srgbClr>
+          </a:solidFill>
+          <a:ln xmlns:a="http://schemas.openxmlformats.org/drawingml/2006/main" w="0">
+            <a:solidFill>
+              <a:srgbClr val="000000">
+                <a:alpha val="0"/>
+              </a:srgbClr>
+            </a:solidFill>
+            <a:prstDash val="solid"/>
+          </a:ln>
+        </p:spPr>
+        <p:txBody>
+          <a:bodyPr xmlns:a="http://schemas.openxmlformats.org/drawingml/2006/main" lIns="0" tIns="0" rIns="0" bIns="0" anchor="t"/>
+          <a:lstStyle xmlns:a="http://schemas.openxmlformats.org/drawingml/2006/main"/>
+          <a:p xmlns:a="http://schemas.openxmlformats.org/drawingml/2006/main">
+            <a:pPr algn="l">
+              <a:defRPr sz="1500" b="1">
+                <a:solidFill>
+                  <a:srgbClr val="16213E"/>
+                </a:solidFill>
+                <a:latin typeface="Aptos Display"/>
+                <a:ea typeface="Aptos Display"/>
+                <a:cs typeface="Aptos Display"/>
+              </a:defRPr>
+            </a:pPr>
+            <a:r>
+              <a:rPr sz="1500" b="1">
+                <a:solidFill>
+                  <a:srgbClr val="16213E"/>
+                </a:solidFill>
+                <a:latin typeface="Aptos Display"/>
+                <a:ea typeface="Aptos Display"/>
+                <a:cs typeface="Aptos Display"/>
+              </a:rPr>
+              <a:t>Il passo successivo e trasformare il modello in un sistema di monitoraggio: aggiornabile, spiegabile e orientato alle decisioni.</a:t>
+            </a:r>
+          </a:p>
+        </p:txBody>
+      </p:sp>
+    </p:spTree>
+    <p:extLst>
+      <p:ext uri="{BB962C8B-B14F-4D97-AF65-F5344CB8AC3E}">
+        <p14:creationId xmlns:p14="http://schemas.microsoft.com/office/powerpoint/2010/main" val="171388266"/>
+      </p:ext>
+    </p:extLst>
+  </p:cSld>
+</p:sld>
+</file>
+
+<file path=ppt/slides/slide17.xml><?xml version="1.0" encoding="utf-8"?>
+<p:sld xmlns:p="http://schemas.openxmlformats.org/presentationml/2006/main">
+  <p:cSld>
+    <p:spTree>
+      <p:nvGrpSpPr>
+        <p:cNvPr id="1" name=""/>
+        <p:cNvGrpSpPr/>
+        <p:nvPr/>
+      </p:nvGrpSpPr>
+      <p:grpSpPr>
+        <a:xfrm xmlns:a="http://schemas.openxmlformats.org/drawingml/2006/main"/>
+      </p:grpSpPr>
+      <p:sp>
+        <p:nvSpPr>
+          <p:cNvPr id="1" name="">
+            <a:extLst xmlns:a="http://schemas.openxmlformats.org/drawingml/2006/main">
+              <a:ext uri="{FF2B5EF4-FFF2-40B4-BE49-F238E27FC236}">
+                <a16:creationId xmlns:a16="http://schemas.microsoft.com/office/drawing/2014/main" id="{CA4B36E6-8E19-438C-A052-DFAD3E663E50}"/>
+              </a:ext>
+            </a:extLst>
+          </p:cNvPr>
+          <p:cNvSpPr>
+            <a:spLocks xmlns:a="http://schemas.openxmlformats.org/drawingml/2006/main" noGrp="1"/>
+          </p:cNvSpPr>
+          <p:nvPr/>
+        </p:nvSpPr>
+        <p:spPr>
+          <a:xfrm xmlns:a="http://schemas.openxmlformats.org/drawingml/2006/main">
+            <a:off x="0" y="0"/>
+            <a:ext cx="12192000" cy="6858000"/>
+          </a:xfrm>
+          <a:prstGeom xmlns:a="http://schemas.openxmlformats.org/drawingml/2006/main" prst="rect">
+            <a:avLst/>
+          </a:prstGeom>
+          <a:solidFill xmlns:a="http://schemas.openxmlformats.org/drawingml/2006/main">
+            <a:srgbClr val="16213E"/>
+          </a:solidFill>
+          <a:ln xmlns:a="http://schemas.openxmlformats.org/drawingml/2006/main" w="0">
+            <a:solidFill>
+              <a:srgbClr val="000000">
+                <a:alpha val="0"/>
+              </a:srgbClr>
+            </a:solidFill>
+            <a:prstDash val="solid"/>
+          </a:ln>
+        </p:spPr>
+      </p:sp>
+      <p:sp>
+        <p:nvSpPr>
+          <p:cNvPr id="2" name="">
+            <a:extLst xmlns:a="http://schemas.openxmlformats.org/drawingml/2006/main">
+              <a:ext uri="{FF2B5EF4-FFF2-40B4-BE49-F238E27FC236}">
+                <a16:creationId xmlns:a16="http://schemas.microsoft.com/office/drawing/2014/main" id="{BD3FBE0D-C18F-42C2-B21F-2599E6DD1986}"/>
+              </a:ext>
+            </a:extLst>
+          </p:cNvPr>
+          <p:cNvSpPr>
+            <a:spLocks xmlns:a="http://schemas.openxmlformats.org/drawingml/2006/main" noGrp="1"/>
+          </p:cNvSpPr>
+          <p:nvPr/>
+        </p:nvSpPr>
+        <p:spPr>
+          <a:xfrm xmlns:a="http://schemas.openxmlformats.org/drawingml/2006/main">
+            <a:off x="0" y="0"/>
+            <a:ext cx="12192000" cy="6858000"/>
+          </a:xfrm>
+          <a:prstGeom xmlns:a="http://schemas.openxmlformats.org/drawingml/2006/main" prst="rect">
+            <a:avLst/>
+          </a:prstGeom>
+          <a:gradFill xmlns:a="http://schemas.openxmlformats.org/drawingml/2006/main">
+            <a:gsLst>
+              <a:gs pos="0">
+                <a:srgbClr val="16213E"/>
+              </a:gs>
+              <a:gs pos="100000">
+                <a:srgbClr val="2A9D8F"/>
+              </a:gs>
+            </a:gsLst>
+            <a:lin ang="600000"/>
+          </a:gradFill>
+          <a:ln xmlns:a="http://schemas.openxmlformats.org/drawingml/2006/main" w="0">
+            <a:solidFill>
+              <a:srgbClr val="000000">
+                <a:alpha val="0"/>
+              </a:srgbClr>
+            </a:solidFill>
+            <a:prstDash val="solid"/>
+          </a:ln>
+        </p:spPr>
+      </p:sp>
+      <p:sp>
+        <p:nvSpPr>
+          <p:cNvPr id="3" name="">
+            <a:extLst xmlns:a="http://schemas.openxmlformats.org/drawingml/2006/main">
+              <a:ext uri="{FF2B5EF4-FFF2-40B4-BE49-F238E27FC236}">
+                <a16:creationId xmlns:a16="http://schemas.microsoft.com/office/drawing/2014/main" id="{A8F4EEC7-0A18-4240-A674-EB783D9901A4}"/>
+              </a:ext>
+            </a:extLst>
+          </p:cNvPr>
+          <p:cNvSpPr>
+            <a:spLocks xmlns:a="http://schemas.openxmlformats.org/drawingml/2006/main" noGrp="1"/>
+          </p:cNvSpPr>
+          <p:nvPr/>
+        </p:nvSpPr>
+        <p:spPr>
+          <a:xfrm xmlns:a="http://schemas.openxmlformats.org/drawingml/2006/main">
+            <a:off x="904875" y="1000125"/>
+            <a:ext cx="8572500" cy="781050"/>
+          </a:xfrm>
+          <a:prstGeom xmlns:a="http://schemas.openxmlformats.org/drawingml/2006/main" prst="rect">
+            <a:avLst/>
+          </a:prstGeom>
+          <a:solidFill xmlns:a="http://schemas.openxmlformats.org/drawingml/2006/main">
+            <a:srgbClr val="000000">
+              <a:alpha val="0"/>
+            </a:srgbClr>
+          </a:solidFill>
+          <a:ln xmlns:a="http://schemas.openxmlformats.org/drawingml/2006/main" w="0">
+            <a:solidFill>
+              <a:srgbClr val="000000">
+                <a:alpha val="0"/>
+              </a:srgbClr>
+            </a:solidFill>
+            <a:prstDash val="solid"/>
+          </a:ln>
+        </p:spPr>
+        <p:txBody>
+          <a:bodyPr xmlns:a="http://schemas.openxmlformats.org/drawingml/2006/main" lIns="0" tIns="0" rIns="0" bIns="0" anchor="t"/>
+          <a:lstStyle xmlns:a="http://schemas.openxmlformats.org/drawingml/2006/main"/>
+          <a:p xmlns:a="http://schemas.openxmlformats.org/drawingml/2006/main">
+            <a:pPr algn="l">
+              <a:defRPr sz="3600" b="1">
+                <a:solidFill>
+                  <a:srgbClr val="FFFFFF"/>
+                </a:solidFill>
+                <a:latin typeface="Aptos Display"/>
+                <a:ea typeface="Aptos Display"/>
+                <a:cs typeface="Aptos Display"/>
+              </a:defRPr>
+            </a:pPr>
+            <a:r>
+              <a:rPr sz="3600" b="1">
+                <a:solidFill>
+                  <a:srgbClr val="FFFFFF"/>
+                </a:solidFill>
+                <a:latin typeface="Aptos Display"/>
+                <a:ea typeface="Aptos Display"/>
+                <a:cs typeface="Aptos Display"/>
+              </a:rPr>
+              <a:t>Grazie per l'attenzione</a:t>
+            </a:r>
+          </a:p>
+        </p:txBody>
+      </p:sp>
+      <p:sp>
+        <p:nvSpPr>
+          <p:cNvPr id="4" name="">
+            <a:extLst xmlns:a="http://schemas.openxmlformats.org/drawingml/2006/main">
+              <a:ext uri="{FF2B5EF4-FFF2-40B4-BE49-F238E27FC236}">
+                <a16:creationId xmlns:a16="http://schemas.microsoft.com/office/drawing/2014/main" id="{4060AEAF-AD81-455C-A35C-147BEA942170}"/>
+              </a:ext>
+            </a:extLst>
+          </p:cNvPr>
+          <p:cNvSpPr>
+            <a:spLocks xmlns:a="http://schemas.openxmlformats.org/drawingml/2006/main" noGrp="1"/>
+          </p:cNvSpPr>
+          <p:nvPr/>
+        </p:nvSpPr>
+        <p:spPr>
+          <a:xfrm xmlns:a="http://schemas.openxmlformats.org/drawingml/2006/main">
+            <a:off x="942975" y="1885950"/>
+            <a:ext cx="8382000" cy="342900"/>
+          </a:xfrm>
+          <a:prstGeom xmlns:a="http://schemas.openxmlformats.org/drawingml/2006/main" prst="rect">
+            <a:avLst/>
+          </a:prstGeom>
+          <a:solidFill xmlns:a="http://schemas.openxmlformats.org/drawingml/2006/main">
+            <a:srgbClr val="000000">
+              <a:alpha val="0"/>
+            </a:srgbClr>
+          </a:solidFill>
+          <a:ln xmlns:a="http://schemas.openxmlformats.org/drawingml/2006/main" w="0">
+            <a:solidFill>
+              <a:srgbClr val="000000">
+                <a:alpha val="0"/>
+              </a:srgbClr>
+            </a:solidFill>
+            <a:prstDash val="solid"/>
+          </a:ln>
+        </p:spPr>
+        <p:txBody>
+          <a:bodyPr xmlns:a="http://schemas.openxmlformats.org/drawingml/2006/main" lIns="0" tIns="0" rIns="0" bIns="0" anchor="t"/>
+          <a:lstStyle xmlns:a="http://schemas.openxmlformats.org/drawingml/2006/main"/>
+          <a:p xmlns:a="http://schemas.openxmlformats.org/drawingml/2006/main">
+            <a:pPr algn="l">
+              <a:defRPr sz="1650" b="0">
+                <a:solidFill>
+                  <a:srgbClr val="E6F4F1"/>
+                </a:solidFill>
+                <a:latin typeface="Aptos"/>
+                <a:ea typeface="Aptos"/>
+                <a:cs typeface="Aptos"/>
+              </a:defRPr>
+            </a:pPr>
+            <a:r>
+              <a:rPr sz="1650" b="0">
+                <a:solidFill>
+                  <a:srgbClr val="E6F4F1"/>
+                </a:solidFill>
+                <a:latin typeface="Aptos"/>
+                <a:ea typeface="Aptos"/>
+                <a:cs typeface="Aptos"/>
+              </a:rPr>
+              <a:t>Previsione di occupazione e disoccupazione regionale in Italia</a:t>
+            </a:r>
+          </a:p>
+        </p:txBody>
+      </p:sp>
+      <p:sp>
+        <p:nvSpPr>
+          <p:cNvPr id="5" name="">
+            <a:extLst xmlns:a="http://schemas.openxmlformats.org/drawingml/2006/main">
+              <a:ext uri="{FF2B5EF4-FFF2-40B4-BE49-F238E27FC236}">
+                <a16:creationId xmlns:a16="http://schemas.microsoft.com/office/drawing/2014/main" id="{EDD681B5-0070-4845-BB9E-BA2097AE7D44}"/>
+              </a:ext>
+            </a:extLst>
+          </p:cNvPr>
+          <p:cNvSpPr>
+            <a:spLocks xmlns:a="http://schemas.openxmlformats.org/drawingml/2006/main" noGrp="1"/>
+          </p:cNvSpPr>
+          <p:nvPr/>
+        </p:nvSpPr>
+        <p:spPr>
+          <a:xfrm xmlns:a="http://schemas.openxmlformats.org/drawingml/2006/main">
+            <a:off x="876300" y="3000375"/>
+            <a:ext cx="8572500" cy="1485900"/>
+          </a:xfrm>
+          <a:prstGeom xmlns:a="http://schemas.openxmlformats.org/drawingml/2006/main" prst="rect">
+            <a:avLst/>
+          </a:prstGeom>
+          <a:solidFill xmlns:a="http://schemas.openxmlformats.org/drawingml/2006/main">
+            <a:srgbClr val="FFFFFF"/>
+          </a:solidFill>
+          <a:ln xmlns:a="http://schemas.openxmlformats.org/drawingml/2006/main" w="9525">
+            <a:solidFill>
+              <a:srgbClr val="D8DDD2"/>
+            </a:solidFill>
+            <a:prstDash val="solid"/>
+          </a:ln>
+        </p:spPr>
+      </p:sp>
+      <p:sp>
+        <p:nvSpPr>
+          <p:cNvPr id="6" name="">
+            <a:extLst xmlns:a="http://schemas.openxmlformats.org/drawingml/2006/main">
+              <a:ext uri="{FF2B5EF4-FFF2-40B4-BE49-F238E27FC236}">
+                <a16:creationId xmlns:a16="http://schemas.microsoft.com/office/drawing/2014/main" id="{D6D407E6-7DDF-410F-97FB-6EDFB637D348}"/>
+              </a:ext>
+            </a:extLst>
+          </p:cNvPr>
+          <p:cNvSpPr>
+            <a:spLocks xmlns:a="http://schemas.openxmlformats.org/drawingml/2006/main" noGrp="1"/>
+          </p:cNvSpPr>
+          <p:nvPr/>
+        </p:nvSpPr>
+        <p:spPr>
+          <a:xfrm xmlns:a="http://schemas.openxmlformats.org/drawingml/2006/main">
+            <a:off x="876300" y="3000375"/>
+            <a:ext cx="95250" cy="1485900"/>
+          </a:xfrm>
+          <a:prstGeom xmlns:a="http://schemas.openxmlformats.org/drawingml/2006/main" prst="rect">
+            <a:avLst/>
+          </a:prstGeom>
+          <a:solidFill xmlns:a="http://schemas.openxmlformats.org/drawingml/2006/main">
+            <a:srgbClr val="E9C46A"/>
+          </a:solidFill>
+          <a:ln xmlns:a="http://schemas.openxmlformats.org/drawingml/2006/main" w="0">
+            <a:solidFill>
+              <a:srgbClr val="000000">
+                <a:alpha val="0"/>
+              </a:srgbClr>
+            </a:solidFill>
+            <a:prstDash val="solid"/>
+          </a:ln>
+        </p:spPr>
+      </p:sp>
+      <p:sp>
+        <p:nvSpPr>
+          <p:cNvPr id="7" name="">
+            <a:extLst xmlns:a="http://schemas.openxmlformats.org/drawingml/2006/main">
+              <a:ext uri="{FF2B5EF4-FFF2-40B4-BE49-F238E27FC236}">
+                <a16:creationId xmlns:a16="http://schemas.microsoft.com/office/drawing/2014/main" id="{D032538B-DDAF-462B-B472-B8673259113B}"/>
+              </a:ext>
+            </a:extLst>
+          </p:cNvPr>
+          <p:cNvSpPr>
+            <a:spLocks xmlns:a="http://schemas.openxmlformats.org/drawingml/2006/main" noGrp="1"/>
+          </p:cNvSpPr>
+          <p:nvPr/>
+        </p:nvSpPr>
+        <p:spPr>
+          <a:xfrm xmlns:a="http://schemas.openxmlformats.org/drawingml/2006/main">
+            <a:off x="1238250" y="3257550"/>
+            <a:ext cx="4953000" cy="285750"/>
+          </a:xfrm>
+          <a:prstGeom xmlns:a="http://schemas.openxmlformats.org/drawingml/2006/main" prst="rect">
+            <a:avLst/>
+          </a:prstGeom>
+          <a:solidFill xmlns:a="http://schemas.openxmlformats.org/drawingml/2006/main">
+            <a:srgbClr val="000000">
+              <a:alpha val="0"/>
+            </a:srgbClr>
+          </a:solidFill>
+          <a:ln xmlns:a="http://schemas.openxmlformats.org/drawingml/2006/main" w="0">
+            <a:solidFill>
+              <a:srgbClr val="000000">
+                <a:alpha val="0"/>
+              </a:srgbClr>
+            </a:solidFill>
+            <a:prstDash val="solid"/>
+          </a:ln>
+        </p:spPr>
+        <p:txBody>
+          <a:bodyPr xmlns:a="http://schemas.openxmlformats.org/drawingml/2006/main" lIns="0" tIns="0" rIns="0" bIns="0" anchor="t"/>
+          <a:lstStyle xmlns:a="http://schemas.openxmlformats.org/drawingml/2006/main"/>
+          <a:p xmlns:a="http://schemas.openxmlformats.org/drawingml/2006/main">
+            <a:pPr algn="l">
+              <a:defRPr sz="1725" b="1">
+                <a:solidFill>
+                  <a:srgbClr val="16213E"/>
+                </a:solidFill>
+                <a:latin typeface="Aptos Display"/>
+                <a:ea typeface="Aptos Display"/>
+                <a:cs typeface="Aptos Display"/>
+              </a:defRPr>
+            </a:pPr>
+            <a:r>
+              <a:rPr sz="1725" b="1">
+                <a:solidFill>
+                  <a:srgbClr val="16213E"/>
+                </a:solidFill>
+                <a:latin typeface="Aptos Display"/>
+                <a:ea typeface="Aptos Display"/>
+                <a:cs typeface="Aptos Display"/>
+              </a:rPr>
+              <a:t>Repository GitHub del progetto</a:t>
+            </a:r>
+          </a:p>
+        </p:txBody>
+      </p:sp>
+      <p:sp>
+        <p:nvSpPr>
+          <p:cNvPr id="8" name="">
+            <a:extLst xmlns:a="http://schemas.openxmlformats.org/drawingml/2006/main">
+              <a:ext uri="{FF2B5EF4-FFF2-40B4-BE49-F238E27FC236}">
+                <a16:creationId xmlns:a16="http://schemas.microsoft.com/office/drawing/2014/main" id="{2D5F1F2B-23EE-4A7E-A2C2-B29C42CEDEF0}"/>
+              </a:ext>
+            </a:extLst>
+          </p:cNvPr>
+          <p:cNvSpPr>
+            <a:spLocks xmlns:a="http://schemas.openxmlformats.org/drawingml/2006/main" noGrp="1"/>
+          </p:cNvSpPr>
+          <p:nvPr/>
+        </p:nvSpPr>
+        <p:spPr>
+          <a:xfrm xmlns:a="http://schemas.openxmlformats.org/drawingml/2006/main">
+            <a:off x="1238250" y="3676650"/>
+            <a:ext cx="7239000" cy="304800"/>
+          </a:xfrm>
+          <a:prstGeom xmlns:a="http://schemas.openxmlformats.org/drawingml/2006/main" prst="rect">
+            <a:avLst/>
+          </a:prstGeom>
+          <a:solidFill xmlns:a="http://schemas.openxmlformats.org/drawingml/2006/main">
+            <a:srgbClr val="000000">
+              <a:alpha val="0"/>
+            </a:srgbClr>
+          </a:solidFill>
+          <a:ln xmlns:a="http://schemas.openxmlformats.org/drawingml/2006/main" w="0">
+            <a:solidFill>
+              <a:srgbClr val="000000">
+                <a:alpha val="0"/>
+              </a:srgbClr>
+            </a:solidFill>
+            <a:prstDash val="solid"/>
+          </a:ln>
+        </p:spPr>
+        <p:txBody>
+          <a:bodyPr xmlns:a="http://schemas.openxmlformats.org/drawingml/2006/main" lIns="0" tIns="0" rIns="0" bIns="0" anchor="t"/>
+          <a:lstStyle xmlns:a="http://schemas.openxmlformats.org/drawingml/2006/main"/>
+          <a:p xmlns:a="http://schemas.openxmlformats.org/drawingml/2006/main">
+            <a:pPr algn="l">
+              <a:defRPr sz="1650" b="1">
+                <a:solidFill>
+                  <a:srgbClr val="457B9D"/>
+                </a:solidFill>
+                <a:latin typeface="Aptos"/>
+                <a:ea typeface="Aptos"/>
+                <a:cs typeface="Aptos"/>
+              </a:defRPr>
+            </a:pPr>
+            <a:r>
+              <a:rPr sz="1650" b="1">
+                <a:solidFill>
+                  <a:srgbClr val="457B9D"/>
+                </a:solidFill>
+                <a:latin typeface="Aptos"/>
+                <a:ea typeface="Aptos"/>
+                <a:cs typeface="Aptos"/>
+              </a:rPr>
+              <a:t>https://github.com/SimoneMantero/big-data-prog</a:t>
+            </a:r>
+          </a:p>
+        </p:txBody>
+      </p:sp>
+      <p:sp>
+        <p:nvSpPr>
+          <p:cNvPr id="9" name="">
+            <a:extLst xmlns:a="http://schemas.openxmlformats.org/drawingml/2006/main">
+              <a:ext uri="{FF2B5EF4-FFF2-40B4-BE49-F238E27FC236}">
+                <a16:creationId xmlns:a16="http://schemas.microsoft.com/office/drawing/2014/main" id="{3E4CF0EB-35A1-4177-AB16-A44734E5EECE}"/>
+              </a:ext>
+            </a:extLst>
+          </p:cNvPr>
+          <p:cNvSpPr>
+            <a:spLocks xmlns:a="http://schemas.openxmlformats.org/drawingml/2006/main" noGrp="1"/>
+          </p:cNvSpPr>
+          <p:nvPr/>
+        </p:nvSpPr>
+        <p:spPr>
+          <a:xfrm xmlns:a="http://schemas.openxmlformats.org/drawingml/2006/main">
+            <a:off x="1238250" y="4305300"/>
+            <a:ext cx="2667000" cy="228600"/>
+          </a:xfrm>
+          <a:prstGeom xmlns:a="http://schemas.openxmlformats.org/drawingml/2006/main" prst="rect">
+            <a:avLst/>
+          </a:prstGeom>
+          <a:solidFill xmlns:a="http://schemas.openxmlformats.org/drawingml/2006/main">
+            <a:srgbClr val="000000">
+              <a:alpha val="0"/>
+            </a:srgbClr>
+          </a:solidFill>
+          <a:ln xmlns:a="http://schemas.openxmlformats.org/drawingml/2006/main" w="0">
+            <a:solidFill>
+              <a:srgbClr val="000000">
+                <a:alpha val="0"/>
+              </a:srgbClr>
+            </a:solidFill>
+            <a:prstDash val="solid"/>
+          </a:ln>
+        </p:spPr>
+        <p:txBody>
+          <a:bodyPr xmlns:a="http://schemas.openxmlformats.org/drawingml/2006/main" lIns="0" tIns="0" rIns="0" bIns="0" anchor="t"/>
+          <a:lstStyle xmlns:a="http://schemas.openxmlformats.org/drawingml/2006/main"/>
+          <a:p xmlns:a="http://schemas.openxmlformats.org/drawingml/2006/main">
+            <a:pPr algn="l">
+              <a:defRPr sz="1125" b="1">
+                <a:solidFill>
+                  <a:srgbClr val="16213E"/>
+                </a:solidFill>
+                <a:latin typeface="Aptos"/>
+                <a:ea typeface="Aptos"/>
+                <a:cs typeface="Aptos"/>
+              </a:defRPr>
+            </a:pPr>
+            <a:r>
+              <a:rPr sz="1125" b="1">
+                <a:solidFill>
+                  <a:srgbClr val="16213E"/>
+                </a:solidFill>
+                <a:latin typeface="Aptos"/>
+                <a:ea typeface="Aptos"/>
+                <a:cs typeface="Aptos"/>
+              </a:rPr>
+              <a:t>Per scaricare il progetto:</a:t>
+            </a:r>
+          </a:p>
+        </p:txBody>
+      </p:sp>
+      <p:sp>
+        <p:nvSpPr>
+          <p:cNvPr id="10" name="">
+            <a:extLst xmlns:a="http://schemas.openxmlformats.org/drawingml/2006/main">
+              <a:ext uri="{FF2B5EF4-FFF2-40B4-BE49-F238E27FC236}">
+                <a16:creationId xmlns:a16="http://schemas.microsoft.com/office/drawing/2014/main" id="{589EEC38-EA8B-4489-8718-0FE2DA51998B}"/>
+              </a:ext>
+            </a:extLst>
+          </p:cNvPr>
+          <p:cNvSpPr>
+            <a:spLocks xmlns:a="http://schemas.openxmlformats.org/drawingml/2006/main" noGrp="1"/>
+          </p:cNvSpPr>
+          <p:nvPr/>
+        </p:nvSpPr>
+        <p:spPr>
+          <a:xfrm xmlns:a="http://schemas.openxmlformats.org/drawingml/2006/main">
+            <a:off x="1238250" y="4686300"/>
+            <a:ext cx="7810500" cy="514350"/>
+          </a:xfrm>
+          <a:prstGeom xmlns:a="http://schemas.openxmlformats.org/drawingml/2006/main" prst="rect">
+            <a:avLst/>
+          </a:prstGeom>
+          <a:solidFill xmlns:a="http://schemas.openxmlformats.org/drawingml/2006/main">
+            <a:srgbClr val="0F172A"/>
+          </a:solidFill>
+          <a:ln xmlns:a="http://schemas.openxmlformats.org/drawingml/2006/main" w="0">
+            <a:solidFill>
+              <a:srgbClr val="000000">
+                <a:alpha val="0"/>
+              </a:srgbClr>
+            </a:solidFill>
+            <a:prstDash val="solid"/>
+          </a:ln>
+        </p:spPr>
+      </p:sp>
+      <p:sp>
+        <p:nvSpPr>
+          <p:cNvPr id="11" name="">
+            <a:extLst xmlns:a="http://schemas.openxmlformats.org/drawingml/2006/main">
+              <a:ext uri="{FF2B5EF4-FFF2-40B4-BE49-F238E27FC236}">
+                <a16:creationId xmlns:a16="http://schemas.microsoft.com/office/drawing/2014/main" id="{766FCA76-31A5-4CEC-B173-93E70395155D}"/>
+              </a:ext>
+            </a:extLst>
+          </p:cNvPr>
+          <p:cNvSpPr>
+            <a:spLocks xmlns:a="http://schemas.openxmlformats.org/drawingml/2006/main" noGrp="1"/>
+          </p:cNvSpPr>
+          <p:nvPr/>
+        </p:nvSpPr>
+        <p:spPr>
+          <a:xfrm xmlns:a="http://schemas.openxmlformats.org/drawingml/2006/main">
+            <a:off x="1457325" y="4848225"/>
+            <a:ext cx="7239000" cy="247650"/>
+          </a:xfrm>
+          <a:prstGeom xmlns:a="http://schemas.openxmlformats.org/drawingml/2006/main" prst="rect">
+            <a:avLst/>
+          </a:prstGeom>
+          <a:solidFill xmlns:a="http://schemas.openxmlformats.org/drawingml/2006/main">
+            <a:srgbClr val="000000">
+              <a:alpha val="0"/>
+            </a:srgbClr>
+          </a:solidFill>
+          <a:ln xmlns:a="http://schemas.openxmlformats.org/drawingml/2006/main" w="0">
+            <a:solidFill>
+              <a:srgbClr val="000000">
+                <a:alpha val="0"/>
+              </a:srgbClr>
+            </a:solidFill>
+            <a:prstDash val="solid"/>
+          </a:ln>
+        </p:spPr>
+        <p:txBody>
+          <a:bodyPr xmlns:a="http://schemas.openxmlformats.org/drawingml/2006/main" lIns="0" tIns="0" rIns="0" bIns="0" anchor="t"/>
+          <a:lstStyle xmlns:a="http://schemas.openxmlformats.org/drawingml/2006/main"/>
+          <a:p xmlns:a="http://schemas.openxmlformats.org/drawingml/2006/main">
+            <a:pPr algn="l">
+              <a:defRPr sz="1350" b="0">
+                <a:solidFill>
+                  <a:srgbClr val="FFFFFF"/>
+                </a:solidFill>
+                <a:latin typeface="Aptos"/>
+                <a:ea typeface="Aptos"/>
+                <a:cs typeface="Aptos"/>
+              </a:defRPr>
+            </a:pPr>
+            <a:r>
+              <a:rPr sz="1350" b="0">
+                <a:solidFill>
+                  <a:srgbClr val="FFFFFF"/>
+                </a:solidFill>
+                <a:latin typeface="Aptos"/>
+                <a:ea typeface="Aptos"/>
+                <a:cs typeface="Aptos"/>
+              </a:rPr>
+              <a:t>git clone https://github.com/SimoneMantero/big-data-prog.git</a:t>
+            </a:r>
+          </a:p>
+        </p:txBody>
+      </p:sp>
+      <p:sp>
+        <p:nvSpPr>
+          <p:cNvPr id="12" name="">
+            <a:extLst xmlns:a="http://schemas.openxmlformats.org/drawingml/2006/main">
+              <a:ext uri="{FF2B5EF4-FFF2-40B4-BE49-F238E27FC236}">
+                <a16:creationId xmlns:a16="http://schemas.microsoft.com/office/drawing/2014/main" id="{C8D7B0D5-4E2B-4889-BD15-B96F2DB51EFB}"/>
+              </a:ext>
+            </a:extLst>
+          </p:cNvPr>
+          <p:cNvSpPr>
+            <a:spLocks xmlns:a="http://schemas.openxmlformats.org/drawingml/2006/main" noGrp="1"/>
+          </p:cNvSpPr>
+          <p:nvPr/>
+        </p:nvSpPr>
+        <p:spPr>
+          <a:xfrm xmlns:a="http://schemas.openxmlformats.org/drawingml/2006/main">
+            <a:off x="914400" y="5810250"/>
+            <a:ext cx="8572500" cy="323850"/>
+          </a:xfrm>
+          <a:prstGeom xmlns:a="http://schemas.openxmlformats.org/drawingml/2006/main" prst="rect">
+            <a:avLst/>
+          </a:prstGeom>
+          <a:solidFill xmlns:a="http://schemas.openxmlformats.org/drawingml/2006/main">
+            <a:srgbClr val="000000">
+              <a:alpha val="0"/>
+            </a:srgbClr>
+          </a:solidFill>
+          <a:ln xmlns:a="http://schemas.openxmlformats.org/drawingml/2006/main" w="0">
+            <a:solidFill>
+              <a:srgbClr val="000000">
+                <a:alpha val="0"/>
+              </a:srgbClr>
+            </a:solidFill>
+            <a:prstDash val="solid"/>
+          </a:ln>
+        </p:spPr>
+        <p:txBody>
+          <a:bodyPr xmlns:a="http://schemas.openxmlformats.org/drawingml/2006/main" lIns="0" tIns="0" rIns="0" bIns="0" anchor="t"/>
+          <a:lstStyle xmlns:a="http://schemas.openxmlformats.org/drawingml/2006/main"/>
+          <a:p xmlns:a="http://schemas.openxmlformats.org/drawingml/2006/main">
+            <a:pPr algn="l">
+              <a:defRPr sz="1350" b="0">
+                <a:solidFill>
+                  <a:srgbClr val="E6F4F1"/>
+                </a:solidFill>
+                <a:latin typeface="Aptos"/>
+                <a:ea typeface="Aptos"/>
+                <a:cs typeface="Aptos"/>
+              </a:defRPr>
+            </a:pPr>
+            <a:r>
+              <a:rPr sz="1350" b="0">
+                <a:solidFill>
+                  <a:srgbClr val="E6F4F1"/>
+                </a:solidFill>
+                <a:latin typeface="Aptos"/>
+                <a:ea typeface="Aptos"/>
+                <a:cs typeface="Aptos"/>
+              </a:rPr>
+              <a:t>Notebook, dati, funzioni Python, grafici, metriche e PowerPoint finale sono inclusi nella repository.</a:t>
+            </a:r>
+          </a:p>
+        </p:txBody>
+      </p:sp>
+      <p:sp>
+        <p:nvSpPr>
+          <p:cNvPr id="13" name="">
+            <a:extLst xmlns:a="http://schemas.openxmlformats.org/drawingml/2006/main">
+              <a:ext uri="{FF2B5EF4-FFF2-40B4-BE49-F238E27FC236}">
+                <a16:creationId xmlns:a16="http://schemas.microsoft.com/office/drawing/2014/main" id="{0207018E-FC6D-4505-BCC5-E6EC34A41752}"/>
+              </a:ext>
+            </a:extLst>
+          </p:cNvPr>
+          <p:cNvSpPr>
+            <a:spLocks xmlns:a="http://schemas.openxmlformats.org/drawingml/2006/main" noGrp="1"/>
+          </p:cNvSpPr>
+          <p:nvPr/>
+        </p:nvSpPr>
+        <p:spPr>
+          <a:xfrm xmlns:a="http://schemas.openxmlformats.org/drawingml/2006/main">
+            <a:off x="9334500" y="5905500"/>
+            <a:ext cx="2000250" cy="266700"/>
+          </a:xfrm>
+          <a:prstGeom xmlns:a="http://schemas.openxmlformats.org/drawingml/2006/main" prst="rect">
+            <a:avLst/>
+          </a:prstGeom>
+          <a:solidFill xmlns:a="http://schemas.openxmlformats.org/drawingml/2006/main">
+            <a:srgbClr val="000000">
+              <a:alpha val="0"/>
+            </a:srgbClr>
+          </a:solidFill>
+          <a:ln xmlns:a="http://schemas.openxmlformats.org/drawingml/2006/main" w="0">
+            <a:solidFill>
+              <a:srgbClr val="000000">
+                <a:alpha val="0"/>
+              </a:srgbClr>
+            </a:solidFill>
+            <a:prstDash val="solid"/>
+          </a:ln>
+        </p:spPr>
+        <p:txBody>
+          <a:bodyPr xmlns:a="http://schemas.openxmlformats.org/drawingml/2006/main" lIns="0" tIns="0" rIns="0" bIns="0" anchor="t"/>
+          <a:lstStyle xmlns:a="http://schemas.openxmlformats.org/drawingml/2006/main"/>
+          <a:p xmlns:a="http://schemas.openxmlformats.org/drawingml/2006/main">
+            <a:pPr algn="r">
+              <a:defRPr sz="1350" b="1">
+                <a:solidFill>
+                  <a:srgbClr val="FFFFFF"/>
+                </a:solidFill>
+                <a:latin typeface="Aptos"/>
+                <a:ea typeface="Aptos"/>
+                <a:cs typeface="Aptos"/>
+              </a:defRPr>
+            </a:pPr>
+            <a:r>
+              <a:rPr sz="1350" b="1">
+                <a:solidFill>
+                  <a:srgbClr val="FFFFFF"/>
+                </a:solidFill>
+                <a:latin typeface="Aptos"/>
+                <a:ea typeface="Aptos"/>
+                <a:cs typeface="Aptos"/>
+              </a:rPr>
+              <a:t>Simone Mantero</a:t>
+            </a:r>
+          </a:p>
+        </p:txBody>
+      </p:sp>
+    </p:spTree>
+    <p:extLst>
+      <p:ext uri="{BB962C8B-B14F-4D97-AF65-F5344CB8AC3E}">
+        <p14:creationId xmlns:p14="http://schemas.microsoft.com/office/powerpoint/2010/main" val="712379888"/>
       </p:ext>
     </p:extLst>
   </p:cSld>
@@ -13005,7 +15401,7 @@
           <p:cNvPr id="1" name="">
             <a:extLst xmlns:a="http://schemas.openxmlformats.org/drawingml/2006/main">
               <a:ext uri="{FF2B5EF4-FFF2-40B4-BE49-F238E27FC236}">
-                <a16:creationId xmlns:a16="http://schemas.microsoft.com/office/drawing/2014/main" id="{B1B18430-8F88-491C-9EA8-F36B0A76CA61}"/>
+                <a16:creationId xmlns:a16="http://schemas.microsoft.com/office/drawing/2014/main" id="{0C5A2C85-C1E1-4EFB-9B5A-A25B713D0868}"/>
               </a:ext>
             </a:extLst>
           </p:cNvPr>
@@ -13040,7 +15436,7 @@
           <p:cNvPr id="2" name="">
             <a:extLst xmlns:a="http://schemas.openxmlformats.org/drawingml/2006/main">
               <a:ext uri="{FF2B5EF4-FFF2-40B4-BE49-F238E27FC236}">
-                <a16:creationId xmlns:a16="http://schemas.microsoft.com/office/drawing/2014/main" id="{5E10CBBC-6611-4E9C-AD39-A41C831DF62E}"/>
+                <a16:creationId xmlns:a16="http://schemas.microsoft.com/office/drawing/2014/main" id="{906C371F-8E6A-4C06-90E4-287A38245974}"/>
               </a:ext>
             </a:extLst>
           </p:cNvPr>
@@ -13075,7 +15471,7 @@
           <p:cNvPr id="3" name="">
             <a:extLst xmlns:a="http://schemas.openxmlformats.org/drawingml/2006/main">
               <a:ext uri="{FF2B5EF4-FFF2-40B4-BE49-F238E27FC236}">
-                <a16:creationId xmlns:a16="http://schemas.microsoft.com/office/drawing/2014/main" id="{EF2369E1-9FD4-40B4-A4E6-9348B56F108F}"/>
+                <a16:creationId xmlns:a16="http://schemas.microsoft.com/office/drawing/2014/main" id="{B1B5ED8D-A614-4414-BB6C-1798111AF102}"/>
               </a:ext>
             </a:extLst>
           </p:cNvPr>
@@ -13139,7 +15535,7 @@
           <p:cNvPr id="4" name="">
             <a:extLst xmlns:a="http://schemas.openxmlformats.org/drawingml/2006/main">
               <a:ext uri="{FF2B5EF4-FFF2-40B4-BE49-F238E27FC236}">
-                <a16:creationId xmlns:a16="http://schemas.microsoft.com/office/drawing/2014/main" id="{E7A25A02-4601-42DC-8FB6-39DC381A1E5F}"/>
+                <a16:creationId xmlns:a16="http://schemas.microsoft.com/office/drawing/2014/main" id="{21728AA5-790A-455A-9AE1-A427C5A31A81}"/>
               </a:ext>
             </a:extLst>
           </p:cNvPr>
@@ -13203,7 +15599,7 @@
           <p:cNvPr id="5" name="">
             <a:extLst xmlns:a="http://schemas.openxmlformats.org/drawingml/2006/main">
               <a:ext uri="{FF2B5EF4-FFF2-40B4-BE49-F238E27FC236}">
-                <a16:creationId xmlns:a16="http://schemas.microsoft.com/office/drawing/2014/main" id="{63DBFDB6-F4B7-4054-8E1E-2CDEB4639176}"/>
+                <a16:creationId xmlns:a16="http://schemas.microsoft.com/office/drawing/2014/main" id="{226E414B-7F8E-4D0C-ABED-52B6FF81366B}"/>
               </a:ext>
             </a:extLst>
           </p:cNvPr>
@@ -13267,7 +15663,7 @@
           <p:cNvPr id="6" name="">
             <a:extLst xmlns:a="http://schemas.openxmlformats.org/drawingml/2006/main">
               <a:ext uri="{FF2B5EF4-FFF2-40B4-BE49-F238E27FC236}">
-                <a16:creationId xmlns:a16="http://schemas.microsoft.com/office/drawing/2014/main" id="{2E67B375-3386-46BD-9227-77618EFAD767}"/>
+                <a16:creationId xmlns:a16="http://schemas.microsoft.com/office/drawing/2014/main" id="{837EB7BE-A2A4-4698-998B-BD906FBD250D}"/>
               </a:ext>
             </a:extLst>
           </p:cNvPr>
@@ -13331,7 +15727,7 @@
           <p:cNvPr id="7" name="">
             <a:extLst xmlns:a="http://schemas.openxmlformats.org/drawingml/2006/main">
               <a:ext uri="{FF2B5EF4-FFF2-40B4-BE49-F238E27FC236}">
-                <a16:creationId xmlns:a16="http://schemas.microsoft.com/office/drawing/2014/main" id="{EC0081B5-736E-4847-AC85-584F58EF588C}"/>
+                <a16:creationId xmlns:a16="http://schemas.microsoft.com/office/drawing/2014/main" id="{45F5267B-1171-4722-886B-7DCF3D94D107}"/>
               </a:ext>
             </a:extLst>
           </p:cNvPr>
@@ -13395,7 +15791,7 @@
           <p:cNvPr id="8" name="">
             <a:extLst xmlns:a="http://schemas.openxmlformats.org/drawingml/2006/main">
               <a:ext uri="{FF2B5EF4-FFF2-40B4-BE49-F238E27FC236}">
-                <a16:creationId xmlns:a16="http://schemas.microsoft.com/office/drawing/2014/main" id="{8348BC08-B709-4A9C-8FAC-3A90BA0CCB5E}"/>
+                <a16:creationId xmlns:a16="http://schemas.microsoft.com/office/drawing/2014/main" id="{5C394FBF-F92E-4496-91CD-B8A3B71CF9A4}"/>
               </a:ext>
             </a:extLst>
           </p:cNvPr>
@@ -13459,7 +15855,7 @@
           <p:cNvPr id="9" name="">
             <a:extLst xmlns:a="http://schemas.openxmlformats.org/drawingml/2006/main">
               <a:ext uri="{FF2B5EF4-FFF2-40B4-BE49-F238E27FC236}">
-                <a16:creationId xmlns:a16="http://schemas.microsoft.com/office/drawing/2014/main" id="{D839B896-0178-45E0-9FD1-A8B4CD472FE2}"/>
+                <a16:creationId xmlns:a16="http://schemas.microsoft.com/office/drawing/2014/main" id="{73235614-6D8C-413C-9EAF-FF7C814724FC}"/>
               </a:ext>
             </a:extLst>
           </p:cNvPr>
@@ -13523,7 +15919,7 @@
           <p:cNvPr id="10" name="">
             <a:extLst xmlns:a="http://schemas.openxmlformats.org/drawingml/2006/main">
               <a:ext uri="{FF2B5EF4-FFF2-40B4-BE49-F238E27FC236}">
-                <a16:creationId xmlns:a16="http://schemas.microsoft.com/office/drawing/2014/main" id="{ADEA896F-15C0-42B1-ABD9-FCBCE38D30E0}"/>
+                <a16:creationId xmlns:a16="http://schemas.microsoft.com/office/drawing/2014/main" id="{9C85854B-19BB-4156-9A96-35F0BEC232A7}"/>
               </a:ext>
             </a:extLst>
           </p:cNvPr>
@@ -13587,7 +15983,7 @@
           <p:cNvPr id="11" name="">
             <a:extLst xmlns:a="http://schemas.openxmlformats.org/drawingml/2006/main">
               <a:ext uri="{FF2B5EF4-FFF2-40B4-BE49-F238E27FC236}">
-                <a16:creationId xmlns:a16="http://schemas.microsoft.com/office/drawing/2014/main" id="{825AC2D9-0A1C-49C9-B818-14B17E92BAFD}"/>
+                <a16:creationId xmlns:a16="http://schemas.microsoft.com/office/drawing/2014/main" id="{DBB17A72-DDC2-4DA6-A329-52170E434B65}"/>
               </a:ext>
             </a:extLst>
           </p:cNvPr>
@@ -13651,7 +16047,7 @@
           <p:cNvPr id="12" name="">
             <a:extLst xmlns:a="http://schemas.openxmlformats.org/drawingml/2006/main">
               <a:ext uri="{FF2B5EF4-FFF2-40B4-BE49-F238E27FC236}">
-                <a16:creationId xmlns:a16="http://schemas.microsoft.com/office/drawing/2014/main" id="{704BEE27-228F-45EE-9758-3E47CB9B76CF}"/>
+                <a16:creationId xmlns:a16="http://schemas.microsoft.com/office/drawing/2014/main" id="{3A15A3C5-7E66-438D-ABA1-89834974B78B}"/>
               </a:ext>
             </a:extLst>
           </p:cNvPr>
@@ -13715,7 +16111,7 @@
           <p:cNvPr id="13" name="">
             <a:extLst xmlns:a="http://schemas.openxmlformats.org/drawingml/2006/main">
               <a:ext uri="{FF2B5EF4-FFF2-40B4-BE49-F238E27FC236}">
-                <a16:creationId xmlns:a16="http://schemas.microsoft.com/office/drawing/2014/main" id="{41F5D964-F9D2-4552-BF5E-42DE8A21117D}"/>
+                <a16:creationId xmlns:a16="http://schemas.microsoft.com/office/drawing/2014/main" id="{3E1D99CF-5203-452A-B4A3-AB149A4DE65F}"/>
               </a:ext>
             </a:extLst>
           </p:cNvPr>
@@ -13779,7 +16175,7 @@
           <p:cNvPr id="14" name="">
             <a:extLst xmlns:a="http://schemas.openxmlformats.org/drawingml/2006/main">
               <a:ext uri="{FF2B5EF4-FFF2-40B4-BE49-F238E27FC236}">
-                <a16:creationId xmlns:a16="http://schemas.microsoft.com/office/drawing/2014/main" id="{110D5132-867C-4977-9132-032B7055F5BA}"/>
+                <a16:creationId xmlns:a16="http://schemas.microsoft.com/office/drawing/2014/main" id="{46001A9C-E062-4BD1-A73B-0F16806372C2}"/>
               </a:ext>
             </a:extLst>
           </p:cNvPr>
@@ -13843,7 +16239,7 @@
           <p:cNvPr id="15" name="">
             <a:extLst xmlns:a="http://schemas.openxmlformats.org/drawingml/2006/main">
               <a:ext uri="{FF2B5EF4-FFF2-40B4-BE49-F238E27FC236}">
-                <a16:creationId xmlns:a16="http://schemas.microsoft.com/office/drawing/2014/main" id="{2425862C-30D5-4063-8F16-C1C527E2CFD0}"/>
+                <a16:creationId xmlns:a16="http://schemas.microsoft.com/office/drawing/2014/main" id="{AAB0BEAF-30D3-4857-9B90-F621C7D0EC2A}"/>
               </a:ext>
             </a:extLst>
           </p:cNvPr>
@@ -13907,7 +16303,7 @@
           <p:cNvPr id="16" name="">
             <a:extLst xmlns:a="http://schemas.openxmlformats.org/drawingml/2006/main">
               <a:ext uri="{FF2B5EF4-FFF2-40B4-BE49-F238E27FC236}">
-                <a16:creationId xmlns:a16="http://schemas.microsoft.com/office/drawing/2014/main" id="{F9F823DB-10C4-48F2-81FA-53574D2C57B5}"/>
+                <a16:creationId xmlns:a16="http://schemas.microsoft.com/office/drawing/2014/main" id="{CECD19FE-63A7-41D1-93D6-A0FE3B5B3C90}"/>
               </a:ext>
             </a:extLst>
           </p:cNvPr>
@@ -13971,7 +16367,7 @@
           <p:cNvPr id="17" name="">
             <a:extLst xmlns:a="http://schemas.openxmlformats.org/drawingml/2006/main">
               <a:ext uri="{FF2B5EF4-FFF2-40B4-BE49-F238E27FC236}">
-                <a16:creationId xmlns:a16="http://schemas.microsoft.com/office/drawing/2014/main" id="{785582B6-F1E9-4F85-B825-9B6D00F46442}"/>
+                <a16:creationId xmlns:a16="http://schemas.microsoft.com/office/drawing/2014/main" id="{2DB28A8D-D676-4046-AD15-13EBCFE11E65}"/>
               </a:ext>
             </a:extLst>
           </p:cNvPr>
@@ -14035,7 +16431,7 @@
           <p:cNvPr id="18" name="">
             <a:extLst xmlns:a="http://schemas.openxmlformats.org/drawingml/2006/main">
               <a:ext uri="{FF2B5EF4-FFF2-40B4-BE49-F238E27FC236}">
-                <a16:creationId xmlns:a16="http://schemas.microsoft.com/office/drawing/2014/main" id="{41475F32-9574-49A0-A2C0-9C5601616157}"/>
+                <a16:creationId xmlns:a16="http://schemas.microsoft.com/office/drawing/2014/main" id="{89CD52D2-8F90-4343-91DA-3FF9CADA6636}"/>
               </a:ext>
             </a:extLst>
           </p:cNvPr>
@@ -14099,7 +16495,7 @@
           <p:cNvPr id="19" name="">
             <a:extLst xmlns:a="http://schemas.openxmlformats.org/drawingml/2006/main">
               <a:ext uri="{FF2B5EF4-FFF2-40B4-BE49-F238E27FC236}">
-                <a16:creationId xmlns:a16="http://schemas.microsoft.com/office/drawing/2014/main" id="{995A9166-796E-4605-9A90-5C08DE677D21}"/>
+                <a16:creationId xmlns:a16="http://schemas.microsoft.com/office/drawing/2014/main" id="{93575661-0F5A-48E4-AE0E-9538D9B5D5BC}"/>
               </a:ext>
             </a:extLst>
           </p:cNvPr>
@@ -14161,7 +16557,7 @@
     </p:spTree>
     <p:extLst>
       <p:ext uri="{BB962C8B-B14F-4D97-AF65-F5344CB8AC3E}">
-        <p14:creationId xmlns:p14="http://schemas.microsoft.com/office/powerpoint/2010/main" val="1924355082"/>
+        <p14:creationId xmlns:p14="http://schemas.microsoft.com/office/powerpoint/2010/main" val="2020080828"/>
       </p:ext>
     </p:extLst>
   </p:cSld>
@@ -14185,7 +16581,7 @@
           <p:cNvPr id="1" name="">
             <a:extLst xmlns:a="http://schemas.openxmlformats.org/drawingml/2006/main">
               <a:ext uri="{FF2B5EF4-FFF2-40B4-BE49-F238E27FC236}">
-                <a16:creationId xmlns:a16="http://schemas.microsoft.com/office/drawing/2014/main" id="{ABC0C867-79E5-4CD7-9E17-ADAE0DC8F229}"/>
+                <a16:creationId xmlns:a16="http://schemas.microsoft.com/office/drawing/2014/main" id="{B045E804-B093-4230-87E0-86E08F83C0FD}"/>
               </a:ext>
             </a:extLst>
           </p:cNvPr>
@@ -14220,7 +16616,7 @@
           <p:cNvPr id="2" name="">
             <a:extLst xmlns:a="http://schemas.openxmlformats.org/drawingml/2006/main">
               <a:ext uri="{FF2B5EF4-FFF2-40B4-BE49-F238E27FC236}">
-                <a16:creationId xmlns:a16="http://schemas.microsoft.com/office/drawing/2014/main" id="{26ED596B-9365-42A8-85C0-9D0E886C642B}"/>
+                <a16:creationId xmlns:a16="http://schemas.microsoft.com/office/drawing/2014/main" id="{9D49162F-5758-4295-BE27-13AB680FCC6A}"/>
               </a:ext>
             </a:extLst>
           </p:cNvPr>
@@ -14255,7 +16651,7 @@
           <p:cNvPr id="3" name="">
             <a:extLst xmlns:a="http://schemas.openxmlformats.org/drawingml/2006/main">
               <a:ext uri="{FF2B5EF4-FFF2-40B4-BE49-F238E27FC236}">
-                <a16:creationId xmlns:a16="http://schemas.microsoft.com/office/drawing/2014/main" id="{D806BE34-4F23-4FF3-9CE0-07FB64DC4550}"/>
+                <a16:creationId xmlns:a16="http://schemas.microsoft.com/office/drawing/2014/main" id="{A1FA08DB-42AD-4F29-9E6A-D146A97B9994}"/>
               </a:ext>
             </a:extLst>
           </p:cNvPr>
@@ -14319,7 +16715,7 @@
           <p:cNvPr id="4" name="">
             <a:extLst xmlns:a="http://schemas.openxmlformats.org/drawingml/2006/main">
               <a:ext uri="{FF2B5EF4-FFF2-40B4-BE49-F238E27FC236}">
-                <a16:creationId xmlns:a16="http://schemas.microsoft.com/office/drawing/2014/main" id="{B0072028-A7A0-46AD-B7D3-E68BFD039C18}"/>
+                <a16:creationId xmlns:a16="http://schemas.microsoft.com/office/drawing/2014/main" id="{E0D40A29-EB3F-4011-A488-E25FD961A029}"/>
               </a:ext>
             </a:extLst>
           </p:cNvPr>
@@ -14383,7 +16779,7 @@
           <p:cNvPr id="5" name="">
             <a:extLst xmlns:a="http://schemas.openxmlformats.org/drawingml/2006/main">
               <a:ext uri="{FF2B5EF4-FFF2-40B4-BE49-F238E27FC236}">
-                <a16:creationId xmlns:a16="http://schemas.microsoft.com/office/drawing/2014/main" id="{2D63E869-4107-4259-BCDE-D193D1E6620F}"/>
+                <a16:creationId xmlns:a16="http://schemas.microsoft.com/office/drawing/2014/main" id="{C937E7E1-BCB5-4F03-A87D-0380F5E95C44}"/>
               </a:ext>
             </a:extLst>
           </p:cNvPr>
@@ -14447,7 +16843,7 @@
           <p:cNvPr id="6" name="">
             <a:extLst xmlns:a="http://schemas.openxmlformats.org/drawingml/2006/main">
               <a:ext uri="{FF2B5EF4-FFF2-40B4-BE49-F238E27FC236}">
-                <a16:creationId xmlns:a16="http://schemas.microsoft.com/office/drawing/2014/main" id="{28F22EE6-B470-4FD4-9F1E-E814ED1542D1}"/>
+                <a16:creationId xmlns:a16="http://schemas.microsoft.com/office/drawing/2014/main" id="{1A76F21A-AAD2-43A5-AE83-AD287D639313}"/>
               </a:ext>
             </a:extLst>
           </p:cNvPr>
@@ -14511,7 +16907,7 @@
           <p:cNvPr id="7" name="">
             <a:extLst xmlns:a="http://schemas.openxmlformats.org/drawingml/2006/main">
               <a:ext uri="{FF2B5EF4-FFF2-40B4-BE49-F238E27FC236}">
-                <a16:creationId xmlns:a16="http://schemas.microsoft.com/office/drawing/2014/main" id="{F8099A86-F99E-4B0C-862E-8D2BA21927FE}"/>
+                <a16:creationId xmlns:a16="http://schemas.microsoft.com/office/drawing/2014/main" id="{9831F008-0780-4D75-89B8-597B69A64ED2}"/>
               </a:ext>
             </a:extLst>
           </p:cNvPr>
@@ -14544,7 +16940,7 @@
           <p:cNvPr id="8" name="">
             <a:extLst xmlns:a="http://schemas.openxmlformats.org/drawingml/2006/main">
               <a:ext uri="{FF2B5EF4-FFF2-40B4-BE49-F238E27FC236}">
-                <a16:creationId xmlns:a16="http://schemas.microsoft.com/office/drawing/2014/main" id="{E689B5B6-13C0-4033-9064-40B5A4D32A2F}"/>
+                <a16:creationId xmlns:a16="http://schemas.microsoft.com/office/drawing/2014/main" id="{6E97F42D-E9A9-4C9E-8894-D895190BF831}"/>
               </a:ext>
             </a:extLst>
           </p:cNvPr>
@@ -14579,7 +16975,7 @@
           <p:cNvPr id="9" name="">
             <a:extLst xmlns:a="http://schemas.openxmlformats.org/drawingml/2006/main">
               <a:ext uri="{FF2B5EF4-FFF2-40B4-BE49-F238E27FC236}">
-                <a16:creationId xmlns:a16="http://schemas.microsoft.com/office/drawing/2014/main" id="{A777F6AE-4981-45CA-A309-98ACB0CCBB99}"/>
+                <a16:creationId xmlns:a16="http://schemas.microsoft.com/office/drawing/2014/main" id="{38B24E3D-5DF8-4CF4-9769-69F8EDF25F49}"/>
               </a:ext>
             </a:extLst>
           </p:cNvPr>
@@ -14643,7 +17039,7 @@
           <p:cNvPr id="10" name="">
             <a:extLst xmlns:a="http://schemas.openxmlformats.org/drawingml/2006/main">
               <a:ext uri="{FF2B5EF4-FFF2-40B4-BE49-F238E27FC236}">
-                <a16:creationId xmlns:a16="http://schemas.microsoft.com/office/drawing/2014/main" id="{2E0330C4-686D-43CA-97C0-AD1F4562C3F6}"/>
+                <a16:creationId xmlns:a16="http://schemas.microsoft.com/office/drawing/2014/main" id="{7FF7BBAE-A0A5-4C1D-9C79-93D2D19A4122}"/>
               </a:ext>
             </a:extLst>
           </p:cNvPr>
@@ -14707,7 +17103,7 @@
           <p:cNvPr id="11" name="">
             <a:extLst xmlns:a="http://schemas.openxmlformats.org/drawingml/2006/main">
               <a:ext uri="{FF2B5EF4-FFF2-40B4-BE49-F238E27FC236}">
-                <a16:creationId xmlns:a16="http://schemas.microsoft.com/office/drawing/2014/main" id="{A1D6264C-BB0A-4B4B-9E9C-9FE02FFA31FD}"/>
+                <a16:creationId xmlns:a16="http://schemas.microsoft.com/office/drawing/2014/main" id="{55332AD4-C5B4-4615-98BB-8E32C81908F7}"/>
               </a:ext>
             </a:extLst>
           </p:cNvPr>
@@ -14771,7 +17167,7 @@
           <p:cNvPr id="12" name="">
             <a:extLst xmlns:a="http://schemas.openxmlformats.org/drawingml/2006/main">
               <a:ext uri="{FF2B5EF4-FFF2-40B4-BE49-F238E27FC236}">
-                <a16:creationId xmlns:a16="http://schemas.microsoft.com/office/drawing/2014/main" id="{FB9A35D0-89C2-47E1-8658-400EB5E641B6}"/>
+                <a16:creationId xmlns:a16="http://schemas.microsoft.com/office/drawing/2014/main" id="{4F913D5D-D4E4-4419-B264-1BE2BC33EFA9}"/>
               </a:ext>
             </a:extLst>
           </p:cNvPr>
@@ -14804,7 +17200,7 @@
           <p:cNvPr id="13" name="">
             <a:extLst xmlns:a="http://schemas.openxmlformats.org/drawingml/2006/main">
               <a:ext uri="{FF2B5EF4-FFF2-40B4-BE49-F238E27FC236}">
-                <a16:creationId xmlns:a16="http://schemas.microsoft.com/office/drawing/2014/main" id="{21D898E3-6CD5-4051-9B37-08B1F6B21672}"/>
+                <a16:creationId xmlns:a16="http://schemas.microsoft.com/office/drawing/2014/main" id="{8E65D8B8-7E1E-48BF-9D30-FEF0B9AD6DB5}"/>
               </a:ext>
             </a:extLst>
           </p:cNvPr>
@@ -14839,7 +17235,7 @@
           <p:cNvPr id="14" name="">
             <a:extLst xmlns:a="http://schemas.openxmlformats.org/drawingml/2006/main">
               <a:ext uri="{FF2B5EF4-FFF2-40B4-BE49-F238E27FC236}">
-                <a16:creationId xmlns:a16="http://schemas.microsoft.com/office/drawing/2014/main" id="{23E55617-AD85-4224-8588-B9B5FC4688B2}"/>
+                <a16:creationId xmlns:a16="http://schemas.microsoft.com/office/drawing/2014/main" id="{442D0435-6E1E-475B-B502-B418FF3DAD2E}"/>
               </a:ext>
             </a:extLst>
           </p:cNvPr>
@@ -14903,7 +17299,7 @@
           <p:cNvPr id="15" name="">
             <a:extLst xmlns:a="http://schemas.openxmlformats.org/drawingml/2006/main">
               <a:ext uri="{FF2B5EF4-FFF2-40B4-BE49-F238E27FC236}">
-                <a16:creationId xmlns:a16="http://schemas.microsoft.com/office/drawing/2014/main" id="{5F436615-7913-43E6-AD86-F9EFB0442C01}"/>
+                <a16:creationId xmlns:a16="http://schemas.microsoft.com/office/drawing/2014/main" id="{3594B055-864F-403D-821D-E5239EC62AAB}"/>
               </a:ext>
             </a:extLst>
           </p:cNvPr>
@@ -14967,7 +17363,7 @@
           <p:cNvPr id="16" name="">
             <a:extLst xmlns:a="http://schemas.openxmlformats.org/drawingml/2006/main">
               <a:ext uri="{FF2B5EF4-FFF2-40B4-BE49-F238E27FC236}">
-                <a16:creationId xmlns:a16="http://schemas.microsoft.com/office/drawing/2014/main" id="{C58FDA3E-5E7B-4854-A62E-942BA7141E50}"/>
+                <a16:creationId xmlns:a16="http://schemas.microsoft.com/office/drawing/2014/main" id="{77F71F00-DA48-411C-A24B-55AE224A4F02}"/>
               </a:ext>
             </a:extLst>
           </p:cNvPr>
@@ -15031,7 +17427,7 @@
           <p:cNvPr id="17" name="">
             <a:extLst xmlns:a="http://schemas.openxmlformats.org/drawingml/2006/main">
               <a:ext uri="{FF2B5EF4-FFF2-40B4-BE49-F238E27FC236}">
-                <a16:creationId xmlns:a16="http://schemas.microsoft.com/office/drawing/2014/main" id="{FD823A30-CCE5-4063-A1C5-585959AA08C2}"/>
+                <a16:creationId xmlns:a16="http://schemas.microsoft.com/office/drawing/2014/main" id="{595DBE83-520E-4869-B634-CF0CEB3E087C}"/>
               </a:ext>
             </a:extLst>
           </p:cNvPr>
@@ -15064,7 +17460,7 @@
           <p:cNvPr id="18" name="">
             <a:extLst xmlns:a="http://schemas.openxmlformats.org/drawingml/2006/main">
               <a:ext uri="{FF2B5EF4-FFF2-40B4-BE49-F238E27FC236}">
-                <a16:creationId xmlns:a16="http://schemas.microsoft.com/office/drawing/2014/main" id="{3F41EF0B-029B-47B2-B52F-026B6C8AAF3B}"/>
+                <a16:creationId xmlns:a16="http://schemas.microsoft.com/office/drawing/2014/main" id="{83CE5F44-14F2-49D7-A5FE-2BCA47FF8FB2}"/>
               </a:ext>
             </a:extLst>
           </p:cNvPr>
@@ -15099,7 +17495,7 @@
           <p:cNvPr id="19" name="">
             <a:extLst xmlns:a="http://schemas.openxmlformats.org/drawingml/2006/main">
               <a:ext uri="{FF2B5EF4-FFF2-40B4-BE49-F238E27FC236}">
-                <a16:creationId xmlns:a16="http://schemas.microsoft.com/office/drawing/2014/main" id="{66AC4396-ECC5-4AD2-ADA0-062760A17604}"/>
+                <a16:creationId xmlns:a16="http://schemas.microsoft.com/office/drawing/2014/main" id="{4223D86B-C85F-47DB-88D8-13A518782149}"/>
               </a:ext>
             </a:extLst>
           </p:cNvPr>
@@ -15163,7 +17559,7 @@
           <p:cNvPr id="20" name="">
             <a:extLst xmlns:a="http://schemas.openxmlformats.org/drawingml/2006/main">
               <a:ext uri="{FF2B5EF4-FFF2-40B4-BE49-F238E27FC236}">
-                <a16:creationId xmlns:a16="http://schemas.microsoft.com/office/drawing/2014/main" id="{E69CB890-E2D5-4A08-885D-0A895C4AA595}"/>
+                <a16:creationId xmlns:a16="http://schemas.microsoft.com/office/drawing/2014/main" id="{852DAA8D-4826-4D35-9767-22F6E47F5456}"/>
               </a:ext>
             </a:extLst>
           </p:cNvPr>
@@ -15227,7 +17623,7 @@
           <p:cNvPr id="21" name="">
             <a:extLst xmlns:a="http://schemas.openxmlformats.org/drawingml/2006/main">
               <a:ext uri="{FF2B5EF4-FFF2-40B4-BE49-F238E27FC236}">
-                <a16:creationId xmlns:a16="http://schemas.microsoft.com/office/drawing/2014/main" id="{34BF961E-034A-4794-A097-DCDCB9918D02}"/>
+                <a16:creationId xmlns:a16="http://schemas.microsoft.com/office/drawing/2014/main" id="{83F92827-6296-46E3-8221-06A2147F064C}"/>
               </a:ext>
             </a:extLst>
           </p:cNvPr>
@@ -15291,7 +17687,7 @@
           <p:cNvPr id="22" name="">
             <a:extLst xmlns:a="http://schemas.openxmlformats.org/drawingml/2006/main">
               <a:ext uri="{FF2B5EF4-FFF2-40B4-BE49-F238E27FC236}">
-                <a16:creationId xmlns:a16="http://schemas.microsoft.com/office/drawing/2014/main" id="{A79858D6-2B48-463E-AA3D-2E961AFF976E}"/>
+                <a16:creationId xmlns:a16="http://schemas.microsoft.com/office/drawing/2014/main" id="{31CBA884-A263-4A0D-8132-E34434FF2FF7}"/>
               </a:ext>
             </a:extLst>
           </p:cNvPr>
@@ -15324,7 +17720,7 @@
           <p:cNvPr id="23" name="">
             <a:extLst xmlns:a="http://schemas.openxmlformats.org/drawingml/2006/main">
               <a:ext uri="{FF2B5EF4-FFF2-40B4-BE49-F238E27FC236}">
-                <a16:creationId xmlns:a16="http://schemas.microsoft.com/office/drawing/2014/main" id="{C2F5803C-2F5B-4CE0-B386-466839845695}"/>
+                <a16:creationId xmlns:a16="http://schemas.microsoft.com/office/drawing/2014/main" id="{4BB61E03-6A0C-4D60-B6FB-98C123DCEF53}"/>
               </a:ext>
             </a:extLst>
           </p:cNvPr>
@@ -15359,7 +17755,7 @@
           <p:cNvPr id="24" name="">
             <a:extLst xmlns:a="http://schemas.openxmlformats.org/drawingml/2006/main">
               <a:ext uri="{FF2B5EF4-FFF2-40B4-BE49-F238E27FC236}">
-                <a16:creationId xmlns:a16="http://schemas.microsoft.com/office/drawing/2014/main" id="{FCFE0A2F-9D16-4FC6-B180-8B31734D5581}"/>
+                <a16:creationId xmlns:a16="http://schemas.microsoft.com/office/drawing/2014/main" id="{759D53D6-A1E0-48A0-A743-19E184C7892B}"/>
               </a:ext>
             </a:extLst>
           </p:cNvPr>
@@ -15423,7 +17819,7 @@
           <p:cNvPr id="25" name="">
             <a:extLst xmlns:a="http://schemas.openxmlformats.org/drawingml/2006/main">
               <a:ext uri="{FF2B5EF4-FFF2-40B4-BE49-F238E27FC236}">
-                <a16:creationId xmlns:a16="http://schemas.microsoft.com/office/drawing/2014/main" id="{64CF4E11-1AA3-4D1C-B142-16C0D9917A60}"/>
+                <a16:creationId xmlns:a16="http://schemas.microsoft.com/office/drawing/2014/main" id="{50645ED2-586B-4342-BE8F-2207CF244FEF}"/>
               </a:ext>
             </a:extLst>
           </p:cNvPr>
@@ -15487,7 +17883,7 @@
           <p:cNvPr id="26" name="">
             <a:extLst xmlns:a="http://schemas.openxmlformats.org/drawingml/2006/main">
               <a:ext uri="{FF2B5EF4-FFF2-40B4-BE49-F238E27FC236}">
-                <a16:creationId xmlns:a16="http://schemas.microsoft.com/office/drawing/2014/main" id="{114B3170-3FDE-42F1-A38A-D223819C7024}"/>
+                <a16:creationId xmlns:a16="http://schemas.microsoft.com/office/drawing/2014/main" id="{E2820463-B657-4433-A29D-98F6E16DABBF}"/>
               </a:ext>
             </a:extLst>
           </p:cNvPr>
@@ -15551,7 +17947,7 @@
           <p:cNvPr id="27" name="">
             <a:extLst xmlns:a="http://schemas.openxmlformats.org/drawingml/2006/main">
               <a:ext uri="{FF2B5EF4-FFF2-40B4-BE49-F238E27FC236}">
-                <a16:creationId xmlns:a16="http://schemas.microsoft.com/office/drawing/2014/main" id="{5C7A60B7-190B-4184-9C00-5F22A1CFC724}"/>
+                <a16:creationId xmlns:a16="http://schemas.microsoft.com/office/drawing/2014/main" id="{C7ED349E-3C8C-4767-BB3D-C817E36015A4}"/>
               </a:ext>
             </a:extLst>
           </p:cNvPr>
@@ -15586,7 +17982,7 @@
           <p:cNvPr id="28" name="">
             <a:extLst xmlns:a="http://schemas.openxmlformats.org/drawingml/2006/main">
               <a:ext uri="{FF2B5EF4-FFF2-40B4-BE49-F238E27FC236}">
-                <a16:creationId xmlns:a16="http://schemas.microsoft.com/office/drawing/2014/main" id="{A96075B6-0128-4DF6-A8EE-3D99053393C2}"/>
+                <a16:creationId xmlns:a16="http://schemas.microsoft.com/office/drawing/2014/main" id="{AA092AC0-463D-411C-9F17-6D6969A31C4F}"/>
               </a:ext>
             </a:extLst>
           </p:cNvPr>
@@ -15650,7 +18046,7 @@
           <p:cNvPr id="29" name="">
             <a:extLst xmlns:a="http://schemas.openxmlformats.org/drawingml/2006/main">
               <a:ext uri="{FF2B5EF4-FFF2-40B4-BE49-F238E27FC236}">
-                <a16:creationId xmlns:a16="http://schemas.microsoft.com/office/drawing/2014/main" id="{4B4EAA74-D7EB-4F4D-BC9C-65B41981BDA8}"/>
+                <a16:creationId xmlns:a16="http://schemas.microsoft.com/office/drawing/2014/main" id="{34835274-5F65-407A-B3E4-E30AAB6C234F}"/>
               </a:ext>
             </a:extLst>
           </p:cNvPr>
@@ -15685,7 +18081,7 @@
           <p:cNvPr id="30" name="">
             <a:extLst xmlns:a="http://schemas.openxmlformats.org/drawingml/2006/main">
               <a:ext uri="{FF2B5EF4-FFF2-40B4-BE49-F238E27FC236}">
-                <a16:creationId xmlns:a16="http://schemas.microsoft.com/office/drawing/2014/main" id="{4AEEF04B-4485-4FEA-847C-DB8A229260C2}"/>
+                <a16:creationId xmlns:a16="http://schemas.microsoft.com/office/drawing/2014/main" id="{1A0B43E8-022B-49DD-9F71-A757FFF60954}"/>
               </a:ext>
             </a:extLst>
           </p:cNvPr>
@@ -15749,7 +18145,7 @@
           <p:cNvPr id="31" name="">
             <a:extLst xmlns:a="http://schemas.openxmlformats.org/drawingml/2006/main">
               <a:ext uri="{FF2B5EF4-FFF2-40B4-BE49-F238E27FC236}">
-                <a16:creationId xmlns:a16="http://schemas.microsoft.com/office/drawing/2014/main" id="{1517C4B2-1E41-4D45-8D2C-1BF9EB9AC2EB}"/>
+                <a16:creationId xmlns:a16="http://schemas.microsoft.com/office/drawing/2014/main" id="{DD8D489B-D96D-422B-AA87-74F63336FBB2}"/>
               </a:ext>
             </a:extLst>
           </p:cNvPr>
@@ -15784,7 +18180,7 @@
           <p:cNvPr id="32" name="">
             <a:extLst xmlns:a="http://schemas.openxmlformats.org/drawingml/2006/main">
               <a:ext uri="{FF2B5EF4-FFF2-40B4-BE49-F238E27FC236}">
-                <a16:creationId xmlns:a16="http://schemas.microsoft.com/office/drawing/2014/main" id="{46A62433-3221-4653-9E37-7E03BAB0AE2A}"/>
+                <a16:creationId xmlns:a16="http://schemas.microsoft.com/office/drawing/2014/main" id="{084B9B73-16FB-4614-9B78-807C44549F7B}"/>
               </a:ext>
             </a:extLst>
           </p:cNvPr>
@@ -15848,7 +18244,7 @@
           <p:cNvPr id="33" name="">
             <a:extLst xmlns:a="http://schemas.openxmlformats.org/drawingml/2006/main">
               <a:ext uri="{FF2B5EF4-FFF2-40B4-BE49-F238E27FC236}">
-                <a16:creationId xmlns:a16="http://schemas.microsoft.com/office/drawing/2014/main" id="{C5CE2674-9F80-4166-9177-EF306334AFF6}"/>
+                <a16:creationId xmlns:a16="http://schemas.microsoft.com/office/drawing/2014/main" id="{54F7E48F-4E75-434B-AA67-9CF9F6FA08D7}"/>
               </a:ext>
             </a:extLst>
           </p:cNvPr>
@@ -15883,7 +18279,7 @@
           <p:cNvPr id="34" name="">
             <a:extLst xmlns:a="http://schemas.openxmlformats.org/drawingml/2006/main">
               <a:ext uri="{FF2B5EF4-FFF2-40B4-BE49-F238E27FC236}">
-                <a16:creationId xmlns:a16="http://schemas.microsoft.com/office/drawing/2014/main" id="{DC82453C-1E6A-46E5-A891-11CDDBB49BF5}"/>
+                <a16:creationId xmlns:a16="http://schemas.microsoft.com/office/drawing/2014/main" id="{61C4B2D8-596D-4492-95DC-31BF93F4220C}"/>
               </a:ext>
             </a:extLst>
           </p:cNvPr>
@@ -15947,7 +18343,7 @@
           <p:cNvPr id="35" name="">
             <a:extLst xmlns:a="http://schemas.openxmlformats.org/drawingml/2006/main">
               <a:ext uri="{FF2B5EF4-FFF2-40B4-BE49-F238E27FC236}">
-                <a16:creationId xmlns:a16="http://schemas.microsoft.com/office/drawing/2014/main" id="{23C4505A-45D6-4755-BD78-CEC92BF747D5}"/>
+                <a16:creationId xmlns:a16="http://schemas.microsoft.com/office/drawing/2014/main" id="{BE8BBE03-EEAF-41BA-822A-157824808482}"/>
               </a:ext>
             </a:extLst>
           </p:cNvPr>
@@ -16009,7 +18405,7 @@
     </p:spTree>
     <p:extLst>
       <p:ext uri="{BB962C8B-B14F-4D97-AF65-F5344CB8AC3E}">
-        <p14:creationId xmlns:p14="http://schemas.microsoft.com/office/powerpoint/2010/main" val="304700762"/>
+        <p14:creationId xmlns:p14="http://schemas.microsoft.com/office/powerpoint/2010/main" val="208497330"/>
       </p:ext>
     </p:extLst>
   </p:cSld>
@@ -16033,7 +18429,7 @@
           <p:cNvPr id="1" name="">
             <a:extLst xmlns:a="http://schemas.openxmlformats.org/drawingml/2006/main">
               <a:ext uri="{FF2B5EF4-FFF2-40B4-BE49-F238E27FC236}">
-                <a16:creationId xmlns:a16="http://schemas.microsoft.com/office/drawing/2014/main" id="{1FE05099-156C-4C45-BC17-D9A70DE14212}"/>
+                <a16:creationId xmlns:a16="http://schemas.microsoft.com/office/drawing/2014/main" id="{3B2E0A3F-43C6-49FC-8C3E-A830074EBF6A}"/>
               </a:ext>
             </a:extLst>
           </p:cNvPr>
@@ -16068,7 +18464,7 @@
           <p:cNvPr id="2" name="">
             <a:extLst xmlns:a="http://schemas.openxmlformats.org/drawingml/2006/main">
               <a:ext uri="{FF2B5EF4-FFF2-40B4-BE49-F238E27FC236}">
-                <a16:creationId xmlns:a16="http://schemas.microsoft.com/office/drawing/2014/main" id="{0E963E9D-90E8-4CAC-88AA-DC9391523BF9}"/>
+                <a16:creationId xmlns:a16="http://schemas.microsoft.com/office/drawing/2014/main" id="{B3B1194F-54B1-497C-A0BF-35AA34E13CFE}"/>
               </a:ext>
             </a:extLst>
           </p:cNvPr>
@@ -16103,7 +18499,7 @@
           <p:cNvPr id="3" name="">
             <a:extLst xmlns:a="http://schemas.openxmlformats.org/drawingml/2006/main">
               <a:ext uri="{FF2B5EF4-FFF2-40B4-BE49-F238E27FC236}">
-                <a16:creationId xmlns:a16="http://schemas.microsoft.com/office/drawing/2014/main" id="{A4794B20-137A-4E3A-8CA1-7C62AB33BAE4}"/>
+                <a16:creationId xmlns:a16="http://schemas.microsoft.com/office/drawing/2014/main" id="{90FEFCFF-E2EE-4135-B286-CB0AC96DD789}"/>
               </a:ext>
             </a:extLst>
           </p:cNvPr>
@@ -16167,7 +18563,7 @@
           <p:cNvPr id="4" name="">
             <a:extLst xmlns:a="http://schemas.openxmlformats.org/drawingml/2006/main">
               <a:ext uri="{FF2B5EF4-FFF2-40B4-BE49-F238E27FC236}">
-                <a16:creationId xmlns:a16="http://schemas.microsoft.com/office/drawing/2014/main" id="{DEE5E9DD-8346-4B9F-828C-98D79AB12A4E}"/>
+                <a16:creationId xmlns:a16="http://schemas.microsoft.com/office/drawing/2014/main" id="{AB9ADF23-10BF-46FB-9931-EBC05BF69BF2}"/>
               </a:ext>
             </a:extLst>
           </p:cNvPr>
@@ -16231,7 +18627,7 @@
           <p:cNvPr id="5" name="">
             <a:extLst xmlns:a="http://schemas.openxmlformats.org/drawingml/2006/main">
               <a:ext uri="{FF2B5EF4-FFF2-40B4-BE49-F238E27FC236}">
-                <a16:creationId xmlns:a16="http://schemas.microsoft.com/office/drawing/2014/main" id="{DBF1F452-308B-42E8-AAEB-23C095FD929F}"/>
+                <a16:creationId xmlns:a16="http://schemas.microsoft.com/office/drawing/2014/main" id="{53B16746-7D46-41AE-8EFD-40E5B89EAC25}"/>
               </a:ext>
             </a:extLst>
           </p:cNvPr>
@@ -16295,7 +18691,7 @@
           <p:cNvPr id="6" name="">
             <a:extLst xmlns:a="http://schemas.openxmlformats.org/drawingml/2006/main">
               <a:ext uri="{FF2B5EF4-FFF2-40B4-BE49-F238E27FC236}">
-                <a16:creationId xmlns:a16="http://schemas.microsoft.com/office/drawing/2014/main" id="{FE5EC92C-7FAE-4EBA-B8D8-8F5169714D83}"/>
+                <a16:creationId xmlns:a16="http://schemas.microsoft.com/office/drawing/2014/main" id="{E526EB45-CAA6-41A1-B789-1F6AB70F907E}"/>
               </a:ext>
             </a:extLst>
           </p:cNvPr>
@@ -16359,7 +18755,7 @@
           <p:cNvPr id="7" name="">
             <a:extLst xmlns:a="http://schemas.openxmlformats.org/drawingml/2006/main">
               <a:ext uri="{FF2B5EF4-FFF2-40B4-BE49-F238E27FC236}">
-                <a16:creationId xmlns:a16="http://schemas.microsoft.com/office/drawing/2014/main" id="{4F7C4DE6-A0E1-46F0-8047-F657F218083A}"/>
+                <a16:creationId xmlns:a16="http://schemas.microsoft.com/office/drawing/2014/main" id="{55946EF2-726D-43BC-9446-5AB81DB4C8C6}"/>
               </a:ext>
             </a:extLst>
           </p:cNvPr>
@@ -16396,7 +18792,7 @@
           <p:nvPr/>
         </p:nvPicPr>
         <p:blipFill>
-          <a:blip xmlns:r="http://schemas.openxmlformats.org/officeDocument/2006/relationships" xmlns:a="http://schemas.openxmlformats.org/drawingml/2006/main" r:embed="R9c86d361885545d4"/>
+          <a:blip xmlns:r="http://schemas.openxmlformats.org/officeDocument/2006/relationships" xmlns:a="http://schemas.openxmlformats.org/drawingml/2006/main" r:embed="Rb759e279366647fd"/>
           <a:stretch xmlns:a="http://schemas.openxmlformats.org/drawingml/2006/main"/>
         </p:blipFill>
         <p:spPr>
@@ -16414,7 +18810,7 @@
           <p:cNvPr id="9" name="">
             <a:extLst xmlns:a="http://schemas.openxmlformats.org/drawingml/2006/main">
               <a:ext uri="{FF2B5EF4-FFF2-40B4-BE49-F238E27FC236}">
-                <a16:creationId xmlns:a16="http://schemas.microsoft.com/office/drawing/2014/main" id="{4DD2D9F2-527C-4D26-A216-A35268811A3B}"/>
+                <a16:creationId xmlns:a16="http://schemas.microsoft.com/office/drawing/2014/main" id="{DD39387A-4CF5-484E-A74C-EE9326AD1AA3}"/>
               </a:ext>
             </a:extLst>
           </p:cNvPr>
@@ -16478,7 +18874,7 @@
           <p:cNvPr id="10" name="">
             <a:extLst xmlns:a="http://schemas.openxmlformats.org/drawingml/2006/main">
               <a:ext uri="{FF2B5EF4-FFF2-40B4-BE49-F238E27FC236}">
-                <a16:creationId xmlns:a16="http://schemas.microsoft.com/office/drawing/2014/main" id="{ACED2B32-8A1A-412C-B003-CEE893A6450F}"/>
+                <a16:creationId xmlns:a16="http://schemas.microsoft.com/office/drawing/2014/main" id="{7ECCD045-0E13-44AE-BFEE-485D91A0D16F}"/>
               </a:ext>
             </a:extLst>
           </p:cNvPr>
@@ -16511,7 +18907,7 @@
           <p:cNvPr id="11" name="">
             <a:extLst xmlns:a="http://schemas.openxmlformats.org/drawingml/2006/main">
               <a:ext uri="{FF2B5EF4-FFF2-40B4-BE49-F238E27FC236}">
-                <a16:creationId xmlns:a16="http://schemas.microsoft.com/office/drawing/2014/main" id="{C00012A1-8009-4D53-9AA3-42C462361823}"/>
+                <a16:creationId xmlns:a16="http://schemas.microsoft.com/office/drawing/2014/main" id="{B4A49B28-18D1-4167-B9F8-260EDB442A1F}"/>
               </a:ext>
             </a:extLst>
           </p:cNvPr>
@@ -16546,7 +18942,7 @@
           <p:cNvPr id="12" name="">
             <a:extLst xmlns:a="http://schemas.openxmlformats.org/drawingml/2006/main">
               <a:ext uri="{FF2B5EF4-FFF2-40B4-BE49-F238E27FC236}">
-                <a16:creationId xmlns:a16="http://schemas.microsoft.com/office/drawing/2014/main" id="{A1AB4DAE-9DBF-4CFB-8212-48B4FCE3A0DF}"/>
+                <a16:creationId xmlns:a16="http://schemas.microsoft.com/office/drawing/2014/main" id="{8763F1B8-61F3-481D-8FF5-8A0538AD9730}"/>
               </a:ext>
             </a:extLst>
           </p:cNvPr>
@@ -16610,7 +19006,7 @@
           <p:cNvPr id="13" name="">
             <a:extLst xmlns:a="http://schemas.openxmlformats.org/drawingml/2006/main">
               <a:ext uri="{FF2B5EF4-FFF2-40B4-BE49-F238E27FC236}">
-                <a16:creationId xmlns:a16="http://schemas.microsoft.com/office/drawing/2014/main" id="{60708111-BD17-4903-8779-8A92A7A27964}"/>
+                <a16:creationId xmlns:a16="http://schemas.microsoft.com/office/drawing/2014/main" id="{E9FBF21B-FE03-4DCC-9346-EAD93FC177BA}"/>
               </a:ext>
             </a:extLst>
           </p:cNvPr>
@@ -16674,7 +19070,7 @@
           <p:cNvPr id="14" name="">
             <a:extLst xmlns:a="http://schemas.openxmlformats.org/drawingml/2006/main">
               <a:ext uri="{FF2B5EF4-FFF2-40B4-BE49-F238E27FC236}">
-                <a16:creationId xmlns:a16="http://schemas.microsoft.com/office/drawing/2014/main" id="{4399BDBC-F197-4707-8073-7BB8A715699F}"/>
+                <a16:creationId xmlns:a16="http://schemas.microsoft.com/office/drawing/2014/main" id="{4497A922-B6FA-41F4-BCD6-64B213767072}"/>
               </a:ext>
             </a:extLst>
           </p:cNvPr>
@@ -16738,7 +19134,7 @@
           <p:cNvPr id="15" name="">
             <a:extLst xmlns:a="http://schemas.openxmlformats.org/drawingml/2006/main">
               <a:ext uri="{FF2B5EF4-FFF2-40B4-BE49-F238E27FC236}">
-                <a16:creationId xmlns:a16="http://schemas.microsoft.com/office/drawing/2014/main" id="{F892170B-7EEB-42AE-BC6E-299A56828480}"/>
+                <a16:creationId xmlns:a16="http://schemas.microsoft.com/office/drawing/2014/main" id="{3C43E8EA-636E-4221-9510-5F146D38059D}"/>
               </a:ext>
             </a:extLst>
           </p:cNvPr>
@@ -16771,7 +19167,7 @@
           <p:cNvPr id="16" name="">
             <a:extLst xmlns:a="http://schemas.openxmlformats.org/drawingml/2006/main">
               <a:ext uri="{FF2B5EF4-FFF2-40B4-BE49-F238E27FC236}">
-                <a16:creationId xmlns:a16="http://schemas.microsoft.com/office/drawing/2014/main" id="{720BD510-08CB-44FA-B635-8591A1B52EC2}"/>
+                <a16:creationId xmlns:a16="http://schemas.microsoft.com/office/drawing/2014/main" id="{FB43A14B-2773-42D2-BCF1-13B8A9B91DFD}"/>
               </a:ext>
             </a:extLst>
           </p:cNvPr>
@@ -16806,7 +19202,7 @@
           <p:cNvPr id="17" name="">
             <a:extLst xmlns:a="http://schemas.openxmlformats.org/drawingml/2006/main">
               <a:ext uri="{FF2B5EF4-FFF2-40B4-BE49-F238E27FC236}">
-                <a16:creationId xmlns:a16="http://schemas.microsoft.com/office/drawing/2014/main" id="{38A3EF58-138C-437E-8807-8425816C5558}"/>
+                <a16:creationId xmlns:a16="http://schemas.microsoft.com/office/drawing/2014/main" id="{AA8E24CB-6BA0-4906-83A2-EE4C23FA8543}"/>
               </a:ext>
             </a:extLst>
           </p:cNvPr>
@@ -16870,7 +19266,7 @@
           <p:cNvPr id="18" name="">
             <a:extLst xmlns:a="http://schemas.openxmlformats.org/drawingml/2006/main">
               <a:ext uri="{FF2B5EF4-FFF2-40B4-BE49-F238E27FC236}">
-                <a16:creationId xmlns:a16="http://schemas.microsoft.com/office/drawing/2014/main" id="{6566724C-9452-4902-B991-FF3BF4120C2F}"/>
+                <a16:creationId xmlns:a16="http://schemas.microsoft.com/office/drawing/2014/main" id="{E02B26A6-C1FB-4B85-AFF0-7FF9B4758D19}"/>
               </a:ext>
             </a:extLst>
           </p:cNvPr>
@@ -16934,7 +19330,7 @@
           <p:cNvPr id="19" name="">
             <a:extLst xmlns:a="http://schemas.openxmlformats.org/drawingml/2006/main">
               <a:ext uri="{FF2B5EF4-FFF2-40B4-BE49-F238E27FC236}">
-                <a16:creationId xmlns:a16="http://schemas.microsoft.com/office/drawing/2014/main" id="{283E32B2-33C1-4A6E-A445-EC93A3BF889D}"/>
+                <a16:creationId xmlns:a16="http://schemas.microsoft.com/office/drawing/2014/main" id="{26137FD4-7C9D-4272-B80F-66E84524677E}"/>
               </a:ext>
             </a:extLst>
           </p:cNvPr>
@@ -16998,7 +19394,7 @@
           <p:cNvPr id="20" name="">
             <a:extLst xmlns:a="http://schemas.openxmlformats.org/drawingml/2006/main">
               <a:ext uri="{FF2B5EF4-FFF2-40B4-BE49-F238E27FC236}">
-                <a16:creationId xmlns:a16="http://schemas.microsoft.com/office/drawing/2014/main" id="{E913128A-F66C-4D81-B924-7F0329FA44AC}"/>
+                <a16:creationId xmlns:a16="http://schemas.microsoft.com/office/drawing/2014/main" id="{46BBBFB1-1A29-4986-AFC8-9E176585133B}"/>
               </a:ext>
             </a:extLst>
           </p:cNvPr>
@@ -17031,7 +19427,7 @@
           <p:cNvPr id="21" name="">
             <a:extLst xmlns:a="http://schemas.openxmlformats.org/drawingml/2006/main">
               <a:ext uri="{FF2B5EF4-FFF2-40B4-BE49-F238E27FC236}">
-                <a16:creationId xmlns:a16="http://schemas.microsoft.com/office/drawing/2014/main" id="{7C5CBC6C-0D22-46AB-8FB7-B695F4AF1433}"/>
+                <a16:creationId xmlns:a16="http://schemas.microsoft.com/office/drawing/2014/main" id="{387F4CB3-1251-4ED9-AF39-5497595C67DE}"/>
               </a:ext>
             </a:extLst>
           </p:cNvPr>
@@ -17066,7 +19462,7 @@
           <p:cNvPr id="22" name="">
             <a:extLst xmlns:a="http://schemas.openxmlformats.org/drawingml/2006/main">
               <a:ext uri="{FF2B5EF4-FFF2-40B4-BE49-F238E27FC236}">
-                <a16:creationId xmlns:a16="http://schemas.microsoft.com/office/drawing/2014/main" id="{F7EE5945-34EB-4789-AB43-7B9AFD73715F}"/>
+                <a16:creationId xmlns:a16="http://schemas.microsoft.com/office/drawing/2014/main" id="{7836EF08-2936-40CA-9D30-F57CB7F513F8}"/>
               </a:ext>
             </a:extLst>
           </p:cNvPr>
@@ -17130,7 +19526,7 @@
           <p:cNvPr id="23" name="">
             <a:extLst xmlns:a="http://schemas.openxmlformats.org/drawingml/2006/main">
               <a:ext uri="{FF2B5EF4-FFF2-40B4-BE49-F238E27FC236}">
-                <a16:creationId xmlns:a16="http://schemas.microsoft.com/office/drawing/2014/main" id="{8B6A8D02-E3E2-4AC5-92D8-B5FEAB7869E0}"/>
+                <a16:creationId xmlns:a16="http://schemas.microsoft.com/office/drawing/2014/main" id="{BF276609-9AFF-4DEE-B904-F3EE320712C3}"/>
               </a:ext>
             </a:extLst>
           </p:cNvPr>
@@ -17194,7 +19590,7 @@
           <p:cNvPr id="24" name="">
             <a:extLst xmlns:a="http://schemas.openxmlformats.org/drawingml/2006/main">
               <a:ext uri="{FF2B5EF4-FFF2-40B4-BE49-F238E27FC236}">
-                <a16:creationId xmlns:a16="http://schemas.microsoft.com/office/drawing/2014/main" id="{E3470A15-E3DE-46CE-A6C2-17C44BA6AD2A}"/>
+                <a16:creationId xmlns:a16="http://schemas.microsoft.com/office/drawing/2014/main" id="{C2D4CF7A-0FA5-4C8D-9BB9-8B3A829A98FC}"/>
               </a:ext>
             </a:extLst>
           </p:cNvPr>
@@ -17258,7 +19654,7 @@
           <p:cNvPr id="25" name="">
             <a:extLst xmlns:a="http://schemas.openxmlformats.org/drawingml/2006/main">
               <a:ext uri="{FF2B5EF4-FFF2-40B4-BE49-F238E27FC236}">
-                <a16:creationId xmlns:a16="http://schemas.microsoft.com/office/drawing/2014/main" id="{E858BE7D-D0CA-4940-BE69-6E553AF4BE7F}"/>
+                <a16:creationId xmlns:a16="http://schemas.microsoft.com/office/drawing/2014/main" id="{E68C2466-C356-426F-987E-F6AEE482B496}"/>
               </a:ext>
             </a:extLst>
           </p:cNvPr>
@@ -17320,7 +19716,7 @@
     </p:spTree>
     <p:extLst>
       <p:ext uri="{BB962C8B-B14F-4D97-AF65-F5344CB8AC3E}">
-        <p14:creationId xmlns:p14="http://schemas.microsoft.com/office/powerpoint/2010/main" val="1215567697"/>
+        <p14:creationId xmlns:p14="http://schemas.microsoft.com/office/powerpoint/2010/main" val="441960156"/>
       </p:ext>
     </p:extLst>
   </p:cSld>
@@ -17344,7 +19740,7 @@
           <p:cNvPr id="1" name="">
             <a:extLst xmlns:a="http://schemas.openxmlformats.org/drawingml/2006/main">
               <a:ext uri="{FF2B5EF4-FFF2-40B4-BE49-F238E27FC236}">
-                <a16:creationId xmlns:a16="http://schemas.microsoft.com/office/drawing/2014/main" id="{4E0632C6-595A-4385-9AAF-A0358679A4A3}"/>
+                <a16:creationId xmlns:a16="http://schemas.microsoft.com/office/drawing/2014/main" id="{EA616A2B-F651-45CA-8F49-254A9AED93EE}"/>
               </a:ext>
             </a:extLst>
           </p:cNvPr>
@@ -17379,7 +19775,7 @@
           <p:cNvPr id="2" name="">
             <a:extLst xmlns:a="http://schemas.openxmlformats.org/drawingml/2006/main">
               <a:ext uri="{FF2B5EF4-FFF2-40B4-BE49-F238E27FC236}">
-                <a16:creationId xmlns:a16="http://schemas.microsoft.com/office/drawing/2014/main" id="{34FD91F3-7B18-411C-8721-2842A3C4614A}"/>
+                <a16:creationId xmlns:a16="http://schemas.microsoft.com/office/drawing/2014/main" id="{7CC9E96F-ADCE-4D30-8DC4-5E66609806A6}"/>
               </a:ext>
             </a:extLst>
           </p:cNvPr>
@@ -17414,7 +19810,7 @@
           <p:cNvPr id="3" name="">
             <a:extLst xmlns:a="http://schemas.openxmlformats.org/drawingml/2006/main">
               <a:ext uri="{FF2B5EF4-FFF2-40B4-BE49-F238E27FC236}">
-                <a16:creationId xmlns:a16="http://schemas.microsoft.com/office/drawing/2014/main" id="{D218BAFF-CA24-4EC5-9B0A-986E23369D0F}"/>
+                <a16:creationId xmlns:a16="http://schemas.microsoft.com/office/drawing/2014/main" id="{AF07FDBA-10F6-4862-981E-75340814025D}"/>
               </a:ext>
             </a:extLst>
           </p:cNvPr>
@@ -17478,7 +19874,7 @@
           <p:cNvPr id="4" name="">
             <a:extLst xmlns:a="http://schemas.openxmlformats.org/drawingml/2006/main">
               <a:ext uri="{FF2B5EF4-FFF2-40B4-BE49-F238E27FC236}">
-                <a16:creationId xmlns:a16="http://schemas.microsoft.com/office/drawing/2014/main" id="{E193C927-9724-4745-B9FD-3DB861D727C5}"/>
+                <a16:creationId xmlns:a16="http://schemas.microsoft.com/office/drawing/2014/main" id="{6DAE4C61-0116-4FEB-91AF-1834594BBD0F}"/>
               </a:ext>
             </a:extLst>
           </p:cNvPr>
@@ -17542,7 +19938,7 @@
           <p:cNvPr id="5" name="">
             <a:extLst xmlns:a="http://schemas.openxmlformats.org/drawingml/2006/main">
               <a:ext uri="{FF2B5EF4-FFF2-40B4-BE49-F238E27FC236}">
-                <a16:creationId xmlns:a16="http://schemas.microsoft.com/office/drawing/2014/main" id="{A4C1595E-CC90-4040-9CEA-3769990A8E27}"/>
+                <a16:creationId xmlns:a16="http://schemas.microsoft.com/office/drawing/2014/main" id="{70DD7574-0CF1-41AA-ADB6-FCE39F8A721B}"/>
               </a:ext>
             </a:extLst>
           </p:cNvPr>
@@ -17606,7 +20002,7 @@
           <p:cNvPr id="6" name="">
             <a:extLst xmlns:a="http://schemas.openxmlformats.org/drawingml/2006/main">
               <a:ext uri="{FF2B5EF4-FFF2-40B4-BE49-F238E27FC236}">
-                <a16:creationId xmlns:a16="http://schemas.microsoft.com/office/drawing/2014/main" id="{752C91A7-0729-4E54-BAC2-14A22F8D3926}"/>
+                <a16:creationId xmlns:a16="http://schemas.microsoft.com/office/drawing/2014/main" id="{31214FED-F4C4-4886-8386-9C714A60EA0F}"/>
               </a:ext>
             </a:extLst>
           </p:cNvPr>
@@ -17670,7 +20066,7 @@
           <p:cNvPr id="7" name="">
             <a:extLst xmlns:a="http://schemas.openxmlformats.org/drawingml/2006/main">
               <a:ext uri="{FF2B5EF4-FFF2-40B4-BE49-F238E27FC236}">
-                <a16:creationId xmlns:a16="http://schemas.microsoft.com/office/drawing/2014/main" id="{71224A4C-ACA1-48CB-B6AB-ABA31CE9131E}"/>
+                <a16:creationId xmlns:a16="http://schemas.microsoft.com/office/drawing/2014/main" id="{558D76C1-ADD0-4237-90B1-C5066F77C33A}"/>
               </a:ext>
             </a:extLst>
           </p:cNvPr>
@@ -17707,7 +20103,7 @@
           <p:nvPr/>
         </p:nvPicPr>
         <p:blipFill>
-          <a:blip xmlns:r="http://schemas.openxmlformats.org/officeDocument/2006/relationships" xmlns:a="http://schemas.openxmlformats.org/drawingml/2006/main" r:embed="Rc5d14992e69d4e89"/>
+          <a:blip xmlns:r="http://schemas.openxmlformats.org/officeDocument/2006/relationships" xmlns:a="http://schemas.openxmlformats.org/drawingml/2006/main" r:embed="R12bbfa139e774901"/>
           <a:stretch xmlns:a="http://schemas.openxmlformats.org/drawingml/2006/main"/>
         </p:blipFill>
         <p:spPr>
@@ -17725,7 +20121,7 @@
           <p:cNvPr id="9" name="">
             <a:extLst xmlns:a="http://schemas.openxmlformats.org/drawingml/2006/main">
               <a:ext uri="{FF2B5EF4-FFF2-40B4-BE49-F238E27FC236}">
-                <a16:creationId xmlns:a16="http://schemas.microsoft.com/office/drawing/2014/main" id="{581BD543-A8B9-4BD3-A41C-C53ECF806565}"/>
+                <a16:creationId xmlns:a16="http://schemas.microsoft.com/office/drawing/2014/main" id="{E1AB1709-933A-4A30-8BD8-BF9C04CEF2E4}"/>
               </a:ext>
             </a:extLst>
           </p:cNvPr>
@@ -17789,7 +20185,7 @@
           <p:cNvPr id="10" name="">
             <a:extLst xmlns:a="http://schemas.openxmlformats.org/drawingml/2006/main">
               <a:ext uri="{FF2B5EF4-FFF2-40B4-BE49-F238E27FC236}">
-                <a16:creationId xmlns:a16="http://schemas.microsoft.com/office/drawing/2014/main" id="{B39B753C-D1CB-4A8B-B060-CA751EAE0906}"/>
+                <a16:creationId xmlns:a16="http://schemas.microsoft.com/office/drawing/2014/main" id="{201320F0-8ADC-440A-AED4-4C0DC94B8342}"/>
               </a:ext>
             </a:extLst>
           </p:cNvPr>
@@ -17826,7 +20222,7 @@
           <p:nvPr/>
         </p:nvPicPr>
         <p:blipFill>
-          <a:blip xmlns:r="http://schemas.openxmlformats.org/officeDocument/2006/relationships" xmlns:a="http://schemas.openxmlformats.org/drawingml/2006/main" r:embed="R0acd0be4e6824ffd"/>
+          <a:blip xmlns:r="http://schemas.openxmlformats.org/officeDocument/2006/relationships" xmlns:a="http://schemas.openxmlformats.org/drawingml/2006/main" r:embed="R021db541beeb4d14"/>
           <a:stretch xmlns:a="http://schemas.openxmlformats.org/drawingml/2006/main"/>
         </p:blipFill>
         <p:spPr>
@@ -17844,7 +20240,7 @@
           <p:cNvPr id="12" name="">
             <a:extLst xmlns:a="http://schemas.openxmlformats.org/drawingml/2006/main">
               <a:ext uri="{FF2B5EF4-FFF2-40B4-BE49-F238E27FC236}">
-                <a16:creationId xmlns:a16="http://schemas.microsoft.com/office/drawing/2014/main" id="{EAECE6A2-097C-4E7B-92D2-6BD3F1C72BDF}"/>
+                <a16:creationId xmlns:a16="http://schemas.microsoft.com/office/drawing/2014/main" id="{390C420F-7E4C-4770-83D2-302AC635D763}"/>
               </a:ext>
             </a:extLst>
           </p:cNvPr>
@@ -17908,7 +20304,7 @@
           <p:cNvPr id="13" name="">
             <a:extLst xmlns:a="http://schemas.openxmlformats.org/drawingml/2006/main">
               <a:ext uri="{FF2B5EF4-FFF2-40B4-BE49-F238E27FC236}">
-                <a16:creationId xmlns:a16="http://schemas.microsoft.com/office/drawing/2014/main" id="{A4B6D175-E06E-4EC7-8776-9F7E3659C1F1}"/>
+                <a16:creationId xmlns:a16="http://schemas.microsoft.com/office/drawing/2014/main" id="{977A293F-81EE-4F94-98F2-96F952C582A1}"/>
               </a:ext>
             </a:extLst>
           </p:cNvPr>
@@ -17941,7 +20337,7 @@
           <p:cNvPr id="14" name="">
             <a:extLst xmlns:a="http://schemas.openxmlformats.org/drawingml/2006/main">
               <a:ext uri="{FF2B5EF4-FFF2-40B4-BE49-F238E27FC236}">
-                <a16:creationId xmlns:a16="http://schemas.microsoft.com/office/drawing/2014/main" id="{8CB5AB31-2DC3-4A50-96D3-586F5D9C7367}"/>
+                <a16:creationId xmlns:a16="http://schemas.microsoft.com/office/drawing/2014/main" id="{FC7EF319-CE31-4B1D-9128-F948A6B52D7D}"/>
               </a:ext>
             </a:extLst>
           </p:cNvPr>
@@ -17976,7 +20372,7 @@
           <p:cNvPr id="15" name="">
             <a:extLst xmlns:a="http://schemas.openxmlformats.org/drawingml/2006/main">
               <a:ext uri="{FF2B5EF4-FFF2-40B4-BE49-F238E27FC236}">
-                <a16:creationId xmlns:a16="http://schemas.microsoft.com/office/drawing/2014/main" id="{1ACBCEE0-8A25-4AF8-9E49-F13D730752D7}"/>
+                <a16:creationId xmlns:a16="http://schemas.microsoft.com/office/drawing/2014/main" id="{AFFB8C31-2822-450D-9F92-01253319843C}"/>
               </a:ext>
             </a:extLst>
           </p:cNvPr>
@@ -18040,7 +20436,7 @@
           <p:cNvPr id="16" name="">
             <a:extLst xmlns:a="http://schemas.openxmlformats.org/drawingml/2006/main">
               <a:ext uri="{FF2B5EF4-FFF2-40B4-BE49-F238E27FC236}">
-                <a16:creationId xmlns:a16="http://schemas.microsoft.com/office/drawing/2014/main" id="{2BA538FA-2DEC-4C46-9198-7BEB7C8896E7}"/>
+                <a16:creationId xmlns:a16="http://schemas.microsoft.com/office/drawing/2014/main" id="{9DFA663E-31BF-4770-AB81-56A35D813FC2}"/>
               </a:ext>
             </a:extLst>
           </p:cNvPr>
@@ -18104,7 +20500,7 @@
           <p:cNvPr id="17" name="">
             <a:extLst xmlns:a="http://schemas.openxmlformats.org/drawingml/2006/main">
               <a:ext uri="{FF2B5EF4-FFF2-40B4-BE49-F238E27FC236}">
-                <a16:creationId xmlns:a16="http://schemas.microsoft.com/office/drawing/2014/main" id="{40D93FAA-F29F-4AC3-8783-49A06C5E11B4}"/>
+                <a16:creationId xmlns:a16="http://schemas.microsoft.com/office/drawing/2014/main" id="{0D9B7906-CB7D-41A4-9601-8FA380C349AF}"/>
               </a:ext>
             </a:extLst>
           </p:cNvPr>
@@ -18168,7 +20564,7 @@
           <p:cNvPr id="18" name="">
             <a:extLst xmlns:a="http://schemas.openxmlformats.org/drawingml/2006/main">
               <a:ext uri="{FF2B5EF4-FFF2-40B4-BE49-F238E27FC236}">
-                <a16:creationId xmlns:a16="http://schemas.microsoft.com/office/drawing/2014/main" id="{089F7AA1-99F6-4050-A4E3-29BB90B70D57}"/>
+                <a16:creationId xmlns:a16="http://schemas.microsoft.com/office/drawing/2014/main" id="{49770293-D8BC-4F0B-9FF1-DCC2C7A4C8BD}"/>
               </a:ext>
             </a:extLst>
           </p:cNvPr>
@@ -18201,7 +20597,7 @@
           <p:cNvPr id="19" name="">
             <a:extLst xmlns:a="http://schemas.openxmlformats.org/drawingml/2006/main">
               <a:ext uri="{FF2B5EF4-FFF2-40B4-BE49-F238E27FC236}">
-                <a16:creationId xmlns:a16="http://schemas.microsoft.com/office/drawing/2014/main" id="{690D2320-D167-47E2-8C58-C6A42BA5ADDB}"/>
+                <a16:creationId xmlns:a16="http://schemas.microsoft.com/office/drawing/2014/main" id="{25D527E6-0CD5-422D-B2C9-667B0C5B1E78}"/>
               </a:ext>
             </a:extLst>
           </p:cNvPr>
@@ -18236,7 +20632,7 @@
           <p:cNvPr id="20" name="">
             <a:extLst xmlns:a="http://schemas.openxmlformats.org/drawingml/2006/main">
               <a:ext uri="{FF2B5EF4-FFF2-40B4-BE49-F238E27FC236}">
-                <a16:creationId xmlns:a16="http://schemas.microsoft.com/office/drawing/2014/main" id="{074B3F11-5716-4AB3-A38F-AB8BACE2A82E}"/>
+                <a16:creationId xmlns:a16="http://schemas.microsoft.com/office/drawing/2014/main" id="{77AA0661-50C8-43E2-9842-A8800593E897}"/>
               </a:ext>
             </a:extLst>
           </p:cNvPr>
@@ -18300,7 +20696,7 @@
           <p:cNvPr id="21" name="">
             <a:extLst xmlns:a="http://schemas.openxmlformats.org/drawingml/2006/main">
               <a:ext uri="{FF2B5EF4-FFF2-40B4-BE49-F238E27FC236}">
-                <a16:creationId xmlns:a16="http://schemas.microsoft.com/office/drawing/2014/main" id="{FA6CE400-403B-482F-AF59-2CCD3AAE0233}"/>
+                <a16:creationId xmlns:a16="http://schemas.microsoft.com/office/drawing/2014/main" id="{A5C88DFF-C740-4425-92F3-72702E577EF6}"/>
               </a:ext>
             </a:extLst>
           </p:cNvPr>
@@ -18364,7 +20760,7 @@
           <p:cNvPr id="22" name="">
             <a:extLst xmlns:a="http://schemas.openxmlformats.org/drawingml/2006/main">
               <a:ext uri="{FF2B5EF4-FFF2-40B4-BE49-F238E27FC236}">
-                <a16:creationId xmlns:a16="http://schemas.microsoft.com/office/drawing/2014/main" id="{21729CE6-BB43-458A-82CA-F39945ECC277}"/>
+                <a16:creationId xmlns:a16="http://schemas.microsoft.com/office/drawing/2014/main" id="{01B6EAA3-BD59-4168-93FE-48E989E696F2}"/>
               </a:ext>
             </a:extLst>
           </p:cNvPr>
@@ -18428,7 +20824,7 @@
           <p:cNvPr id="23" name="">
             <a:extLst xmlns:a="http://schemas.openxmlformats.org/drawingml/2006/main">
               <a:ext uri="{FF2B5EF4-FFF2-40B4-BE49-F238E27FC236}">
-                <a16:creationId xmlns:a16="http://schemas.microsoft.com/office/drawing/2014/main" id="{EA510999-B873-42D7-9B24-BF5D0C67676D}"/>
+                <a16:creationId xmlns:a16="http://schemas.microsoft.com/office/drawing/2014/main" id="{36E0C8A8-9132-455A-A012-D10247561FF8}"/>
               </a:ext>
             </a:extLst>
           </p:cNvPr>
@@ -18461,7 +20857,7 @@
           <p:cNvPr id="24" name="">
             <a:extLst xmlns:a="http://schemas.openxmlformats.org/drawingml/2006/main">
               <a:ext uri="{FF2B5EF4-FFF2-40B4-BE49-F238E27FC236}">
-                <a16:creationId xmlns:a16="http://schemas.microsoft.com/office/drawing/2014/main" id="{6DA7E7A8-18E6-4FD1-8019-FBEA386587A2}"/>
+                <a16:creationId xmlns:a16="http://schemas.microsoft.com/office/drawing/2014/main" id="{9F8C5BAC-DAAA-45E5-A281-9F783C77D7D3}"/>
               </a:ext>
             </a:extLst>
           </p:cNvPr>
@@ -18496,7 +20892,7 @@
           <p:cNvPr id="25" name="">
             <a:extLst xmlns:a="http://schemas.openxmlformats.org/drawingml/2006/main">
               <a:ext uri="{FF2B5EF4-FFF2-40B4-BE49-F238E27FC236}">
-                <a16:creationId xmlns:a16="http://schemas.microsoft.com/office/drawing/2014/main" id="{51C82140-01CF-45FD-ADD4-F9B5ECC61044}"/>
+                <a16:creationId xmlns:a16="http://schemas.microsoft.com/office/drawing/2014/main" id="{9A3FB24F-65C3-4946-8954-F20709569148}"/>
               </a:ext>
             </a:extLst>
           </p:cNvPr>
@@ -18560,7 +20956,7 @@
           <p:cNvPr id="26" name="">
             <a:extLst xmlns:a="http://schemas.openxmlformats.org/drawingml/2006/main">
               <a:ext uri="{FF2B5EF4-FFF2-40B4-BE49-F238E27FC236}">
-                <a16:creationId xmlns:a16="http://schemas.microsoft.com/office/drawing/2014/main" id="{C470C4DF-373B-48D0-998C-458D8D1E667A}"/>
+                <a16:creationId xmlns:a16="http://schemas.microsoft.com/office/drawing/2014/main" id="{236A08D5-55BE-474E-A299-D94A2A1A7C13}"/>
               </a:ext>
             </a:extLst>
           </p:cNvPr>
@@ -18624,7 +21020,7 @@
           <p:cNvPr id="27" name="">
             <a:extLst xmlns:a="http://schemas.openxmlformats.org/drawingml/2006/main">
               <a:ext uri="{FF2B5EF4-FFF2-40B4-BE49-F238E27FC236}">
-                <a16:creationId xmlns:a16="http://schemas.microsoft.com/office/drawing/2014/main" id="{4242FB2A-B176-4C27-BEAF-DE25577F6031}"/>
+                <a16:creationId xmlns:a16="http://schemas.microsoft.com/office/drawing/2014/main" id="{8FDDC8D8-BD86-4D36-9089-9646740AA72D}"/>
               </a:ext>
             </a:extLst>
           </p:cNvPr>
@@ -18686,7 +21082,7 @@
     </p:spTree>
     <p:extLst>
       <p:ext uri="{BB962C8B-B14F-4D97-AF65-F5344CB8AC3E}">
-        <p14:creationId xmlns:p14="http://schemas.microsoft.com/office/powerpoint/2010/main" val="896557789"/>
+        <p14:creationId xmlns:p14="http://schemas.microsoft.com/office/powerpoint/2010/main" val="1463473281"/>
       </p:ext>
     </p:extLst>
   </p:cSld>
@@ -18710,7 +21106,7 @@
           <p:cNvPr id="1" name="">
             <a:extLst xmlns:a="http://schemas.openxmlformats.org/drawingml/2006/main">
               <a:ext uri="{FF2B5EF4-FFF2-40B4-BE49-F238E27FC236}">
-                <a16:creationId xmlns:a16="http://schemas.microsoft.com/office/drawing/2014/main" id="{1E62C2BF-3851-4854-A25A-C083E5F93244}"/>
+                <a16:creationId xmlns:a16="http://schemas.microsoft.com/office/drawing/2014/main" id="{E6FBDF40-063F-4B11-B6B7-3B82C45CC369}"/>
               </a:ext>
             </a:extLst>
           </p:cNvPr>
@@ -18745,7 +21141,7 @@
           <p:cNvPr id="2" name="">
             <a:extLst xmlns:a="http://schemas.openxmlformats.org/drawingml/2006/main">
               <a:ext uri="{FF2B5EF4-FFF2-40B4-BE49-F238E27FC236}">
-                <a16:creationId xmlns:a16="http://schemas.microsoft.com/office/drawing/2014/main" id="{723CA9F5-4A06-4886-9EF2-7DE3B9486127}"/>
+                <a16:creationId xmlns:a16="http://schemas.microsoft.com/office/drawing/2014/main" id="{872D1B17-6B3A-43A8-8547-9165A6F76F49}"/>
               </a:ext>
             </a:extLst>
           </p:cNvPr>
@@ -18780,7 +21176,7 @@
           <p:cNvPr id="3" name="">
             <a:extLst xmlns:a="http://schemas.openxmlformats.org/drawingml/2006/main">
               <a:ext uri="{FF2B5EF4-FFF2-40B4-BE49-F238E27FC236}">
-                <a16:creationId xmlns:a16="http://schemas.microsoft.com/office/drawing/2014/main" id="{120E7AE4-AD25-4A19-AE76-14A95C0B6DDF}"/>
+                <a16:creationId xmlns:a16="http://schemas.microsoft.com/office/drawing/2014/main" id="{83338FCE-4B80-4C24-91A4-04FC8A028F5F}"/>
               </a:ext>
             </a:extLst>
           </p:cNvPr>
@@ -18844,7 +21240,7 @@
           <p:cNvPr id="4" name="">
             <a:extLst xmlns:a="http://schemas.openxmlformats.org/drawingml/2006/main">
               <a:ext uri="{FF2B5EF4-FFF2-40B4-BE49-F238E27FC236}">
-                <a16:creationId xmlns:a16="http://schemas.microsoft.com/office/drawing/2014/main" id="{5F92C587-65A5-48B7-810E-3654838B291C}"/>
+                <a16:creationId xmlns:a16="http://schemas.microsoft.com/office/drawing/2014/main" id="{D15C3CC5-2603-465F-843F-A2EDD591E549}"/>
               </a:ext>
             </a:extLst>
           </p:cNvPr>
@@ -18908,7 +21304,7 @@
           <p:cNvPr id="5" name="">
             <a:extLst xmlns:a="http://schemas.openxmlformats.org/drawingml/2006/main">
               <a:ext uri="{FF2B5EF4-FFF2-40B4-BE49-F238E27FC236}">
-                <a16:creationId xmlns:a16="http://schemas.microsoft.com/office/drawing/2014/main" id="{F08902BE-A2AE-4813-BDBA-C56B52CBCBF6}"/>
+                <a16:creationId xmlns:a16="http://schemas.microsoft.com/office/drawing/2014/main" id="{0DEB7466-BFAE-492C-962C-01E4175225D4}"/>
               </a:ext>
             </a:extLst>
           </p:cNvPr>
@@ -18972,7 +21368,7 @@
           <p:cNvPr id="6" name="">
             <a:extLst xmlns:a="http://schemas.openxmlformats.org/drawingml/2006/main">
               <a:ext uri="{FF2B5EF4-FFF2-40B4-BE49-F238E27FC236}">
-                <a16:creationId xmlns:a16="http://schemas.microsoft.com/office/drawing/2014/main" id="{09F7F69E-831D-4602-B3CC-91A321106F7F}"/>
+                <a16:creationId xmlns:a16="http://schemas.microsoft.com/office/drawing/2014/main" id="{89FD8E64-1E13-4B24-BABD-8652C723E285}"/>
               </a:ext>
             </a:extLst>
           </p:cNvPr>
@@ -19036,7 +21432,7 @@
           <p:cNvPr id="7" name="">
             <a:extLst xmlns:a="http://schemas.openxmlformats.org/drawingml/2006/main">
               <a:ext uri="{FF2B5EF4-FFF2-40B4-BE49-F238E27FC236}">
-                <a16:creationId xmlns:a16="http://schemas.microsoft.com/office/drawing/2014/main" id="{3B6AADB4-BA81-4735-BB60-F9631756EDE9}"/>
+                <a16:creationId xmlns:a16="http://schemas.microsoft.com/office/drawing/2014/main" id="{0B344B04-8639-493B-93B0-8918257A5C81}"/>
               </a:ext>
             </a:extLst>
           </p:cNvPr>
@@ -19069,7 +21465,7 @@
           <p:cNvPr id="8" name="">
             <a:extLst xmlns:a="http://schemas.openxmlformats.org/drawingml/2006/main">
               <a:ext uri="{FF2B5EF4-FFF2-40B4-BE49-F238E27FC236}">
-                <a16:creationId xmlns:a16="http://schemas.microsoft.com/office/drawing/2014/main" id="{4350AD57-4E59-4F3F-9B49-FC0F8185D264}"/>
+                <a16:creationId xmlns:a16="http://schemas.microsoft.com/office/drawing/2014/main" id="{A9421609-B056-4FD1-9F3A-09CAB8BCAF94}"/>
               </a:ext>
             </a:extLst>
           </p:cNvPr>
@@ -19133,7 +21529,7 @@
           <p:cNvPr id="9" name="">
             <a:extLst xmlns:a="http://schemas.openxmlformats.org/drawingml/2006/main">
               <a:ext uri="{FF2B5EF4-FFF2-40B4-BE49-F238E27FC236}">
-                <a16:creationId xmlns:a16="http://schemas.microsoft.com/office/drawing/2014/main" id="{DA5B2261-AF47-4545-BB52-C153FC05B0B6}"/>
+                <a16:creationId xmlns:a16="http://schemas.microsoft.com/office/drawing/2014/main" id="{1CEFFB1D-02DA-41D7-A743-1D1BB60AAE35}"/>
               </a:ext>
             </a:extLst>
           </p:cNvPr>
@@ -19168,7 +21564,7 @@
           <p:cNvPr id="10" name="">
             <a:extLst xmlns:a="http://schemas.openxmlformats.org/drawingml/2006/main">
               <a:ext uri="{FF2B5EF4-FFF2-40B4-BE49-F238E27FC236}">
-                <a16:creationId xmlns:a16="http://schemas.microsoft.com/office/drawing/2014/main" id="{837548C3-CD37-453D-A797-14A944A492B4}"/>
+                <a16:creationId xmlns:a16="http://schemas.microsoft.com/office/drawing/2014/main" id="{1DFB77A9-7FCE-4DD4-9575-0C54CEC43FDB}"/>
               </a:ext>
             </a:extLst>
           </p:cNvPr>
@@ -19232,7 +21628,7 @@
           <p:cNvPr id="11" name="">
             <a:extLst xmlns:a="http://schemas.openxmlformats.org/drawingml/2006/main">
               <a:ext uri="{FF2B5EF4-FFF2-40B4-BE49-F238E27FC236}">
-                <a16:creationId xmlns:a16="http://schemas.microsoft.com/office/drawing/2014/main" id="{7E40F35A-F922-4A84-BF1F-DF30F4B314C6}"/>
+                <a16:creationId xmlns:a16="http://schemas.microsoft.com/office/drawing/2014/main" id="{3B7554B9-9E4B-4E84-84CE-01D6B44DC5CB}"/>
               </a:ext>
             </a:extLst>
           </p:cNvPr>
@@ -19267,7 +21663,7 @@
           <p:cNvPr id="12" name="">
             <a:extLst xmlns:a="http://schemas.openxmlformats.org/drawingml/2006/main">
               <a:ext uri="{FF2B5EF4-FFF2-40B4-BE49-F238E27FC236}">
-                <a16:creationId xmlns:a16="http://schemas.microsoft.com/office/drawing/2014/main" id="{1F53350F-4A02-4872-9B12-D012C436D599}"/>
+                <a16:creationId xmlns:a16="http://schemas.microsoft.com/office/drawing/2014/main" id="{DFE96CB2-151F-45A8-94DA-E7C5EE6B863F}"/>
               </a:ext>
             </a:extLst>
           </p:cNvPr>
@@ -19331,7 +21727,7 @@
           <p:cNvPr id="13" name="">
             <a:extLst xmlns:a="http://schemas.openxmlformats.org/drawingml/2006/main">
               <a:ext uri="{FF2B5EF4-FFF2-40B4-BE49-F238E27FC236}">
-                <a16:creationId xmlns:a16="http://schemas.microsoft.com/office/drawing/2014/main" id="{A5F62D52-2B52-43EA-BEC7-D4B7995FC685}"/>
+                <a16:creationId xmlns:a16="http://schemas.microsoft.com/office/drawing/2014/main" id="{B865F164-7C05-4C6B-8615-70027C387A36}"/>
               </a:ext>
             </a:extLst>
           </p:cNvPr>
@@ -19366,7 +21762,7 @@
           <p:cNvPr id="14" name="">
             <a:extLst xmlns:a="http://schemas.openxmlformats.org/drawingml/2006/main">
               <a:ext uri="{FF2B5EF4-FFF2-40B4-BE49-F238E27FC236}">
-                <a16:creationId xmlns:a16="http://schemas.microsoft.com/office/drawing/2014/main" id="{23BC707F-56C5-4E64-93A1-4B5B7ABBE4CC}"/>
+                <a16:creationId xmlns:a16="http://schemas.microsoft.com/office/drawing/2014/main" id="{384FABA8-5C9B-4002-ABD2-14F965C5B6BE}"/>
               </a:ext>
             </a:extLst>
           </p:cNvPr>
@@ -19430,7 +21826,7 @@
           <p:cNvPr id="15" name="">
             <a:extLst xmlns:a="http://schemas.openxmlformats.org/drawingml/2006/main">
               <a:ext uri="{FF2B5EF4-FFF2-40B4-BE49-F238E27FC236}">
-                <a16:creationId xmlns:a16="http://schemas.microsoft.com/office/drawing/2014/main" id="{BD934D3A-9324-44B3-B850-870EB567A116}"/>
+                <a16:creationId xmlns:a16="http://schemas.microsoft.com/office/drawing/2014/main" id="{E9BAAF5F-8520-4F03-BD5A-AF55D38FC4B7}"/>
               </a:ext>
             </a:extLst>
           </p:cNvPr>
@@ -19465,7 +21861,7 @@
           <p:cNvPr id="16" name="">
             <a:extLst xmlns:a="http://schemas.openxmlformats.org/drawingml/2006/main">
               <a:ext uri="{FF2B5EF4-FFF2-40B4-BE49-F238E27FC236}">
-                <a16:creationId xmlns:a16="http://schemas.microsoft.com/office/drawing/2014/main" id="{84DA3D75-B433-4D64-94F2-30FD88E938E6}"/>
+                <a16:creationId xmlns:a16="http://schemas.microsoft.com/office/drawing/2014/main" id="{13B853B2-4AA7-4168-95C9-BD103498D4A4}"/>
               </a:ext>
             </a:extLst>
           </p:cNvPr>
@@ -19529,7 +21925,7 @@
           <p:cNvPr id="17" name="">
             <a:extLst xmlns:a="http://schemas.openxmlformats.org/drawingml/2006/main">
               <a:ext uri="{FF2B5EF4-FFF2-40B4-BE49-F238E27FC236}">
-                <a16:creationId xmlns:a16="http://schemas.microsoft.com/office/drawing/2014/main" id="{72427153-27EC-42D1-AFA3-4A50A1E47726}"/>
+                <a16:creationId xmlns:a16="http://schemas.microsoft.com/office/drawing/2014/main" id="{B6538024-ED75-480E-9351-E653B52A1A41}"/>
               </a:ext>
             </a:extLst>
           </p:cNvPr>
@@ -19564,7 +21960,7 @@
           <p:cNvPr id="18" name="">
             <a:extLst xmlns:a="http://schemas.openxmlformats.org/drawingml/2006/main">
               <a:ext uri="{FF2B5EF4-FFF2-40B4-BE49-F238E27FC236}">
-                <a16:creationId xmlns:a16="http://schemas.microsoft.com/office/drawing/2014/main" id="{ED57826E-6E44-4B3B-9A50-00DAE382F244}"/>
+                <a16:creationId xmlns:a16="http://schemas.microsoft.com/office/drawing/2014/main" id="{ABF3A5EA-F6BA-4979-861D-4370A962B282}"/>
               </a:ext>
             </a:extLst>
           </p:cNvPr>
@@ -19599,7 +21995,7 @@
           <p:cNvPr id="19" name="">
             <a:extLst xmlns:a="http://schemas.openxmlformats.org/drawingml/2006/main">
               <a:ext uri="{FF2B5EF4-FFF2-40B4-BE49-F238E27FC236}">
-                <a16:creationId xmlns:a16="http://schemas.microsoft.com/office/drawing/2014/main" id="{DF996991-C4A1-4604-AA9B-5CDDF60441DA}"/>
+                <a16:creationId xmlns:a16="http://schemas.microsoft.com/office/drawing/2014/main" id="{2C0A9257-312A-4997-90DE-55CCA6A8E246}"/>
               </a:ext>
             </a:extLst>
           </p:cNvPr>
@@ -19632,7 +22028,7 @@
           <p:cNvPr id="20" name="">
             <a:extLst xmlns:a="http://schemas.openxmlformats.org/drawingml/2006/main">
               <a:ext uri="{FF2B5EF4-FFF2-40B4-BE49-F238E27FC236}">
-                <a16:creationId xmlns:a16="http://schemas.microsoft.com/office/drawing/2014/main" id="{B58DE4B4-9F1A-4498-8899-1F1AA57BDF96}"/>
+                <a16:creationId xmlns:a16="http://schemas.microsoft.com/office/drawing/2014/main" id="{8F95B29D-5A06-4162-8432-D6A28ABE68CC}"/>
               </a:ext>
             </a:extLst>
           </p:cNvPr>
@@ -19696,7 +22092,7 @@
           <p:cNvPr id="21" name="">
             <a:extLst xmlns:a="http://schemas.openxmlformats.org/drawingml/2006/main">
               <a:ext uri="{FF2B5EF4-FFF2-40B4-BE49-F238E27FC236}">
-                <a16:creationId xmlns:a16="http://schemas.microsoft.com/office/drawing/2014/main" id="{44C17719-4C04-4557-8994-877DAE7D384F}"/>
+                <a16:creationId xmlns:a16="http://schemas.microsoft.com/office/drawing/2014/main" id="{073FE542-E187-4F53-82F8-25F5961113B9}"/>
               </a:ext>
             </a:extLst>
           </p:cNvPr>
@@ -19731,7 +22127,7 @@
           <p:cNvPr id="22" name="">
             <a:extLst xmlns:a="http://schemas.openxmlformats.org/drawingml/2006/main">
               <a:ext uri="{FF2B5EF4-FFF2-40B4-BE49-F238E27FC236}">
-                <a16:creationId xmlns:a16="http://schemas.microsoft.com/office/drawing/2014/main" id="{B51E4988-3AA3-4318-9617-D937314FBF1B}"/>
+                <a16:creationId xmlns:a16="http://schemas.microsoft.com/office/drawing/2014/main" id="{FE17C23D-CA0D-4FB1-A069-A59975374895}"/>
               </a:ext>
             </a:extLst>
           </p:cNvPr>
@@ -19795,7 +22191,7 @@
           <p:cNvPr id="23" name="">
             <a:extLst xmlns:a="http://schemas.openxmlformats.org/drawingml/2006/main">
               <a:ext uri="{FF2B5EF4-FFF2-40B4-BE49-F238E27FC236}">
-                <a16:creationId xmlns:a16="http://schemas.microsoft.com/office/drawing/2014/main" id="{FD2C998C-373E-422A-82F8-E998FDB3455A}"/>
+                <a16:creationId xmlns:a16="http://schemas.microsoft.com/office/drawing/2014/main" id="{5BB88B9F-CA8B-47C1-8E51-608443319E06}"/>
               </a:ext>
             </a:extLst>
           </p:cNvPr>
@@ -19830,7 +22226,7 @@
           <p:cNvPr id="24" name="">
             <a:extLst xmlns:a="http://schemas.openxmlformats.org/drawingml/2006/main">
               <a:ext uri="{FF2B5EF4-FFF2-40B4-BE49-F238E27FC236}">
-                <a16:creationId xmlns:a16="http://schemas.microsoft.com/office/drawing/2014/main" id="{1356E265-2AAB-47DD-8A40-069A586ED8BB}"/>
+                <a16:creationId xmlns:a16="http://schemas.microsoft.com/office/drawing/2014/main" id="{955A64A7-7C5A-42C5-827E-C188C3CA9253}"/>
               </a:ext>
             </a:extLst>
           </p:cNvPr>
@@ -19894,7 +22290,7 @@
           <p:cNvPr id="25" name="">
             <a:extLst xmlns:a="http://schemas.openxmlformats.org/drawingml/2006/main">
               <a:ext uri="{FF2B5EF4-FFF2-40B4-BE49-F238E27FC236}">
-                <a16:creationId xmlns:a16="http://schemas.microsoft.com/office/drawing/2014/main" id="{C89BCEB0-5ED4-440C-82AF-19CAEF36179B}"/>
+                <a16:creationId xmlns:a16="http://schemas.microsoft.com/office/drawing/2014/main" id="{A11ED540-543A-432A-870C-F2B0695A8E52}"/>
               </a:ext>
             </a:extLst>
           </p:cNvPr>
@@ -19929,7 +22325,7 @@
           <p:cNvPr id="26" name="">
             <a:extLst xmlns:a="http://schemas.openxmlformats.org/drawingml/2006/main">
               <a:ext uri="{FF2B5EF4-FFF2-40B4-BE49-F238E27FC236}">
-                <a16:creationId xmlns:a16="http://schemas.microsoft.com/office/drawing/2014/main" id="{87951034-744F-4871-9C63-7E2DE1B0C20B}"/>
+                <a16:creationId xmlns:a16="http://schemas.microsoft.com/office/drawing/2014/main" id="{4AD414D9-6B19-474F-A593-CD1DA8E3A866}"/>
               </a:ext>
             </a:extLst>
           </p:cNvPr>
@@ -19993,7 +22389,7 @@
           <p:cNvPr id="27" name="">
             <a:extLst xmlns:a="http://schemas.openxmlformats.org/drawingml/2006/main">
               <a:ext uri="{FF2B5EF4-FFF2-40B4-BE49-F238E27FC236}">
-                <a16:creationId xmlns:a16="http://schemas.microsoft.com/office/drawing/2014/main" id="{0482C7FA-3995-4CD9-9FAA-E5F69F39FBC9}"/>
+                <a16:creationId xmlns:a16="http://schemas.microsoft.com/office/drawing/2014/main" id="{260675B3-578E-4753-A050-ED2D94502CD8}"/>
               </a:ext>
             </a:extLst>
           </p:cNvPr>
@@ -20028,7 +22424,7 @@
           <p:cNvPr id="28" name="">
             <a:extLst xmlns:a="http://schemas.openxmlformats.org/drawingml/2006/main">
               <a:ext uri="{FF2B5EF4-FFF2-40B4-BE49-F238E27FC236}">
-                <a16:creationId xmlns:a16="http://schemas.microsoft.com/office/drawing/2014/main" id="{089F9F72-1A7C-4CE9-840B-266535D835AD}"/>
+                <a16:creationId xmlns:a16="http://schemas.microsoft.com/office/drawing/2014/main" id="{1CC0C663-3F21-4E51-90BA-539DE942AF7C}"/>
               </a:ext>
             </a:extLst>
           </p:cNvPr>
@@ -20092,7 +22488,7 @@
           <p:cNvPr id="29" name="">
             <a:extLst xmlns:a="http://schemas.openxmlformats.org/drawingml/2006/main">
               <a:ext uri="{FF2B5EF4-FFF2-40B4-BE49-F238E27FC236}">
-                <a16:creationId xmlns:a16="http://schemas.microsoft.com/office/drawing/2014/main" id="{4DDCA673-019B-4BEB-BD9B-C64B0224B45E}"/>
+                <a16:creationId xmlns:a16="http://schemas.microsoft.com/office/drawing/2014/main" id="{8C6891C1-2049-41DB-B5D0-4558E0BA629A}"/>
               </a:ext>
             </a:extLst>
           </p:cNvPr>
@@ -20125,7 +22521,7 @@
           <p:cNvPr id="30" name="">
             <a:extLst xmlns:a="http://schemas.openxmlformats.org/drawingml/2006/main">
               <a:ext uri="{FF2B5EF4-FFF2-40B4-BE49-F238E27FC236}">
-                <a16:creationId xmlns:a16="http://schemas.microsoft.com/office/drawing/2014/main" id="{C6281BC3-0D54-45C3-9E86-B6C7A423FF75}"/>
+                <a16:creationId xmlns:a16="http://schemas.microsoft.com/office/drawing/2014/main" id="{E103280F-0973-4F73-8434-F8FB00030652}"/>
               </a:ext>
             </a:extLst>
           </p:cNvPr>
@@ -20189,7 +22585,7 @@
           <p:cNvPr id="31" name="">
             <a:extLst xmlns:a="http://schemas.openxmlformats.org/drawingml/2006/main">
               <a:ext uri="{FF2B5EF4-FFF2-40B4-BE49-F238E27FC236}">
-                <a16:creationId xmlns:a16="http://schemas.microsoft.com/office/drawing/2014/main" id="{9FB24961-DDB2-47EA-A1A1-F129B6855A63}"/>
+                <a16:creationId xmlns:a16="http://schemas.microsoft.com/office/drawing/2014/main" id="{B09B9EFE-AE16-44A5-A1CC-7E3F497FA0ED}"/>
               </a:ext>
             </a:extLst>
           </p:cNvPr>
@@ -20224,7 +22620,7 @@
           <p:cNvPr id="32" name="">
             <a:extLst xmlns:a="http://schemas.openxmlformats.org/drawingml/2006/main">
               <a:ext uri="{FF2B5EF4-FFF2-40B4-BE49-F238E27FC236}">
-                <a16:creationId xmlns:a16="http://schemas.microsoft.com/office/drawing/2014/main" id="{9A4E27B2-031B-4037-ABD2-4DCC775D459D}"/>
+                <a16:creationId xmlns:a16="http://schemas.microsoft.com/office/drawing/2014/main" id="{EEEC5E17-CBD0-4B36-B79E-5CD700BA2786}"/>
               </a:ext>
             </a:extLst>
           </p:cNvPr>
@@ -20288,7 +22684,7 @@
           <p:cNvPr id="33" name="">
             <a:extLst xmlns:a="http://schemas.openxmlformats.org/drawingml/2006/main">
               <a:ext uri="{FF2B5EF4-FFF2-40B4-BE49-F238E27FC236}">
-                <a16:creationId xmlns:a16="http://schemas.microsoft.com/office/drawing/2014/main" id="{50A193CA-533F-4829-8E2E-1EFC63926624}"/>
+                <a16:creationId xmlns:a16="http://schemas.microsoft.com/office/drawing/2014/main" id="{91B2AD1A-27A4-4770-8C3D-72884C3F2B2E}"/>
               </a:ext>
             </a:extLst>
           </p:cNvPr>
@@ -20323,7 +22719,7 @@
           <p:cNvPr id="34" name="">
             <a:extLst xmlns:a="http://schemas.openxmlformats.org/drawingml/2006/main">
               <a:ext uri="{FF2B5EF4-FFF2-40B4-BE49-F238E27FC236}">
-                <a16:creationId xmlns:a16="http://schemas.microsoft.com/office/drawing/2014/main" id="{F628B579-4BFD-4A04-89A5-EE2611331837}"/>
+                <a16:creationId xmlns:a16="http://schemas.microsoft.com/office/drawing/2014/main" id="{959B3CA1-C31B-42E6-BDC3-7E518AAEB4F9}"/>
               </a:ext>
             </a:extLst>
           </p:cNvPr>
@@ -20387,7 +22783,7 @@
           <p:cNvPr id="35" name="">
             <a:extLst xmlns:a="http://schemas.openxmlformats.org/drawingml/2006/main">
               <a:ext uri="{FF2B5EF4-FFF2-40B4-BE49-F238E27FC236}">
-                <a16:creationId xmlns:a16="http://schemas.microsoft.com/office/drawing/2014/main" id="{F6FF7D95-058A-4D58-8545-F6EA8D252397}"/>
+                <a16:creationId xmlns:a16="http://schemas.microsoft.com/office/drawing/2014/main" id="{0D394FD1-CA16-4182-96EA-2F6587A31452}"/>
               </a:ext>
             </a:extLst>
           </p:cNvPr>
@@ -20422,7 +22818,7 @@
           <p:cNvPr id="36" name="">
             <a:extLst xmlns:a="http://schemas.openxmlformats.org/drawingml/2006/main">
               <a:ext uri="{FF2B5EF4-FFF2-40B4-BE49-F238E27FC236}">
-                <a16:creationId xmlns:a16="http://schemas.microsoft.com/office/drawing/2014/main" id="{61299B49-BE85-489D-8685-E04D8AE94558}"/>
+                <a16:creationId xmlns:a16="http://schemas.microsoft.com/office/drawing/2014/main" id="{1F88200D-28F5-494F-8F77-11810CAE300B}"/>
               </a:ext>
             </a:extLst>
           </p:cNvPr>
@@ -20486,7 +22882,7 @@
           <p:cNvPr id="37" name="">
             <a:extLst xmlns:a="http://schemas.openxmlformats.org/drawingml/2006/main">
               <a:ext uri="{FF2B5EF4-FFF2-40B4-BE49-F238E27FC236}">
-                <a16:creationId xmlns:a16="http://schemas.microsoft.com/office/drawing/2014/main" id="{FC53E711-54FD-43D6-AA39-FCA19644C181}"/>
+                <a16:creationId xmlns:a16="http://schemas.microsoft.com/office/drawing/2014/main" id="{A69236E3-AEAF-408F-B65D-4AE12DCD7086}"/>
               </a:ext>
             </a:extLst>
           </p:cNvPr>
@@ -20521,7 +22917,7 @@
           <p:cNvPr id="38" name="">
             <a:extLst xmlns:a="http://schemas.openxmlformats.org/drawingml/2006/main">
               <a:ext uri="{FF2B5EF4-FFF2-40B4-BE49-F238E27FC236}">
-                <a16:creationId xmlns:a16="http://schemas.microsoft.com/office/drawing/2014/main" id="{707958CE-3C75-45F9-9B94-4AD69D87E97B}"/>
+                <a16:creationId xmlns:a16="http://schemas.microsoft.com/office/drawing/2014/main" id="{D1F830CF-B170-4D90-9D55-24D873A1FAAB}"/>
               </a:ext>
             </a:extLst>
           </p:cNvPr>
@@ -20585,7 +22981,7 @@
           <p:cNvPr id="39" name="">
             <a:extLst xmlns:a="http://schemas.openxmlformats.org/drawingml/2006/main">
               <a:ext uri="{FF2B5EF4-FFF2-40B4-BE49-F238E27FC236}">
-                <a16:creationId xmlns:a16="http://schemas.microsoft.com/office/drawing/2014/main" id="{43F5A196-D88F-40B6-8F06-D7D49146EDDD}"/>
+                <a16:creationId xmlns:a16="http://schemas.microsoft.com/office/drawing/2014/main" id="{BAC30DA4-4F4B-46D2-BECC-2C1E35E92ED5}"/>
               </a:ext>
             </a:extLst>
           </p:cNvPr>
@@ -20647,7 +23043,7 @@
     </p:spTree>
     <p:extLst>
       <p:ext uri="{BB962C8B-B14F-4D97-AF65-F5344CB8AC3E}">
-        <p14:creationId xmlns:p14="http://schemas.microsoft.com/office/powerpoint/2010/main" val="526281924"/>
+        <p14:creationId xmlns:p14="http://schemas.microsoft.com/office/powerpoint/2010/main" val="1474029620"/>
       </p:ext>
     </p:extLst>
   </p:cSld>
@@ -20671,7 +23067,7 @@
           <p:cNvPr id="1" name="">
             <a:extLst xmlns:a="http://schemas.openxmlformats.org/drawingml/2006/main">
               <a:ext uri="{FF2B5EF4-FFF2-40B4-BE49-F238E27FC236}">
-                <a16:creationId xmlns:a16="http://schemas.microsoft.com/office/drawing/2014/main" id="{879A30F5-057C-4AFE-8EDC-CF958FA09AB5}"/>
+                <a16:creationId xmlns:a16="http://schemas.microsoft.com/office/drawing/2014/main" id="{A8B72257-D0F4-4112-965C-09F1267C5029}"/>
               </a:ext>
             </a:extLst>
           </p:cNvPr>
@@ -20706,7 +23102,7 @@
           <p:cNvPr id="2" name="">
             <a:extLst xmlns:a="http://schemas.openxmlformats.org/drawingml/2006/main">
               <a:ext uri="{FF2B5EF4-FFF2-40B4-BE49-F238E27FC236}">
-                <a16:creationId xmlns:a16="http://schemas.microsoft.com/office/drawing/2014/main" id="{064CEBC6-4737-4282-A648-F2E2B5A0C127}"/>
+                <a16:creationId xmlns:a16="http://schemas.microsoft.com/office/drawing/2014/main" id="{1711D69C-EC89-42F0-A559-E79437CA4459}"/>
               </a:ext>
             </a:extLst>
           </p:cNvPr>
@@ -20741,7 +23137,7 @@
           <p:cNvPr id="3" name="">
             <a:extLst xmlns:a="http://schemas.openxmlformats.org/drawingml/2006/main">
               <a:ext uri="{FF2B5EF4-FFF2-40B4-BE49-F238E27FC236}">
-                <a16:creationId xmlns:a16="http://schemas.microsoft.com/office/drawing/2014/main" id="{1F878A80-FA4A-4492-B9C6-BAB9BA49C332}"/>
+                <a16:creationId xmlns:a16="http://schemas.microsoft.com/office/drawing/2014/main" id="{38767F98-C298-4574-A4DC-B100E2501368}"/>
               </a:ext>
             </a:extLst>
           </p:cNvPr>
@@ -20805,7 +23201,7 @@
           <p:cNvPr id="4" name="">
             <a:extLst xmlns:a="http://schemas.openxmlformats.org/drawingml/2006/main">
               <a:ext uri="{FF2B5EF4-FFF2-40B4-BE49-F238E27FC236}">
-                <a16:creationId xmlns:a16="http://schemas.microsoft.com/office/drawing/2014/main" id="{9286AB8C-DF9C-46E0-9955-5787C8635DEC}"/>
+                <a16:creationId xmlns:a16="http://schemas.microsoft.com/office/drawing/2014/main" id="{738B449F-0A9E-47CF-92DD-E9989A8382FD}"/>
               </a:ext>
             </a:extLst>
           </p:cNvPr>
@@ -20869,7 +23265,7 @@
           <p:cNvPr id="5" name="">
             <a:extLst xmlns:a="http://schemas.openxmlformats.org/drawingml/2006/main">
               <a:ext uri="{FF2B5EF4-FFF2-40B4-BE49-F238E27FC236}">
-                <a16:creationId xmlns:a16="http://schemas.microsoft.com/office/drawing/2014/main" id="{479BE889-E2EE-4DB8-AB6F-451E5D2A0AFD}"/>
+                <a16:creationId xmlns:a16="http://schemas.microsoft.com/office/drawing/2014/main" id="{9A5C2FE5-EAF5-4B19-809F-A5BFD34D9FA1}"/>
               </a:ext>
             </a:extLst>
           </p:cNvPr>
@@ -20933,7 +23329,7 @@
           <p:cNvPr id="6" name="">
             <a:extLst xmlns:a="http://schemas.openxmlformats.org/drawingml/2006/main">
               <a:ext uri="{FF2B5EF4-FFF2-40B4-BE49-F238E27FC236}">
-                <a16:creationId xmlns:a16="http://schemas.microsoft.com/office/drawing/2014/main" id="{4CAA6EBA-51E7-40A2-AC81-6C742AACE8B5}"/>
+                <a16:creationId xmlns:a16="http://schemas.microsoft.com/office/drawing/2014/main" id="{D71B107B-ED32-4503-866F-28967C627FDD}"/>
               </a:ext>
             </a:extLst>
           </p:cNvPr>
@@ -20997,7 +23393,7 @@
           <p:cNvPr id="7" name="">
             <a:extLst xmlns:a="http://schemas.openxmlformats.org/drawingml/2006/main">
               <a:ext uri="{FF2B5EF4-FFF2-40B4-BE49-F238E27FC236}">
-                <a16:creationId xmlns:a16="http://schemas.microsoft.com/office/drawing/2014/main" id="{984C8AA6-78D3-4BA2-ADA8-83118D34B2D0}"/>
+                <a16:creationId xmlns:a16="http://schemas.microsoft.com/office/drawing/2014/main" id="{37E25E16-F9EE-44ED-9960-BE6649C330AB}"/>
               </a:ext>
             </a:extLst>
           </p:cNvPr>
@@ -21030,7 +23426,7 @@
           <p:cNvPr id="8" name="">
             <a:extLst xmlns:a="http://schemas.openxmlformats.org/drawingml/2006/main">
               <a:ext uri="{FF2B5EF4-FFF2-40B4-BE49-F238E27FC236}">
-                <a16:creationId xmlns:a16="http://schemas.microsoft.com/office/drawing/2014/main" id="{F107AAD3-3836-4952-ACB6-E65A23020547}"/>
+                <a16:creationId xmlns:a16="http://schemas.microsoft.com/office/drawing/2014/main" id="{B5E9368F-325E-4A91-8CA5-524BFCA65C56}"/>
               </a:ext>
             </a:extLst>
           </p:cNvPr>
@@ -21094,7 +23490,7 @@
           <p:cNvPr id="9" name="">
             <a:extLst xmlns:a="http://schemas.openxmlformats.org/drawingml/2006/main">
               <a:ext uri="{FF2B5EF4-FFF2-40B4-BE49-F238E27FC236}">
-                <a16:creationId xmlns:a16="http://schemas.microsoft.com/office/drawing/2014/main" id="{617B0CC4-4E57-49D2-9957-2ECAE52EBC91}"/>
+                <a16:creationId xmlns:a16="http://schemas.microsoft.com/office/drawing/2014/main" id="{594C5ABE-8D67-4F80-A46F-01B6789FC54F}"/>
               </a:ext>
             </a:extLst>
           </p:cNvPr>
@@ -21127,7 +23523,7 @@
           <p:cNvPr id="10" name="">
             <a:extLst xmlns:a="http://schemas.openxmlformats.org/drawingml/2006/main">
               <a:ext uri="{FF2B5EF4-FFF2-40B4-BE49-F238E27FC236}">
-                <a16:creationId xmlns:a16="http://schemas.microsoft.com/office/drawing/2014/main" id="{5AE3E231-9250-455B-BB27-761D2A05644C}"/>
+                <a16:creationId xmlns:a16="http://schemas.microsoft.com/office/drawing/2014/main" id="{7D9DBDF5-76B0-4B0A-A815-A2B92C1C2686}"/>
               </a:ext>
             </a:extLst>
           </p:cNvPr>
@@ -21191,7 +23587,7 @@
           <p:cNvPr id="11" name="">
             <a:extLst xmlns:a="http://schemas.openxmlformats.org/drawingml/2006/main">
               <a:ext uri="{FF2B5EF4-FFF2-40B4-BE49-F238E27FC236}">
-                <a16:creationId xmlns:a16="http://schemas.microsoft.com/office/drawing/2014/main" id="{18E76692-1C6D-45D7-B5C1-780C5C4E5B4D}"/>
+                <a16:creationId xmlns:a16="http://schemas.microsoft.com/office/drawing/2014/main" id="{27FEC76E-C3C8-444D-A696-A7D8ACCC4436}"/>
               </a:ext>
             </a:extLst>
           </p:cNvPr>
@@ -21224,7 +23620,7 @@
           <p:cNvPr id="12" name="">
             <a:extLst xmlns:a="http://schemas.openxmlformats.org/drawingml/2006/main">
               <a:ext uri="{FF2B5EF4-FFF2-40B4-BE49-F238E27FC236}">
-                <a16:creationId xmlns:a16="http://schemas.microsoft.com/office/drawing/2014/main" id="{9F91B438-0646-491D-AB66-0E89A56B139B}"/>
+                <a16:creationId xmlns:a16="http://schemas.microsoft.com/office/drawing/2014/main" id="{9BFB8BF0-0C6F-4038-ABE1-F39290168A6A}"/>
               </a:ext>
             </a:extLst>
           </p:cNvPr>
@@ -21288,7 +23684,7 @@
           <p:cNvPr id="13" name="">
             <a:extLst xmlns:a="http://schemas.openxmlformats.org/drawingml/2006/main">
               <a:ext uri="{FF2B5EF4-FFF2-40B4-BE49-F238E27FC236}">
-                <a16:creationId xmlns:a16="http://schemas.microsoft.com/office/drawing/2014/main" id="{E49E6A99-5DC8-449A-B639-1B276EAFB683}"/>
+                <a16:creationId xmlns:a16="http://schemas.microsoft.com/office/drawing/2014/main" id="{5AA4D584-6232-4730-9DC4-F6271FCC0114}"/>
               </a:ext>
             </a:extLst>
           </p:cNvPr>
@@ -21321,7 +23717,7 @@
           <p:cNvPr id="14" name="">
             <a:extLst xmlns:a="http://schemas.openxmlformats.org/drawingml/2006/main">
               <a:ext uri="{FF2B5EF4-FFF2-40B4-BE49-F238E27FC236}">
-                <a16:creationId xmlns:a16="http://schemas.microsoft.com/office/drawing/2014/main" id="{26B39ED0-93DB-41EE-B292-20D5D3A43402}"/>
+                <a16:creationId xmlns:a16="http://schemas.microsoft.com/office/drawing/2014/main" id="{2BA61E9C-3CD2-4148-9DAF-67A420B5AD9D}"/>
               </a:ext>
             </a:extLst>
           </p:cNvPr>
@@ -21385,7 +23781,7 @@
           <p:cNvPr id="15" name="">
             <a:extLst xmlns:a="http://schemas.openxmlformats.org/drawingml/2006/main">
               <a:ext uri="{FF2B5EF4-FFF2-40B4-BE49-F238E27FC236}">
-                <a16:creationId xmlns:a16="http://schemas.microsoft.com/office/drawing/2014/main" id="{5DD4FBD1-FADB-4796-8166-064D25E6CB18}"/>
+                <a16:creationId xmlns:a16="http://schemas.microsoft.com/office/drawing/2014/main" id="{75D89AA9-6BD5-4969-9B64-EFBCE40F5031}"/>
               </a:ext>
             </a:extLst>
           </p:cNvPr>
@@ -21418,7 +23814,7 @@
           <p:cNvPr id="16" name="">
             <a:extLst xmlns:a="http://schemas.openxmlformats.org/drawingml/2006/main">
               <a:ext uri="{FF2B5EF4-FFF2-40B4-BE49-F238E27FC236}">
-                <a16:creationId xmlns:a16="http://schemas.microsoft.com/office/drawing/2014/main" id="{1C26C069-952C-4FC8-87A8-53AE64F662C9}"/>
+                <a16:creationId xmlns:a16="http://schemas.microsoft.com/office/drawing/2014/main" id="{9C07B0E5-B89F-4ECE-BCCB-B16E589CB7BD}"/>
               </a:ext>
             </a:extLst>
           </p:cNvPr>
@@ -21482,7 +23878,7 @@
           <p:cNvPr id="17" name="">
             <a:extLst xmlns:a="http://schemas.openxmlformats.org/drawingml/2006/main">
               <a:ext uri="{FF2B5EF4-FFF2-40B4-BE49-F238E27FC236}">
-                <a16:creationId xmlns:a16="http://schemas.microsoft.com/office/drawing/2014/main" id="{1301DA54-6884-4C9A-AA21-D27DC6EE3B52}"/>
+                <a16:creationId xmlns:a16="http://schemas.microsoft.com/office/drawing/2014/main" id="{09F014ED-F9AC-4823-9EBE-59A47C37F3DB}"/>
               </a:ext>
             </a:extLst>
           </p:cNvPr>
@@ -21515,7 +23911,7 @@
           <p:cNvPr id="18" name="">
             <a:extLst xmlns:a="http://schemas.openxmlformats.org/drawingml/2006/main">
               <a:ext uri="{FF2B5EF4-FFF2-40B4-BE49-F238E27FC236}">
-                <a16:creationId xmlns:a16="http://schemas.microsoft.com/office/drawing/2014/main" id="{93F8BCF9-AF74-47F8-9092-0116CD8C4589}"/>
+                <a16:creationId xmlns:a16="http://schemas.microsoft.com/office/drawing/2014/main" id="{53F1EF11-C746-4422-9F19-34DD24312A13}"/>
               </a:ext>
             </a:extLst>
           </p:cNvPr>
@@ -21579,7 +23975,7 @@
           <p:cNvPr id="19" name="">
             <a:extLst xmlns:a="http://schemas.openxmlformats.org/drawingml/2006/main">
               <a:ext uri="{FF2B5EF4-FFF2-40B4-BE49-F238E27FC236}">
-                <a16:creationId xmlns:a16="http://schemas.microsoft.com/office/drawing/2014/main" id="{B76360CD-5851-4AB3-89EE-363503F7CA77}"/>
+                <a16:creationId xmlns:a16="http://schemas.microsoft.com/office/drawing/2014/main" id="{B40EED66-6910-43E2-B996-E849986DA749}"/>
               </a:ext>
             </a:extLst>
           </p:cNvPr>
@@ -21612,7 +24008,7 @@
           <p:cNvPr id="20" name="">
             <a:extLst xmlns:a="http://schemas.openxmlformats.org/drawingml/2006/main">
               <a:ext uri="{FF2B5EF4-FFF2-40B4-BE49-F238E27FC236}">
-                <a16:creationId xmlns:a16="http://schemas.microsoft.com/office/drawing/2014/main" id="{228EEA0E-9D6C-4F9B-AD7D-1BA79096B136}"/>
+                <a16:creationId xmlns:a16="http://schemas.microsoft.com/office/drawing/2014/main" id="{B1ABE124-2519-4D2A-8149-41B7AC54C812}"/>
               </a:ext>
             </a:extLst>
           </p:cNvPr>
@@ -21676,7 +24072,7 @@
           <p:cNvPr id="21" name="">
             <a:extLst xmlns:a="http://schemas.openxmlformats.org/drawingml/2006/main">
               <a:ext uri="{FF2B5EF4-FFF2-40B4-BE49-F238E27FC236}">
-                <a16:creationId xmlns:a16="http://schemas.microsoft.com/office/drawing/2014/main" id="{8DE0E529-427A-487D-ACD0-1112321F9878}"/>
+                <a16:creationId xmlns:a16="http://schemas.microsoft.com/office/drawing/2014/main" id="{A3D5FDD1-3EDE-4B12-914A-2D5A6A98E75D}"/>
               </a:ext>
             </a:extLst>
           </p:cNvPr>
@@ -21709,7 +24105,7 @@
           <p:cNvPr id="22" name="">
             <a:extLst xmlns:a="http://schemas.openxmlformats.org/drawingml/2006/main">
               <a:ext uri="{FF2B5EF4-FFF2-40B4-BE49-F238E27FC236}">
-                <a16:creationId xmlns:a16="http://schemas.microsoft.com/office/drawing/2014/main" id="{FD36EB7F-EF1D-41F8-8F92-10C7F46A1A3E}"/>
+                <a16:creationId xmlns:a16="http://schemas.microsoft.com/office/drawing/2014/main" id="{1B69E566-04C1-431A-8D03-8347BFBE94BF}"/>
               </a:ext>
             </a:extLst>
           </p:cNvPr>
@@ -21773,7 +24169,7 @@
           <p:cNvPr id="23" name="">
             <a:extLst xmlns:a="http://schemas.openxmlformats.org/drawingml/2006/main">
               <a:ext uri="{FF2B5EF4-FFF2-40B4-BE49-F238E27FC236}">
-                <a16:creationId xmlns:a16="http://schemas.microsoft.com/office/drawing/2014/main" id="{A264C589-17EA-4211-8692-9C36E2E7D61E}"/>
+                <a16:creationId xmlns:a16="http://schemas.microsoft.com/office/drawing/2014/main" id="{F8A31123-1C28-4680-9B9F-360FBB86D9FF}"/>
               </a:ext>
             </a:extLst>
           </p:cNvPr>
@@ -21806,7 +24202,7 @@
           <p:cNvPr id="24" name="">
             <a:extLst xmlns:a="http://schemas.openxmlformats.org/drawingml/2006/main">
               <a:ext uri="{FF2B5EF4-FFF2-40B4-BE49-F238E27FC236}">
-                <a16:creationId xmlns:a16="http://schemas.microsoft.com/office/drawing/2014/main" id="{5663DF75-F290-4267-86F5-053A4FA15321}"/>
+                <a16:creationId xmlns:a16="http://schemas.microsoft.com/office/drawing/2014/main" id="{F09A06C1-D956-4122-B4EB-94A9643944EC}"/>
               </a:ext>
             </a:extLst>
           </p:cNvPr>
@@ -21870,7 +24266,7 @@
           <p:cNvPr id="25" name="">
             <a:extLst xmlns:a="http://schemas.openxmlformats.org/drawingml/2006/main">
               <a:ext uri="{FF2B5EF4-FFF2-40B4-BE49-F238E27FC236}">
-                <a16:creationId xmlns:a16="http://schemas.microsoft.com/office/drawing/2014/main" id="{C24B70B0-4927-4BD3-A973-D0CAFE35DC8A}"/>
+                <a16:creationId xmlns:a16="http://schemas.microsoft.com/office/drawing/2014/main" id="{DEDEEFF4-0023-4828-90AE-E11B91A4F941}"/>
               </a:ext>
             </a:extLst>
           </p:cNvPr>
@@ -21903,7 +24299,7 @@
           <p:cNvPr id="26" name="">
             <a:extLst xmlns:a="http://schemas.openxmlformats.org/drawingml/2006/main">
               <a:ext uri="{FF2B5EF4-FFF2-40B4-BE49-F238E27FC236}">
-                <a16:creationId xmlns:a16="http://schemas.microsoft.com/office/drawing/2014/main" id="{C49515B9-66CC-49E4-AAB2-DB44EDC4F025}"/>
+                <a16:creationId xmlns:a16="http://schemas.microsoft.com/office/drawing/2014/main" id="{F8415869-94BD-4059-B709-46BBD2BFC75E}"/>
               </a:ext>
             </a:extLst>
           </p:cNvPr>
@@ -21967,7 +24363,7 @@
           <p:cNvPr id="27" name="">
             <a:extLst xmlns:a="http://schemas.openxmlformats.org/drawingml/2006/main">
               <a:ext uri="{FF2B5EF4-FFF2-40B4-BE49-F238E27FC236}">
-                <a16:creationId xmlns:a16="http://schemas.microsoft.com/office/drawing/2014/main" id="{8F225ADB-91D2-4678-9545-F6FA582F2E64}"/>
+                <a16:creationId xmlns:a16="http://schemas.microsoft.com/office/drawing/2014/main" id="{C4E2B915-4CA1-4195-BEED-6A813491EC5D}"/>
               </a:ext>
             </a:extLst>
           </p:cNvPr>
@@ -22000,7 +24396,7 @@
           <p:cNvPr id="28" name="">
             <a:extLst xmlns:a="http://schemas.openxmlformats.org/drawingml/2006/main">
               <a:ext uri="{FF2B5EF4-FFF2-40B4-BE49-F238E27FC236}">
-                <a16:creationId xmlns:a16="http://schemas.microsoft.com/office/drawing/2014/main" id="{F2C63D90-D300-49DA-9C41-D31B77D28E32}"/>
+                <a16:creationId xmlns:a16="http://schemas.microsoft.com/office/drawing/2014/main" id="{E85AE40B-9454-4FCF-8F6A-735C14D1B976}"/>
               </a:ext>
             </a:extLst>
           </p:cNvPr>
@@ -22064,7 +24460,7 @@
           <p:cNvPr id="29" name="">
             <a:extLst xmlns:a="http://schemas.openxmlformats.org/drawingml/2006/main">
               <a:ext uri="{FF2B5EF4-FFF2-40B4-BE49-F238E27FC236}">
-                <a16:creationId xmlns:a16="http://schemas.microsoft.com/office/drawing/2014/main" id="{22988CAC-1DCD-49B9-A300-19FA4860171F}"/>
+                <a16:creationId xmlns:a16="http://schemas.microsoft.com/office/drawing/2014/main" id="{09676A64-D8E5-4D8C-A44E-6E7A68C0EC38}"/>
               </a:ext>
             </a:extLst>
           </p:cNvPr>
@@ -22097,7 +24493,7 @@
           <p:cNvPr id="30" name="">
             <a:extLst xmlns:a="http://schemas.openxmlformats.org/drawingml/2006/main">
               <a:ext uri="{FF2B5EF4-FFF2-40B4-BE49-F238E27FC236}">
-                <a16:creationId xmlns:a16="http://schemas.microsoft.com/office/drawing/2014/main" id="{329B149B-7B0D-41F5-A3DE-4EBE4A0661A0}"/>
+                <a16:creationId xmlns:a16="http://schemas.microsoft.com/office/drawing/2014/main" id="{89961206-21D9-4823-9396-6BB500A4F606}"/>
               </a:ext>
             </a:extLst>
           </p:cNvPr>
@@ -22161,7 +24557,7 @@
           <p:cNvPr id="31" name="">
             <a:extLst xmlns:a="http://schemas.openxmlformats.org/drawingml/2006/main">
               <a:ext uri="{FF2B5EF4-FFF2-40B4-BE49-F238E27FC236}">
-                <a16:creationId xmlns:a16="http://schemas.microsoft.com/office/drawing/2014/main" id="{D9A440CA-BE8D-445A-B3CB-9BC3B836D207}"/>
+                <a16:creationId xmlns:a16="http://schemas.microsoft.com/office/drawing/2014/main" id="{0A4D9D91-A360-4AC6-AEE7-8998C99D542F}"/>
               </a:ext>
             </a:extLst>
           </p:cNvPr>
@@ -22194,7 +24590,7 @@
           <p:cNvPr id="32" name="">
             <a:extLst xmlns:a="http://schemas.openxmlformats.org/drawingml/2006/main">
               <a:ext uri="{FF2B5EF4-FFF2-40B4-BE49-F238E27FC236}">
-                <a16:creationId xmlns:a16="http://schemas.microsoft.com/office/drawing/2014/main" id="{308D2FCA-1FCC-4EAA-A70F-B52EB926CA7B}"/>
+                <a16:creationId xmlns:a16="http://schemas.microsoft.com/office/drawing/2014/main" id="{903DDE9B-19A0-434E-953A-6E6A5CB49D20}"/>
               </a:ext>
             </a:extLst>
           </p:cNvPr>
@@ -22258,7 +24654,7 @@
           <p:cNvPr id="33" name="">
             <a:extLst xmlns:a="http://schemas.openxmlformats.org/drawingml/2006/main">
               <a:ext uri="{FF2B5EF4-FFF2-40B4-BE49-F238E27FC236}">
-                <a16:creationId xmlns:a16="http://schemas.microsoft.com/office/drawing/2014/main" id="{FDF9253D-B63C-4C64-890E-9234C8E26E88}"/>
+                <a16:creationId xmlns:a16="http://schemas.microsoft.com/office/drawing/2014/main" id="{E1D86006-AD6C-4D4F-858E-FFF4C2C0BBF3}"/>
               </a:ext>
             </a:extLst>
           </p:cNvPr>
@@ -22291,7 +24687,7 @@
           <p:cNvPr id="34" name="">
             <a:extLst xmlns:a="http://schemas.openxmlformats.org/drawingml/2006/main">
               <a:ext uri="{FF2B5EF4-FFF2-40B4-BE49-F238E27FC236}">
-                <a16:creationId xmlns:a16="http://schemas.microsoft.com/office/drawing/2014/main" id="{F723F1CD-0A88-4142-BDCC-F8078C2B7F38}"/>
+                <a16:creationId xmlns:a16="http://schemas.microsoft.com/office/drawing/2014/main" id="{52ADB26A-DE8D-42F7-A87A-0C3965283F71}"/>
               </a:ext>
             </a:extLst>
           </p:cNvPr>
@@ -22355,7 +24751,7 @@
           <p:cNvPr id="35" name="">
             <a:extLst xmlns:a="http://schemas.openxmlformats.org/drawingml/2006/main">
               <a:ext uri="{FF2B5EF4-FFF2-40B4-BE49-F238E27FC236}">
-                <a16:creationId xmlns:a16="http://schemas.microsoft.com/office/drawing/2014/main" id="{07708752-F66C-4B3F-A610-4DE666AE8F92}"/>
+                <a16:creationId xmlns:a16="http://schemas.microsoft.com/office/drawing/2014/main" id="{E2932386-B0BD-4A52-B8DD-29A530E34A74}"/>
               </a:ext>
             </a:extLst>
           </p:cNvPr>
@@ -22388,7 +24784,7 @@
           <p:cNvPr id="36" name="">
             <a:extLst xmlns:a="http://schemas.openxmlformats.org/drawingml/2006/main">
               <a:ext uri="{FF2B5EF4-FFF2-40B4-BE49-F238E27FC236}">
-                <a16:creationId xmlns:a16="http://schemas.microsoft.com/office/drawing/2014/main" id="{6016480F-A9F2-4AAC-B574-3DE4CA3BA990}"/>
+                <a16:creationId xmlns:a16="http://schemas.microsoft.com/office/drawing/2014/main" id="{B9FB8E44-F0F7-4885-A7E4-ABA8B26598C0}"/>
               </a:ext>
             </a:extLst>
           </p:cNvPr>
@@ -22452,7 +24848,7 @@
           <p:cNvPr id="37" name="">
             <a:extLst xmlns:a="http://schemas.openxmlformats.org/drawingml/2006/main">
               <a:ext uri="{FF2B5EF4-FFF2-40B4-BE49-F238E27FC236}">
-                <a16:creationId xmlns:a16="http://schemas.microsoft.com/office/drawing/2014/main" id="{ED972471-2BB0-445C-917D-1FD9BAD6ADBC}"/>
+                <a16:creationId xmlns:a16="http://schemas.microsoft.com/office/drawing/2014/main" id="{15262932-954A-4C2C-9711-560E095962AB}"/>
               </a:ext>
             </a:extLst>
           </p:cNvPr>
@@ -22485,7 +24881,7 @@
           <p:cNvPr id="38" name="">
             <a:extLst xmlns:a="http://schemas.openxmlformats.org/drawingml/2006/main">
               <a:ext uri="{FF2B5EF4-FFF2-40B4-BE49-F238E27FC236}">
-                <a16:creationId xmlns:a16="http://schemas.microsoft.com/office/drawing/2014/main" id="{0E746494-86A4-4B7A-805F-72364E427C8A}"/>
+                <a16:creationId xmlns:a16="http://schemas.microsoft.com/office/drawing/2014/main" id="{6661B2A6-EC7C-4751-A8EC-1701058C5C3D}"/>
               </a:ext>
             </a:extLst>
           </p:cNvPr>
@@ -22549,7 +24945,7 @@
           <p:cNvPr id="39" name="">
             <a:extLst xmlns:a="http://schemas.openxmlformats.org/drawingml/2006/main">
               <a:ext uri="{FF2B5EF4-FFF2-40B4-BE49-F238E27FC236}">
-                <a16:creationId xmlns:a16="http://schemas.microsoft.com/office/drawing/2014/main" id="{0ACED660-E7AB-4EA7-8CD6-3998E28EFD87}"/>
+                <a16:creationId xmlns:a16="http://schemas.microsoft.com/office/drawing/2014/main" id="{A28151E8-B7AE-4CB1-9AC5-ACF936DAADA0}"/>
               </a:ext>
             </a:extLst>
           </p:cNvPr>
@@ -22582,7 +24978,7 @@
           <p:cNvPr id="40" name="">
             <a:extLst xmlns:a="http://schemas.openxmlformats.org/drawingml/2006/main">
               <a:ext uri="{FF2B5EF4-FFF2-40B4-BE49-F238E27FC236}">
-                <a16:creationId xmlns:a16="http://schemas.microsoft.com/office/drawing/2014/main" id="{512799E7-A8BD-4E96-A8BD-A3204D5AE015}"/>
+                <a16:creationId xmlns:a16="http://schemas.microsoft.com/office/drawing/2014/main" id="{8EF0320A-22BE-4903-9691-EBBC4C3711F3}"/>
               </a:ext>
             </a:extLst>
           </p:cNvPr>
@@ -22646,7 +25042,7 @@
           <p:cNvPr id="41" name="">
             <a:extLst xmlns:a="http://schemas.openxmlformats.org/drawingml/2006/main">
               <a:ext uri="{FF2B5EF4-FFF2-40B4-BE49-F238E27FC236}">
-                <a16:creationId xmlns:a16="http://schemas.microsoft.com/office/drawing/2014/main" id="{340D0867-386E-483E-A16C-1A47502FD580}"/>
+                <a16:creationId xmlns:a16="http://schemas.microsoft.com/office/drawing/2014/main" id="{CCFED136-F0E1-4CB3-9F11-0135F5DD1121}"/>
               </a:ext>
             </a:extLst>
           </p:cNvPr>
@@ -22679,7 +25075,7 @@
           <p:cNvPr id="42" name="">
             <a:extLst xmlns:a="http://schemas.openxmlformats.org/drawingml/2006/main">
               <a:ext uri="{FF2B5EF4-FFF2-40B4-BE49-F238E27FC236}">
-                <a16:creationId xmlns:a16="http://schemas.microsoft.com/office/drawing/2014/main" id="{85E4E807-C329-48AE-89A1-E83A347D557B}"/>
+                <a16:creationId xmlns:a16="http://schemas.microsoft.com/office/drawing/2014/main" id="{F2F70A78-3A8D-4D58-A99D-37AC4508FF62}"/>
               </a:ext>
             </a:extLst>
           </p:cNvPr>
@@ -22743,7 +25139,7 @@
           <p:cNvPr id="43" name="">
             <a:extLst xmlns:a="http://schemas.openxmlformats.org/drawingml/2006/main">
               <a:ext uri="{FF2B5EF4-FFF2-40B4-BE49-F238E27FC236}">
-                <a16:creationId xmlns:a16="http://schemas.microsoft.com/office/drawing/2014/main" id="{65A5DD78-34B7-4728-8B26-63A40E7C19DA}"/>
+                <a16:creationId xmlns:a16="http://schemas.microsoft.com/office/drawing/2014/main" id="{671F8EA2-9454-4128-B9EE-940D236BDA38}"/>
               </a:ext>
             </a:extLst>
           </p:cNvPr>
@@ -22776,7 +25172,7 @@
           <p:cNvPr id="44" name="">
             <a:extLst xmlns:a="http://schemas.openxmlformats.org/drawingml/2006/main">
               <a:ext uri="{FF2B5EF4-FFF2-40B4-BE49-F238E27FC236}">
-                <a16:creationId xmlns:a16="http://schemas.microsoft.com/office/drawing/2014/main" id="{B2B2CEAE-D885-4BBD-9C46-B262D830E200}"/>
+                <a16:creationId xmlns:a16="http://schemas.microsoft.com/office/drawing/2014/main" id="{F316C9DE-0FD4-49FD-A378-0A314B13E1A2}"/>
               </a:ext>
             </a:extLst>
           </p:cNvPr>
@@ -22840,7 +25236,7 @@
           <p:cNvPr id="45" name="">
             <a:extLst xmlns:a="http://schemas.openxmlformats.org/drawingml/2006/main">
               <a:ext uri="{FF2B5EF4-FFF2-40B4-BE49-F238E27FC236}">
-                <a16:creationId xmlns:a16="http://schemas.microsoft.com/office/drawing/2014/main" id="{569F7503-1529-479F-BED1-D335FB8F5BEE}"/>
+                <a16:creationId xmlns:a16="http://schemas.microsoft.com/office/drawing/2014/main" id="{FE759F66-07D4-4819-867F-666472C8744F}"/>
               </a:ext>
             </a:extLst>
           </p:cNvPr>
@@ -22873,7 +25269,7 @@
           <p:cNvPr id="46" name="">
             <a:extLst xmlns:a="http://schemas.openxmlformats.org/drawingml/2006/main">
               <a:ext uri="{FF2B5EF4-FFF2-40B4-BE49-F238E27FC236}">
-                <a16:creationId xmlns:a16="http://schemas.microsoft.com/office/drawing/2014/main" id="{B6B4F594-A031-4493-930A-82F5537993D6}"/>
+                <a16:creationId xmlns:a16="http://schemas.microsoft.com/office/drawing/2014/main" id="{C3F86545-46FD-4DD7-9668-9CEA929DE5A5}"/>
               </a:ext>
             </a:extLst>
           </p:cNvPr>
@@ -22937,7 +25333,7 @@
           <p:cNvPr id="47" name="">
             <a:extLst xmlns:a="http://schemas.openxmlformats.org/drawingml/2006/main">
               <a:ext uri="{FF2B5EF4-FFF2-40B4-BE49-F238E27FC236}">
-                <a16:creationId xmlns:a16="http://schemas.microsoft.com/office/drawing/2014/main" id="{A5C70D2C-71EA-450D-9410-9FBE6A73730F}"/>
+                <a16:creationId xmlns:a16="http://schemas.microsoft.com/office/drawing/2014/main" id="{92A0BB04-3582-49B6-90D2-B33C57B69192}"/>
               </a:ext>
             </a:extLst>
           </p:cNvPr>
@@ -22970,7 +25366,7 @@
           <p:cNvPr id="48" name="">
             <a:extLst xmlns:a="http://schemas.openxmlformats.org/drawingml/2006/main">
               <a:ext uri="{FF2B5EF4-FFF2-40B4-BE49-F238E27FC236}">
-                <a16:creationId xmlns:a16="http://schemas.microsoft.com/office/drawing/2014/main" id="{1F1BC2A4-AB27-4817-BBAC-372E35797F9E}"/>
+                <a16:creationId xmlns:a16="http://schemas.microsoft.com/office/drawing/2014/main" id="{52B756CD-832A-4688-ACA7-C0F9CB5D8FA7}"/>
               </a:ext>
             </a:extLst>
           </p:cNvPr>
@@ -23034,7 +25430,7 @@
           <p:cNvPr id="49" name="">
             <a:extLst xmlns:a="http://schemas.openxmlformats.org/drawingml/2006/main">
               <a:ext uri="{FF2B5EF4-FFF2-40B4-BE49-F238E27FC236}">
-                <a16:creationId xmlns:a16="http://schemas.microsoft.com/office/drawing/2014/main" id="{CA3CC169-9A90-4593-B1D7-8826868CBE09}"/>
+                <a16:creationId xmlns:a16="http://schemas.microsoft.com/office/drawing/2014/main" id="{E7979C5F-B9F2-43B5-848F-5B12DBE28B04}"/>
               </a:ext>
             </a:extLst>
           </p:cNvPr>
@@ -23067,7 +25463,7 @@
           <p:cNvPr id="50" name="">
             <a:extLst xmlns:a="http://schemas.openxmlformats.org/drawingml/2006/main">
               <a:ext uri="{FF2B5EF4-FFF2-40B4-BE49-F238E27FC236}">
-                <a16:creationId xmlns:a16="http://schemas.microsoft.com/office/drawing/2014/main" id="{D13EAFBA-0D4C-47C9-A41E-AE671D014B59}"/>
+                <a16:creationId xmlns:a16="http://schemas.microsoft.com/office/drawing/2014/main" id="{17925083-57FB-42D0-9240-45760A0E1DB6}"/>
               </a:ext>
             </a:extLst>
           </p:cNvPr>
@@ -23131,7 +25527,7 @@
           <p:cNvPr id="51" name="">
             <a:extLst xmlns:a="http://schemas.openxmlformats.org/drawingml/2006/main">
               <a:ext uri="{FF2B5EF4-FFF2-40B4-BE49-F238E27FC236}">
-                <a16:creationId xmlns:a16="http://schemas.microsoft.com/office/drawing/2014/main" id="{B896BAE5-A9AA-442C-AC8F-B68113C792B3}"/>
+                <a16:creationId xmlns:a16="http://schemas.microsoft.com/office/drawing/2014/main" id="{ECDB7252-4900-44AE-A44E-1CA65AAD1A78}"/>
               </a:ext>
             </a:extLst>
           </p:cNvPr>
@@ -23164,7 +25560,7 @@
           <p:cNvPr id="52" name="">
             <a:extLst xmlns:a="http://schemas.openxmlformats.org/drawingml/2006/main">
               <a:ext uri="{FF2B5EF4-FFF2-40B4-BE49-F238E27FC236}">
-                <a16:creationId xmlns:a16="http://schemas.microsoft.com/office/drawing/2014/main" id="{02140D1B-4635-4130-BD74-C77FADD9A822}"/>
+                <a16:creationId xmlns:a16="http://schemas.microsoft.com/office/drawing/2014/main" id="{43F8E697-A882-455E-B263-0F2FB80EC3E1}"/>
               </a:ext>
             </a:extLst>
           </p:cNvPr>
@@ -23228,7 +25624,7 @@
           <p:cNvPr id="53" name="">
             <a:extLst xmlns:a="http://schemas.openxmlformats.org/drawingml/2006/main">
               <a:ext uri="{FF2B5EF4-FFF2-40B4-BE49-F238E27FC236}">
-                <a16:creationId xmlns:a16="http://schemas.microsoft.com/office/drawing/2014/main" id="{59C3BA6D-136C-46DF-A949-00D1F70170EF}"/>
+                <a16:creationId xmlns:a16="http://schemas.microsoft.com/office/drawing/2014/main" id="{158F0857-C76B-4130-AD6D-637451F7FB03}"/>
               </a:ext>
             </a:extLst>
           </p:cNvPr>
@@ -23261,7 +25657,7 @@
           <p:cNvPr id="54" name="">
             <a:extLst xmlns:a="http://schemas.openxmlformats.org/drawingml/2006/main">
               <a:ext uri="{FF2B5EF4-FFF2-40B4-BE49-F238E27FC236}">
-                <a16:creationId xmlns:a16="http://schemas.microsoft.com/office/drawing/2014/main" id="{069AAF6D-28F2-4631-BAEA-9026F32F4385}"/>
+                <a16:creationId xmlns:a16="http://schemas.microsoft.com/office/drawing/2014/main" id="{5A8E3021-C424-48CD-ADED-B16BEE045554}"/>
               </a:ext>
             </a:extLst>
           </p:cNvPr>
@@ -23325,7 +25721,7 @@
           <p:cNvPr id="55" name="">
             <a:extLst xmlns:a="http://schemas.openxmlformats.org/drawingml/2006/main">
               <a:ext uri="{FF2B5EF4-FFF2-40B4-BE49-F238E27FC236}">
-                <a16:creationId xmlns:a16="http://schemas.microsoft.com/office/drawing/2014/main" id="{A4F37324-3E16-4D0C-B9D2-18AF16361CAC}"/>
+                <a16:creationId xmlns:a16="http://schemas.microsoft.com/office/drawing/2014/main" id="{787E58B3-5D95-4EF3-8FED-3E0D890A16C4}"/>
               </a:ext>
             </a:extLst>
           </p:cNvPr>
@@ -23358,7 +25754,7 @@
           <p:cNvPr id="56" name="">
             <a:extLst xmlns:a="http://schemas.openxmlformats.org/drawingml/2006/main">
               <a:ext uri="{FF2B5EF4-FFF2-40B4-BE49-F238E27FC236}">
-                <a16:creationId xmlns:a16="http://schemas.microsoft.com/office/drawing/2014/main" id="{C8F085F8-731B-48FA-B7DD-37380A4EF8DC}"/>
+                <a16:creationId xmlns:a16="http://schemas.microsoft.com/office/drawing/2014/main" id="{D1EF7275-E15E-464B-BA98-449A88C4A4A2}"/>
               </a:ext>
             </a:extLst>
           </p:cNvPr>
@@ -23422,7 +25818,7 @@
           <p:cNvPr id="57" name="">
             <a:extLst xmlns:a="http://schemas.openxmlformats.org/drawingml/2006/main">
               <a:ext uri="{FF2B5EF4-FFF2-40B4-BE49-F238E27FC236}">
-                <a16:creationId xmlns:a16="http://schemas.microsoft.com/office/drawing/2014/main" id="{46C72684-925C-4668-BAD5-C029CAFA7682}"/>
+                <a16:creationId xmlns:a16="http://schemas.microsoft.com/office/drawing/2014/main" id="{DBC8F099-2D80-4C4F-90F3-CE336398E7C8}"/>
               </a:ext>
             </a:extLst>
           </p:cNvPr>
@@ -23455,7 +25851,7 @@
           <p:cNvPr id="58" name="">
             <a:extLst xmlns:a="http://schemas.openxmlformats.org/drawingml/2006/main">
               <a:ext uri="{FF2B5EF4-FFF2-40B4-BE49-F238E27FC236}">
-                <a16:creationId xmlns:a16="http://schemas.microsoft.com/office/drawing/2014/main" id="{0D9CB64C-ADEB-4F22-93B4-AA7204D58062}"/>
+                <a16:creationId xmlns:a16="http://schemas.microsoft.com/office/drawing/2014/main" id="{C320D727-9CDC-40A1-B185-09BFC67E5412}"/>
               </a:ext>
             </a:extLst>
           </p:cNvPr>
@@ -23519,7 +25915,7 @@
           <p:cNvPr id="59" name="">
             <a:extLst xmlns:a="http://schemas.openxmlformats.org/drawingml/2006/main">
               <a:ext uri="{FF2B5EF4-FFF2-40B4-BE49-F238E27FC236}">
-                <a16:creationId xmlns:a16="http://schemas.microsoft.com/office/drawing/2014/main" id="{D0C491C1-7931-44AB-9DF2-3864040C4CC4}"/>
+                <a16:creationId xmlns:a16="http://schemas.microsoft.com/office/drawing/2014/main" id="{3FC5C85A-F2CA-476F-A7C9-F4B04F28E6A3}"/>
               </a:ext>
             </a:extLst>
           </p:cNvPr>
@@ -23552,7 +25948,7 @@
           <p:cNvPr id="60" name="">
             <a:extLst xmlns:a="http://schemas.openxmlformats.org/drawingml/2006/main">
               <a:ext uri="{FF2B5EF4-FFF2-40B4-BE49-F238E27FC236}">
-                <a16:creationId xmlns:a16="http://schemas.microsoft.com/office/drawing/2014/main" id="{CD8CD3F8-3E99-4F31-9DE1-6C58D2258127}"/>
+                <a16:creationId xmlns:a16="http://schemas.microsoft.com/office/drawing/2014/main" id="{D378B09A-C1C9-4593-9A42-A06759838506}"/>
               </a:ext>
             </a:extLst>
           </p:cNvPr>
@@ -23616,7 +26012,7 @@
           <p:cNvPr id="61" name="">
             <a:extLst xmlns:a="http://schemas.openxmlformats.org/drawingml/2006/main">
               <a:ext uri="{FF2B5EF4-FFF2-40B4-BE49-F238E27FC236}">
-                <a16:creationId xmlns:a16="http://schemas.microsoft.com/office/drawing/2014/main" id="{FC72E4AA-4CEF-4CE1-9E0B-EEF42AE2DB91}"/>
+                <a16:creationId xmlns:a16="http://schemas.microsoft.com/office/drawing/2014/main" id="{F6E5BC54-A33D-46B2-9123-EE7E44CEA791}"/>
               </a:ext>
             </a:extLst>
           </p:cNvPr>
@@ -23649,7 +26045,7 @@
           <p:cNvPr id="62" name="">
             <a:extLst xmlns:a="http://schemas.openxmlformats.org/drawingml/2006/main">
               <a:ext uri="{FF2B5EF4-FFF2-40B4-BE49-F238E27FC236}">
-                <a16:creationId xmlns:a16="http://schemas.microsoft.com/office/drawing/2014/main" id="{90CA79E8-988C-4C6D-9DF4-289ACD8385B8}"/>
+                <a16:creationId xmlns:a16="http://schemas.microsoft.com/office/drawing/2014/main" id="{B6CEA1F6-D31F-4CB7-B5C6-7C5DF7FC5768}"/>
               </a:ext>
             </a:extLst>
           </p:cNvPr>
@@ -23713,7 +26109,7 @@
           <p:cNvPr id="63" name="">
             <a:extLst xmlns:a="http://schemas.openxmlformats.org/drawingml/2006/main">
               <a:ext uri="{FF2B5EF4-FFF2-40B4-BE49-F238E27FC236}">
-                <a16:creationId xmlns:a16="http://schemas.microsoft.com/office/drawing/2014/main" id="{E9EDE9B8-3B05-4304-B223-DDC67DCDC244}"/>
+                <a16:creationId xmlns:a16="http://schemas.microsoft.com/office/drawing/2014/main" id="{101D1C8C-3808-488F-A8F0-00592EA78139}"/>
               </a:ext>
             </a:extLst>
           </p:cNvPr>
@@ -23746,7 +26142,7 @@
           <p:cNvPr id="64" name="">
             <a:extLst xmlns:a="http://schemas.openxmlformats.org/drawingml/2006/main">
               <a:ext uri="{FF2B5EF4-FFF2-40B4-BE49-F238E27FC236}">
-                <a16:creationId xmlns:a16="http://schemas.microsoft.com/office/drawing/2014/main" id="{F90A851E-3089-49E7-A64A-02AB911550C1}"/>
+                <a16:creationId xmlns:a16="http://schemas.microsoft.com/office/drawing/2014/main" id="{FA935F89-FE4E-48C3-9E03-B5BF9EE9A2DC}"/>
               </a:ext>
             </a:extLst>
           </p:cNvPr>
@@ -23781,7 +26177,7 @@
           <p:cNvPr id="65" name="">
             <a:extLst xmlns:a="http://schemas.openxmlformats.org/drawingml/2006/main">
               <a:ext uri="{FF2B5EF4-FFF2-40B4-BE49-F238E27FC236}">
-                <a16:creationId xmlns:a16="http://schemas.microsoft.com/office/drawing/2014/main" id="{1BD064EB-6F42-4A94-B8DE-4B4CADB7CF90}"/>
+                <a16:creationId xmlns:a16="http://schemas.microsoft.com/office/drawing/2014/main" id="{849C61AB-77FE-4219-99F4-8D43F917822F}"/>
               </a:ext>
             </a:extLst>
           </p:cNvPr>
@@ -23845,7 +26241,7 @@
           <p:cNvPr id="66" name="">
             <a:extLst xmlns:a="http://schemas.openxmlformats.org/drawingml/2006/main">
               <a:ext uri="{FF2B5EF4-FFF2-40B4-BE49-F238E27FC236}">
-                <a16:creationId xmlns:a16="http://schemas.microsoft.com/office/drawing/2014/main" id="{F07814A9-718D-4E31-8714-FB842909C2D8}"/>
+                <a16:creationId xmlns:a16="http://schemas.microsoft.com/office/drawing/2014/main" id="{9F83CEAD-7D24-4430-9AE6-A3D9ED85A577}"/>
               </a:ext>
             </a:extLst>
           </p:cNvPr>
@@ -23909,7 +26305,7 @@
           <p:cNvPr id="67" name="">
             <a:extLst xmlns:a="http://schemas.openxmlformats.org/drawingml/2006/main">
               <a:ext uri="{FF2B5EF4-FFF2-40B4-BE49-F238E27FC236}">
-                <a16:creationId xmlns:a16="http://schemas.microsoft.com/office/drawing/2014/main" id="{297F864B-15DF-472D-80D0-17E067792349}"/>
+                <a16:creationId xmlns:a16="http://schemas.microsoft.com/office/drawing/2014/main" id="{40D09C38-C419-4472-9E57-FFF2E34617F6}"/>
               </a:ext>
             </a:extLst>
           </p:cNvPr>
@@ -23973,7 +26369,7 @@
           <p:cNvPr id="68" name="">
             <a:extLst xmlns:a="http://schemas.openxmlformats.org/drawingml/2006/main">
               <a:ext uri="{FF2B5EF4-FFF2-40B4-BE49-F238E27FC236}">
-                <a16:creationId xmlns:a16="http://schemas.microsoft.com/office/drawing/2014/main" id="{64946F9F-0EB2-4BA8-8B8C-16DE859C38EF}"/>
+                <a16:creationId xmlns:a16="http://schemas.microsoft.com/office/drawing/2014/main" id="{1D56A741-9E7D-402C-9976-6E8FB32B2C57}"/>
               </a:ext>
             </a:extLst>
           </p:cNvPr>
@@ -24006,7 +26402,7 @@
           <p:cNvPr id="69" name="">
             <a:extLst xmlns:a="http://schemas.openxmlformats.org/drawingml/2006/main">
               <a:ext uri="{FF2B5EF4-FFF2-40B4-BE49-F238E27FC236}">
-                <a16:creationId xmlns:a16="http://schemas.microsoft.com/office/drawing/2014/main" id="{8BA4C663-AA89-4945-9534-522F919F0AF2}"/>
+                <a16:creationId xmlns:a16="http://schemas.microsoft.com/office/drawing/2014/main" id="{3CA976E0-EA84-484E-B2AA-DB11B91CB5D5}"/>
               </a:ext>
             </a:extLst>
           </p:cNvPr>
@@ -24041,7 +26437,7 @@
           <p:cNvPr id="70" name="">
             <a:extLst xmlns:a="http://schemas.openxmlformats.org/drawingml/2006/main">
               <a:ext uri="{FF2B5EF4-FFF2-40B4-BE49-F238E27FC236}">
-                <a16:creationId xmlns:a16="http://schemas.microsoft.com/office/drawing/2014/main" id="{0FC144CF-FABA-44F3-873B-B0E3F7EBF482}"/>
+                <a16:creationId xmlns:a16="http://schemas.microsoft.com/office/drawing/2014/main" id="{8E891260-B732-4931-BF7A-B77E243E469E}"/>
               </a:ext>
             </a:extLst>
           </p:cNvPr>
@@ -24105,7 +26501,7 @@
           <p:cNvPr id="71" name="">
             <a:extLst xmlns:a="http://schemas.openxmlformats.org/drawingml/2006/main">
               <a:ext uri="{FF2B5EF4-FFF2-40B4-BE49-F238E27FC236}">
-                <a16:creationId xmlns:a16="http://schemas.microsoft.com/office/drawing/2014/main" id="{C5912D31-BBF6-471D-BD4C-AE2129959E24}"/>
+                <a16:creationId xmlns:a16="http://schemas.microsoft.com/office/drawing/2014/main" id="{21545804-6B6E-465D-A6FA-AD422B8EBEBE}"/>
               </a:ext>
             </a:extLst>
           </p:cNvPr>
@@ -24169,7 +26565,7 @@
           <p:cNvPr id="72" name="">
             <a:extLst xmlns:a="http://schemas.openxmlformats.org/drawingml/2006/main">
               <a:ext uri="{FF2B5EF4-FFF2-40B4-BE49-F238E27FC236}">
-                <a16:creationId xmlns:a16="http://schemas.microsoft.com/office/drawing/2014/main" id="{2DD1E739-24B5-44FF-9CE5-D9816C0C7D0C}"/>
+                <a16:creationId xmlns:a16="http://schemas.microsoft.com/office/drawing/2014/main" id="{F9CDC47A-DE91-4404-B404-FCF86728D6AF}"/>
               </a:ext>
             </a:extLst>
           </p:cNvPr>
@@ -24233,7 +26629,7 @@
           <p:cNvPr id="73" name="">
             <a:extLst xmlns:a="http://schemas.openxmlformats.org/drawingml/2006/main">
               <a:ext uri="{FF2B5EF4-FFF2-40B4-BE49-F238E27FC236}">
-                <a16:creationId xmlns:a16="http://schemas.microsoft.com/office/drawing/2014/main" id="{CCF876F0-633F-4615-BE2A-DB99F7495665}"/>
+                <a16:creationId xmlns:a16="http://schemas.microsoft.com/office/drawing/2014/main" id="{BB73151E-ABF5-4D7B-B490-B9F72D4929A2}"/>
               </a:ext>
             </a:extLst>
           </p:cNvPr>
@@ -24297,7 +26693,7 @@
           <p:cNvPr id="74" name="">
             <a:extLst xmlns:a="http://schemas.openxmlformats.org/drawingml/2006/main">
               <a:ext uri="{FF2B5EF4-FFF2-40B4-BE49-F238E27FC236}">
-                <a16:creationId xmlns:a16="http://schemas.microsoft.com/office/drawing/2014/main" id="{6F3DB678-5606-4F3C-8E8A-3CA6FA2446EE}"/>
+                <a16:creationId xmlns:a16="http://schemas.microsoft.com/office/drawing/2014/main" id="{6C224B50-59A5-48AE-822F-B02A717FE79C}"/>
               </a:ext>
             </a:extLst>
           </p:cNvPr>
@@ -24361,7 +26757,7 @@
           <p:cNvPr id="75" name="">
             <a:extLst xmlns:a="http://schemas.openxmlformats.org/drawingml/2006/main">
               <a:ext uri="{FF2B5EF4-FFF2-40B4-BE49-F238E27FC236}">
-                <a16:creationId xmlns:a16="http://schemas.microsoft.com/office/drawing/2014/main" id="{1D29B525-2CC4-4768-B77A-BCEF6AE94449}"/>
+                <a16:creationId xmlns:a16="http://schemas.microsoft.com/office/drawing/2014/main" id="{4C5D279E-2A4C-4433-9620-FD73916F9C30}"/>
               </a:ext>
             </a:extLst>
           </p:cNvPr>
@@ -24423,7 +26819,7 @@
     </p:spTree>
     <p:extLst>
       <p:ext uri="{BB962C8B-B14F-4D97-AF65-F5344CB8AC3E}">
-        <p14:creationId xmlns:p14="http://schemas.microsoft.com/office/powerpoint/2010/main" val="857372210"/>
+        <p14:creationId xmlns:p14="http://schemas.microsoft.com/office/powerpoint/2010/main" val="900004458"/>
       </p:ext>
     </p:extLst>
   </p:cSld>
@@ -24447,7 +26843,7 @@
           <p:cNvPr id="1" name="">
             <a:extLst xmlns:a="http://schemas.openxmlformats.org/drawingml/2006/main">
               <a:ext uri="{FF2B5EF4-FFF2-40B4-BE49-F238E27FC236}">
-                <a16:creationId xmlns:a16="http://schemas.microsoft.com/office/drawing/2014/main" id="{DF8CBB63-1F38-4F1E-896C-81625A6EFA56}"/>
+                <a16:creationId xmlns:a16="http://schemas.microsoft.com/office/drawing/2014/main" id="{A240A4B1-C936-4BE2-A194-B7E4C17284CA}"/>
               </a:ext>
             </a:extLst>
           </p:cNvPr>
@@ -24482,7 +26878,7 @@
           <p:cNvPr id="2" name="">
             <a:extLst xmlns:a="http://schemas.openxmlformats.org/drawingml/2006/main">
               <a:ext uri="{FF2B5EF4-FFF2-40B4-BE49-F238E27FC236}">
-                <a16:creationId xmlns:a16="http://schemas.microsoft.com/office/drawing/2014/main" id="{4049F1B9-3BE6-44F4-BE97-95AA46F82341}"/>
+                <a16:creationId xmlns:a16="http://schemas.microsoft.com/office/drawing/2014/main" id="{6BD61E99-1936-429B-B7DF-984F6393C55C}"/>
               </a:ext>
             </a:extLst>
           </p:cNvPr>
@@ -24517,7 +26913,7 @@
           <p:cNvPr id="3" name="">
             <a:extLst xmlns:a="http://schemas.openxmlformats.org/drawingml/2006/main">
               <a:ext uri="{FF2B5EF4-FFF2-40B4-BE49-F238E27FC236}">
-                <a16:creationId xmlns:a16="http://schemas.microsoft.com/office/drawing/2014/main" id="{FC54D390-1DEB-476F-93B3-4A050A5F3EA8}"/>
+                <a16:creationId xmlns:a16="http://schemas.microsoft.com/office/drawing/2014/main" id="{5955FA75-6C53-42A6-B640-D65AD0ACE454}"/>
               </a:ext>
             </a:extLst>
           </p:cNvPr>
@@ -24581,7 +26977,7 @@
           <p:cNvPr id="4" name="">
             <a:extLst xmlns:a="http://schemas.openxmlformats.org/drawingml/2006/main">
               <a:ext uri="{FF2B5EF4-FFF2-40B4-BE49-F238E27FC236}">
-                <a16:creationId xmlns:a16="http://schemas.microsoft.com/office/drawing/2014/main" id="{29C2FE8C-2F23-473E-AAD3-40F0A74F631C}"/>
+                <a16:creationId xmlns:a16="http://schemas.microsoft.com/office/drawing/2014/main" id="{632EB29B-C5C4-4A62-8B71-E41F8567A40D}"/>
               </a:ext>
             </a:extLst>
           </p:cNvPr>
@@ -24645,7 +27041,7 @@
           <p:cNvPr id="5" name="">
             <a:extLst xmlns:a="http://schemas.openxmlformats.org/drawingml/2006/main">
               <a:ext uri="{FF2B5EF4-FFF2-40B4-BE49-F238E27FC236}">
-                <a16:creationId xmlns:a16="http://schemas.microsoft.com/office/drawing/2014/main" id="{239413BB-E8F6-47C4-A2B6-D3E6BDDF5C9C}"/>
+                <a16:creationId xmlns:a16="http://schemas.microsoft.com/office/drawing/2014/main" id="{479DC827-BE76-4628-8E17-D6AC0B4B0220}"/>
               </a:ext>
             </a:extLst>
           </p:cNvPr>
@@ -24709,7 +27105,7 @@
           <p:cNvPr id="6" name="">
             <a:extLst xmlns:a="http://schemas.openxmlformats.org/drawingml/2006/main">
               <a:ext uri="{FF2B5EF4-FFF2-40B4-BE49-F238E27FC236}">
-                <a16:creationId xmlns:a16="http://schemas.microsoft.com/office/drawing/2014/main" id="{B7DCBD9F-44FC-41F3-8B4A-8AA8CCB5772A}"/>
+                <a16:creationId xmlns:a16="http://schemas.microsoft.com/office/drawing/2014/main" id="{FE43B40A-B541-411F-B3BB-422B0C9D6EFD}"/>
               </a:ext>
             </a:extLst>
           </p:cNvPr>
@@ -24773,7 +27169,7 @@
           <p:cNvPr id="7" name="">
             <a:extLst xmlns:a="http://schemas.openxmlformats.org/drawingml/2006/main">
               <a:ext uri="{FF2B5EF4-FFF2-40B4-BE49-F238E27FC236}">
-                <a16:creationId xmlns:a16="http://schemas.microsoft.com/office/drawing/2014/main" id="{90AA148E-B939-48EE-82B4-720DD07FE285}"/>
+                <a16:creationId xmlns:a16="http://schemas.microsoft.com/office/drawing/2014/main" id="{0EA0CF93-4F1F-48C5-B6F2-8C9F14C505B9}"/>
               </a:ext>
             </a:extLst>
           </p:cNvPr>
@@ -24806,7 +27202,7 @@
           <p:cNvPr id="8" name="">
             <a:extLst xmlns:a="http://schemas.openxmlformats.org/drawingml/2006/main">
               <a:ext uri="{FF2B5EF4-FFF2-40B4-BE49-F238E27FC236}">
-                <a16:creationId xmlns:a16="http://schemas.microsoft.com/office/drawing/2014/main" id="{C5EDC334-9FA3-480E-BCC8-6DEB51106D2D}"/>
+                <a16:creationId xmlns:a16="http://schemas.microsoft.com/office/drawing/2014/main" id="{F540314F-CDC5-4FBD-A19B-F650DC386574}"/>
               </a:ext>
             </a:extLst>
           </p:cNvPr>
@@ -24870,7 +27266,7 @@
           <p:cNvPr id="9" name="">
             <a:extLst xmlns:a="http://schemas.openxmlformats.org/drawingml/2006/main">
               <a:ext uri="{FF2B5EF4-FFF2-40B4-BE49-F238E27FC236}">
-                <a16:creationId xmlns:a16="http://schemas.microsoft.com/office/drawing/2014/main" id="{094B0949-5E64-4ADF-8BC6-43D64DFC5AB3}"/>
+                <a16:creationId xmlns:a16="http://schemas.microsoft.com/office/drawing/2014/main" id="{AF45BD0E-D426-402C-97D5-A14BAE5A632E}"/>
               </a:ext>
             </a:extLst>
           </p:cNvPr>
@@ -24903,7 +27299,7 @@
           <p:cNvPr id="10" name="">
             <a:extLst xmlns:a="http://schemas.openxmlformats.org/drawingml/2006/main">
               <a:ext uri="{FF2B5EF4-FFF2-40B4-BE49-F238E27FC236}">
-                <a16:creationId xmlns:a16="http://schemas.microsoft.com/office/drawing/2014/main" id="{8AEE817D-A08B-46DF-B07A-7775D1E03C32}"/>
+                <a16:creationId xmlns:a16="http://schemas.microsoft.com/office/drawing/2014/main" id="{ED2E315B-E922-4004-AB63-2B05A40D0EFC}"/>
               </a:ext>
             </a:extLst>
           </p:cNvPr>
@@ -24967,7 +27363,7 @@
           <p:cNvPr id="11" name="">
             <a:extLst xmlns:a="http://schemas.openxmlformats.org/drawingml/2006/main">
               <a:ext uri="{FF2B5EF4-FFF2-40B4-BE49-F238E27FC236}">
-                <a16:creationId xmlns:a16="http://schemas.microsoft.com/office/drawing/2014/main" id="{4D5FAFAC-F3E3-4A89-99BB-0526F22E071D}"/>
+                <a16:creationId xmlns:a16="http://schemas.microsoft.com/office/drawing/2014/main" id="{89FEB955-1322-4795-90D1-5E35CE610630}"/>
               </a:ext>
             </a:extLst>
           </p:cNvPr>
@@ -25000,7 +27396,7 @@
           <p:cNvPr id="12" name="">
             <a:extLst xmlns:a="http://schemas.openxmlformats.org/drawingml/2006/main">
               <a:ext uri="{FF2B5EF4-FFF2-40B4-BE49-F238E27FC236}">
-                <a16:creationId xmlns:a16="http://schemas.microsoft.com/office/drawing/2014/main" id="{B4B7A6D8-CF38-4049-A2EB-1ECB8079C069}"/>
+                <a16:creationId xmlns:a16="http://schemas.microsoft.com/office/drawing/2014/main" id="{3582492F-1AA8-4DA9-B983-0F5B134EBB3E}"/>
               </a:ext>
             </a:extLst>
           </p:cNvPr>
@@ -25064,7 +27460,7 @@
           <p:cNvPr id="13" name="">
             <a:extLst xmlns:a="http://schemas.openxmlformats.org/drawingml/2006/main">
               <a:ext uri="{FF2B5EF4-FFF2-40B4-BE49-F238E27FC236}">
-                <a16:creationId xmlns:a16="http://schemas.microsoft.com/office/drawing/2014/main" id="{D47A4107-BFEE-41E7-993C-8F7E8771C464}"/>
+                <a16:creationId xmlns:a16="http://schemas.microsoft.com/office/drawing/2014/main" id="{AE5E5DFC-831C-4697-8483-0E472366A688}"/>
               </a:ext>
             </a:extLst>
           </p:cNvPr>
@@ -25097,7 +27493,7 @@
           <p:cNvPr id="14" name="">
             <a:extLst xmlns:a="http://schemas.openxmlformats.org/drawingml/2006/main">
               <a:ext uri="{FF2B5EF4-FFF2-40B4-BE49-F238E27FC236}">
-                <a16:creationId xmlns:a16="http://schemas.microsoft.com/office/drawing/2014/main" id="{A2FCCA86-4D53-495F-81A1-0CBBA1248033}"/>
+                <a16:creationId xmlns:a16="http://schemas.microsoft.com/office/drawing/2014/main" id="{3A6EFF98-5B08-4D08-9B2E-59C8043B10FD}"/>
               </a:ext>
             </a:extLst>
           </p:cNvPr>
@@ -25161,7 +27557,7 @@
           <p:cNvPr id="15" name="">
             <a:extLst xmlns:a="http://schemas.openxmlformats.org/drawingml/2006/main">
               <a:ext uri="{FF2B5EF4-FFF2-40B4-BE49-F238E27FC236}">
-                <a16:creationId xmlns:a16="http://schemas.microsoft.com/office/drawing/2014/main" id="{C36EF8BE-35F8-4EE4-A1B9-17988793F402}"/>
+                <a16:creationId xmlns:a16="http://schemas.microsoft.com/office/drawing/2014/main" id="{2DD246A0-CBB9-406C-8F3C-0FFBAF17BAD3}"/>
               </a:ext>
             </a:extLst>
           </p:cNvPr>
@@ -25194,7 +27590,7 @@
           <p:cNvPr id="16" name="">
             <a:extLst xmlns:a="http://schemas.openxmlformats.org/drawingml/2006/main">
               <a:ext uri="{FF2B5EF4-FFF2-40B4-BE49-F238E27FC236}">
-                <a16:creationId xmlns:a16="http://schemas.microsoft.com/office/drawing/2014/main" id="{D3FF5443-5E27-4EB8-B3B7-23AB6F9ED830}"/>
+                <a16:creationId xmlns:a16="http://schemas.microsoft.com/office/drawing/2014/main" id="{D6BDA4E1-0C7F-459B-868E-63BFBD63A8E2}"/>
               </a:ext>
             </a:extLst>
           </p:cNvPr>
@@ -25258,7 +27654,7 @@
           <p:cNvPr id="17" name="">
             <a:extLst xmlns:a="http://schemas.openxmlformats.org/drawingml/2006/main">
               <a:ext uri="{FF2B5EF4-FFF2-40B4-BE49-F238E27FC236}">
-                <a16:creationId xmlns:a16="http://schemas.microsoft.com/office/drawing/2014/main" id="{EBD6EC7E-09CF-4FE3-8814-A2D952C0D0F8}"/>
+                <a16:creationId xmlns:a16="http://schemas.microsoft.com/office/drawing/2014/main" id="{579E2CD2-B863-401E-8799-B524EB2D0866}"/>
               </a:ext>
             </a:extLst>
           </p:cNvPr>
@@ -25291,7 +27687,7 @@
           <p:cNvPr id="18" name="">
             <a:extLst xmlns:a="http://schemas.openxmlformats.org/drawingml/2006/main">
               <a:ext uri="{FF2B5EF4-FFF2-40B4-BE49-F238E27FC236}">
-                <a16:creationId xmlns:a16="http://schemas.microsoft.com/office/drawing/2014/main" id="{7E108564-A086-4017-94DB-37A882219B29}"/>
+                <a16:creationId xmlns:a16="http://schemas.microsoft.com/office/drawing/2014/main" id="{F30974F6-5630-45CD-A114-2A412D906B7F}"/>
               </a:ext>
             </a:extLst>
           </p:cNvPr>
@@ -25355,7 +27751,7 @@
           <p:cNvPr id="19" name="">
             <a:extLst xmlns:a="http://schemas.openxmlformats.org/drawingml/2006/main">
               <a:ext uri="{FF2B5EF4-FFF2-40B4-BE49-F238E27FC236}">
-                <a16:creationId xmlns:a16="http://schemas.microsoft.com/office/drawing/2014/main" id="{9A8B18B2-0C19-471D-87C2-AF83D9862D48}"/>
+                <a16:creationId xmlns:a16="http://schemas.microsoft.com/office/drawing/2014/main" id="{FBD29DFA-0D7C-4C11-8204-7DB6E9F66EA5}"/>
               </a:ext>
             </a:extLst>
           </p:cNvPr>
@@ -25388,7 +27784,7 @@
           <p:cNvPr id="20" name="">
             <a:extLst xmlns:a="http://schemas.openxmlformats.org/drawingml/2006/main">
               <a:ext uri="{FF2B5EF4-FFF2-40B4-BE49-F238E27FC236}">
-                <a16:creationId xmlns:a16="http://schemas.microsoft.com/office/drawing/2014/main" id="{2A365DB6-F63E-4CBB-9247-7E6AD08434B0}"/>
+                <a16:creationId xmlns:a16="http://schemas.microsoft.com/office/drawing/2014/main" id="{67BC9A8B-BB9C-44DF-B807-1061F5CADA8D}"/>
               </a:ext>
             </a:extLst>
           </p:cNvPr>
@@ -25452,7 +27848,7 @@
           <p:cNvPr id="21" name="">
             <a:extLst xmlns:a="http://schemas.openxmlformats.org/drawingml/2006/main">
               <a:ext uri="{FF2B5EF4-FFF2-40B4-BE49-F238E27FC236}">
-                <a16:creationId xmlns:a16="http://schemas.microsoft.com/office/drawing/2014/main" id="{BDFD0B7C-31BB-4A81-937E-BF9B72E84E0C}"/>
+                <a16:creationId xmlns:a16="http://schemas.microsoft.com/office/drawing/2014/main" id="{185A5E83-DBD8-4566-8C80-C36FA71C5AD1}"/>
               </a:ext>
             </a:extLst>
           </p:cNvPr>
@@ -25485,7 +27881,7 @@
           <p:cNvPr id="22" name="">
             <a:extLst xmlns:a="http://schemas.openxmlformats.org/drawingml/2006/main">
               <a:ext uri="{FF2B5EF4-FFF2-40B4-BE49-F238E27FC236}">
-                <a16:creationId xmlns:a16="http://schemas.microsoft.com/office/drawing/2014/main" id="{E464A9F4-BDFA-493E-B3B4-27A45B26FE0A}"/>
+                <a16:creationId xmlns:a16="http://schemas.microsoft.com/office/drawing/2014/main" id="{240665BD-5D71-4D60-944A-4E186F558C4E}"/>
               </a:ext>
             </a:extLst>
           </p:cNvPr>
@@ -25549,7 +27945,7 @@
           <p:cNvPr id="23" name="">
             <a:extLst xmlns:a="http://schemas.openxmlformats.org/drawingml/2006/main">
               <a:ext uri="{FF2B5EF4-FFF2-40B4-BE49-F238E27FC236}">
-                <a16:creationId xmlns:a16="http://schemas.microsoft.com/office/drawing/2014/main" id="{33728A32-B9C5-43EA-BB9E-98862C751E3F}"/>
+                <a16:creationId xmlns:a16="http://schemas.microsoft.com/office/drawing/2014/main" id="{B77BCAB1-E4D7-4727-928A-80A4C02641B1}"/>
               </a:ext>
             </a:extLst>
           </p:cNvPr>
@@ -25582,7 +27978,7 @@
           <p:cNvPr id="24" name="">
             <a:extLst xmlns:a="http://schemas.openxmlformats.org/drawingml/2006/main">
               <a:ext uri="{FF2B5EF4-FFF2-40B4-BE49-F238E27FC236}">
-                <a16:creationId xmlns:a16="http://schemas.microsoft.com/office/drawing/2014/main" id="{081CBBC6-0A47-4B3E-A361-F60A8080F911}"/>
+                <a16:creationId xmlns:a16="http://schemas.microsoft.com/office/drawing/2014/main" id="{DE8B197D-2E66-4752-B855-CA46D4FF45B1}"/>
               </a:ext>
             </a:extLst>
           </p:cNvPr>
@@ -25646,7 +28042,7 @@
           <p:cNvPr id="25" name="">
             <a:extLst xmlns:a="http://schemas.openxmlformats.org/drawingml/2006/main">
               <a:ext uri="{FF2B5EF4-FFF2-40B4-BE49-F238E27FC236}">
-                <a16:creationId xmlns:a16="http://schemas.microsoft.com/office/drawing/2014/main" id="{172761D1-3BF3-4D80-A93B-98805FCC800C}"/>
+                <a16:creationId xmlns:a16="http://schemas.microsoft.com/office/drawing/2014/main" id="{EA7AF139-368F-4DFC-8FA5-7D5D062F43D7}"/>
               </a:ext>
             </a:extLst>
           </p:cNvPr>
@@ -25679,7 +28075,7 @@
           <p:cNvPr id="26" name="">
             <a:extLst xmlns:a="http://schemas.openxmlformats.org/drawingml/2006/main">
               <a:ext uri="{FF2B5EF4-FFF2-40B4-BE49-F238E27FC236}">
-                <a16:creationId xmlns:a16="http://schemas.microsoft.com/office/drawing/2014/main" id="{414DF6E8-E60C-4A85-A2DB-F2D463DB1F00}"/>
+                <a16:creationId xmlns:a16="http://schemas.microsoft.com/office/drawing/2014/main" id="{6BB32E29-12E7-45DF-A41E-58518789F66E}"/>
               </a:ext>
             </a:extLst>
           </p:cNvPr>
@@ -25743,7 +28139,7 @@
           <p:cNvPr id="27" name="">
             <a:extLst xmlns:a="http://schemas.openxmlformats.org/drawingml/2006/main">
               <a:ext uri="{FF2B5EF4-FFF2-40B4-BE49-F238E27FC236}">
-                <a16:creationId xmlns:a16="http://schemas.microsoft.com/office/drawing/2014/main" id="{A9F08ED3-97E8-47CB-A43E-59CB18B82848}"/>
+                <a16:creationId xmlns:a16="http://schemas.microsoft.com/office/drawing/2014/main" id="{7EBC0B1B-ECA8-4C3C-9630-1B141C6C7D70}"/>
               </a:ext>
             </a:extLst>
           </p:cNvPr>
@@ -25776,7 +28172,7 @@
           <p:cNvPr id="28" name="">
             <a:extLst xmlns:a="http://schemas.openxmlformats.org/drawingml/2006/main">
               <a:ext uri="{FF2B5EF4-FFF2-40B4-BE49-F238E27FC236}">
-                <a16:creationId xmlns:a16="http://schemas.microsoft.com/office/drawing/2014/main" id="{DA994D5B-04C8-4DDA-AC8C-5B16B0F3A358}"/>
+                <a16:creationId xmlns:a16="http://schemas.microsoft.com/office/drawing/2014/main" id="{A91AF6B8-D0B4-49E8-B0BB-CE7265E0DA05}"/>
               </a:ext>
             </a:extLst>
           </p:cNvPr>
@@ -25840,7 +28236,7 @@
           <p:cNvPr id="29" name="">
             <a:extLst xmlns:a="http://schemas.openxmlformats.org/drawingml/2006/main">
               <a:ext uri="{FF2B5EF4-FFF2-40B4-BE49-F238E27FC236}">
-                <a16:creationId xmlns:a16="http://schemas.microsoft.com/office/drawing/2014/main" id="{85E63CA8-F667-4E57-80D4-7C6B12A262A5}"/>
+                <a16:creationId xmlns:a16="http://schemas.microsoft.com/office/drawing/2014/main" id="{A7F5903A-7F1B-47A8-BFC1-D4737B613D66}"/>
               </a:ext>
             </a:extLst>
           </p:cNvPr>
@@ -25873,7 +28269,7 @@
           <p:cNvPr id="30" name="">
             <a:extLst xmlns:a="http://schemas.openxmlformats.org/drawingml/2006/main">
               <a:ext uri="{FF2B5EF4-FFF2-40B4-BE49-F238E27FC236}">
-                <a16:creationId xmlns:a16="http://schemas.microsoft.com/office/drawing/2014/main" id="{18FCB085-D57F-4E10-B936-3CEB1F5EECE4}"/>
+                <a16:creationId xmlns:a16="http://schemas.microsoft.com/office/drawing/2014/main" id="{36F56900-0BCC-4365-A60C-CB338C963848}"/>
               </a:ext>
             </a:extLst>
           </p:cNvPr>
@@ -25937,7 +28333,7 @@
           <p:cNvPr id="31" name="">
             <a:extLst xmlns:a="http://schemas.openxmlformats.org/drawingml/2006/main">
               <a:ext uri="{FF2B5EF4-FFF2-40B4-BE49-F238E27FC236}">
-                <a16:creationId xmlns:a16="http://schemas.microsoft.com/office/drawing/2014/main" id="{759D100D-3A1F-46C8-8165-5E3C814E156E}"/>
+                <a16:creationId xmlns:a16="http://schemas.microsoft.com/office/drawing/2014/main" id="{86BB6954-DE76-4524-B79D-7F17FE7DA146}"/>
               </a:ext>
             </a:extLst>
           </p:cNvPr>
@@ -25970,7 +28366,7 @@
           <p:cNvPr id="32" name="">
             <a:extLst xmlns:a="http://schemas.openxmlformats.org/drawingml/2006/main">
               <a:ext uri="{FF2B5EF4-FFF2-40B4-BE49-F238E27FC236}">
-                <a16:creationId xmlns:a16="http://schemas.microsoft.com/office/drawing/2014/main" id="{218BED8C-128F-4220-A4A3-9775257C755E}"/>
+                <a16:creationId xmlns:a16="http://schemas.microsoft.com/office/drawing/2014/main" id="{0D3CAC8B-5FD5-4FE8-829F-E95BFDE6F782}"/>
               </a:ext>
             </a:extLst>
           </p:cNvPr>
@@ -26034,7 +28430,7 @@
           <p:cNvPr id="33" name="">
             <a:extLst xmlns:a="http://schemas.openxmlformats.org/drawingml/2006/main">
               <a:ext uri="{FF2B5EF4-FFF2-40B4-BE49-F238E27FC236}">
-                <a16:creationId xmlns:a16="http://schemas.microsoft.com/office/drawing/2014/main" id="{AD903186-E4BC-487C-84B4-00B0A782A789}"/>
+                <a16:creationId xmlns:a16="http://schemas.microsoft.com/office/drawing/2014/main" id="{8E5C20F5-FC35-4189-AC8A-982CD63E7FF8}"/>
               </a:ext>
             </a:extLst>
           </p:cNvPr>
@@ -26067,7 +28463,7 @@
           <p:cNvPr id="34" name="">
             <a:extLst xmlns:a="http://schemas.openxmlformats.org/drawingml/2006/main">
               <a:ext uri="{FF2B5EF4-FFF2-40B4-BE49-F238E27FC236}">
-                <a16:creationId xmlns:a16="http://schemas.microsoft.com/office/drawing/2014/main" id="{9DD3CD57-1E34-45AE-AC16-7F808A047150}"/>
+                <a16:creationId xmlns:a16="http://schemas.microsoft.com/office/drawing/2014/main" id="{51102627-6EB8-4F7C-B670-AE340D31188E}"/>
               </a:ext>
             </a:extLst>
           </p:cNvPr>
@@ -26131,7 +28527,7 @@
           <p:cNvPr id="35" name="">
             <a:extLst xmlns:a="http://schemas.openxmlformats.org/drawingml/2006/main">
               <a:ext uri="{FF2B5EF4-FFF2-40B4-BE49-F238E27FC236}">
-                <a16:creationId xmlns:a16="http://schemas.microsoft.com/office/drawing/2014/main" id="{47B59DED-3860-4C66-ADCB-3A5370C7FA25}"/>
+                <a16:creationId xmlns:a16="http://schemas.microsoft.com/office/drawing/2014/main" id="{2D30C701-5AD0-415E-BF33-08B040439884}"/>
               </a:ext>
             </a:extLst>
           </p:cNvPr>
@@ -26164,7 +28560,7 @@
           <p:cNvPr id="36" name="">
             <a:extLst xmlns:a="http://schemas.openxmlformats.org/drawingml/2006/main">
               <a:ext uri="{FF2B5EF4-FFF2-40B4-BE49-F238E27FC236}">
-                <a16:creationId xmlns:a16="http://schemas.microsoft.com/office/drawing/2014/main" id="{BD98E2AD-476D-46FA-B609-4CB67F8A6D8A}"/>
+                <a16:creationId xmlns:a16="http://schemas.microsoft.com/office/drawing/2014/main" id="{1C6FBE32-789B-458E-9EA9-372EB257839F}"/>
               </a:ext>
             </a:extLst>
           </p:cNvPr>
@@ -26228,7 +28624,7 @@
           <p:cNvPr id="37" name="">
             <a:extLst xmlns:a="http://schemas.openxmlformats.org/drawingml/2006/main">
               <a:ext uri="{FF2B5EF4-FFF2-40B4-BE49-F238E27FC236}">
-                <a16:creationId xmlns:a16="http://schemas.microsoft.com/office/drawing/2014/main" id="{C0C6162C-7B12-4590-B023-45E73BAFE63C}"/>
+                <a16:creationId xmlns:a16="http://schemas.microsoft.com/office/drawing/2014/main" id="{5FBB8B25-B746-4701-BCCD-81E50FDC925D}"/>
               </a:ext>
             </a:extLst>
           </p:cNvPr>
@@ -26261,7 +28657,7 @@
           <p:cNvPr id="38" name="">
             <a:extLst xmlns:a="http://schemas.openxmlformats.org/drawingml/2006/main">
               <a:ext uri="{FF2B5EF4-FFF2-40B4-BE49-F238E27FC236}">
-                <a16:creationId xmlns:a16="http://schemas.microsoft.com/office/drawing/2014/main" id="{4DB45972-C548-42BC-8E43-E2AC397A3936}"/>
+                <a16:creationId xmlns:a16="http://schemas.microsoft.com/office/drawing/2014/main" id="{6474C4F7-BD2F-43DD-8A28-3ACEA240B6FC}"/>
               </a:ext>
             </a:extLst>
           </p:cNvPr>
@@ -26325,7 +28721,7 @@
           <p:cNvPr id="39" name="">
             <a:extLst xmlns:a="http://schemas.openxmlformats.org/drawingml/2006/main">
               <a:ext uri="{FF2B5EF4-FFF2-40B4-BE49-F238E27FC236}">
-                <a16:creationId xmlns:a16="http://schemas.microsoft.com/office/drawing/2014/main" id="{0BDBC108-5895-440A-A188-E300C4E0D2B8}"/>
+                <a16:creationId xmlns:a16="http://schemas.microsoft.com/office/drawing/2014/main" id="{67A0AB3D-B39D-4B97-A821-0BF0B17BA492}"/>
               </a:ext>
             </a:extLst>
           </p:cNvPr>
@@ -26358,7 +28754,7 @@
           <p:cNvPr id="40" name="">
             <a:extLst xmlns:a="http://schemas.openxmlformats.org/drawingml/2006/main">
               <a:ext uri="{FF2B5EF4-FFF2-40B4-BE49-F238E27FC236}">
-                <a16:creationId xmlns:a16="http://schemas.microsoft.com/office/drawing/2014/main" id="{1E041D9B-E2FE-43DB-B4C5-EB6EF39DE7ED}"/>
+                <a16:creationId xmlns:a16="http://schemas.microsoft.com/office/drawing/2014/main" id="{A933EA01-BEE1-4140-A9B5-3515B4BF4B46}"/>
               </a:ext>
             </a:extLst>
           </p:cNvPr>
@@ -26422,7 +28818,7 @@
           <p:cNvPr id="41" name="">
             <a:extLst xmlns:a="http://schemas.openxmlformats.org/drawingml/2006/main">
               <a:ext uri="{FF2B5EF4-FFF2-40B4-BE49-F238E27FC236}">
-                <a16:creationId xmlns:a16="http://schemas.microsoft.com/office/drawing/2014/main" id="{1FAE8113-B3DC-49EB-B660-7D1A46F69A1E}"/>
+                <a16:creationId xmlns:a16="http://schemas.microsoft.com/office/drawing/2014/main" id="{5AE78099-E31B-4423-8622-432DC660C54A}"/>
               </a:ext>
             </a:extLst>
           </p:cNvPr>
@@ -26455,7 +28851,7 @@
           <p:cNvPr id="42" name="">
             <a:extLst xmlns:a="http://schemas.openxmlformats.org/drawingml/2006/main">
               <a:ext uri="{FF2B5EF4-FFF2-40B4-BE49-F238E27FC236}">
-                <a16:creationId xmlns:a16="http://schemas.microsoft.com/office/drawing/2014/main" id="{1D87BC61-D7D6-4647-972B-782BD1693956}"/>
+                <a16:creationId xmlns:a16="http://schemas.microsoft.com/office/drawing/2014/main" id="{A3119EBE-8FBE-45F6-B071-5B5805B8499E}"/>
               </a:ext>
             </a:extLst>
           </p:cNvPr>
@@ -26519,7 +28915,7 @@
           <p:cNvPr id="43" name="">
             <a:extLst xmlns:a="http://schemas.openxmlformats.org/drawingml/2006/main">
               <a:ext uri="{FF2B5EF4-FFF2-40B4-BE49-F238E27FC236}">
-                <a16:creationId xmlns:a16="http://schemas.microsoft.com/office/drawing/2014/main" id="{DEFC6E5F-1F59-41A0-8168-8170346E545D}"/>
+                <a16:creationId xmlns:a16="http://schemas.microsoft.com/office/drawing/2014/main" id="{527F2E4A-9A61-445B-8F8F-5CA08854D370}"/>
               </a:ext>
             </a:extLst>
           </p:cNvPr>
@@ -26552,7 +28948,7 @@
           <p:cNvPr id="44" name="">
             <a:extLst xmlns:a="http://schemas.openxmlformats.org/drawingml/2006/main">
               <a:ext uri="{FF2B5EF4-FFF2-40B4-BE49-F238E27FC236}">
-                <a16:creationId xmlns:a16="http://schemas.microsoft.com/office/drawing/2014/main" id="{5C88029E-9697-44B2-8EFF-C392C209890B}"/>
+                <a16:creationId xmlns:a16="http://schemas.microsoft.com/office/drawing/2014/main" id="{33BA265E-F75A-4C1D-8632-9DAE3BA99139}"/>
               </a:ext>
             </a:extLst>
           </p:cNvPr>
@@ -26616,7 +29012,7 @@
           <p:cNvPr id="45" name="">
             <a:extLst xmlns:a="http://schemas.openxmlformats.org/drawingml/2006/main">
               <a:ext uri="{FF2B5EF4-FFF2-40B4-BE49-F238E27FC236}">
-                <a16:creationId xmlns:a16="http://schemas.microsoft.com/office/drawing/2014/main" id="{A8F0B870-9756-44F5-9F9B-55CB7EBBEDE7}"/>
+                <a16:creationId xmlns:a16="http://schemas.microsoft.com/office/drawing/2014/main" id="{E21D6E82-B021-4E29-9B46-BB7CC5EB53FA}"/>
               </a:ext>
             </a:extLst>
           </p:cNvPr>
@@ -26649,7 +29045,7 @@
           <p:cNvPr id="46" name="">
             <a:extLst xmlns:a="http://schemas.openxmlformats.org/drawingml/2006/main">
               <a:ext uri="{FF2B5EF4-FFF2-40B4-BE49-F238E27FC236}">
-                <a16:creationId xmlns:a16="http://schemas.microsoft.com/office/drawing/2014/main" id="{7C2E9860-8717-4749-9860-3A12C2AC2518}"/>
+                <a16:creationId xmlns:a16="http://schemas.microsoft.com/office/drawing/2014/main" id="{AFA28A8B-3E4D-4088-8088-E3ACB221487B}"/>
               </a:ext>
             </a:extLst>
           </p:cNvPr>
@@ -26713,7 +29109,7 @@
           <p:cNvPr id="47" name="">
             <a:extLst xmlns:a="http://schemas.openxmlformats.org/drawingml/2006/main">
               <a:ext uri="{FF2B5EF4-FFF2-40B4-BE49-F238E27FC236}">
-                <a16:creationId xmlns:a16="http://schemas.microsoft.com/office/drawing/2014/main" id="{3DB3C1C7-D997-405D-A95E-EAFFE7E90D59}"/>
+                <a16:creationId xmlns:a16="http://schemas.microsoft.com/office/drawing/2014/main" id="{FE94DFAB-1077-4CA3-B8E1-14166670601E}"/>
               </a:ext>
             </a:extLst>
           </p:cNvPr>
@@ -26746,7 +29142,7 @@
           <p:cNvPr id="48" name="">
             <a:extLst xmlns:a="http://schemas.openxmlformats.org/drawingml/2006/main">
               <a:ext uri="{FF2B5EF4-FFF2-40B4-BE49-F238E27FC236}">
-                <a16:creationId xmlns:a16="http://schemas.microsoft.com/office/drawing/2014/main" id="{B6290901-65CD-4B2A-895D-DE4DB6CA0954}"/>
+                <a16:creationId xmlns:a16="http://schemas.microsoft.com/office/drawing/2014/main" id="{74205445-0AE5-4A2D-8C3D-96C0BD69AA1E}"/>
               </a:ext>
             </a:extLst>
           </p:cNvPr>
@@ -26810,7 +29206,7 @@
           <p:cNvPr id="49" name="">
             <a:extLst xmlns:a="http://schemas.openxmlformats.org/drawingml/2006/main">
               <a:ext uri="{FF2B5EF4-FFF2-40B4-BE49-F238E27FC236}">
-                <a16:creationId xmlns:a16="http://schemas.microsoft.com/office/drawing/2014/main" id="{CBF9E3F8-0737-49EA-BDCB-85819F48B2B9}"/>
+                <a16:creationId xmlns:a16="http://schemas.microsoft.com/office/drawing/2014/main" id="{3653062A-1387-40EA-B4D1-7BDF4503D311}"/>
               </a:ext>
             </a:extLst>
           </p:cNvPr>
@@ -26843,7 +29239,7 @@
           <p:cNvPr id="50" name="">
             <a:extLst xmlns:a="http://schemas.openxmlformats.org/drawingml/2006/main">
               <a:ext uri="{FF2B5EF4-FFF2-40B4-BE49-F238E27FC236}">
-                <a16:creationId xmlns:a16="http://schemas.microsoft.com/office/drawing/2014/main" id="{741ECA42-72B3-4057-8F32-D57AD1B567BA}"/>
+                <a16:creationId xmlns:a16="http://schemas.microsoft.com/office/drawing/2014/main" id="{3F834946-4875-442F-964E-7756EF50D2B3}"/>
               </a:ext>
             </a:extLst>
           </p:cNvPr>
@@ -26907,7 +29303,7 @@
           <p:cNvPr id="51" name="">
             <a:extLst xmlns:a="http://schemas.openxmlformats.org/drawingml/2006/main">
               <a:ext uri="{FF2B5EF4-FFF2-40B4-BE49-F238E27FC236}">
-                <a16:creationId xmlns:a16="http://schemas.microsoft.com/office/drawing/2014/main" id="{E262D6CD-F86E-4DBD-BAE9-B750B6D82088}"/>
+                <a16:creationId xmlns:a16="http://schemas.microsoft.com/office/drawing/2014/main" id="{C72EBC8B-4E77-4304-B113-2F771CF49B95}"/>
               </a:ext>
             </a:extLst>
           </p:cNvPr>
@@ -26940,7 +29336,7 @@
           <p:cNvPr id="52" name="">
             <a:extLst xmlns:a="http://schemas.openxmlformats.org/drawingml/2006/main">
               <a:ext uri="{FF2B5EF4-FFF2-40B4-BE49-F238E27FC236}">
-                <a16:creationId xmlns:a16="http://schemas.microsoft.com/office/drawing/2014/main" id="{BD77D8AA-09E4-4171-B4C6-1F0638FF0969}"/>
+                <a16:creationId xmlns:a16="http://schemas.microsoft.com/office/drawing/2014/main" id="{F544EB29-58CA-4BF3-AB83-5AEF4E1ECE92}"/>
               </a:ext>
             </a:extLst>
           </p:cNvPr>
@@ -27004,7 +29400,7 @@
           <p:cNvPr id="53" name="">
             <a:extLst xmlns:a="http://schemas.openxmlformats.org/drawingml/2006/main">
               <a:ext uri="{FF2B5EF4-FFF2-40B4-BE49-F238E27FC236}">
-                <a16:creationId xmlns:a16="http://schemas.microsoft.com/office/drawing/2014/main" id="{3D12655D-2FD8-4DD2-9AF0-0AC10E341F87}"/>
+                <a16:creationId xmlns:a16="http://schemas.microsoft.com/office/drawing/2014/main" id="{380AF413-ED2A-4048-8408-8A3902363455}"/>
               </a:ext>
             </a:extLst>
           </p:cNvPr>
@@ -27037,7 +29433,7 @@
           <p:cNvPr id="54" name="">
             <a:extLst xmlns:a="http://schemas.openxmlformats.org/drawingml/2006/main">
               <a:ext uri="{FF2B5EF4-FFF2-40B4-BE49-F238E27FC236}">
-                <a16:creationId xmlns:a16="http://schemas.microsoft.com/office/drawing/2014/main" id="{8F41AB15-7620-4221-B242-B6BDD7E93EE5}"/>
+                <a16:creationId xmlns:a16="http://schemas.microsoft.com/office/drawing/2014/main" id="{32F0A0C1-0B30-4A5D-8B96-3672287D0E9B}"/>
               </a:ext>
             </a:extLst>
           </p:cNvPr>
@@ -27101,7 +29497,7 @@
           <p:cNvPr id="55" name="">
             <a:extLst xmlns:a="http://schemas.openxmlformats.org/drawingml/2006/main">
               <a:ext uri="{FF2B5EF4-FFF2-40B4-BE49-F238E27FC236}">
-                <a16:creationId xmlns:a16="http://schemas.microsoft.com/office/drawing/2014/main" id="{F5115EF2-2695-4104-8D0E-414179613B25}"/>
+                <a16:creationId xmlns:a16="http://schemas.microsoft.com/office/drawing/2014/main" id="{BC46ABB1-4AD1-4AB0-BF20-69012DE1FBA2}"/>
               </a:ext>
             </a:extLst>
           </p:cNvPr>
@@ -27138,7 +29534,7 @@
           <p:nvPr/>
         </p:nvPicPr>
         <p:blipFill>
-          <a:blip xmlns:r="http://schemas.openxmlformats.org/officeDocument/2006/relationships" xmlns:a="http://schemas.openxmlformats.org/drawingml/2006/main" r:embed="Rb793451b1fa64d30"/>
+          <a:blip xmlns:r="http://schemas.openxmlformats.org/officeDocument/2006/relationships" xmlns:a="http://schemas.openxmlformats.org/drawingml/2006/main" r:embed="Rf64c8b5eba494249"/>
           <a:stretch xmlns:a="http://schemas.openxmlformats.org/drawingml/2006/main"/>
         </p:blipFill>
         <p:spPr>
@@ -27156,7 +29552,7 @@
           <p:cNvPr id="57" name="">
             <a:extLst xmlns:a="http://schemas.openxmlformats.org/drawingml/2006/main">
               <a:ext uri="{FF2B5EF4-FFF2-40B4-BE49-F238E27FC236}">
-                <a16:creationId xmlns:a16="http://schemas.microsoft.com/office/drawing/2014/main" id="{4D375144-8D08-4525-A588-E7B5668A0DA4}"/>
+                <a16:creationId xmlns:a16="http://schemas.microsoft.com/office/drawing/2014/main" id="{FA720423-1E82-4A4D-BB68-507CC4FD254F}"/>
               </a:ext>
             </a:extLst>
           </p:cNvPr>
@@ -27220,7 +29616,7 @@
           <p:cNvPr id="58" name="">
             <a:extLst xmlns:a="http://schemas.openxmlformats.org/drawingml/2006/main">
               <a:ext uri="{FF2B5EF4-FFF2-40B4-BE49-F238E27FC236}">
-                <a16:creationId xmlns:a16="http://schemas.microsoft.com/office/drawing/2014/main" id="{E9B23D89-8F50-4E41-94B3-D77328C675CD}"/>
+                <a16:creationId xmlns:a16="http://schemas.microsoft.com/office/drawing/2014/main" id="{4B797F08-F0A9-4507-9F2E-8B4170B41A77}"/>
               </a:ext>
             </a:extLst>
           </p:cNvPr>
@@ -27282,7 +29678,7 @@
     </p:spTree>
     <p:extLst>
       <p:ext uri="{BB962C8B-B14F-4D97-AF65-F5344CB8AC3E}">
-        <p14:creationId xmlns:p14="http://schemas.microsoft.com/office/powerpoint/2010/main" val="1592508132"/>
+        <p14:creationId xmlns:p14="http://schemas.microsoft.com/office/powerpoint/2010/main" val="1770642711"/>
       </p:ext>
     </p:extLst>
   </p:cSld>
@@ -27306,7 +29702,7 @@
           <p:cNvPr id="1" name="">
             <a:extLst xmlns:a="http://schemas.openxmlformats.org/drawingml/2006/main">
               <a:ext uri="{FF2B5EF4-FFF2-40B4-BE49-F238E27FC236}">
-                <a16:creationId xmlns:a16="http://schemas.microsoft.com/office/drawing/2014/main" id="{D79B54B0-0359-4039-8CFF-22765F7310B1}"/>
+                <a16:creationId xmlns:a16="http://schemas.microsoft.com/office/drawing/2014/main" id="{1E63391B-F98C-4989-8774-139C7DFA11DB}"/>
               </a:ext>
             </a:extLst>
           </p:cNvPr>
@@ -27341,7 +29737,7 @@
           <p:cNvPr id="2" name="">
             <a:extLst xmlns:a="http://schemas.openxmlformats.org/drawingml/2006/main">
               <a:ext uri="{FF2B5EF4-FFF2-40B4-BE49-F238E27FC236}">
-                <a16:creationId xmlns:a16="http://schemas.microsoft.com/office/drawing/2014/main" id="{7B83195C-1E3B-4A8A-AC7D-661F4F70CC89}"/>
+                <a16:creationId xmlns:a16="http://schemas.microsoft.com/office/drawing/2014/main" id="{A0BE5994-E174-4405-9435-D74155608CF1}"/>
               </a:ext>
             </a:extLst>
           </p:cNvPr>
@@ -27376,7 +29772,7 @@
           <p:cNvPr id="3" name="">
             <a:extLst xmlns:a="http://schemas.openxmlformats.org/drawingml/2006/main">
               <a:ext uri="{FF2B5EF4-FFF2-40B4-BE49-F238E27FC236}">
-                <a16:creationId xmlns:a16="http://schemas.microsoft.com/office/drawing/2014/main" id="{6209C158-50FA-4543-853F-0F04D5A3C223}"/>
+                <a16:creationId xmlns:a16="http://schemas.microsoft.com/office/drawing/2014/main" id="{E164626C-8541-4D87-A654-20F79E5EB30E}"/>
               </a:ext>
             </a:extLst>
           </p:cNvPr>
@@ -27440,7 +29836,7 @@
           <p:cNvPr id="4" name="">
             <a:extLst xmlns:a="http://schemas.openxmlformats.org/drawingml/2006/main">
               <a:ext uri="{FF2B5EF4-FFF2-40B4-BE49-F238E27FC236}">
-                <a16:creationId xmlns:a16="http://schemas.microsoft.com/office/drawing/2014/main" id="{16CFD888-4369-43E4-9583-500F6A07FCC5}"/>
+                <a16:creationId xmlns:a16="http://schemas.microsoft.com/office/drawing/2014/main" id="{8CBB2877-2F42-4A47-9111-D26D72707B12}"/>
               </a:ext>
             </a:extLst>
           </p:cNvPr>
@@ -27504,7 +29900,7 @@
           <p:cNvPr id="5" name="">
             <a:extLst xmlns:a="http://schemas.openxmlformats.org/drawingml/2006/main">
               <a:ext uri="{FF2B5EF4-FFF2-40B4-BE49-F238E27FC236}">
-                <a16:creationId xmlns:a16="http://schemas.microsoft.com/office/drawing/2014/main" id="{164646E1-05BD-4F65-8BD6-BED1982F024E}"/>
+                <a16:creationId xmlns:a16="http://schemas.microsoft.com/office/drawing/2014/main" id="{FCBE31C3-0E29-4F5C-B071-A2CA6C3C541A}"/>
               </a:ext>
             </a:extLst>
           </p:cNvPr>
@@ -27568,7 +29964,7 @@
           <p:cNvPr id="6" name="">
             <a:extLst xmlns:a="http://schemas.openxmlformats.org/drawingml/2006/main">
               <a:ext uri="{FF2B5EF4-FFF2-40B4-BE49-F238E27FC236}">
-                <a16:creationId xmlns:a16="http://schemas.microsoft.com/office/drawing/2014/main" id="{C7E23861-D3E4-42C3-B095-9D15D139CC2F}"/>
+                <a16:creationId xmlns:a16="http://schemas.microsoft.com/office/drawing/2014/main" id="{44C86BD6-C4CB-4921-B6F3-96724D398510}"/>
               </a:ext>
             </a:extLst>
           </p:cNvPr>
@@ -27632,7 +30028,7 @@
           <p:cNvPr id="7" name="">
             <a:extLst xmlns:a="http://schemas.openxmlformats.org/drawingml/2006/main">
               <a:ext uri="{FF2B5EF4-FFF2-40B4-BE49-F238E27FC236}">
-                <a16:creationId xmlns:a16="http://schemas.microsoft.com/office/drawing/2014/main" id="{FB78B22D-886F-4EAD-8018-0051D472190B}"/>
+                <a16:creationId xmlns:a16="http://schemas.microsoft.com/office/drawing/2014/main" id="{A4FF51E8-8468-4559-B39E-B4DF6DC01AA3}"/>
               </a:ext>
             </a:extLst>
           </p:cNvPr>
@@ -27669,7 +30065,7 @@
           <p:nvPr/>
         </p:nvPicPr>
         <p:blipFill>
-          <a:blip xmlns:r="http://schemas.openxmlformats.org/officeDocument/2006/relationships" xmlns:a="http://schemas.openxmlformats.org/drawingml/2006/main" r:embed="Rbbcda79d85a84198"/>
+          <a:blip xmlns:r="http://schemas.openxmlformats.org/officeDocument/2006/relationships" xmlns:a="http://schemas.openxmlformats.org/drawingml/2006/main" r:embed="Rc64c25f0b07640a6"/>
           <a:stretch xmlns:a="http://schemas.openxmlformats.org/drawingml/2006/main"/>
         </p:blipFill>
         <p:spPr>
@@ -27687,7 +30083,7 @@
           <p:cNvPr id="9" name="">
             <a:extLst xmlns:a="http://schemas.openxmlformats.org/drawingml/2006/main">
               <a:ext uri="{FF2B5EF4-FFF2-40B4-BE49-F238E27FC236}">
-                <a16:creationId xmlns:a16="http://schemas.microsoft.com/office/drawing/2014/main" id="{294A1100-9391-4E02-A1E0-394377C0C8E6}"/>
+                <a16:creationId xmlns:a16="http://schemas.microsoft.com/office/drawing/2014/main" id="{C2C63B6B-226B-41C1-98BD-2779696ABC18}"/>
               </a:ext>
             </a:extLst>
           </p:cNvPr>
@@ -27751,7 +30147,7 @@
           <p:cNvPr id="10" name="">
             <a:extLst xmlns:a="http://schemas.openxmlformats.org/drawingml/2006/main">
               <a:ext uri="{FF2B5EF4-FFF2-40B4-BE49-F238E27FC236}">
-                <a16:creationId xmlns:a16="http://schemas.microsoft.com/office/drawing/2014/main" id="{A8C1B1BB-6C82-4789-B35F-4B1947F89C1A}"/>
+                <a16:creationId xmlns:a16="http://schemas.microsoft.com/office/drawing/2014/main" id="{BCFDA771-16EB-416D-8D59-12856070D87E}"/>
               </a:ext>
             </a:extLst>
           </p:cNvPr>
@@ -27784,7 +30180,7 @@
           <p:cNvPr id="11" name="">
             <a:extLst xmlns:a="http://schemas.openxmlformats.org/drawingml/2006/main">
               <a:ext uri="{FF2B5EF4-FFF2-40B4-BE49-F238E27FC236}">
-                <a16:creationId xmlns:a16="http://schemas.microsoft.com/office/drawing/2014/main" id="{F615339D-BD3B-49F0-92BA-CC309B028142}"/>
+                <a16:creationId xmlns:a16="http://schemas.microsoft.com/office/drawing/2014/main" id="{50DE62CD-B544-41CF-ADFA-FC89738B1D74}"/>
               </a:ext>
             </a:extLst>
           </p:cNvPr>
@@ -27819,7 +30215,7 @@
           <p:cNvPr id="12" name="">
             <a:extLst xmlns:a="http://schemas.openxmlformats.org/drawingml/2006/main">
               <a:ext uri="{FF2B5EF4-FFF2-40B4-BE49-F238E27FC236}">
-                <a16:creationId xmlns:a16="http://schemas.microsoft.com/office/drawing/2014/main" id="{989F98D6-2AAE-4171-BAE5-86DA79FF99E6}"/>
+                <a16:creationId xmlns:a16="http://schemas.microsoft.com/office/drawing/2014/main" id="{8A14E915-E988-46B5-9414-74C0D2961D90}"/>
               </a:ext>
             </a:extLst>
           </p:cNvPr>
@@ -27883,7 +30279,7 @@
           <p:cNvPr id="13" name="">
             <a:extLst xmlns:a="http://schemas.openxmlformats.org/drawingml/2006/main">
               <a:ext uri="{FF2B5EF4-FFF2-40B4-BE49-F238E27FC236}">
-                <a16:creationId xmlns:a16="http://schemas.microsoft.com/office/drawing/2014/main" id="{C2E9D068-B551-4FDE-B5F9-4655B523FF7D}"/>
+                <a16:creationId xmlns:a16="http://schemas.microsoft.com/office/drawing/2014/main" id="{7931A94C-4AFD-4274-B7F4-13DB88FCD514}"/>
               </a:ext>
             </a:extLst>
           </p:cNvPr>
@@ -27947,7 +30343,7 @@
           <p:cNvPr id="14" name="">
             <a:extLst xmlns:a="http://schemas.openxmlformats.org/drawingml/2006/main">
               <a:ext uri="{FF2B5EF4-FFF2-40B4-BE49-F238E27FC236}">
-                <a16:creationId xmlns:a16="http://schemas.microsoft.com/office/drawing/2014/main" id="{371CE07A-43DF-49BC-85B6-737D573AD464}"/>
+                <a16:creationId xmlns:a16="http://schemas.microsoft.com/office/drawing/2014/main" id="{CB8B4BFD-AA71-4121-9334-60059A3B0932}"/>
               </a:ext>
             </a:extLst>
           </p:cNvPr>
@@ -28011,7 +30407,7 @@
           <p:cNvPr id="15" name="">
             <a:extLst xmlns:a="http://schemas.openxmlformats.org/drawingml/2006/main">
               <a:ext uri="{FF2B5EF4-FFF2-40B4-BE49-F238E27FC236}">
-                <a16:creationId xmlns:a16="http://schemas.microsoft.com/office/drawing/2014/main" id="{6D65900F-EB66-40CA-A7F5-D979F62B6F2A}"/>
+                <a16:creationId xmlns:a16="http://schemas.microsoft.com/office/drawing/2014/main" id="{9CBD9D7E-79A3-45D9-89BE-99E7FBEC9E85}"/>
               </a:ext>
             </a:extLst>
           </p:cNvPr>
@@ -28044,7 +30440,7 @@
           <p:cNvPr id="16" name="">
             <a:extLst xmlns:a="http://schemas.openxmlformats.org/drawingml/2006/main">
               <a:ext uri="{FF2B5EF4-FFF2-40B4-BE49-F238E27FC236}">
-                <a16:creationId xmlns:a16="http://schemas.microsoft.com/office/drawing/2014/main" id="{CD5EAF26-CBC8-4AEB-81C0-A9A9B55969C2}"/>
+                <a16:creationId xmlns:a16="http://schemas.microsoft.com/office/drawing/2014/main" id="{E13FBDD7-2D40-438A-B16A-B23DC1E02333}"/>
               </a:ext>
             </a:extLst>
           </p:cNvPr>
@@ -28079,7 +30475,7 @@
           <p:cNvPr id="17" name="">
             <a:extLst xmlns:a="http://schemas.openxmlformats.org/drawingml/2006/main">
               <a:ext uri="{FF2B5EF4-FFF2-40B4-BE49-F238E27FC236}">
-                <a16:creationId xmlns:a16="http://schemas.microsoft.com/office/drawing/2014/main" id="{75B43577-C016-4545-9CDD-F14C79610982}"/>
+                <a16:creationId xmlns:a16="http://schemas.microsoft.com/office/drawing/2014/main" id="{3156098C-7B10-4157-841B-5FB012E170CB}"/>
               </a:ext>
             </a:extLst>
           </p:cNvPr>
@@ -28143,7 +30539,7 @@
           <p:cNvPr id="18" name="">
             <a:extLst xmlns:a="http://schemas.openxmlformats.org/drawingml/2006/main">
               <a:ext uri="{FF2B5EF4-FFF2-40B4-BE49-F238E27FC236}">
-                <a16:creationId xmlns:a16="http://schemas.microsoft.com/office/drawing/2014/main" id="{4F0AC277-2C52-427C-A9B1-52DB004FCB3E}"/>
+                <a16:creationId xmlns:a16="http://schemas.microsoft.com/office/drawing/2014/main" id="{1518F3BD-CFA5-44EE-93F6-AF4F281F3C46}"/>
               </a:ext>
             </a:extLst>
           </p:cNvPr>
@@ -28207,7 +30603,7 @@
           <p:cNvPr id="19" name="">
             <a:extLst xmlns:a="http://schemas.openxmlformats.org/drawingml/2006/main">
               <a:ext uri="{FF2B5EF4-FFF2-40B4-BE49-F238E27FC236}">
-                <a16:creationId xmlns:a16="http://schemas.microsoft.com/office/drawing/2014/main" id="{F5712B89-1E4F-4408-82F4-643D2ADE3B77}"/>
+                <a16:creationId xmlns:a16="http://schemas.microsoft.com/office/drawing/2014/main" id="{3CB40975-C322-4A14-B37C-C0A6471A7C44}"/>
               </a:ext>
             </a:extLst>
           </p:cNvPr>
@@ -28271,7 +30667,7 @@
           <p:cNvPr id="20" name="">
             <a:extLst xmlns:a="http://schemas.openxmlformats.org/drawingml/2006/main">
               <a:ext uri="{FF2B5EF4-FFF2-40B4-BE49-F238E27FC236}">
-                <a16:creationId xmlns:a16="http://schemas.microsoft.com/office/drawing/2014/main" id="{6528B536-9028-48F9-8CF9-C7842CE921ED}"/>
+                <a16:creationId xmlns:a16="http://schemas.microsoft.com/office/drawing/2014/main" id="{67E5FD7B-EDDD-4D8D-A1AB-0B86C2772EF2}"/>
               </a:ext>
             </a:extLst>
           </p:cNvPr>
@@ -28304,7 +30700,7 @@
           <p:cNvPr id="21" name="">
             <a:extLst xmlns:a="http://schemas.openxmlformats.org/drawingml/2006/main">
               <a:ext uri="{FF2B5EF4-FFF2-40B4-BE49-F238E27FC236}">
-                <a16:creationId xmlns:a16="http://schemas.microsoft.com/office/drawing/2014/main" id="{B5697495-4529-465C-AAA6-C0CFC60367E8}"/>
+                <a16:creationId xmlns:a16="http://schemas.microsoft.com/office/drawing/2014/main" id="{1BBF7E6E-4087-4504-A580-4220CA191556}"/>
               </a:ext>
             </a:extLst>
           </p:cNvPr>
@@ -28339,7 +30735,7 @@
           <p:cNvPr id="22" name="">
             <a:extLst xmlns:a="http://schemas.openxmlformats.org/drawingml/2006/main">
               <a:ext uri="{FF2B5EF4-FFF2-40B4-BE49-F238E27FC236}">
-                <a16:creationId xmlns:a16="http://schemas.microsoft.com/office/drawing/2014/main" id="{A47D2583-5F0B-4A5A-A546-692FC0D6199C}"/>
+                <a16:creationId xmlns:a16="http://schemas.microsoft.com/office/drawing/2014/main" id="{CC84DB18-82FD-488C-BBE3-A75BEE6EF978}"/>
               </a:ext>
             </a:extLst>
           </p:cNvPr>
@@ -28403,7 +30799,7 @@
           <p:cNvPr id="23" name="">
             <a:extLst xmlns:a="http://schemas.openxmlformats.org/drawingml/2006/main">
               <a:ext uri="{FF2B5EF4-FFF2-40B4-BE49-F238E27FC236}">
-                <a16:creationId xmlns:a16="http://schemas.microsoft.com/office/drawing/2014/main" id="{90F83BE8-B5A3-4EBF-9AF1-D33512F08E2D}"/>
+                <a16:creationId xmlns:a16="http://schemas.microsoft.com/office/drawing/2014/main" id="{36D8940B-805D-4DCF-AD29-65F2EC32D300}"/>
               </a:ext>
             </a:extLst>
           </p:cNvPr>
@@ -28467,7 +30863,7 @@
           <p:cNvPr id="24" name="">
             <a:extLst xmlns:a="http://schemas.openxmlformats.org/drawingml/2006/main">
               <a:ext uri="{FF2B5EF4-FFF2-40B4-BE49-F238E27FC236}">
-                <a16:creationId xmlns:a16="http://schemas.microsoft.com/office/drawing/2014/main" id="{D4325DCA-C524-4145-AEF1-1CC7523F2EC8}"/>
+                <a16:creationId xmlns:a16="http://schemas.microsoft.com/office/drawing/2014/main" id="{719816E4-1667-4790-9686-B55E89E2107C}"/>
               </a:ext>
             </a:extLst>
           </p:cNvPr>
@@ -28531,7 +30927,7 @@
           <p:cNvPr id="25" name="">
             <a:extLst xmlns:a="http://schemas.openxmlformats.org/drawingml/2006/main">
               <a:ext uri="{FF2B5EF4-FFF2-40B4-BE49-F238E27FC236}">
-                <a16:creationId xmlns:a16="http://schemas.microsoft.com/office/drawing/2014/main" id="{783897F0-3E98-474D-8E5B-A7AB7C060A99}"/>
+                <a16:creationId xmlns:a16="http://schemas.microsoft.com/office/drawing/2014/main" id="{30ABCE8D-1AC8-4F69-8466-0A54978F3EE4}"/>
               </a:ext>
             </a:extLst>
           </p:cNvPr>
@@ -28593,7 +30989,7 @@
     </p:spTree>
     <p:extLst>
       <p:ext uri="{BB962C8B-B14F-4D97-AF65-F5344CB8AC3E}">
-        <p14:creationId xmlns:p14="http://schemas.microsoft.com/office/powerpoint/2010/main" val="324753661"/>
+        <p14:creationId xmlns:p14="http://schemas.microsoft.com/office/powerpoint/2010/main" val="1689966192"/>
       </p:ext>
     </p:extLst>
   </p:cSld>
